--- a/documents/slide bao cao v2.pptx
+++ b/documents/slide bao cao v2.pptx
@@ -5,7 +5,7 @@
     <p:sldMasterId id="2147483648" r:id="rId1"/>
   </p:sldMasterIdLst>
   <p:notesMasterIdLst>
-    <p:notesMasterId r:id="rId62"/>
+    <p:notesMasterId r:id="rId63"/>
   </p:notesMasterIdLst>
   <p:sldIdLst>
     <p:sldId id="256" r:id="rId2"/>
@@ -26,48 +26,49 @@
     <p:sldId id="288" r:id="rId17"/>
     <p:sldId id="289" r:id="rId18"/>
     <p:sldId id="270" r:id="rId19"/>
-    <p:sldId id="290" r:id="rId20"/>
-    <p:sldId id="271" r:id="rId21"/>
-    <p:sldId id="292" r:id="rId22"/>
-    <p:sldId id="272" r:id="rId23"/>
-    <p:sldId id="273" r:id="rId24"/>
-    <p:sldId id="293" r:id="rId25"/>
-    <p:sldId id="294" r:id="rId26"/>
-    <p:sldId id="295" r:id="rId27"/>
-    <p:sldId id="298" r:id="rId28"/>
-    <p:sldId id="299" r:id="rId29"/>
-    <p:sldId id="296" r:id="rId30"/>
-    <p:sldId id="297" r:id="rId31"/>
-    <p:sldId id="274" r:id="rId32"/>
-    <p:sldId id="300" r:id="rId33"/>
-    <p:sldId id="275" r:id="rId34"/>
-    <p:sldId id="305" r:id="rId35"/>
-    <p:sldId id="304" r:id="rId36"/>
-    <p:sldId id="301" r:id="rId37"/>
-    <p:sldId id="303" r:id="rId38"/>
-    <p:sldId id="302" r:id="rId39"/>
-    <p:sldId id="311" r:id="rId40"/>
-    <p:sldId id="306" r:id="rId41"/>
-    <p:sldId id="307" r:id="rId42"/>
-    <p:sldId id="308" r:id="rId43"/>
-    <p:sldId id="309" r:id="rId44"/>
-    <p:sldId id="310" r:id="rId45"/>
-    <p:sldId id="312" r:id="rId46"/>
-    <p:sldId id="265" r:id="rId47"/>
-    <p:sldId id="276" r:id="rId48"/>
-    <p:sldId id="313" r:id="rId49"/>
-    <p:sldId id="277" r:id="rId50"/>
-    <p:sldId id="314" r:id="rId51"/>
-    <p:sldId id="278" r:id="rId52"/>
-    <p:sldId id="316" r:id="rId53"/>
-    <p:sldId id="279" r:id="rId54"/>
-    <p:sldId id="317" r:id="rId55"/>
-    <p:sldId id="280" r:id="rId56"/>
-    <p:sldId id="315" r:id="rId57"/>
-    <p:sldId id="266" r:id="rId58"/>
-    <p:sldId id="282" r:id="rId59"/>
-    <p:sldId id="283" r:id="rId60"/>
-    <p:sldId id="267" r:id="rId61"/>
+    <p:sldId id="318" r:id="rId20"/>
+    <p:sldId id="290" r:id="rId21"/>
+    <p:sldId id="271" r:id="rId22"/>
+    <p:sldId id="292" r:id="rId23"/>
+    <p:sldId id="272" r:id="rId24"/>
+    <p:sldId id="273" r:id="rId25"/>
+    <p:sldId id="293" r:id="rId26"/>
+    <p:sldId id="294" r:id="rId27"/>
+    <p:sldId id="295" r:id="rId28"/>
+    <p:sldId id="298" r:id="rId29"/>
+    <p:sldId id="299" r:id="rId30"/>
+    <p:sldId id="296" r:id="rId31"/>
+    <p:sldId id="297" r:id="rId32"/>
+    <p:sldId id="274" r:id="rId33"/>
+    <p:sldId id="300" r:id="rId34"/>
+    <p:sldId id="275" r:id="rId35"/>
+    <p:sldId id="305" r:id="rId36"/>
+    <p:sldId id="304" r:id="rId37"/>
+    <p:sldId id="301" r:id="rId38"/>
+    <p:sldId id="303" r:id="rId39"/>
+    <p:sldId id="302" r:id="rId40"/>
+    <p:sldId id="311" r:id="rId41"/>
+    <p:sldId id="306" r:id="rId42"/>
+    <p:sldId id="307" r:id="rId43"/>
+    <p:sldId id="308" r:id="rId44"/>
+    <p:sldId id="309" r:id="rId45"/>
+    <p:sldId id="310" r:id="rId46"/>
+    <p:sldId id="312" r:id="rId47"/>
+    <p:sldId id="265" r:id="rId48"/>
+    <p:sldId id="276" r:id="rId49"/>
+    <p:sldId id="313" r:id="rId50"/>
+    <p:sldId id="277" r:id="rId51"/>
+    <p:sldId id="314" r:id="rId52"/>
+    <p:sldId id="278" r:id="rId53"/>
+    <p:sldId id="316" r:id="rId54"/>
+    <p:sldId id="279" r:id="rId55"/>
+    <p:sldId id="317" r:id="rId56"/>
+    <p:sldId id="280" r:id="rId57"/>
+    <p:sldId id="315" r:id="rId58"/>
+    <p:sldId id="266" r:id="rId59"/>
+    <p:sldId id="282" r:id="rId60"/>
+    <p:sldId id="283" r:id="rId61"/>
+    <p:sldId id="267" r:id="rId62"/>
   </p:sldIdLst>
   <p:sldSz cx="12192000" cy="6858000"/>
   <p:notesSz cx="6858000" cy="9144000"/>
@@ -189,6 +190,7 @@
             <p14:sldId id="288"/>
             <p14:sldId id="289"/>
             <p14:sldId id="270"/>
+            <p14:sldId id="318"/>
             <p14:sldId id="290"/>
             <p14:sldId id="271"/>
             <p14:sldId id="292"/>
@@ -324,7 +326,7 @@
           <a:p>
             <a:fld id="{AEB1C5C1-54CE-4892-A53C-9115FF4B63AE}" type="datetimeFigureOut">
               <a:rPr lang="en-US" smtClean="0"/>
-              <a:t>6/16/2025</a:t>
+              <a:t>6/19/2025</a:t>
             </a:fld>
             <a:endParaRPr lang="en-US"/>
           </a:p>
@@ -738,7 +740,7 @@
           <a:p>
             <a:fld id="{AC66C343-037B-4BB6-A079-7472CF8881D5}" type="datetimeFigureOut">
               <a:rPr lang="en-US" smtClean="0"/>
-              <a:t>6/16/2025</a:t>
+              <a:t>6/19/2025</a:t>
             </a:fld>
             <a:endParaRPr lang="en-US"/>
           </a:p>
@@ -936,7 +938,7 @@
           <a:p>
             <a:fld id="{AC66C343-037B-4BB6-A079-7472CF8881D5}" type="datetimeFigureOut">
               <a:rPr lang="en-US" smtClean="0"/>
-              <a:t>6/16/2025</a:t>
+              <a:t>6/19/2025</a:t>
             </a:fld>
             <a:endParaRPr lang="en-US"/>
           </a:p>
@@ -1144,7 +1146,7 @@
           <a:p>
             <a:fld id="{AC66C343-037B-4BB6-A079-7472CF8881D5}" type="datetimeFigureOut">
               <a:rPr lang="en-US" smtClean="0"/>
-              <a:t>6/16/2025</a:t>
+              <a:t>6/19/2025</a:t>
             </a:fld>
             <a:endParaRPr lang="en-US"/>
           </a:p>
@@ -1342,7 +1344,7 @@
           <a:p>
             <a:fld id="{AC66C343-037B-4BB6-A079-7472CF8881D5}" type="datetimeFigureOut">
               <a:rPr lang="en-US" smtClean="0"/>
-              <a:t>6/16/2025</a:t>
+              <a:t>6/19/2025</a:t>
             </a:fld>
             <a:endParaRPr lang="en-US"/>
           </a:p>
@@ -1617,7 +1619,7 @@
           <a:p>
             <a:fld id="{AC66C343-037B-4BB6-A079-7472CF8881D5}" type="datetimeFigureOut">
               <a:rPr lang="en-US" smtClean="0"/>
-              <a:t>6/16/2025</a:t>
+              <a:t>6/19/2025</a:t>
             </a:fld>
             <a:endParaRPr lang="en-US"/>
           </a:p>
@@ -1882,7 +1884,7 @@
           <a:p>
             <a:fld id="{AC66C343-037B-4BB6-A079-7472CF8881D5}" type="datetimeFigureOut">
               <a:rPr lang="en-US" smtClean="0"/>
-              <a:t>6/16/2025</a:t>
+              <a:t>6/19/2025</a:t>
             </a:fld>
             <a:endParaRPr lang="en-US"/>
           </a:p>
@@ -2294,7 +2296,7 @@
           <a:p>
             <a:fld id="{AC66C343-037B-4BB6-A079-7472CF8881D5}" type="datetimeFigureOut">
               <a:rPr lang="en-US" smtClean="0"/>
-              <a:t>6/16/2025</a:t>
+              <a:t>6/19/2025</a:t>
             </a:fld>
             <a:endParaRPr lang="en-US"/>
           </a:p>
@@ -2435,7 +2437,7 @@
           <a:p>
             <a:fld id="{AC66C343-037B-4BB6-A079-7472CF8881D5}" type="datetimeFigureOut">
               <a:rPr lang="en-US" smtClean="0"/>
-              <a:t>6/16/2025</a:t>
+              <a:t>6/19/2025</a:t>
             </a:fld>
             <a:endParaRPr lang="en-US"/>
           </a:p>
@@ -2548,7 +2550,7 @@
           <a:p>
             <a:fld id="{AC66C343-037B-4BB6-A079-7472CF8881D5}" type="datetimeFigureOut">
               <a:rPr lang="en-US" smtClean="0"/>
-              <a:t>6/16/2025</a:t>
+              <a:t>6/19/2025</a:t>
             </a:fld>
             <a:endParaRPr lang="en-US"/>
           </a:p>
@@ -2859,7 +2861,7 @@
           <a:p>
             <a:fld id="{AC66C343-037B-4BB6-A079-7472CF8881D5}" type="datetimeFigureOut">
               <a:rPr lang="en-US" smtClean="0"/>
-              <a:t>6/16/2025</a:t>
+              <a:t>6/19/2025</a:t>
             </a:fld>
             <a:endParaRPr lang="en-US"/>
           </a:p>
@@ -3147,7 +3149,7 @@
           <a:p>
             <a:fld id="{AC66C343-037B-4BB6-A079-7472CF8881D5}" type="datetimeFigureOut">
               <a:rPr lang="en-US" smtClean="0"/>
-              <a:t>6/16/2025</a:t>
+              <a:t>6/19/2025</a:t>
             </a:fld>
             <a:endParaRPr lang="en-US"/>
           </a:p>
@@ -3388,7 +3390,7 @@
           <a:p>
             <a:fld id="{AC66C343-037B-4BB6-A079-7472CF8881D5}" type="datetimeFigureOut">
               <a:rPr lang="en-US" smtClean="0"/>
-              <a:t>6/16/2025</a:t>
+              <a:t>6/19/2025</a:t>
             </a:fld>
             <a:endParaRPr lang="en-US"/>
           </a:p>
@@ -4114,6 +4116,14 @@
 <file path=ppt/slides/slide10.xml><?xml version="1.0" encoding="utf-8"?>
 <p:sld xmlns:a="http://schemas.openxmlformats.org/drawingml/2006/main" xmlns:r="http://schemas.openxmlformats.org/officeDocument/2006/relationships" xmlns:p="http://schemas.openxmlformats.org/presentationml/2006/main">
   <p:cSld>
+    <p:bg>
+      <p:bgPr>
+        <a:solidFill>
+          <a:schemeClr val="bg1"/>
+        </a:solidFill>
+        <a:effectLst/>
+      </p:bgPr>
+    </p:bg>
     <p:spTree>
       <p:nvGrpSpPr>
         <p:cNvPr id="1" name="">
@@ -4134,83 +4144,580 @@
           <a:chExt cx="0" cy="0"/>
         </a:xfrm>
       </p:grpSpPr>
-      <p:sp>
-        <p:nvSpPr>
-          <p:cNvPr id="2" name="Title 1">
-            <a:extLst>
-              <a:ext uri="{FF2B5EF4-FFF2-40B4-BE49-F238E27FC236}">
-                <a16:creationId xmlns:a16="http://schemas.microsoft.com/office/drawing/2014/main" id="{EC6D27E4-D1CC-7449-5835-509B35BF48D0}"/>
-              </a:ext>
-            </a:extLst>
-          </p:cNvPr>
-          <p:cNvSpPr>
-            <a:spLocks noGrp="1"/>
-          </p:cNvSpPr>
-          <p:nvPr>
-            <p:ph type="title"/>
+      <p:sp useBgFill="1">
+        <p:nvSpPr>
+          <p:cNvPr id="9" name="Rectangle 8">
+            <a:extLst>
+              <a:ext uri="{FF2B5EF4-FFF2-40B4-BE49-F238E27FC236}">
+                <a16:creationId xmlns:a16="http://schemas.microsoft.com/office/drawing/2014/main" id="{743AA782-23D1-4521-8CAD-47662984AA08}"/>
+              </a:ext>
+              <a:ext uri="{C183D7F6-B498-43B3-948B-1728B52AA6E4}">
+                <adec:decorative xmlns:adec="http://schemas.microsoft.com/office/drawing/2017/decorative" val="1"/>
+              </a:ext>
+            </a:extLst>
+          </p:cNvPr>
+          <p:cNvSpPr>
+            <a:spLocks noGrp="1" noRot="1" noChangeAspect="1" noMove="1" noResize="1" noEditPoints="1" noAdjustHandles="1" noChangeArrowheads="1" noChangeShapeType="1" noTextEdit="1"/>
+          </p:cNvSpPr>
+          <p:nvPr>
+            <p:extLst>
+              <p:ext uri="{386F3935-93C4-4BCD-93E2-E3B085C9AB24}">
+                <p16:designElem xmlns:p16="http://schemas.microsoft.com/office/powerpoint/2015/main" val="1"/>
+              </p:ext>
+            </p:extLst>
           </p:nvPr>
         </p:nvSpPr>
         <p:spPr>
           <a:xfrm>
-            <a:off x="838200" y="365125"/>
-            <a:ext cx="10515600" cy="1030537"/>
+            <a:off x="0" y="0"/>
+            <a:ext cx="12192000" cy="6858000"/>
+          </a:xfrm>
+          <a:prstGeom prst="rect">
+            <a:avLst/>
+          </a:prstGeom>
+          <a:ln>
+            <a:noFill/>
+          </a:ln>
+        </p:spPr>
+        <p:style>
+          <a:lnRef idx="2">
+            <a:schemeClr val="accent1">
+              <a:shade val="50000"/>
+            </a:schemeClr>
+          </a:lnRef>
+          <a:fillRef idx="1">
+            <a:schemeClr val="accent1"/>
+          </a:fillRef>
+          <a:effectRef idx="0">
+            <a:schemeClr val="accent1"/>
+          </a:effectRef>
+          <a:fontRef idx="minor">
+            <a:schemeClr val="lt1"/>
+          </a:fontRef>
+        </p:style>
+        <p:txBody>
+          <a:bodyPr rtlCol="0" anchor="ctr"/>
+          <a:lstStyle/>
+          <a:p>
+            <a:pPr algn="ctr"/>
+            <a:endParaRPr lang="en-US"/>
+          </a:p>
+        </p:txBody>
+      </p:sp>
+      <p:sp>
+        <p:nvSpPr>
+          <p:cNvPr id="2" name="Title 1">
+            <a:extLst>
+              <a:ext uri="{FF2B5EF4-FFF2-40B4-BE49-F238E27FC236}">
+                <a16:creationId xmlns:a16="http://schemas.microsoft.com/office/drawing/2014/main" id="{EC6D27E4-D1CC-7449-5835-509B35BF48D0}"/>
+              </a:ext>
+            </a:extLst>
+          </p:cNvPr>
+          <p:cNvSpPr>
+            <a:spLocks noGrp="1"/>
+          </p:cNvSpPr>
+          <p:nvPr>
+            <p:ph type="title"/>
+          </p:nvPr>
+        </p:nvSpPr>
+        <p:spPr>
+          <a:xfrm>
+            <a:off x="630936" y="640080"/>
+            <a:ext cx="4818888" cy="1481328"/>
           </a:xfrm>
         </p:spPr>
         <p:txBody>
-          <a:bodyPr>
+          <a:bodyPr anchor="b">
             <a:normAutofit/>
           </a:bodyPr>
           <a:lstStyle/>
           <a:p>
             <a:r>
-              <a:rPr lang="en-US" sz="4000" b="1">
-                <a:latin typeface="Times New Roman" panose="02020603050405020304" pitchFamily="18" charset="0"/>
-                <a:cs typeface="Times New Roman" panose="02020603050405020304" pitchFamily="18" charset="0"/>
-              </a:rPr>
-              <a:t>CƠ SỞ LÝ THUYẾT</a:t>
-            </a:r>
-          </a:p>
-        </p:txBody>
-      </p:sp>
-      <p:sp>
-        <p:nvSpPr>
-          <p:cNvPr id="3" name="Content Placeholder 2">
-            <a:extLst>
-              <a:ext uri="{FF2B5EF4-FFF2-40B4-BE49-F238E27FC236}">
-                <a16:creationId xmlns:a16="http://schemas.microsoft.com/office/drawing/2014/main" id="{5067B23E-8310-5899-E43E-DAE762286571}"/>
-              </a:ext>
-            </a:extLst>
-          </p:cNvPr>
-          <p:cNvSpPr>
-            <a:spLocks noGrp="1"/>
-          </p:cNvSpPr>
-          <p:nvPr>
-            <p:ph idx="1"/>
+              <a:rPr lang="en-US" sz="5000" b="1">
+                <a:latin typeface="Times New Roman" panose="02020603050405020304" pitchFamily="18" charset="0"/>
+                <a:cs typeface="Times New Roman" panose="02020603050405020304" pitchFamily="18" charset="0"/>
+              </a:rPr>
+              <a:t>CƠ SỞ </a:t>
+            </a:r>
+            <a:br>
+              <a:rPr lang="en-US" sz="5000" b="1">
+                <a:latin typeface="Times New Roman" panose="02020603050405020304" pitchFamily="18" charset="0"/>
+                <a:cs typeface="Times New Roman" panose="02020603050405020304" pitchFamily="18" charset="0"/>
+              </a:rPr>
+            </a:br>
+            <a:r>
+              <a:rPr lang="en-US" sz="5000" b="1">
+                <a:latin typeface="Times New Roman" panose="02020603050405020304" pitchFamily="18" charset="0"/>
+                <a:cs typeface="Times New Roman" panose="02020603050405020304" pitchFamily="18" charset="0"/>
+              </a:rPr>
+              <a:t>LÝ THUYẾT</a:t>
+            </a:r>
+          </a:p>
+        </p:txBody>
+      </p:sp>
+      <p:sp>
+        <p:nvSpPr>
+          <p:cNvPr id="11" name="sketch line">
+            <a:extLst>
+              <a:ext uri="{FF2B5EF4-FFF2-40B4-BE49-F238E27FC236}">
+                <a16:creationId xmlns:a16="http://schemas.microsoft.com/office/drawing/2014/main" id="{71877DBC-BB60-40F0-AC93-2ACDBAAE60CE}"/>
+              </a:ext>
+              <a:ext uri="{C183D7F6-B498-43B3-948B-1728B52AA6E4}">
+                <adec:decorative xmlns:adec="http://schemas.microsoft.com/office/drawing/2017/decorative" val="1"/>
+              </a:ext>
+            </a:extLst>
+          </p:cNvPr>
+          <p:cNvSpPr>
+            <a:spLocks noGrp="1" noRot="1" noChangeAspect="1" noMove="1" noResize="1" noEditPoints="1" noAdjustHandles="1" noChangeArrowheads="1" noChangeShapeType="1" noTextEdit="1"/>
+          </p:cNvSpPr>
+          <p:nvPr>
+            <p:extLst>
+              <p:ext uri="{386F3935-93C4-4BCD-93E2-E3B085C9AB24}">
+                <p16:designElem xmlns:p16="http://schemas.microsoft.com/office/powerpoint/2015/main" val="1"/>
+              </p:ext>
+            </p:extLst>
           </p:nvPr>
         </p:nvSpPr>
         <p:spPr>
           <a:xfrm>
-            <a:off x="838200" y="1395662"/>
-            <a:ext cx="10515600" cy="4781301"/>
+            <a:off x="643278" y="2372868"/>
+            <a:ext cx="3255095" cy="18288"/>
+          </a:xfrm>
+          <a:custGeom>
+            <a:avLst/>
+            <a:gdLst>
+              <a:gd name="connsiteX0" fmla="*/ 0 w 3255095"/>
+              <a:gd name="connsiteY0" fmla="*/ 0 h 18288"/>
+              <a:gd name="connsiteX1" fmla="*/ 618468 w 3255095"/>
+              <a:gd name="connsiteY1" fmla="*/ 0 h 18288"/>
+              <a:gd name="connsiteX2" fmla="*/ 1269487 w 3255095"/>
+              <a:gd name="connsiteY2" fmla="*/ 0 h 18288"/>
+              <a:gd name="connsiteX3" fmla="*/ 1953057 w 3255095"/>
+              <a:gd name="connsiteY3" fmla="*/ 0 h 18288"/>
+              <a:gd name="connsiteX4" fmla="*/ 2636627 w 3255095"/>
+              <a:gd name="connsiteY4" fmla="*/ 0 h 18288"/>
+              <a:gd name="connsiteX5" fmla="*/ 3255095 w 3255095"/>
+              <a:gd name="connsiteY5" fmla="*/ 0 h 18288"/>
+              <a:gd name="connsiteX6" fmla="*/ 3255095 w 3255095"/>
+              <a:gd name="connsiteY6" fmla="*/ 18288 h 18288"/>
+              <a:gd name="connsiteX7" fmla="*/ 2538974 w 3255095"/>
+              <a:gd name="connsiteY7" fmla="*/ 18288 h 18288"/>
+              <a:gd name="connsiteX8" fmla="*/ 1822853 w 3255095"/>
+              <a:gd name="connsiteY8" fmla="*/ 18288 h 18288"/>
+              <a:gd name="connsiteX9" fmla="*/ 1171834 w 3255095"/>
+              <a:gd name="connsiteY9" fmla="*/ 18288 h 18288"/>
+              <a:gd name="connsiteX10" fmla="*/ 0 w 3255095"/>
+              <a:gd name="connsiteY10" fmla="*/ 18288 h 18288"/>
+              <a:gd name="connsiteX11" fmla="*/ 0 w 3255095"/>
+              <a:gd name="connsiteY11" fmla="*/ 0 h 18288"/>
+            </a:gdLst>
+            <a:ahLst/>
+            <a:cxnLst>
+              <a:cxn ang="0">
+                <a:pos x="connsiteX0" y="connsiteY0"/>
+              </a:cxn>
+              <a:cxn ang="0">
+                <a:pos x="connsiteX1" y="connsiteY1"/>
+              </a:cxn>
+              <a:cxn ang="0">
+                <a:pos x="connsiteX2" y="connsiteY2"/>
+              </a:cxn>
+              <a:cxn ang="0">
+                <a:pos x="connsiteX3" y="connsiteY3"/>
+              </a:cxn>
+              <a:cxn ang="0">
+                <a:pos x="connsiteX4" y="connsiteY4"/>
+              </a:cxn>
+              <a:cxn ang="0">
+                <a:pos x="connsiteX5" y="connsiteY5"/>
+              </a:cxn>
+              <a:cxn ang="0">
+                <a:pos x="connsiteX6" y="connsiteY6"/>
+              </a:cxn>
+              <a:cxn ang="0">
+                <a:pos x="connsiteX7" y="connsiteY7"/>
+              </a:cxn>
+              <a:cxn ang="0">
+                <a:pos x="connsiteX8" y="connsiteY8"/>
+              </a:cxn>
+              <a:cxn ang="0">
+                <a:pos x="connsiteX9" y="connsiteY9"/>
+              </a:cxn>
+              <a:cxn ang="0">
+                <a:pos x="connsiteX10" y="connsiteY10"/>
+              </a:cxn>
+              <a:cxn ang="0">
+                <a:pos x="connsiteX11" y="connsiteY11"/>
+              </a:cxn>
+            </a:cxnLst>
+            <a:rect l="l" t="t" r="r" b="b"/>
+            <a:pathLst>
+              <a:path w="3255095" h="18288" fill="none" extrusionOk="0">
+                <a:moveTo>
+                  <a:pt x="0" y="0"/>
+                </a:moveTo>
+                <a:cubicBezTo>
+                  <a:pt x="240201" y="-22123"/>
+                  <a:pt x="462021" y="-19623"/>
+                  <a:pt x="618468" y="0"/>
+                </a:cubicBezTo>
+                <a:cubicBezTo>
+                  <a:pt x="774915" y="19623"/>
+                  <a:pt x="974734" y="2035"/>
+                  <a:pt x="1269487" y="0"/>
+                </a:cubicBezTo>
+                <a:cubicBezTo>
+                  <a:pt x="1564240" y="-2035"/>
+                  <a:pt x="1733579" y="10639"/>
+                  <a:pt x="1953057" y="0"/>
+                </a:cubicBezTo>
+                <a:cubicBezTo>
+                  <a:pt x="2172535" y="-10639"/>
+                  <a:pt x="2453962" y="14018"/>
+                  <a:pt x="2636627" y="0"/>
+                </a:cubicBezTo>
+                <a:cubicBezTo>
+                  <a:pt x="2819292" y="-14018"/>
+                  <a:pt x="3121375" y="5399"/>
+                  <a:pt x="3255095" y="0"/>
+                </a:cubicBezTo>
+                <a:cubicBezTo>
+                  <a:pt x="3254386" y="8157"/>
+                  <a:pt x="3254682" y="12125"/>
+                  <a:pt x="3255095" y="18288"/>
+                </a:cubicBezTo>
+                <a:cubicBezTo>
+                  <a:pt x="3088545" y="23203"/>
+                  <a:pt x="2687475" y="7419"/>
+                  <a:pt x="2538974" y="18288"/>
+                </a:cubicBezTo>
+                <a:cubicBezTo>
+                  <a:pt x="2390473" y="29157"/>
+                  <a:pt x="2137381" y="-8959"/>
+                  <a:pt x="1822853" y="18288"/>
+                </a:cubicBezTo>
+                <a:cubicBezTo>
+                  <a:pt x="1508325" y="45535"/>
+                  <a:pt x="1466437" y="20385"/>
+                  <a:pt x="1171834" y="18288"/>
+                </a:cubicBezTo>
+                <a:cubicBezTo>
+                  <a:pt x="877231" y="16191"/>
+                  <a:pt x="561097" y="37643"/>
+                  <a:pt x="0" y="18288"/>
+                </a:cubicBezTo>
+                <a:cubicBezTo>
+                  <a:pt x="-46" y="12483"/>
+                  <a:pt x="-203" y="6491"/>
+                  <a:pt x="0" y="0"/>
+                </a:cubicBezTo>
+                <a:close/>
+              </a:path>
+              <a:path w="3255095" h="18288" stroke="0" extrusionOk="0">
+                <a:moveTo>
+                  <a:pt x="0" y="0"/>
+                </a:moveTo>
+                <a:cubicBezTo>
+                  <a:pt x="291965" y="19429"/>
+                  <a:pt x="363155" y="8568"/>
+                  <a:pt x="618468" y="0"/>
+                </a:cubicBezTo>
+                <a:cubicBezTo>
+                  <a:pt x="873781" y="-8568"/>
+                  <a:pt x="904459" y="-19505"/>
+                  <a:pt x="1171834" y="0"/>
+                </a:cubicBezTo>
+                <a:cubicBezTo>
+                  <a:pt x="1439209" y="19505"/>
+                  <a:pt x="1744369" y="9790"/>
+                  <a:pt x="1887955" y="0"/>
+                </a:cubicBezTo>
+                <a:cubicBezTo>
+                  <a:pt x="2031541" y="-9790"/>
+                  <a:pt x="2346378" y="21240"/>
+                  <a:pt x="2506423" y="0"/>
+                </a:cubicBezTo>
+                <a:cubicBezTo>
+                  <a:pt x="2666468" y="-21240"/>
+                  <a:pt x="2990257" y="30414"/>
+                  <a:pt x="3255095" y="0"/>
+                </a:cubicBezTo>
+                <a:cubicBezTo>
+                  <a:pt x="3254831" y="4493"/>
+                  <a:pt x="3255479" y="9472"/>
+                  <a:pt x="3255095" y="18288"/>
+                </a:cubicBezTo>
+                <a:cubicBezTo>
+                  <a:pt x="3120743" y="16690"/>
+                  <a:pt x="2759628" y="42462"/>
+                  <a:pt x="2604076" y="18288"/>
+                </a:cubicBezTo>
+                <a:cubicBezTo>
+                  <a:pt x="2448524" y="-5886"/>
+                  <a:pt x="2184336" y="19599"/>
+                  <a:pt x="1887955" y="18288"/>
+                </a:cubicBezTo>
+                <a:cubicBezTo>
+                  <a:pt x="1591574" y="16977"/>
+                  <a:pt x="1548845" y="6870"/>
+                  <a:pt x="1334589" y="18288"/>
+                </a:cubicBezTo>
+                <a:cubicBezTo>
+                  <a:pt x="1120333" y="29706"/>
+                  <a:pt x="996014" y="9662"/>
+                  <a:pt x="683570" y="18288"/>
+                </a:cubicBezTo>
+                <a:cubicBezTo>
+                  <a:pt x="371126" y="26914"/>
+                  <a:pt x="198687" y="16167"/>
+                  <a:pt x="0" y="18288"/>
+                </a:cubicBezTo>
+                <a:cubicBezTo>
+                  <a:pt x="843" y="9577"/>
+                  <a:pt x="371" y="6900"/>
+                  <a:pt x="0" y="0"/>
+                </a:cubicBezTo>
+                <a:close/>
+              </a:path>
+            </a:pathLst>
+          </a:custGeom>
+          <a:solidFill>
+            <a:schemeClr val="accent2"/>
+          </a:solidFill>
+          <a:ln w="38100" cap="rnd">
+            <a:solidFill>
+              <a:schemeClr val="accent2"/>
+            </a:solidFill>
+            <a:round/>
+            <a:extLst>
+              <a:ext uri="{C807C97D-BFC1-408E-A445-0C87EB9F89A2}">
+                <ask:lineSketchStyleProps xmlns:ask="http://schemas.microsoft.com/office/drawing/2018/sketchyshapes" sd="1219033472">
+                  <a:prstGeom prst="rect">
+                    <a:avLst/>
+                  </a:prstGeom>
+                  <ask:type>
+                    <ask:lineSketchFreehand/>
+                  </ask:type>
+                </ask:lineSketchStyleProps>
+              </a:ext>
+            </a:extLst>
+          </a:ln>
+        </p:spPr>
+        <p:style>
+          <a:lnRef idx="2">
+            <a:schemeClr val="accent1">
+              <a:shade val="50000"/>
+            </a:schemeClr>
+          </a:lnRef>
+          <a:fillRef idx="1">
+            <a:schemeClr val="accent1"/>
+          </a:fillRef>
+          <a:effectRef idx="0">
+            <a:schemeClr val="accent1"/>
+          </a:effectRef>
+          <a:fontRef idx="minor">
+            <a:schemeClr val="lt1"/>
+          </a:fontRef>
+        </p:style>
+        <p:txBody>
+          <a:bodyPr rtlCol="0" anchor="ctr"/>
+          <a:lstStyle/>
+          <a:p>
+            <a:pPr algn="ctr"/>
+            <a:endParaRPr lang="en-US"/>
+          </a:p>
+        </p:txBody>
+      </p:sp>
+      <p:sp>
+        <p:nvSpPr>
+          <p:cNvPr id="3" name="Content Placeholder 2">
+            <a:extLst>
+              <a:ext uri="{FF2B5EF4-FFF2-40B4-BE49-F238E27FC236}">
+                <a16:creationId xmlns:a16="http://schemas.microsoft.com/office/drawing/2014/main" id="{5067B23E-8310-5899-E43E-DAE762286571}"/>
+              </a:ext>
+            </a:extLst>
+          </p:cNvPr>
+          <p:cNvSpPr>
+            <a:spLocks noGrp="1"/>
+          </p:cNvSpPr>
+          <p:nvPr>
+            <p:ph idx="1"/>
+          </p:nvPr>
+        </p:nvSpPr>
+        <p:spPr>
+          <a:xfrm>
+            <a:off x="630936" y="2660904"/>
+            <a:ext cx="5135880" cy="3547872"/>
           </a:xfrm>
         </p:spPr>
         <p:txBody>
-          <a:bodyPr/>
-          <a:lstStyle/>
+          <a:bodyPr anchor="t">
+            <a:normAutofit fontScale="92500" lnSpcReduction="10000"/>
+          </a:bodyPr>
+          <a:lstStyle/>
+          <a:p>
+            <a:pPr marL="0" indent="0">
+              <a:lnSpc>
+                <a:spcPct val="160000"/>
+              </a:lnSpc>
+              <a:buNone/>
+            </a:pPr>
+            <a:r>
+              <a:rPr lang="en-US" b="1">
+                <a:latin typeface="Times New Roman" panose="02020603050405020304" pitchFamily="18" charset="0"/>
+                <a:cs typeface="Times New Roman" panose="02020603050405020304" pitchFamily="18" charset="0"/>
+              </a:rPr>
+              <a:t>2.2. Mô hình </a:t>
+            </a:r>
+            <a:r>
+              <a:rPr lang="en-US" sz="3000" b="1">
+                <a:latin typeface="Times New Roman" panose="02020603050405020304" pitchFamily="18" charset="0"/>
+                <a:cs typeface="Times New Roman" panose="02020603050405020304" pitchFamily="18" charset="0"/>
+              </a:rPr>
+              <a:t>ngôn</a:t>
+            </a:r>
+            <a:r>
+              <a:rPr lang="en-US" b="1">
+                <a:latin typeface="Times New Roman" panose="02020603050405020304" pitchFamily="18" charset="0"/>
+                <a:cs typeface="Times New Roman" panose="02020603050405020304" pitchFamily="18" charset="0"/>
+              </a:rPr>
+              <a:t> ngữ lớn - LLM</a:t>
+            </a:r>
+          </a:p>
+          <a:p>
+            <a:r>
+              <a:rPr lang="en-US" sz="2200" i="1">
+                <a:latin typeface="Times New Roman" panose="02020603050405020304" pitchFamily="18" charset="0"/>
+                <a:cs typeface="Times New Roman" panose="02020603050405020304" pitchFamily="18" charset="0"/>
+              </a:rPr>
+              <a:t>Xử lý và sinh </a:t>
+            </a:r>
+            <a:r>
+              <a:rPr lang="en-US" sz="2200">
+                <a:latin typeface="Times New Roman" panose="02020603050405020304" pitchFamily="18" charset="0"/>
+                <a:cs typeface="Times New Roman" panose="02020603050405020304" pitchFamily="18" charset="0"/>
+              </a:rPr>
+              <a:t>văn bản tự nhiên.</a:t>
+            </a:r>
+          </a:p>
+          <a:p>
+            <a:r>
+              <a:rPr lang="en-US" sz="2200">
+                <a:latin typeface="Times New Roman" panose="02020603050405020304" pitchFamily="18" charset="0"/>
+                <a:cs typeface="Times New Roman" panose="02020603050405020304" pitchFamily="18" charset="0"/>
+              </a:rPr>
+              <a:t>Huấn luyện trên </a:t>
+            </a:r>
+            <a:r>
+              <a:rPr lang="en-US" sz="2200" b="1" i="1">
+                <a:latin typeface="Times New Roman" panose="02020603050405020304" pitchFamily="18" charset="0"/>
+                <a:cs typeface="Times New Roman" panose="02020603050405020304" pitchFamily="18" charset="0"/>
+              </a:rPr>
+              <a:t>dữ liệu quy mô lớn</a:t>
+            </a:r>
+            <a:r>
+              <a:rPr lang="en-US" sz="2200">
+                <a:latin typeface="Times New Roman" panose="02020603050405020304" pitchFamily="18" charset="0"/>
+                <a:cs typeface="Times New Roman" panose="02020603050405020304" pitchFamily="18" charset="0"/>
+              </a:rPr>
+              <a:t>.</a:t>
+            </a:r>
+          </a:p>
+          <a:p>
+            <a:r>
+              <a:rPr lang="en-US" sz="2200" b="1" i="1">
+                <a:latin typeface="Times New Roman" panose="02020603050405020304" pitchFamily="18" charset="0"/>
+                <a:cs typeface="Times New Roman" panose="02020603050405020304" pitchFamily="18" charset="0"/>
+              </a:rPr>
+              <a:t>Kiến trúc phức tạp </a:t>
+            </a:r>
+            <a:r>
+              <a:rPr lang="en-US" sz="2200">
+                <a:latin typeface="Times New Roman" panose="02020603050405020304" pitchFamily="18" charset="0"/>
+                <a:cs typeface="Times New Roman" panose="02020603050405020304" pitchFamily="18" charset="0"/>
+              </a:rPr>
+              <a:t>với hàng tỉ tham số dựa trên </a:t>
+            </a:r>
+            <a:r>
+              <a:rPr lang="en-US" sz="2200" b="1" i="1">
+                <a:latin typeface="Times New Roman" panose="02020603050405020304" pitchFamily="18" charset="0"/>
+                <a:cs typeface="Times New Roman" panose="02020603050405020304" pitchFamily="18" charset="0"/>
+              </a:rPr>
+              <a:t>nền Transformer</a:t>
+            </a:r>
+            <a:r>
+              <a:rPr lang="en-US" sz="2200" b="1">
+                <a:latin typeface="Times New Roman" panose="02020603050405020304" pitchFamily="18" charset="0"/>
+                <a:cs typeface="Times New Roman" panose="02020603050405020304" pitchFamily="18" charset="0"/>
+              </a:rPr>
+              <a:t>.</a:t>
+            </a:r>
+          </a:p>
+          <a:p>
+            <a:r>
+              <a:rPr lang="en-US" sz="2200">
+                <a:latin typeface="Times New Roman" panose="02020603050405020304" pitchFamily="18" charset="0"/>
+                <a:cs typeface="Times New Roman" panose="02020603050405020304" pitchFamily="18" charset="0"/>
+              </a:rPr>
+              <a:t>Có thể trích xuất, phân tích, gán nhãn, sinh văn bản.</a:t>
+            </a:r>
+          </a:p>
+          <a:p>
+            <a:r>
+              <a:rPr lang="en-US" sz="2200">
+                <a:latin typeface="Times New Roman" panose="02020603050405020304" pitchFamily="18" charset="0"/>
+                <a:cs typeface="Times New Roman" panose="02020603050405020304" pitchFamily="18" charset="0"/>
+              </a:rPr>
+              <a:t>Ứng dụng trong chatbot, giáo dục, pháp lý, y tế…</a:t>
+            </a:r>
+          </a:p>
           <a:p>
             <a:pPr marL="0" indent="0">
               <a:buNone/>
             </a:pPr>
-            <a:r>
-              <a:rPr lang="en-US" i="1">
-                <a:latin typeface="Times New Roman" panose="02020603050405020304" pitchFamily="18" charset="0"/>
-                <a:cs typeface="Times New Roman" panose="02020603050405020304" pitchFamily="18" charset="0"/>
-              </a:rPr>
-              <a:t>2.2. Mô hình ngôn ngữ lớn LLM</a:t>
-            </a:r>
-          </a:p>
-        </p:txBody>
-      </p:sp>
+            <a:endParaRPr lang="en-US" sz="2200" i="1">
+              <a:latin typeface="Times New Roman" panose="02020603050405020304" pitchFamily="18" charset="0"/>
+              <a:cs typeface="Times New Roman" panose="02020603050405020304" pitchFamily="18" charset="0"/>
+            </a:endParaRPr>
+          </a:p>
+        </p:txBody>
+      </p:sp>
+      <p:pic>
+        <p:nvPicPr>
+          <p:cNvPr id="4" name="Picture 3" descr="A screenshot of a computer&#10;&#10;AI-generated content may be incorrect.">
+            <a:extLst>
+              <a:ext uri="{FF2B5EF4-FFF2-40B4-BE49-F238E27FC236}">
+                <a16:creationId xmlns:a16="http://schemas.microsoft.com/office/drawing/2014/main" id="{670E2A17-FB78-A897-D260-C9C252227DFE}"/>
+              </a:ext>
+            </a:extLst>
+          </p:cNvPr>
+          <p:cNvPicPr>
+            <a:picLocks noChangeAspect="1"/>
+          </p:cNvPicPr>
+          <p:nvPr/>
+        </p:nvPicPr>
+        <p:blipFill>
+          <a:blip r:embed="rId2">
+            <a:extLst>
+              <a:ext uri="{28A0092B-C50C-407E-A947-70E740481C1C}">
+                <a14:useLocalDpi xmlns:a14="http://schemas.microsoft.com/office/drawing/2010/main" val="0"/>
+              </a:ext>
+            </a:extLst>
+          </a:blip>
+          <a:stretch>
+            <a:fillRect/>
+          </a:stretch>
+        </p:blipFill>
+        <p:spPr>
+          <a:xfrm>
+            <a:off x="5766816" y="1594753"/>
+            <a:ext cx="6108192" cy="3668494"/>
+          </a:xfrm>
+          <a:prstGeom prst="rect">
+            <a:avLst/>
+          </a:prstGeom>
+        </p:spPr>
+      </p:pic>
     </p:spTree>
     <p:extLst>
       <p:ext uri="{BB962C8B-B14F-4D97-AF65-F5344CB8AC3E}">
@@ -4227,6 +4734,14 @@
 <file path=ppt/slides/slide11.xml><?xml version="1.0" encoding="utf-8"?>
 <p:sld xmlns:a="http://schemas.openxmlformats.org/drawingml/2006/main" xmlns:r="http://schemas.openxmlformats.org/officeDocument/2006/relationships" xmlns:p="http://schemas.openxmlformats.org/presentationml/2006/main">
   <p:cSld>
+    <p:bg>
+      <p:bgPr>
+        <a:solidFill>
+          <a:schemeClr val="bg1"/>
+        </a:solidFill>
+        <a:effectLst/>
+      </p:bgPr>
+    </p:bg>
     <p:spTree>
       <p:nvGrpSpPr>
         <p:cNvPr id="1" name="">
@@ -4247,83 +4762,543 @@
           <a:chExt cx="0" cy="0"/>
         </a:xfrm>
       </p:grpSpPr>
-      <p:sp>
-        <p:nvSpPr>
-          <p:cNvPr id="2" name="Title 1">
-            <a:extLst>
-              <a:ext uri="{FF2B5EF4-FFF2-40B4-BE49-F238E27FC236}">
-                <a16:creationId xmlns:a16="http://schemas.microsoft.com/office/drawing/2014/main" id="{7A2D5F9A-9397-BD22-F4BB-DCDF55965150}"/>
-              </a:ext>
-            </a:extLst>
-          </p:cNvPr>
-          <p:cNvSpPr>
-            <a:spLocks noGrp="1"/>
-          </p:cNvSpPr>
-          <p:nvPr>
-            <p:ph type="title"/>
+      <p:sp useBgFill="1">
+        <p:nvSpPr>
+          <p:cNvPr id="9" name="Rectangle 8">
+            <a:extLst>
+              <a:ext uri="{FF2B5EF4-FFF2-40B4-BE49-F238E27FC236}">
+                <a16:creationId xmlns:a16="http://schemas.microsoft.com/office/drawing/2014/main" id="{743AA782-23D1-4521-8CAD-47662984AA08}"/>
+              </a:ext>
+              <a:ext uri="{C183D7F6-B498-43B3-948B-1728B52AA6E4}">
+                <adec:decorative xmlns:adec="http://schemas.microsoft.com/office/drawing/2017/decorative" val="1"/>
+              </a:ext>
+            </a:extLst>
+          </p:cNvPr>
+          <p:cNvSpPr>
+            <a:spLocks noGrp="1" noRot="1" noChangeAspect="1" noMove="1" noResize="1" noEditPoints="1" noAdjustHandles="1" noChangeArrowheads="1" noChangeShapeType="1" noTextEdit="1"/>
+          </p:cNvSpPr>
+          <p:nvPr>
+            <p:extLst>
+              <p:ext uri="{386F3935-93C4-4BCD-93E2-E3B085C9AB24}">
+                <p16:designElem xmlns:p16="http://schemas.microsoft.com/office/powerpoint/2015/main" val="1"/>
+              </p:ext>
+            </p:extLst>
           </p:nvPr>
         </p:nvSpPr>
         <p:spPr>
           <a:xfrm>
-            <a:off x="838200" y="365125"/>
-            <a:ext cx="10515600" cy="1030537"/>
+            <a:off x="0" y="0"/>
+            <a:ext cx="12192000" cy="6858000"/>
+          </a:xfrm>
+          <a:prstGeom prst="rect">
+            <a:avLst/>
+          </a:prstGeom>
+          <a:ln>
+            <a:noFill/>
+          </a:ln>
+        </p:spPr>
+        <p:style>
+          <a:lnRef idx="2">
+            <a:schemeClr val="accent1">
+              <a:shade val="50000"/>
+            </a:schemeClr>
+          </a:lnRef>
+          <a:fillRef idx="1">
+            <a:schemeClr val="accent1"/>
+          </a:fillRef>
+          <a:effectRef idx="0">
+            <a:schemeClr val="accent1"/>
+          </a:effectRef>
+          <a:fontRef idx="minor">
+            <a:schemeClr val="lt1"/>
+          </a:fontRef>
+        </p:style>
+        <p:txBody>
+          <a:bodyPr rtlCol="0" anchor="ctr"/>
+          <a:lstStyle/>
+          <a:p>
+            <a:pPr algn="ctr"/>
+            <a:endParaRPr lang="en-US"/>
+          </a:p>
+        </p:txBody>
+      </p:sp>
+      <p:sp>
+        <p:nvSpPr>
+          <p:cNvPr id="2" name="Title 1">
+            <a:extLst>
+              <a:ext uri="{FF2B5EF4-FFF2-40B4-BE49-F238E27FC236}">
+                <a16:creationId xmlns:a16="http://schemas.microsoft.com/office/drawing/2014/main" id="{7A2D5F9A-9397-BD22-F4BB-DCDF55965150}"/>
+              </a:ext>
+            </a:extLst>
+          </p:cNvPr>
+          <p:cNvSpPr>
+            <a:spLocks noGrp="1"/>
+          </p:cNvSpPr>
+          <p:nvPr>
+            <p:ph type="title"/>
+          </p:nvPr>
+        </p:nvSpPr>
+        <p:spPr>
+          <a:xfrm>
+            <a:off x="630936" y="640080"/>
+            <a:ext cx="4818888" cy="1481328"/>
           </a:xfrm>
         </p:spPr>
         <p:txBody>
-          <a:bodyPr>
+          <a:bodyPr anchor="b">
             <a:normAutofit/>
           </a:bodyPr>
           <a:lstStyle/>
           <a:p>
             <a:r>
-              <a:rPr lang="en-US" sz="4000" b="1">
-                <a:latin typeface="Times New Roman" panose="02020603050405020304" pitchFamily="18" charset="0"/>
-                <a:cs typeface="Times New Roman" panose="02020603050405020304" pitchFamily="18" charset="0"/>
-              </a:rPr>
-              <a:t>CƠ SỞ LÝ THUYẾT</a:t>
-            </a:r>
-          </a:p>
-        </p:txBody>
-      </p:sp>
-      <p:sp>
-        <p:nvSpPr>
-          <p:cNvPr id="3" name="Content Placeholder 2">
-            <a:extLst>
-              <a:ext uri="{FF2B5EF4-FFF2-40B4-BE49-F238E27FC236}">
-                <a16:creationId xmlns:a16="http://schemas.microsoft.com/office/drawing/2014/main" id="{7C2CBD0B-87E8-0B2A-8825-72D6A9F50A34}"/>
-              </a:ext>
-            </a:extLst>
-          </p:cNvPr>
-          <p:cNvSpPr>
-            <a:spLocks noGrp="1"/>
-          </p:cNvSpPr>
-          <p:nvPr>
-            <p:ph idx="1"/>
+              <a:rPr lang="en-US" sz="5000" b="1">
+                <a:latin typeface="Times New Roman" panose="02020603050405020304" pitchFamily="18" charset="0"/>
+                <a:cs typeface="Times New Roman" panose="02020603050405020304" pitchFamily="18" charset="0"/>
+              </a:rPr>
+              <a:t>CƠ SỞ </a:t>
+            </a:r>
+            <a:br>
+              <a:rPr lang="en-US" sz="5000" b="1">
+                <a:latin typeface="Times New Roman" panose="02020603050405020304" pitchFamily="18" charset="0"/>
+                <a:cs typeface="Times New Roman" panose="02020603050405020304" pitchFamily="18" charset="0"/>
+              </a:rPr>
+            </a:br>
+            <a:r>
+              <a:rPr lang="en-US" sz="5000" b="1">
+                <a:latin typeface="Times New Roman" panose="02020603050405020304" pitchFamily="18" charset="0"/>
+                <a:cs typeface="Times New Roman" panose="02020603050405020304" pitchFamily="18" charset="0"/>
+              </a:rPr>
+              <a:t>LÝ THUYẾT</a:t>
+            </a:r>
+          </a:p>
+        </p:txBody>
+      </p:sp>
+      <p:sp>
+        <p:nvSpPr>
+          <p:cNvPr id="11" name="sketch line">
+            <a:extLst>
+              <a:ext uri="{FF2B5EF4-FFF2-40B4-BE49-F238E27FC236}">
+                <a16:creationId xmlns:a16="http://schemas.microsoft.com/office/drawing/2014/main" id="{71877DBC-BB60-40F0-AC93-2ACDBAAE60CE}"/>
+              </a:ext>
+              <a:ext uri="{C183D7F6-B498-43B3-948B-1728B52AA6E4}">
+                <adec:decorative xmlns:adec="http://schemas.microsoft.com/office/drawing/2017/decorative" val="1"/>
+              </a:ext>
+            </a:extLst>
+          </p:cNvPr>
+          <p:cNvSpPr>
+            <a:spLocks noGrp="1" noRot="1" noChangeAspect="1" noMove="1" noResize="1" noEditPoints="1" noAdjustHandles="1" noChangeArrowheads="1" noChangeShapeType="1" noTextEdit="1"/>
+          </p:cNvSpPr>
+          <p:nvPr>
+            <p:extLst>
+              <p:ext uri="{386F3935-93C4-4BCD-93E2-E3B085C9AB24}">
+                <p16:designElem xmlns:p16="http://schemas.microsoft.com/office/powerpoint/2015/main" val="1"/>
+              </p:ext>
+            </p:extLst>
           </p:nvPr>
         </p:nvSpPr>
         <p:spPr>
           <a:xfrm>
-            <a:off x="838200" y="1395662"/>
-            <a:ext cx="10515600" cy="4781301"/>
+            <a:off x="643278" y="2372868"/>
+            <a:ext cx="3255095" cy="18288"/>
+          </a:xfrm>
+          <a:custGeom>
+            <a:avLst/>
+            <a:gdLst>
+              <a:gd name="connsiteX0" fmla="*/ 0 w 3255095"/>
+              <a:gd name="connsiteY0" fmla="*/ 0 h 18288"/>
+              <a:gd name="connsiteX1" fmla="*/ 618468 w 3255095"/>
+              <a:gd name="connsiteY1" fmla="*/ 0 h 18288"/>
+              <a:gd name="connsiteX2" fmla="*/ 1269487 w 3255095"/>
+              <a:gd name="connsiteY2" fmla="*/ 0 h 18288"/>
+              <a:gd name="connsiteX3" fmla="*/ 1953057 w 3255095"/>
+              <a:gd name="connsiteY3" fmla="*/ 0 h 18288"/>
+              <a:gd name="connsiteX4" fmla="*/ 2636627 w 3255095"/>
+              <a:gd name="connsiteY4" fmla="*/ 0 h 18288"/>
+              <a:gd name="connsiteX5" fmla="*/ 3255095 w 3255095"/>
+              <a:gd name="connsiteY5" fmla="*/ 0 h 18288"/>
+              <a:gd name="connsiteX6" fmla="*/ 3255095 w 3255095"/>
+              <a:gd name="connsiteY6" fmla="*/ 18288 h 18288"/>
+              <a:gd name="connsiteX7" fmla="*/ 2538974 w 3255095"/>
+              <a:gd name="connsiteY7" fmla="*/ 18288 h 18288"/>
+              <a:gd name="connsiteX8" fmla="*/ 1822853 w 3255095"/>
+              <a:gd name="connsiteY8" fmla="*/ 18288 h 18288"/>
+              <a:gd name="connsiteX9" fmla="*/ 1171834 w 3255095"/>
+              <a:gd name="connsiteY9" fmla="*/ 18288 h 18288"/>
+              <a:gd name="connsiteX10" fmla="*/ 0 w 3255095"/>
+              <a:gd name="connsiteY10" fmla="*/ 18288 h 18288"/>
+              <a:gd name="connsiteX11" fmla="*/ 0 w 3255095"/>
+              <a:gd name="connsiteY11" fmla="*/ 0 h 18288"/>
+            </a:gdLst>
+            <a:ahLst/>
+            <a:cxnLst>
+              <a:cxn ang="0">
+                <a:pos x="connsiteX0" y="connsiteY0"/>
+              </a:cxn>
+              <a:cxn ang="0">
+                <a:pos x="connsiteX1" y="connsiteY1"/>
+              </a:cxn>
+              <a:cxn ang="0">
+                <a:pos x="connsiteX2" y="connsiteY2"/>
+              </a:cxn>
+              <a:cxn ang="0">
+                <a:pos x="connsiteX3" y="connsiteY3"/>
+              </a:cxn>
+              <a:cxn ang="0">
+                <a:pos x="connsiteX4" y="connsiteY4"/>
+              </a:cxn>
+              <a:cxn ang="0">
+                <a:pos x="connsiteX5" y="connsiteY5"/>
+              </a:cxn>
+              <a:cxn ang="0">
+                <a:pos x="connsiteX6" y="connsiteY6"/>
+              </a:cxn>
+              <a:cxn ang="0">
+                <a:pos x="connsiteX7" y="connsiteY7"/>
+              </a:cxn>
+              <a:cxn ang="0">
+                <a:pos x="connsiteX8" y="connsiteY8"/>
+              </a:cxn>
+              <a:cxn ang="0">
+                <a:pos x="connsiteX9" y="connsiteY9"/>
+              </a:cxn>
+              <a:cxn ang="0">
+                <a:pos x="connsiteX10" y="connsiteY10"/>
+              </a:cxn>
+              <a:cxn ang="0">
+                <a:pos x="connsiteX11" y="connsiteY11"/>
+              </a:cxn>
+            </a:cxnLst>
+            <a:rect l="l" t="t" r="r" b="b"/>
+            <a:pathLst>
+              <a:path w="3255095" h="18288" fill="none" extrusionOk="0">
+                <a:moveTo>
+                  <a:pt x="0" y="0"/>
+                </a:moveTo>
+                <a:cubicBezTo>
+                  <a:pt x="240201" y="-22123"/>
+                  <a:pt x="462021" y="-19623"/>
+                  <a:pt x="618468" y="0"/>
+                </a:cubicBezTo>
+                <a:cubicBezTo>
+                  <a:pt x="774915" y="19623"/>
+                  <a:pt x="974734" y="2035"/>
+                  <a:pt x="1269487" y="0"/>
+                </a:cubicBezTo>
+                <a:cubicBezTo>
+                  <a:pt x="1564240" y="-2035"/>
+                  <a:pt x="1733579" y="10639"/>
+                  <a:pt x="1953057" y="0"/>
+                </a:cubicBezTo>
+                <a:cubicBezTo>
+                  <a:pt x="2172535" y="-10639"/>
+                  <a:pt x="2453962" y="14018"/>
+                  <a:pt x="2636627" y="0"/>
+                </a:cubicBezTo>
+                <a:cubicBezTo>
+                  <a:pt x="2819292" y="-14018"/>
+                  <a:pt x="3121375" y="5399"/>
+                  <a:pt x="3255095" y="0"/>
+                </a:cubicBezTo>
+                <a:cubicBezTo>
+                  <a:pt x="3254386" y="8157"/>
+                  <a:pt x="3254682" y="12125"/>
+                  <a:pt x="3255095" y="18288"/>
+                </a:cubicBezTo>
+                <a:cubicBezTo>
+                  <a:pt x="3088545" y="23203"/>
+                  <a:pt x="2687475" y="7419"/>
+                  <a:pt x="2538974" y="18288"/>
+                </a:cubicBezTo>
+                <a:cubicBezTo>
+                  <a:pt x="2390473" y="29157"/>
+                  <a:pt x="2137381" y="-8959"/>
+                  <a:pt x="1822853" y="18288"/>
+                </a:cubicBezTo>
+                <a:cubicBezTo>
+                  <a:pt x="1508325" y="45535"/>
+                  <a:pt x="1466437" y="20385"/>
+                  <a:pt x="1171834" y="18288"/>
+                </a:cubicBezTo>
+                <a:cubicBezTo>
+                  <a:pt x="877231" y="16191"/>
+                  <a:pt x="561097" y="37643"/>
+                  <a:pt x="0" y="18288"/>
+                </a:cubicBezTo>
+                <a:cubicBezTo>
+                  <a:pt x="-46" y="12483"/>
+                  <a:pt x="-203" y="6491"/>
+                  <a:pt x="0" y="0"/>
+                </a:cubicBezTo>
+                <a:close/>
+              </a:path>
+              <a:path w="3255095" h="18288" stroke="0" extrusionOk="0">
+                <a:moveTo>
+                  <a:pt x="0" y="0"/>
+                </a:moveTo>
+                <a:cubicBezTo>
+                  <a:pt x="291965" y="19429"/>
+                  <a:pt x="363155" y="8568"/>
+                  <a:pt x="618468" y="0"/>
+                </a:cubicBezTo>
+                <a:cubicBezTo>
+                  <a:pt x="873781" y="-8568"/>
+                  <a:pt x="904459" y="-19505"/>
+                  <a:pt x="1171834" y="0"/>
+                </a:cubicBezTo>
+                <a:cubicBezTo>
+                  <a:pt x="1439209" y="19505"/>
+                  <a:pt x="1744369" y="9790"/>
+                  <a:pt x="1887955" y="0"/>
+                </a:cubicBezTo>
+                <a:cubicBezTo>
+                  <a:pt x="2031541" y="-9790"/>
+                  <a:pt x="2346378" y="21240"/>
+                  <a:pt x="2506423" y="0"/>
+                </a:cubicBezTo>
+                <a:cubicBezTo>
+                  <a:pt x="2666468" y="-21240"/>
+                  <a:pt x="2990257" y="30414"/>
+                  <a:pt x="3255095" y="0"/>
+                </a:cubicBezTo>
+                <a:cubicBezTo>
+                  <a:pt x="3254831" y="4493"/>
+                  <a:pt x="3255479" y="9472"/>
+                  <a:pt x="3255095" y="18288"/>
+                </a:cubicBezTo>
+                <a:cubicBezTo>
+                  <a:pt x="3120743" y="16690"/>
+                  <a:pt x="2759628" y="42462"/>
+                  <a:pt x="2604076" y="18288"/>
+                </a:cubicBezTo>
+                <a:cubicBezTo>
+                  <a:pt x="2448524" y="-5886"/>
+                  <a:pt x="2184336" y="19599"/>
+                  <a:pt x="1887955" y="18288"/>
+                </a:cubicBezTo>
+                <a:cubicBezTo>
+                  <a:pt x="1591574" y="16977"/>
+                  <a:pt x="1548845" y="6870"/>
+                  <a:pt x="1334589" y="18288"/>
+                </a:cubicBezTo>
+                <a:cubicBezTo>
+                  <a:pt x="1120333" y="29706"/>
+                  <a:pt x="996014" y="9662"/>
+                  <a:pt x="683570" y="18288"/>
+                </a:cubicBezTo>
+                <a:cubicBezTo>
+                  <a:pt x="371126" y="26914"/>
+                  <a:pt x="198687" y="16167"/>
+                  <a:pt x="0" y="18288"/>
+                </a:cubicBezTo>
+                <a:cubicBezTo>
+                  <a:pt x="843" y="9577"/>
+                  <a:pt x="371" y="6900"/>
+                  <a:pt x="0" y="0"/>
+                </a:cubicBezTo>
+                <a:close/>
+              </a:path>
+            </a:pathLst>
+          </a:custGeom>
+          <a:solidFill>
+            <a:schemeClr val="accent2"/>
+          </a:solidFill>
+          <a:ln w="38100" cap="rnd">
+            <a:solidFill>
+              <a:schemeClr val="accent2"/>
+            </a:solidFill>
+            <a:round/>
+            <a:extLst>
+              <a:ext uri="{C807C97D-BFC1-408E-A445-0C87EB9F89A2}">
+                <ask:lineSketchStyleProps xmlns:ask="http://schemas.microsoft.com/office/drawing/2018/sketchyshapes" sd="1219033472">
+                  <a:prstGeom prst="rect">
+                    <a:avLst/>
+                  </a:prstGeom>
+                  <ask:type>
+                    <ask:lineSketchFreehand/>
+                  </ask:type>
+                </ask:lineSketchStyleProps>
+              </a:ext>
+            </a:extLst>
+          </a:ln>
+        </p:spPr>
+        <p:style>
+          <a:lnRef idx="2">
+            <a:schemeClr val="accent1">
+              <a:shade val="50000"/>
+            </a:schemeClr>
+          </a:lnRef>
+          <a:fillRef idx="1">
+            <a:schemeClr val="accent1"/>
+          </a:fillRef>
+          <a:effectRef idx="0">
+            <a:schemeClr val="accent1"/>
+          </a:effectRef>
+          <a:fontRef idx="minor">
+            <a:schemeClr val="lt1"/>
+          </a:fontRef>
+        </p:style>
+        <p:txBody>
+          <a:bodyPr rtlCol="0" anchor="ctr"/>
+          <a:lstStyle/>
+          <a:p>
+            <a:pPr algn="ctr"/>
+            <a:endParaRPr lang="en-US"/>
+          </a:p>
+        </p:txBody>
+      </p:sp>
+      <p:sp>
+        <p:nvSpPr>
+          <p:cNvPr id="3" name="Content Placeholder 2">
+            <a:extLst>
+              <a:ext uri="{FF2B5EF4-FFF2-40B4-BE49-F238E27FC236}">
+                <a16:creationId xmlns:a16="http://schemas.microsoft.com/office/drawing/2014/main" id="{7C2CBD0B-87E8-0B2A-8825-72D6A9F50A34}"/>
+              </a:ext>
+            </a:extLst>
+          </p:cNvPr>
+          <p:cNvSpPr>
+            <a:spLocks noGrp="1"/>
+          </p:cNvSpPr>
+          <p:nvPr>
+            <p:ph idx="1"/>
+          </p:nvPr>
+        </p:nvSpPr>
+        <p:spPr>
+          <a:xfrm>
+            <a:off x="630936" y="2660904"/>
+            <a:ext cx="4818888" cy="3547872"/>
           </a:xfrm>
         </p:spPr>
         <p:txBody>
-          <a:bodyPr/>
+          <a:bodyPr anchor="t">
+            <a:normAutofit/>
+          </a:bodyPr>
           <a:lstStyle/>
           <a:p>
             <a:pPr marL="0" indent="0">
+              <a:lnSpc>
+                <a:spcPct val="150000"/>
+              </a:lnSpc>
               <a:buNone/>
             </a:pPr>
             <a:r>
-              <a:rPr lang="en-US" i="1">
+              <a:rPr lang="en-US" b="1">
                 <a:latin typeface="Times New Roman" panose="02020603050405020304" pitchFamily="18" charset="0"/>
                 <a:cs typeface="Times New Roman" panose="02020603050405020304" pitchFamily="18" charset="0"/>
               </a:rPr>
               <a:t>2.3. Hệ thống RAG</a:t>
             </a:r>
           </a:p>
-        </p:txBody>
-      </p:sp>
+          <a:p>
+            <a:r>
+              <a:rPr lang="en-US" sz="2000" b="1" i="1">
+                <a:latin typeface="Times New Roman" panose="02020603050405020304" pitchFamily="18" charset="0"/>
+                <a:cs typeface="Times New Roman" panose="02020603050405020304" pitchFamily="18" charset="0"/>
+              </a:rPr>
+              <a:t>Sự kết hợp </a:t>
+            </a:r>
+            <a:r>
+              <a:rPr lang="en-US" sz="2000">
+                <a:latin typeface="Times New Roman" panose="02020603050405020304" pitchFamily="18" charset="0"/>
+                <a:cs typeface="Times New Roman" panose="02020603050405020304" pitchFamily="18" charset="0"/>
+              </a:rPr>
+              <a:t>giữa tìm kiếm thông tin (retrieval) và sinh văn bản (generation).</a:t>
+            </a:r>
+          </a:p>
+          <a:p>
+            <a:r>
+              <a:rPr lang="en-US" sz="2000">
+                <a:latin typeface="Times New Roman" panose="02020603050405020304" pitchFamily="18" charset="0"/>
+                <a:cs typeface="Times New Roman" panose="02020603050405020304" pitchFamily="18" charset="0"/>
+              </a:rPr>
+              <a:t>Gồm </a:t>
+            </a:r>
+            <a:r>
+              <a:rPr lang="en-US" sz="2000" b="1" i="1">
+                <a:latin typeface="Times New Roman" panose="02020603050405020304" pitchFamily="18" charset="0"/>
+                <a:cs typeface="Times New Roman" panose="02020603050405020304" pitchFamily="18" charset="0"/>
+              </a:rPr>
+              <a:t>bộ truy xuất </a:t>
+            </a:r>
+            <a:r>
+              <a:rPr lang="en-US" sz="2000">
+                <a:latin typeface="Times New Roman" panose="02020603050405020304" pitchFamily="18" charset="0"/>
+                <a:cs typeface="Times New Roman" panose="02020603050405020304" pitchFamily="18" charset="0"/>
+              </a:rPr>
+              <a:t>và </a:t>
+            </a:r>
+            <a:r>
+              <a:rPr lang="en-US" sz="2000" b="1" i="1">
+                <a:latin typeface="Times New Roman" panose="02020603050405020304" pitchFamily="18" charset="0"/>
+                <a:cs typeface="Times New Roman" panose="02020603050405020304" pitchFamily="18" charset="0"/>
+              </a:rPr>
+              <a:t>bộ tạo sinh</a:t>
+            </a:r>
+            <a:r>
+              <a:rPr lang="en-US" sz="2000">
+                <a:latin typeface="Times New Roman" panose="02020603050405020304" pitchFamily="18" charset="0"/>
+                <a:cs typeface="Times New Roman" panose="02020603050405020304" pitchFamily="18" charset="0"/>
+              </a:rPr>
+              <a:t>.</a:t>
+            </a:r>
+            <a:endParaRPr lang="en-US" sz="2000" b="1" i="1">
+              <a:latin typeface="Times New Roman" panose="02020603050405020304" pitchFamily="18" charset="0"/>
+              <a:cs typeface="Times New Roman" panose="02020603050405020304" pitchFamily="18" charset="0"/>
+            </a:endParaRPr>
+          </a:p>
+          <a:p>
+            <a:r>
+              <a:rPr lang="en-US" sz="2000" b="1" i="1">
+                <a:latin typeface="Times New Roman" panose="02020603050405020304" pitchFamily="18" charset="0"/>
+                <a:cs typeface="Times New Roman" panose="02020603050405020304" pitchFamily="18" charset="0"/>
+              </a:rPr>
+              <a:t>Cải thiện </a:t>
+            </a:r>
+            <a:r>
+              <a:rPr lang="en-US" sz="2000">
+                <a:latin typeface="Times New Roman" panose="02020603050405020304" pitchFamily="18" charset="0"/>
+                <a:cs typeface="Times New Roman" panose="02020603050405020304" pitchFamily="18" charset="0"/>
+              </a:rPr>
+              <a:t>độ chinh xác, khả năng mở rộng và khả năng tùy biến lĩnh vực.</a:t>
+            </a:r>
+          </a:p>
+        </p:txBody>
+      </p:sp>
+      <p:pic>
+        <p:nvPicPr>
+          <p:cNvPr id="4" name="Picture 3" descr="A diagram of a software model&#10;&#10;AI-generated content may be incorrect.">
+            <a:extLst>
+              <a:ext uri="{FF2B5EF4-FFF2-40B4-BE49-F238E27FC236}">
+                <a16:creationId xmlns:a16="http://schemas.microsoft.com/office/drawing/2014/main" id="{1AA1C02A-01CC-8118-BE66-A0E66E8B5F36}"/>
+              </a:ext>
+            </a:extLst>
+          </p:cNvPr>
+          <p:cNvPicPr>
+            <a:picLocks noChangeAspect="1"/>
+          </p:cNvPicPr>
+          <p:nvPr/>
+        </p:nvPicPr>
+        <p:blipFill>
+          <a:blip r:embed="rId2">
+            <a:extLst>
+              <a:ext uri="{28A0092B-C50C-407E-A947-70E740481C1C}">
+                <a14:useLocalDpi xmlns:a14="http://schemas.microsoft.com/office/drawing/2010/main" val="0"/>
+              </a:ext>
+            </a:extLst>
+          </a:blip>
+          <a:stretch>
+            <a:fillRect/>
+          </a:stretch>
+        </p:blipFill>
+        <p:spPr>
+          <a:xfrm>
+            <a:off x="6099048" y="2043787"/>
+            <a:ext cx="5458968" cy="2770425"/>
+          </a:xfrm>
+          <a:prstGeom prst="rect">
+            <a:avLst/>
+          </a:prstGeom>
+        </p:spPr>
+      </p:pic>
     </p:spTree>
     <p:extLst>
       <p:ext uri="{BB962C8B-B14F-4D97-AF65-F5344CB8AC3E}">
@@ -4340,6 +5315,14 @@
 <file path=ppt/slides/slide12.xml><?xml version="1.0" encoding="utf-8"?>
 <p:sld xmlns:a="http://schemas.openxmlformats.org/drawingml/2006/main" xmlns:r="http://schemas.openxmlformats.org/officeDocument/2006/relationships" xmlns:p="http://schemas.openxmlformats.org/presentationml/2006/main">
   <p:cSld>
+    <p:bg>
+      <p:bgPr>
+        <a:solidFill>
+          <a:schemeClr val="bg1"/>
+        </a:solidFill>
+        <a:effectLst/>
+      </p:bgPr>
+    </p:bg>
     <p:spTree>
       <p:nvGrpSpPr>
         <p:cNvPr id="1" name="">
@@ -4360,83 +5343,519 @@
           <a:chExt cx="0" cy="0"/>
         </a:xfrm>
       </p:grpSpPr>
-      <p:sp>
-        <p:nvSpPr>
-          <p:cNvPr id="2" name="Title 1">
-            <a:extLst>
-              <a:ext uri="{FF2B5EF4-FFF2-40B4-BE49-F238E27FC236}">
-                <a16:creationId xmlns:a16="http://schemas.microsoft.com/office/drawing/2014/main" id="{81654923-3D76-C0E7-D7B8-36E4D40CA334}"/>
-              </a:ext>
-            </a:extLst>
-          </p:cNvPr>
-          <p:cNvSpPr>
-            <a:spLocks noGrp="1"/>
-          </p:cNvSpPr>
-          <p:nvPr>
-            <p:ph type="title"/>
+      <p:sp useBgFill="1">
+        <p:nvSpPr>
+          <p:cNvPr id="38" name="Rectangle 37">
+            <a:extLst>
+              <a:ext uri="{FF2B5EF4-FFF2-40B4-BE49-F238E27FC236}">
+                <a16:creationId xmlns:a16="http://schemas.microsoft.com/office/drawing/2014/main" id="{743AA782-23D1-4521-8CAD-47662984AA08}"/>
+              </a:ext>
+              <a:ext uri="{C183D7F6-B498-43B3-948B-1728B52AA6E4}">
+                <adec:decorative xmlns:adec="http://schemas.microsoft.com/office/drawing/2017/decorative" val="1"/>
+              </a:ext>
+            </a:extLst>
+          </p:cNvPr>
+          <p:cNvSpPr>
+            <a:spLocks noGrp="1" noRot="1" noChangeAspect="1" noMove="1" noResize="1" noEditPoints="1" noAdjustHandles="1" noChangeArrowheads="1" noChangeShapeType="1" noTextEdit="1"/>
+          </p:cNvSpPr>
+          <p:nvPr>
+            <p:extLst>
+              <p:ext uri="{386F3935-93C4-4BCD-93E2-E3B085C9AB24}">
+                <p16:designElem xmlns:p16="http://schemas.microsoft.com/office/powerpoint/2015/main" val="1"/>
+              </p:ext>
+            </p:extLst>
           </p:nvPr>
         </p:nvSpPr>
         <p:spPr>
           <a:xfrm>
-            <a:off x="838200" y="365125"/>
-            <a:ext cx="10515600" cy="1030537"/>
+            <a:off x="0" y="0"/>
+            <a:ext cx="12192000" cy="6858000"/>
+          </a:xfrm>
+          <a:prstGeom prst="rect">
+            <a:avLst/>
+          </a:prstGeom>
+          <a:ln>
+            <a:noFill/>
+          </a:ln>
+        </p:spPr>
+        <p:style>
+          <a:lnRef idx="2">
+            <a:schemeClr val="accent1">
+              <a:shade val="50000"/>
+            </a:schemeClr>
+          </a:lnRef>
+          <a:fillRef idx="1">
+            <a:schemeClr val="accent1"/>
+          </a:fillRef>
+          <a:effectRef idx="0">
+            <a:schemeClr val="accent1"/>
+          </a:effectRef>
+          <a:fontRef idx="minor">
+            <a:schemeClr val="lt1"/>
+          </a:fontRef>
+        </p:style>
+        <p:txBody>
+          <a:bodyPr rtlCol="0" anchor="ctr"/>
+          <a:lstStyle/>
+          <a:p>
+            <a:pPr algn="ctr"/>
+            <a:endParaRPr lang="en-US"/>
+          </a:p>
+        </p:txBody>
+      </p:sp>
+      <p:sp>
+        <p:nvSpPr>
+          <p:cNvPr id="2" name="Title 1">
+            <a:extLst>
+              <a:ext uri="{FF2B5EF4-FFF2-40B4-BE49-F238E27FC236}">
+                <a16:creationId xmlns:a16="http://schemas.microsoft.com/office/drawing/2014/main" id="{81654923-3D76-C0E7-D7B8-36E4D40CA334}"/>
+              </a:ext>
+            </a:extLst>
+          </p:cNvPr>
+          <p:cNvSpPr>
+            <a:spLocks noGrp="1"/>
+          </p:cNvSpPr>
+          <p:nvPr>
+            <p:ph type="title"/>
+          </p:nvPr>
+        </p:nvSpPr>
+        <p:spPr>
+          <a:xfrm>
+            <a:off x="630936" y="640080"/>
+            <a:ext cx="4818888" cy="1481328"/>
           </a:xfrm>
         </p:spPr>
         <p:txBody>
-          <a:bodyPr>
+          <a:bodyPr anchor="b">
             <a:normAutofit/>
           </a:bodyPr>
           <a:lstStyle/>
           <a:p>
             <a:r>
-              <a:rPr lang="en-US" sz="4000" b="1">
-                <a:latin typeface="Times New Roman" panose="02020603050405020304" pitchFamily="18" charset="0"/>
-                <a:cs typeface="Times New Roman" panose="02020603050405020304" pitchFamily="18" charset="0"/>
-              </a:rPr>
-              <a:t>CƠ SỞ LÝ THUYẾT</a:t>
-            </a:r>
-          </a:p>
-        </p:txBody>
-      </p:sp>
-      <p:sp>
-        <p:nvSpPr>
-          <p:cNvPr id="3" name="Content Placeholder 2">
-            <a:extLst>
-              <a:ext uri="{FF2B5EF4-FFF2-40B4-BE49-F238E27FC236}">
-                <a16:creationId xmlns:a16="http://schemas.microsoft.com/office/drawing/2014/main" id="{1A2089A2-789B-BD11-19CB-A29F9C8615C9}"/>
-              </a:ext>
-            </a:extLst>
-          </p:cNvPr>
-          <p:cNvSpPr>
-            <a:spLocks noGrp="1"/>
-          </p:cNvSpPr>
-          <p:nvPr>
-            <p:ph idx="1"/>
+              <a:rPr lang="en-US" sz="5000" b="1">
+                <a:latin typeface="Times New Roman" panose="02020603050405020304" pitchFamily="18" charset="0"/>
+                <a:cs typeface="Times New Roman" panose="02020603050405020304" pitchFamily="18" charset="0"/>
+              </a:rPr>
+              <a:t>CƠ SỞ </a:t>
+            </a:r>
+            <a:br>
+              <a:rPr lang="en-US" sz="5000" b="1">
+                <a:latin typeface="Times New Roman" panose="02020603050405020304" pitchFamily="18" charset="0"/>
+                <a:cs typeface="Times New Roman" panose="02020603050405020304" pitchFamily="18" charset="0"/>
+              </a:rPr>
+            </a:br>
+            <a:r>
+              <a:rPr lang="en-US" sz="5000" b="1">
+                <a:latin typeface="Times New Roman" panose="02020603050405020304" pitchFamily="18" charset="0"/>
+                <a:cs typeface="Times New Roman" panose="02020603050405020304" pitchFamily="18" charset="0"/>
+              </a:rPr>
+              <a:t>LÝ THUYẾT</a:t>
+            </a:r>
+          </a:p>
+        </p:txBody>
+      </p:sp>
+      <p:sp>
+        <p:nvSpPr>
+          <p:cNvPr id="40" name="sketch line">
+            <a:extLst>
+              <a:ext uri="{FF2B5EF4-FFF2-40B4-BE49-F238E27FC236}">
+                <a16:creationId xmlns:a16="http://schemas.microsoft.com/office/drawing/2014/main" id="{71877DBC-BB60-40F0-AC93-2ACDBAAE60CE}"/>
+              </a:ext>
+              <a:ext uri="{C183D7F6-B498-43B3-948B-1728B52AA6E4}">
+                <adec:decorative xmlns:adec="http://schemas.microsoft.com/office/drawing/2017/decorative" val="1"/>
+              </a:ext>
+            </a:extLst>
+          </p:cNvPr>
+          <p:cNvSpPr>
+            <a:spLocks noGrp="1" noRot="1" noChangeAspect="1" noMove="1" noResize="1" noEditPoints="1" noAdjustHandles="1" noChangeArrowheads="1" noChangeShapeType="1" noTextEdit="1"/>
+          </p:cNvSpPr>
+          <p:nvPr>
+            <p:extLst>
+              <p:ext uri="{386F3935-93C4-4BCD-93E2-E3B085C9AB24}">
+                <p16:designElem xmlns:p16="http://schemas.microsoft.com/office/powerpoint/2015/main" val="1"/>
+              </p:ext>
+            </p:extLst>
           </p:nvPr>
         </p:nvSpPr>
         <p:spPr>
           <a:xfrm>
-            <a:off x="838200" y="1395662"/>
-            <a:ext cx="10515600" cy="4781301"/>
+            <a:off x="643278" y="2372868"/>
+            <a:ext cx="3255095" cy="18288"/>
+          </a:xfrm>
+          <a:custGeom>
+            <a:avLst/>
+            <a:gdLst>
+              <a:gd name="connsiteX0" fmla="*/ 0 w 3255095"/>
+              <a:gd name="connsiteY0" fmla="*/ 0 h 18288"/>
+              <a:gd name="connsiteX1" fmla="*/ 618468 w 3255095"/>
+              <a:gd name="connsiteY1" fmla="*/ 0 h 18288"/>
+              <a:gd name="connsiteX2" fmla="*/ 1269487 w 3255095"/>
+              <a:gd name="connsiteY2" fmla="*/ 0 h 18288"/>
+              <a:gd name="connsiteX3" fmla="*/ 1953057 w 3255095"/>
+              <a:gd name="connsiteY3" fmla="*/ 0 h 18288"/>
+              <a:gd name="connsiteX4" fmla="*/ 2636627 w 3255095"/>
+              <a:gd name="connsiteY4" fmla="*/ 0 h 18288"/>
+              <a:gd name="connsiteX5" fmla="*/ 3255095 w 3255095"/>
+              <a:gd name="connsiteY5" fmla="*/ 0 h 18288"/>
+              <a:gd name="connsiteX6" fmla="*/ 3255095 w 3255095"/>
+              <a:gd name="connsiteY6" fmla="*/ 18288 h 18288"/>
+              <a:gd name="connsiteX7" fmla="*/ 2538974 w 3255095"/>
+              <a:gd name="connsiteY7" fmla="*/ 18288 h 18288"/>
+              <a:gd name="connsiteX8" fmla="*/ 1822853 w 3255095"/>
+              <a:gd name="connsiteY8" fmla="*/ 18288 h 18288"/>
+              <a:gd name="connsiteX9" fmla="*/ 1171834 w 3255095"/>
+              <a:gd name="connsiteY9" fmla="*/ 18288 h 18288"/>
+              <a:gd name="connsiteX10" fmla="*/ 0 w 3255095"/>
+              <a:gd name="connsiteY10" fmla="*/ 18288 h 18288"/>
+              <a:gd name="connsiteX11" fmla="*/ 0 w 3255095"/>
+              <a:gd name="connsiteY11" fmla="*/ 0 h 18288"/>
+            </a:gdLst>
+            <a:ahLst/>
+            <a:cxnLst>
+              <a:cxn ang="0">
+                <a:pos x="connsiteX0" y="connsiteY0"/>
+              </a:cxn>
+              <a:cxn ang="0">
+                <a:pos x="connsiteX1" y="connsiteY1"/>
+              </a:cxn>
+              <a:cxn ang="0">
+                <a:pos x="connsiteX2" y="connsiteY2"/>
+              </a:cxn>
+              <a:cxn ang="0">
+                <a:pos x="connsiteX3" y="connsiteY3"/>
+              </a:cxn>
+              <a:cxn ang="0">
+                <a:pos x="connsiteX4" y="connsiteY4"/>
+              </a:cxn>
+              <a:cxn ang="0">
+                <a:pos x="connsiteX5" y="connsiteY5"/>
+              </a:cxn>
+              <a:cxn ang="0">
+                <a:pos x="connsiteX6" y="connsiteY6"/>
+              </a:cxn>
+              <a:cxn ang="0">
+                <a:pos x="connsiteX7" y="connsiteY7"/>
+              </a:cxn>
+              <a:cxn ang="0">
+                <a:pos x="connsiteX8" y="connsiteY8"/>
+              </a:cxn>
+              <a:cxn ang="0">
+                <a:pos x="connsiteX9" y="connsiteY9"/>
+              </a:cxn>
+              <a:cxn ang="0">
+                <a:pos x="connsiteX10" y="connsiteY10"/>
+              </a:cxn>
+              <a:cxn ang="0">
+                <a:pos x="connsiteX11" y="connsiteY11"/>
+              </a:cxn>
+            </a:cxnLst>
+            <a:rect l="l" t="t" r="r" b="b"/>
+            <a:pathLst>
+              <a:path w="3255095" h="18288" fill="none" extrusionOk="0">
+                <a:moveTo>
+                  <a:pt x="0" y="0"/>
+                </a:moveTo>
+                <a:cubicBezTo>
+                  <a:pt x="240201" y="-22123"/>
+                  <a:pt x="462021" y="-19623"/>
+                  <a:pt x="618468" y="0"/>
+                </a:cubicBezTo>
+                <a:cubicBezTo>
+                  <a:pt x="774915" y="19623"/>
+                  <a:pt x="974734" y="2035"/>
+                  <a:pt x="1269487" y="0"/>
+                </a:cubicBezTo>
+                <a:cubicBezTo>
+                  <a:pt x="1564240" y="-2035"/>
+                  <a:pt x="1733579" y="10639"/>
+                  <a:pt x="1953057" y="0"/>
+                </a:cubicBezTo>
+                <a:cubicBezTo>
+                  <a:pt x="2172535" y="-10639"/>
+                  <a:pt x="2453962" y="14018"/>
+                  <a:pt x="2636627" y="0"/>
+                </a:cubicBezTo>
+                <a:cubicBezTo>
+                  <a:pt x="2819292" y="-14018"/>
+                  <a:pt x="3121375" y="5399"/>
+                  <a:pt x="3255095" y="0"/>
+                </a:cubicBezTo>
+                <a:cubicBezTo>
+                  <a:pt x="3254386" y="8157"/>
+                  <a:pt x="3254682" y="12125"/>
+                  <a:pt x="3255095" y="18288"/>
+                </a:cubicBezTo>
+                <a:cubicBezTo>
+                  <a:pt x="3088545" y="23203"/>
+                  <a:pt x="2687475" y="7419"/>
+                  <a:pt x="2538974" y="18288"/>
+                </a:cubicBezTo>
+                <a:cubicBezTo>
+                  <a:pt x="2390473" y="29157"/>
+                  <a:pt x="2137381" y="-8959"/>
+                  <a:pt x="1822853" y="18288"/>
+                </a:cubicBezTo>
+                <a:cubicBezTo>
+                  <a:pt x="1508325" y="45535"/>
+                  <a:pt x="1466437" y="20385"/>
+                  <a:pt x="1171834" y="18288"/>
+                </a:cubicBezTo>
+                <a:cubicBezTo>
+                  <a:pt x="877231" y="16191"/>
+                  <a:pt x="561097" y="37643"/>
+                  <a:pt x="0" y="18288"/>
+                </a:cubicBezTo>
+                <a:cubicBezTo>
+                  <a:pt x="-46" y="12483"/>
+                  <a:pt x="-203" y="6491"/>
+                  <a:pt x="0" y="0"/>
+                </a:cubicBezTo>
+                <a:close/>
+              </a:path>
+              <a:path w="3255095" h="18288" stroke="0" extrusionOk="0">
+                <a:moveTo>
+                  <a:pt x="0" y="0"/>
+                </a:moveTo>
+                <a:cubicBezTo>
+                  <a:pt x="291965" y="19429"/>
+                  <a:pt x="363155" y="8568"/>
+                  <a:pt x="618468" y="0"/>
+                </a:cubicBezTo>
+                <a:cubicBezTo>
+                  <a:pt x="873781" y="-8568"/>
+                  <a:pt x="904459" y="-19505"/>
+                  <a:pt x="1171834" y="0"/>
+                </a:cubicBezTo>
+                <a:cubicBezTo>
+                  <a:pt x="1439209" y="19505"/>
+                  <a:pt x="1744369" y="9790"/>
+                  <a:pt x="1887955" y="0"/>
+                </a:cubicBezTo>
+                <a:cubicBezTo>
+                  <a:pt x="2031541" y="-9790"/>
+                  <a:pt x="2346378" y="21240"/>
+                  <a:pt x="2506423" y="0"/>
+                </a:cubicBezTo>
+                <a:cubicBezTo>
+                  <a:pt x="2666468" y="-21240"/>
+                  <a:pt x="2990257" y="30414"/>
+                  <a:pt x="3255095" y="0"/>
+                </a:cubicBezTo>
+                <a:cubicBezTo>
+                  <a:pt x="3254831" y="4493"/>
+                  <a:pt x="3255479" y="9472"/>
+                  <a:pt x="3255095" y="18288"/>
+                </a:cubicBezTo>
+                <a:cubicBezTo>
+                  <a:pt x="3120743" y="16690"/>
+                  <a:pt x="2759628" y="42462"/>
+                  <a:pt x="2604076" y="18288"/>
+                </a:cubicBezTo>
+                <a:cubicBezTo>
+                  <a:pt x="2448524" y="-5886"/>
+                  <a:pt x="2184336" y="19599"/>
+                  <a:pt x="1887955" y="18288"/>
+                </a:cubicBezTo>
+                <a:cubicBezTo>
+                  <a:pt x="1591574" y="16977"/>
+                  <a:pt x="1548845" y="6870"/>
+                  <a:pt x="1334589" y="18288"/>
+                </a:cubicBezTo>
+                <a:cubicBezTo>
+                  <a:pt x="1120333" y="29706"/>
+                  <a:pt x="996014" y="9662"/>
+                  <a:pt x="683570" y="18288"/>
+                </a:cubicBezTo>
+                <a:cubicBezTo>
+                  <a:pt x="371126" y="26914"/>
+                  <a:pt x="198687" y="16167"/>
+                  <a:pt x="0" y="18288"/>
+                </a:cubicBezTo>
+                <a:cubicBezTo>
+                  <a:pt x="843" y="9577"/>
+                  <a:pt x="371" y="6900"/>
+                  <a:pt x="0" y="0"/>
+                </a:cubicBezTo>
+                <a:close/>
+              </a:path>
+            </a:pathLst>
+          </a:custGeom>
+          <a:solidFill>
+            <a:schemeClr val="accent2"/>
+          </a:solidFill>
+          <a:ln w="38100" cap="rnd">
+            <a:solidFill>
+              <a:schemeClr val="accent2"/>
+            </a:solidFill>
+            <a:round/>
+            <a:extLst>
+              <a:ext uri="{C807C97D-BFC1-408E-A445-0C87EB9F89A2}">
+                <ask:lineSketchStyleProps xmlns:ask="http://schemas.microsoft.com/office/drawing/2018/sketchyshapes" sd="1219033472">
+                  <a:prstGeom prst="rect">
+                    <a:avLst/>
+                  </a:prstGeom>
+                  <ask:type>
+                    <ask:lineSketchFreehand/>
+                  </ask:type>
+                </ask:lineSketchStyleProps>
+              </a:ext>
+            </a:extLst>
+          </a:ln>
+        </p:spPr>
+        <p:style>
+          <a:lnRef idx="2">
+            <a:schemeClr val="accent1">
+              <a:shade val="50000"/>
+            </a:schemeClr>
+          </a:lnRef>
+          <a:fillRef idx="1">
+            <a:schemeClr val="accent1"/>
+          </a:fillRef>
+          <a:effectRef idx="0">
+            <a:schemeClr val="accent1"/>
+          </a:effectRef>
+          <a:fontRef idx="minor">
+            <a:schemeClr val="lt1"/>
+          </a:fontRef>
+        </p:style>
+        <p:txBody>
+          <a:bodyPr rtlCol="0" anchor="ctr"/>
+          <a:lstStyle/>
+          <a:p>
+            <a:pPr algn="ctr"/>
+            <a:endParaRPr lang="en-US"/>
+          </a:p>
+        </p:txBody>
+      </p:sp>
+      <p:sp>
+        <p:nvSpPr>
+          <p:cNvPr id="3" name="Content Placeholder 2">
+            <a:extLst>
+              <a:ext uri="{FF2B5EF4-FFF2-40B4-BE49-F238E27FC236}">
+                <a16:creationId xmlns:a16="http://schemas.microsoft.com/office/drawing/2014/main" id="{1A2089A2-789B-BD11-19CB-A29F9C8615C9}"/>
+              </a:ext>
+            </a:extLst>
+          </p:cNvPr>
+          <p:cNvSpPr>
+            <a:spLocks noGrp="1"/>
+          </p:cNvSpPr>
+          <p:nvPr>
+            <p:ph idx="1"/>
+          </p:nvPr>
+        </p:nvSpPr>
+        <p:spPr>
+          <a:xfrm>
+            <a:off x="630936" y="2660904"/>
+            <a:ext cx="5144222" cy="3547872"/>
           </a:xfrm>
         </p:spPr>
         <p:txBody>
-          <a:bodyPr/>
+          <a:bodyPr anchor="t">
+            <a:normAutofit lnSpcReduction="10000"/>
+          </a:bodyPr>
           <a:lstStyle/>
           <a:p>
             <a:pPr marL="0" indent="0">
+              <a:lnSpc>
+                <a:spcPct val="150000"/>
+              </a:lnSpc>
               <a:buNone/>
             </a:pPr>
             <a:r>
-              <a:rPr lang="en-US" i="1">
+              <a:rPr lang="en-US" b="1">
                 <a:latin typeface="Times New Roman" panose="02020603050405020304" pitchFamily="18" charset="0"/>
                 <a:cs typeface="Times New Roman" panose="02020603050405020304" pitchFamily="18" charset="0"/>
               </a:rPr>
               <a:t>2.4. Công cụ chuyển đổi văn bản – âm thanh</a:t>
             </a:r>
           </a:p>
-        </p:txBody>
-      </p:sp>
+          <a:p>
+            <a:r>
+              <a:rPr lang="en-US" sz="2000">
+                <a:latin typeface="Times New Roman" panose="02020603050405020304" pitchFamily="18" charset="0"/>
+                <a:cs typeface="Times New Roman" panose="02020603050405020304" pitchFamily="18" charset="0"/>
+              </a:rPr>
+              <a:t>Sử dụng </a:t>
+            </a:r>
+            <a:r>
+              <a:rPr lang="en-US" sz="2000" b="1" i="1">
+                <a:latin typeface="Times New Roman" panose="02020603050405020304" pitchFamily="18" charset="0"/>
+                <a:cs typeface="Times New Roman" panose="02020603050405020304" pitchFamily="18" charset="0"/>
+              </a:rPr>
+              <a:t>các công nghệ chuyển đổi </a:t>
+            </a:r>
+            <a:r>
+              <a:rPr lang="en-US" sz="2000">
+                <a:latin typeface="Times New Roman" panose="02020603050405020304" pitchFamily="18" charset="0"/>
+                <a:cs typeface="Times New Roman" panose="02020603050405020304" pitchFamily="18" charset="0"/>
+              </a:rPr>
+              <a:t>văn bản thành âm thanh hoặc ngược lại</a:t>
+            </a:r>
+          </a:p>
+          <a:p>
+            <a:r>
+              <a:rPr lang="en-US" sz="2000" b="1" i="1">
+                <a:latin typeface="Times New Roman" panose="02020603050405020304" pitchFamily="18" charset="0"/>
+                <a:cs typeface="Times New Roman" panose="02020603050405020304" pitchFamily="18" charset="0"/>
+              </a:rPr>
+              <a:t>Cải thiện khả năng giao tiếp </a:t>
+            </a:r>
+            <a:r>
+              <a:rPr lang="en-US" sz="2000">
+                <a:latin typeface="Times New Roman" panose="02020603050405020304" pitchFamily="18" charset="0"/>
+                <a:cs typeface="Times New Roman" panose="02020603050405020304" pitchFamily="18" charset="0"/>
+              </a:rPr>
+              <a:t>giữa con người và máy móc.</a:t>
+            </a:r>
+          </a:p>
+          <a:p>
+            <a:r>
+              <a:rPr lang="en-US" sz="2000">
+                <a:latin typeface="Times New Roman" panose="02020603050405020304" pitchFamily="18" charset="0"/>
+                <a:cs typeface="Times New Roman" panose="02020603050405020304" pitchFamily="18" charset="0"/>
+              </a:rPr>
+              <a:t>Ứng dụng trong trợ lý ảo, nhập liệu bằng giọng nói, và đọc văn bản tự động trong nhiều ứng dụng, hệ thống khác nhau.</a:t>
+            </a:r>
+          </a:p>
+        </p:txBody>
+      </p:sp>
+      <p:pic>
+        <p:nvPicPr>
+          <p:cNvPr id="5" name="Picture 4" descr="A blue background with text and icons&#10;&#10;AI-generated content may be incorrect.">
+            <a:extLst>
+              <a:ext uri="{FF2B5EF4-FFF2-40B4-BE49-F238E27FC236}">
+                <a16:creationId xmlns:a16="http://schemas.microsoft.com/office/drawing/2014/main" id="{F9BD9FDD-2993-0818-4C18-DC0B116FEB2A}"/>
+              </a:ext>
+            </a:extLst>
+          </p:cNvPr>
+          <p:cNvPicPr>
+            <a:picLocks noChangeAspect="1"/>
+          </p:cNvPicPr>
+          <p:nvPr/>
+        </p:nvPicPr>
+        <p:blipFill>
+          <a:blip r:embed="rId2">
+            <a:extLst>
+              <a:ext uri="{28A0092B-C50C-407E-A947-70E740481C1C}">
+                <a14:useLocalDpi xmlns:a14="http://schemas.microsoft.com/office/drawing/2010/main" val="0"/>
+              </a:ext>
+            </a:extLst>
+          </a:blip>
+          <a:srcRect l="10427" t="26852" r="8709"/>
+          <a:stretch>
+            <a:fillRect/>
+          </a:stretch>
+        </p:blipFill>
+        <p:spPr>
+          <a:xfrm>
+            <a:off x="6099048" y="2040166"/>
+            <a:ext cx="5458968" cy="2777668"/>
+          </a:xfrm>
+          <a:prstGeom prst="rect">
+            <a:avLst/>
+          </a:prstGeom>
+        </p:spPr>
+      </p:pic>
     </p:spTree>
     <p:extLst>
       <p:ext uri="{BB962C8B-B14F-4D97-AF65-F5344CB8AC3E}">
@@ -4673,6 +6092,14 @@
 <file path=ppt/slides/slide15.xml><?xml version="1.0" encoding="utf-8"?>
 <p:sld xmlns:a="http://schemas.openxmlformats.org/drawingml/2006/main" xmlns:r="http://schemas.openxmlformats.org/officeDocument/2006/relationships" xmlns:p="http://schemas.openxmlformats.org/presentationml/2006/main">
   <p:cSld>
+    <p:bg>
+      <p:bgPr>
+        <a:solidFill>
+          <a:schemeClr val="bg1"/>
+        </a:solidFill>
+        <a:effectLst/>
+      </p:bgPr>
+    </p:bg>
     <p:spTree>
       <p:nvGrpSpPr>
         <p:cNvPr id="1" name="">
@@ -4693,95 +6120,510 @@
           <a:chExt cx="0" cy="0"/>
         </a:xfrm>
       </p:grpSpPr>
-      <p:sp>
-        <p:nvSpPr>
-          <p:cNvPr id="2" name="Title 1">
-            <a:extLst>
-              <a:ext uri="{FF2B5EF4-FFF2-40B4-BE49-F238E27FC236}">
-                <a16:creationId xmlns:a16="http://schemas.microsoft.com/office/drawing/2014/main" id="{9F61362B-C055-854C-DA7B-0A54BC88E9CF}"/>
-              </a:ext>
-            </a:extLst>
-          </p:cNvPr>
-          <p:cNvSpPr>
-            <a:spLocks noGrp="1"/>
-          </p:cNvSpPr>
-          <p:nvPr>
-            <p:ph type="title"/>
+      <p:sp useBgFill="1">
+        <p:nvSpPr>
+          <p:cNvPr id="26" name="Rectangle 25">
+            <a:extLst>
+              <a:ext uri="{FF2B5EF4-FFF2-40B4-BE49-F238E27FC236}">
+                <a16:creationId xmlns:a16="http://schemas.microsoft.com/office/drawing/2014/main" id="{BCED4D40-4B67-4331-AC48-79B82B4A47D8}"/>
+              </a:ext>
+              <a:ext uri="{C183D7F6-B498-43B3-948B-1728B52AA6E4}">
+                <adec:decorative xmlns:adec="http://schemas.microsoft.com/office/drawing/2017/decorative" val="1"/>
+              </a:ext>
+            </a:extLst>
+          </p:cNvPr>
+          <p:cNvSpPr>
+            <a:spLocks noGrp="1" noRot="1" noChangeAspect="1" noMove="1" noResize="1" noEditPoints="1" noAdjustHandles="1" noChangeArrowheads="1" noChangeShapeType="1" noTextEdit="1"/>
+          </p:cNvSpPr>
+          <p:nvPr>
+            <p:extLst>
+              <p:ext uri="{386F3935-93C4-4BCD-93E2-E3B085C9AB24}">
+                <p16:designElem xmlns:p16="http://schemas.microsoft.com/office/powerpoint/2015/main" val="1"/>
+              </p:ext>
+            </p:extLst>
           </p:nvPr>
         </p:nvSpPr>
         <p:spPr>
           <a:xfrm>
-            <a:off x="838200" y="365125"/>
-            <a:ext cx="10515600" cy="1030537"/>
+            <a:off x="0" y="0"/>
+            <a:ext cx="12192000" cy="6858000"/>
+          </a:xfrm>
+          <a:prstGeom prst="rect">
+            <a:avLst/>
+          </a:prstGeom>
+          <a:ln>
+            <a:noFill/>
+          </a:ln>
+        </p:spPr>
+        <p:style>
+          <a:lnRef idx="2">
+            <a:schemeClr val="accent1">
+              <a:shade val="50000"/>
+            </a:schemeClr>
+          </a:lnRef>
+          <a:fillRef idx="1">
+            <a:schemeClr val="accent1"/>
+          </a:fillRef>
+          <a:effectRef idx="0">
+            <a:schemeClr val="accent1"/>
+          </a:effectRef>
+          <a:fontRef idx="minor">
+            <a:schemeClr val="lt1"/>
+          </a:fontRef>
+        </p:style>
+        <p:txBody>
+          <a:bodyPr rtlCol="0" anchor="ctr"/>
+          <a:lstStyle/>
+          <a:p>
+            <a:pPr algn="ctr"/>
+            <a:endParaRPr lang="en-US"/>
+          </a:p>
+        </p:txBody>
+      </p:sp>
+      <p:sp>
+        <p:nvSpPr>
+          <p:cNvPr id="2" name="Title 1">
+            <a:extLst>
+              <a:ext uri="{FF2B5EF4-FFF2-40B4-BE49-F238E27FC236}">
+                <a16:creationId xmlns:a16="http://schemas.microsoft.com/office/drawing/2014/main" id="{9F61362B-C055-854C-DA7B-0A54BC88E9CF}"/>
+              </a:ext>
+            </a:extLst>
+          </p:cNvPr>
+          <p:cNvSpPr>
+            <a:spLocks noGrp="1"/>
+          </p:cNvSpPr>
+          <p:nvPr>
+            <p:ph type="title"/>
+          </p:nvPr>
+        </p:nvSpPr>
+        <p:spPr>
+          <a:xfrm>
+            <a:off x="638881" y="213039"/>
+            <a:ext cx="10909640" cy="1453931"/>
           </a:xfrm>
         </p:spPr>
         <p:txBody>
-          <a:bodyPr>
+          <a:bodyPr vert="horz" lIns="91440" tIns="45720" rIns="91440" bIns="45720" rtlCol="0" anchor="ctr">
             <a:normAutofit/>
           </a:bodyPr>
           <a:lstStyle/>
           <a:p>
-            <a:r>
-              <a:rPr lang="en-US" sz="4000" b="1">
+            <a:pPr algn="ctr">
+              <a:lnSpc>
+                <a:spcPct val="114000"/>
+              </a:lnSpc>
+            </a:pPr>
+            <a:r>
+              <a:rPr lang="en-US" sz="4000" b="1" kern="1200">
+                <a:solidFill>
+                  <a:schemeClr val="tx1"/>
+                </a:solidFill>
                 <a:latin typeface="Times New Roman" panose="02020603050405020304" pitchFamily="18" charset="0"/>
                 <a:cs typeface="Times New Roman" panose="02020603050405020304" pitchFamily="18" charset="0"/>
               </a:rPr>
               <a:t>PHƯƠNG PHÁP ĐỀ XUẤT</a:t>
             </a:r>
-          </a:p>
-        </p:txBody>
-      </p:sp>
-      <p:sp>
-        <p:nvSpPr>
-          <p:cNvPr id="3" name="Content Placeholder 2">
-            <a:extLst>
-              <a:ext uri="{FF2B5EF4-FFF2-40B4-BE49-F238E27FC236}">
-                <a16:creationId xmlns:a16="http://schemas.microsoft.com/office/drawing/2014/main" id="{BF4E81BA-E7E9-2A29-8991-88E5FBB5668F}"/>
-              </a:ext>
-            </a:extLst>
-          </p:cNvPr>
-          <p:cNvSpPr>
-            <a:spLocks noGrp="1"/>
-          </p:cNvSpPr>
-          <p:nvPr>
-            <p:ph idx="1"/>
+            <a:br>
+              <a:rPr lang="en-US" sz="2800" b="1" kern="1200">
+                <a:solidFill>
+                  <a:schemeClr val="tx1"/>
+                </a:solidFill>
+                <a:latin typeface="Times New Roman" panose="02020603050405020304" pitchFamily="18" charset="0"/>
+                <a:cs typeface="Times New Roman" panose="02020603050405020304" pitchFamily="18" charset="0"/>
+              </a:rPr>
+            </a:br>
+            <a:r>
+              <a:rPr lang="en-US" sz="2800" b="1" kern="1200">
+                <a:solidFill>
+                  <a:schemeClr val="tx1"/>
+                </a:solidFill>
+                <a:latin typeface="Times New Roman" panose="02020603050405020304" pitchFamily="18" charset="0"/>
+                <a:cs typeface="Times New Roman" panose="02020603050405020304" pitchFamily="18" charset="0"/>
+              </a:rPr>
+              <a:t>3.2. Tổng quan phương pháp đề xuất</a:t>
+            </a:r>
+          </a:p>
+        </p:txBody>
+      </p:sp>
+      <p:sp>
+        <p:nvSpPr>
+          <p:cNvPr id="28" name="sketch line">
+            <a:extLst>
+              <a:ext uri="{FF2B5EF4-FFF2-40B4-BE49-F238E27FC236}">
+                <a16:creationId xmlns:a16="http://schemas.microsoft.com/office/drawing/2014/main" id="{670CEDEF-4F34-412E-84EE-329C1E936AF5}"/>
+              </a:ext>
+              <a:ext uri="{C183D7F6-B498-43B3-948B-1728B52AA6E4}">
+                <adec:decorative xmlns:adec="http://schemas.microsoft.com/office/drawing/2017/decorative" val="1"/>
+              </a:ext>
+            </a:extLst>
+          </p:cNvPr>
+          <p:cNvSpPr>
+            <a:spLocks noGrp="1" noRot="1" noChangeAspect="1" noMove="1" noResize="1" noEditPoints="1" noAdjustHandles="1" noChangeArrowheads="1" noChangeShapeType="1" noTextEdit="1"/>
+          </p:cNvSpPr>
+          <p:nvPr>
+            <p:extLst>
+              <p:ext uri="{386F3935-93C4-4BCD-93E2-E3B085C9AB24}">
+                <p16:designElem xmlns:p16="http://schemas.microsoft.com/office/powerpoint/2015/main" val="1"/>
+              </p:ext>
+            </p:extLst>
           </p:nvPr>
         </p:nvSpPr>
         <p:spPr>
           <a:xfrm>
-            <a:off x="838200" y="1395662"/>
-            <a:ext cx="10515600" cy="4781301"/>
+            <a:off x="3807702" y="1733454"/>
+            <a:ext cx="4572000" cy="18288"/>
           </a:xfrm>
+          <a:custGeom>
+            <a:avLst/>
+            <a:gdLst>
+              <a:gd name="connsiteX0" fmla="*/ 0 w 4572000"/>
+              <a:gd name="connsiteY0" fmla="*/ 0 h 18288"/>
+              <a:gd name="connsiteX1" fmla="*/ 515983 w 4572000"/>
+              <a:gd name="connsiteY1" fmla="*/ 0 h 18288"/>
+              <a:gd name="connsiteX2" fmla="*/ 1031966 w 4572000"/>
+              <a:gd name="connsiteY2" fmla="*/ 0 h 18288"/>
+              <a:gd name="connsiteX3" fmla="*/ 1639389 w 4572000"/>
+              <a:gd name="connsiteY3" fmla="*/ 0 h 18288"/>
+              <a:gd name="connsiteX4" fmla="*/ 2383971 w 4572000"/>
+              <a:gd name="connsiteY4" fmla="*/ 0 h 18288"/>
+              <a:gd name="connsiteX5" fmla="*/ 2945674 w 4572000"/>
+              <a:gd name="connsiteY5" fmla="*/ 0 h 18288"/>
+              <a:gd name="connsiteX6" fmla="*/ 3507377 w 4572000"/>
+              <a:gd name="connsiteY6" fmla="*/ 0 h 18288"/>
+              <a:gd name="connsiteX7" fmla="*/ 4572000 w 4572000"/>
+              <a:gd name="connsiteY7" fmla="*/ 0 h 18288"/>
+              <a:gd name="connsiteX8" fmla="*/ 4572000 w 4572000"/>
+              <a:gd name="connsiteY8" fmla="*/ 18288 h 18288"/>
+              <a:gd name="connsiteX9" fmla="*/ 3873137 w 4572000"/>
+              <a:gd name="connsiteY9" fmla="*/ 18288 h 18288"/>
+              <a:gd name="connsiteX10" fmla="*/ 3311434 w 4572000"/>
+              <a:gd name="connsiteY10" fmla="*/ 18288 h 18288"/>
+              <a:gd name="connsiteX11" fmla="*/ 2749731 w 4572000"/>
+              <a:gd name="connsiteY11" fmla="*/ 18288 h 18288"/>
+              <a:gd name="connsiteX12" fmla="*/ 2050869 w 4572000"/>
+              <a:gd name="connsiteY12" fmla="*/ 18288 h 18288"/>
+              <a:gd name="connsiteX13" fmla="*/ 1306286 w 4572000"/>
+              <a:gd name="connsiteY13" fmla="*/ 18288 h 18288"/>
+              <a:gd name="connsiteX14" fmla="*/ 790303 w 4572000"/>
+              <a:gd name="connsiteY14" fmla="*/ 18288 h 18288"/>
+              <a:gd name="connsiteX15" fmla="*/ 0 w 4572000"/>
+              <a:gd name="connsiteY15" fmla="*/ 18288 h 18288"/>
+              <a:gd name="connsiteX16" fmla="*/ 0 w 4572000"/>
+              <a:gd name="connsiteY16" fmla="*/ 0 h 18288"/>
+            </a:gdLst>
+            <a:ahLst/>
+            <a:cxnLst>
+              <a:cxn ang="0">
+                <a:pos x="connsiteX0" y="connsiteY0"/>
+              </a:cxn>
+              <a:cxn ang="0">
+                <a:pos x="connsiteX1" y="connsiteY1"/>
+              </a:cxn>
+              <a:cxn ang="0">
+                <a:pos x="connsiteX2" y="connsiteY2"/>
+              </a:cxn>
+              <a:cxn ang="0">
+                <a:pos x="connsiteX3" y="connsiteY3"/>
+              </a:cxn>
+              <a:cxn ang="0">
+                <a:pos x="connsiteX4" y="connsiteY4"/>
+              </a:cxn>
+              <a:cxn ang="0">
+                <a:pos x="connsiteX5" y="connsiteY5"/>
+              </a:cxn>
+              <a:cxn ang="0">
+                <a:pos x="connsiteX6" y="connsiteY6"/>
+              </a:cxn>
+              <a:cxn ang="0">
+                <a:pos x="connsiteX7" y="connsiteY7"/>
+              </a:cxn>
+              <a:cxn ang="0">
+                <a:pos x="connsiteX8" y="connsiteY8"/>
+              </a:cxn>
+              <a:cxn ang="0">
+                <a:pos x="connsiteX9" y="connsiteY9"/>
+              </a:cxn>
+              <a:cxn ang="0">
+                <a:pos x="connsiteX10" y="connsiteY10"/>
+              </a:cxn>
+              <a:cxn ang="0">
+                <a:pos x="connsiteX11" y="connsiteY11"/>
+              </a:cxn>
+              <a:cxn ang="0">
+                <a:pos x="connsiteX12" y="connsiteY12"/>
+              </a:cxn>
+              <a:cxn ang="0">
+                <a:pos x="connsiteX13" y="connsiteY13"/>
+              </a:cxn>
+              <a:cxn ang="0">
+                <a:pos x="connsiteX14" y="connsiteY14"/>
+              </a:cxn>
+              <a:cxn ang="0">
+                <a:pos x="connsiteX15" y="connsiteY15"/>
+              </a:cxn>
+              <a:cxn ang="0">
+                <a:pos x="connsiteX16" y="connsiteY16"/>
+              </a:cxn>
+            </a:cxnLst>
+            <a:rect l="l" t="t" r="r" b="b"/>
+            <a:pathLst>
+              <a:path w="4572000" h="18288" fill="none" extrusionOk="0">
+                <a:moveTo>
+                  <a:pt x="0" y="0"/>
+                </a:moveTo>
+                <a:cubicBezTo>
+                  <a:pt x="105156" y="-20963"/>
+                  <a:pt x="340432" y="822"/>
+                  <a:pt x="515983" y="0"/>
+                </a:cubicBezTo>
+                <a:cubicBezTo>
+                  <a:pt x="691534" y="-822"/>
+                  <a:pt x="850679" y="16479"/>
+                  <a:pt x="1031966" y="0"/>
+                </a:cubicBezTo>
+                <a:cubicBezTo>
+                  <a:pt x="1213253" y="-16479"/>
+                  <a:pt x="1443646" y="-18730"/>
+                  <a:pt x="1639389" y="0"/>
+                </a:cubicBezTo>
+                <a:cubicBezTo>
+                  <a:pt x="1835132" y="18730"/>
+                  <a:pt x="2159975" y="18531"/>
+                  <a:pt x="2383971" y="0"/>
+                </a:cubicBezTo>
+                <a:cubicBezTo>
+                  <a:pt x="2607967" y="-18531"/>
+                  <a:pt x="2719096" y="-12030"/>
+                  <a:pt x="2945674" y="0"/>
+                </a:cubicBezTo>
+                <a:cubicBezTo>
+                  <a:pt x="3172252" y="12030"/>
+                  <a:pt x="3269167" y="27666"/>
+                  <a:pt x="3507377" y="0"/>
+                </a:cubicBezTo>
+                <a:cubicBezTo>
+                  <a:pt x="3745587" y="-27666"/>
+                  <a:pt x="4116741" y="18705"/>
+                  <a:pt x="4572000" y="0"/>
+                </a:cubicBezTo>
+                <a:cubicBezTo>
+                  <a:pt x="4572895" y="8974"/>
+                  <a:pt x="4571454" y="9359"/>
+                  <a:pt x="4572000" y="18288"/>
+                </a:cubicBezTo>
+                <a:cubicBezTo>
+                  <a:pt x="4374698" y="3942"/>
+                  <a:pt x="4098874" y="-11042"/>
+                  <a:pt x="3873137" y="18288"/>
+                </a:cubicBezTo>
+                <a:cubicBezTo>
+                  <a:pt x="3647400" y="47618"/>
+                  <a:pt x="3517055" y="5421"/>
+                  <a:pt x="3311434" y="18288"/>
+                </a:cubicBezTo>
+                <a:cubicBezTo>
+                  <a:pt x="3105813" y="31155"/>
+                  <a:pt x="3025168" y="17856"/>
+                  <a:pt x="2749731" y="18288"/>
+                </a:cubicBezTo>
+                <a:cubicBezTo>
+                  <a:pt x="2474294" y="18720"/>
+                  <a:pt x="2291766" y="-14168"/>
+                  <a:pt x="2050869" y="18288"/>
+                </a:cubicBezTo>
+                <a:cubicBezTo>
+                  <a:pt x="1809972" y="50744"/>
+                  <a:pt x="1540276" y="46798"/>
+                  <a:pt x="1306286" y="18288"/>
+                </a:cubicBezTo>
+                <a:cubicBezTo>
+                  <a:pt x="1072296" y="-10222"/>
+                  <a:pt x="972445" y="19645"/>
+                  <a:pt x="790303" y="18288"/>
+                </a:cubicBezTo>
+                <a:cubicBezTo>
+                  <a:pt x="608161" y="16931"/>
+                  <a:pt x="200981" y="8241"/>
+                  <a:pt x="0" y="18288"/>
+                </a:cubicBezTo>
+                <a:cubicBezTo>
+                  <a:pt x="-229" y="14222"/>
+                  <a:pt x="509" y="5816"/>
+                  <a:pt x="0" y="0"/>
+                </a:cubicBezTo>
+                <a:close/>
+              </a:path>
+              <a:path w="4572000" h="18288" stroke="0" extrusionOk="0">
+                <a:moveTo>
+                  <a:pt x="0" y="0"/>
+                </a:moveTo>
+                <a:cubicBezTo>
+                  <a:pt x="143285" y="-9565"/>
+                  <a:pt x="327959" y="-11498"/>
+                  <a:pt x="561703" y="0"/>
+                </a:cubicBezTo>
+                <a:cubicBezTo>
+                  <a:pt x="795447" y="11498"/>
+                  <a:pt x="838260" y="18255"/>
+                  <a:pt x="1077686" y="0"/>
+                </a:cubicBezTo>
+                <a:cubicBezTo>
+                  <a:pt x="1317112" y="-18255"/>
+                  <a:pt x="1437472" y="23514"/>
+                  <a:pt x="1639389" y="0"/>
+                </a:cubicBezTo>
+                <a:cubicBezTo>
+                  <a:pt x="1841306" y="-23514"/>
+                  <a:pt x="2037142" y="-12551"/>
+                  <a:pt x="2292531" y="0"/>
+                </a:cubicBezTo>
+                <a:cubicBezTo>
+                  <a:pt x="2547920" y="12551"/>
+                  <a:pt x="2810436" y="-20352"/>
+                  <a:pt x="2991394" y="0"/>
+                </a:cubicBezTo>
+                <a:cubicBezTo>
+                  <a:pt x="3172352" y="20352"/>
+                  <a:pt x="3530025" y="-13347"/>
+                  <a:pt x="3735977" y="0"/>
+                </a:cubicBezTo>
+                <a:cubicBezTo>
+                  <a:pt x="3941929" y="13347"/>
+                  <a:pt x="4161497" y="34086"/>
+                  <a:pt x="4572000" y="0"/>
+                </a:cubicBezTo>
+                <a:cubicBezTo>
+                  <a:pt x="4571545" y="6162"/>
+                  <a:pt x="4571903" y="11775"/>
+                  <a:pt x="4572000" y="18288"/>
+                </a:cubicBezTo>
+                <a:cubicBezTo>
+                  <a:pt x="4228040" y="36490"/>
+                  <a:pt x="4199736" y="42557"/>
+                  <a:pt x="3873137" y="18288"/>
+                </a:cubicBezTo>
+                <a:cubicBezTo>
+                  <a:pt x="3546538" y="-5981"/>
+                  <a:pt x="3472124" y="16809"/>
+                  <a:pt x="3128554" y="18288"/>
+                </a:cubicBezTo>
+                <a:cubicBezTo>
+                  <a:pt x="2784984" y="19767"/>
+                  <a:pt x="2735896" y="-17781"/>
+                  <a:pt x="2383971" y="18288"/>
+                </a:cubicBezTo>
+                <a:cubicBezTo>
+                  <a:pt x="2032046" y="54357"/>
+                  <a:pt x="2019324" y="2920"/>
+                  <a:pt x="1867989" y="18288"/>
+                </a:cubicBezTo>
+                <a:cubicBezTo>
+                  <a:pt x="1716654" y="33656"/>
+                  <a:pt x="1418675" y="32575"/>
+                  <a:pt x="1169126" y="18288"/>
+                </a:cubicBezTo>
+                <a:cubicBezTo>
+                  <a:pt x="919577" y="4001"/>
+                  <a:pt x="798537" y="16165"/>
+                  <a:pt x="561703" y="18288"/>
+                </a:cubicBezTo>
+                <a:cubicBezTo>
+                  <a:pt x="324869" y="20411"/>
+                  <a:pt x="221395" y="-912"/>
+                  <a:pt x="0" y="18288"/>
+                </a:cubicBezTo>
+                <a:cubicBezTo>
+                  <a:pt x="766" y="10800"/>
+                  <a:pt x="-457" y="8180"/>
+                  <a:pt x="0" y="0"/>
+                </a:cubicBezTo>
+                <a:close/>
+              </a:path>
+            </a:pathLst>
+          </a:custGeom>
+          <a:solidFill>
+            <a:schemeClr val="accent2"/>
+          </a:solidFill>
+          <a:ln w="41275" cap="rnd">
+            <a:solidFill>
+              <a:schemeClr val="accent2"/>
+            </a:solidFill>
+            <a:round/>
+            <a:extLst>
+              <a:ext uri="{C807C97D-BFC1-408E-A445-0C87EB9F89A2}">
+                <ask:lineSketchStyleProps xmlns:ask="http://schemas.microsoft.com/office/drawing/2018/sketchyshapes" sd="2727557108">
+                  <a:prstGeom prst="rect">
+                    <a:avLst/>
+                  </a:prstGeom>
+                  <ask:type>
+                    <ask:lineSketchFreehand/>
+                  </ask:type>
+                </ask:lineSketchStyleProps>
+              </a:ext>
+            </a:extLst>
+          </a:ln>
         </p:spPr>
-        <p:txBody>
-          <a:bodyPr/>
-          <a:lstStyle/>
-          <a:p>
-            <a:pPr marL="0" indent="0">
-              <a:buNone/>
-            </a:pPr>
-            <a:r>
-              <a:rPr lang="en-US" i="1">
-                <a:latin typeface="Times New Roman" panose="02020603050405020304" pitchFamily="18" charset="0"/>
-                <a:cs typeface="Times New Roman" panose="02020603050405020304" pitchFamily="18" charset="0"/>
-              </a:rPr>
-              <a:t>3.2. Tổng quan phương pháp đề xuất</a:t>
-            </a:r>
-          </a:p>
-          <a:p>
-            <a:pPr marL="0" indent="0">
-              <a:buNone/>
-            </a:pPr>
-            <a:r>
-              <a:rPr lang="en-US" sz="2000" i="1">
-                <a:latin typeface="Times New Roman" panose="02020603050405020304" pitchFamily="18" charset="0"/>
-                <a:cs typeface="Times New Roman" panose="02020603050405020304" pitchFamily="18" charset="0"/>
-              </a:rPr>
-              <a:t>(hình)</a:t>
-            </a:r>
-          </a:p>
-        </p:txBody>
-      </p:sp>
+        <p:style>
+          <a:lnRef idx="2">
+            <a:schemeClr val="accent1">
+              <a:shade val="50000"/>
+            </a:schemeClr>
+          </a:lnRef>
+          <a:fillRef idx="1">
+            <a:schemeClr val="accent1"/>
+          </a:fillRef>
+          <a:effectRef idx="0">
+            <a:schemeClr val="accent1"/>
+          </a:effectRef>
+          <a:fontRef idx="minor">
+            <a:schemeClr val="lt1"/>
+          </a:fontRef>
+        </p:style>
+        <p:txBody>
+          <a:bodyPr rtlCol="0" anchor="ctr"/>
+          <a:lstStyle/>
+          <a:p>
+            <a:pPr algn="ctr"/>
+            <a:endParaRPr lang="en-US"/>
+          </a:p>
+        </p:txBody>
+      </p:sp>
+      <p:pic>
+        <p:nvPicPr>
+          <p:cNvPr id="6" name="Picture 5" descr="A screenshot of a computer&#10;&#10;AI-generated content may be incorrect.">
+            <a:extLst>
+              <a:ext uri="{FF2B5EF4-FFF2-40B4-BE49-F238E27FC236}">
+                <a16:creationId xmlns:a16="http://schemas.microsoft.com/office/drawing/2014/main" id="{EEDDCF43-B889-D0B9-E9F1-1B2FF967FA00}"/>
+              </a:ext>
+            </a:extLst>
+          </p:cNvPr>
+          <p:cNvPicPr>
+            <a:picLocks noChangeAspect="1"/>
+          </p:cNvPicPr>
+          <p:nvPr/>
+        </p:nvPicPr>
+        <p:blipFill>
+          <a:blip r:embed="rId2">
+            <a:extLst>
+              <a:ext uri="{28A0092B-C50C-407E-A947-70E740481C1C}">
+                <a14:useLocalDpi xmlns:a14="http://schemas.microsoft.com/office/drawing/2010/main" val="0"/>
+              </a:ext>
+            </a:extLst>
+          </a:blip>
+          <a:stretch>
+            <a:fillRect/>
+          </a:stretch>
+        </p:blipFill>
+        <p:spPr>
+          <a:xfrm>
+            <a:off x="2470985" y="1818226"/>
+            <a:ext cx="7245432" cy="4401599"/>
+          </a:xfrm>
+          <a:prstGeom prst="rect">
+            <a:avLst/>
+          </a:prstGeom>
+        </p:spPr>
+      </p:pic>
     </p:spTree>
     <p:extLst>
       <p:ext uri="{BB962C8B-B14F-4D97-AF65-F5344CB8AC3E}">
@@ -5173,12 +7015,20 @@
 <file path=ppt/slides/slide19.xml><?xml version="1.0" encoding="utf-8"?>
 <p:sld xmlns:a="http://schemas.openxmlformats.org/drawingml/2006/main" xmlns:r="http://schemas.openxmlformats.org/officeDocument/2006/relationships" xmlns:p="http://schemas.openxmlformats.org/presentationml/2006/main">
   <p:cSld>
+    <p:bg>
+      <p:bgPr>
+        <a:solidFill>
+          <a:schemeClr val="bg1"/>
+        </a:solidFill>
+        <a:effectLst/>
+      </p:bgPr>
+    </p:bg>
     <p:spTree>
       <p:nvGrpSpPr>
         <p:cNvPr id="1" name="">
           <a:extLst>
             <a:ext uri="{FF2B5EF4-FFF2-40B4-BE49-F238E27FC236}">
-              <a16:creationId xmlns:a16="http://schemas.microsoft.com/office/drawing/2014/main" id="{18D240CE-75C8-FAD3-F11D-D12E50D3EC28}"/>
+              <a16:creationId xmlns:a16="http://schemas.microsoft.com/office/drawing/2014/main" id="{3B29206B-2DF5-06CD-B140-9FA5D27773E8}"/>
             </a:ext>
           </a:extLst>
         </p:cNvPr>
@@ -5193,99 +7043,512 @@
           <a:chExt cx="0" cy="0"/>
         </a:xfrm>
       </p:grpSpPr>
-      <p:sp>
-        <p:nvSpPr>
-          <p:cNvPr id="2" name="Title 1">
-            <a:extLst>
-              <a:ext uri="{FF2B5EF4-FFF2-40B4-BE49-F238E27FC236}">
-                <a16:creationId xmlns:a16="http://schemas.microsoft.com/office/drawing/2014/main" id="{34000910-DBD4-C977-CC19-F8415F4D9374}"/>
-              </a:ext>
-            </a:extLst>
-          </p:cNvPr>
-          <p:cNvSpPr>
-            <a:spLocks noGrp="1"/>
-          </p:cNvSpPr>
-          <p:nvPr>
-            <p:ph type="title"/>
+      <p:sp useBgFill="1">
+        <p:nvSpPr>
+          <p:cNvPr id="33" name="Rectangle 32">
+            <a:extLst>
+              <a:ext uri="{FF2B5EF4-FFF2-40B4-BE49-F238E27FC236}">
+                <a16:creationId xmlns:a16="http://schemas.microsoft.com/office/drawing/2014/main" id="{BCED4D40-4B67-4331-AC48-79B82B4A47D8}"/>
+              </a:ext>
+              <a:ext uri="{C183D7F6-B498-43B3-948B-1728B52AA6E4}">
+                <adec:decorative xmlns:adec="http://schemas.microsoft.com/office/drawing/2017/decorative" val="1"/>
+              </a:ext>
+            </a:extLst>
+          </p:cNvPr>
+          <p:cNvSpPr>
+            <a:spLocks noGrp="1" noRot="1" noChangeAspect="1" noMove="1" noResize="1" noEditPoints="1" noAdjustHandles="1" noChangeArrowheads="1" noChangeShapeType="1" noTextEdit="1"/>
+          </p:cNvSpPr>
+          <p:nvPr>
+            <p:extLst>
+              <p:ext uri="{386F3935-93C4-4BCD-93E2-E3B085C9AB24}">
+                <p16:designElem xmlns:p16="http://schemas.microsoft.com/office/powerpoint/2015/main" val="1"/>
+              </p:ext>
+            </p:extLst>
           </p:nvPr>
         </p:nvSpPr>
         <p:spPr>
           <a:xfrm>
-            <a:off x="838200" y="365125"/>
-            <a:ext cx="10515600" cy="1030537"/>
+            <a:off x="0" y="0"/>
+            <a:ext cx="12192000" cy="6858000"/>
+          </a:xfrm>
+          <a:prstGeom prst="rect">
+            <a:avLst/>
+          </a:prstGeom>
+          <a:ln>
+            <a:noFill/>
+          </a:ln>
+        </p:spPr>
+        <p:style>
+          <a:lnRef idx="2">
+            <a:schemeClr val="accent1">
+              <a:shade val="50000"/>
+            </a:schemeClr>
+          </a:lnRef>
+          <a:fillRef idx="1">
+            <a:schemeClr val="accent1"/>
+          </a:fillRef>
+          <a:effectRef idx="0">
+            <a:schemeClr val="accent1"/>
+          </a:effectRef>
+          <a:fontRef idx="minor">
+            <a:schemeClr val="lt1"/>
+          </a:fontRef>
+        </p:style>
+        <p:txBody>
+          <a:bodyPr rtlCol="0" anchor="ctr"/>
+          <a:lstStyle/>
+          <a:p>
+            <a:pPr algn="ctr"/>
+            <a:endParaRPr lang="en-US"/>
+          </a:p>
+        </p:txBody>
+      </p:sp>
+      <p:sp>
+        <p:nvSpPr>
+          <p:cNvPr id="2" name="Title 1">
+            <a:extLst>
+              <a:ext uri="{FF2B5EF4-FFF2-40B4-BE49-F238E27FC236}">
+                <a16:creationId xmlns:a16="http://schemas.microsoft.com/office/drawing/2014/main" id="{8C47DA0F-DFD7-605B-1978-2ECE55BFABEA}"/>
+              </a:ext>
+            </a:extLst>
+          </p:cNvPr>
+          <p:cNvSpPr>
+            <a:spLocks noGrp="1"/>
+          </p:cNvSpPr>
+          <p:nvPr>
+            <p:ph type="title"/>
+          </p:nvPr>
+        </p:nvSpPr>
+        <p:spPr>
+          <a:xfrm>
+            <a:off x="638881" y="180955"/>
+            <a:ext cx="10909640" cy="1486015"/>
           </a:xfrm>
         </p:spPr>
         <p:txBody>
-          <a:bodyPr>
+          <a:bodyPr vert="horz" lIns="91440" tIns="45720" rIns="91440" bIns="45720" rtlCol="0" anchor="ctr">
             <a:normAutofit/>
           </a:bodyPr>
           <a:lstStyle/>
           <a:p>
-            <a:r>
+            <a:pPr algn="ctr">
+              <a:lnSpc>
+                <a:spcPct val="114000"/>
+              </a:lnSpc>
+            </a:pPr>
+            <a:r>
+              <a:rPr lang="en-US" b="1">
+                <a:latin typeface="Times New Roman" panose="02020603050405020304" pitchFamily="18" charset="0"/>
+                <a:cs typeface="Times New Roman" panose="02020603050405020304" pitchFamily="18" charset="0"/>
+              </a:rPr>
+              <a:t>PHƯƠNG PHÁP ĐỀ XUẤT</a:t>
+            </a:r>
+            <a:br>
               <a:rPr lang="en-US" sz="4000" b="1">
                 <a:latin typeface="Times New Roman" panose="02020603050405020304" pitchFamily="18" charset="0"/>
                 <a:cs typeface="Times New Roman" panose="02020603050405020304" pitchFamily="18" charset="0"/>
               </a:rPr>
-              <a:t>PHƯƠNG PHÁP ĐỀ XUẤT</a:t>
-            </a:r>
-          </a:p>
-        </p:txBody>
-      </p:sp>
-      <p:sp>
-        <p:nvSpPr>
-          <p:cNvPr id="3" name="Content Placeholder 2">
-            <a:extLst>
-              <a:ext uri="{FF2B5EF4-FFF2-40B4-BE49-F238E27FC236}">
-                <a16:creationId xmlns:a16="http://schemas.microsoft.com/office/drawing/2014/main" id="{C2AF600F-137F-1B18-1D35-C7894E00D3EC}"/>
-              </a:ext>
-            </a:extLst>
-          </p:cNvPr>
-          <p:cNvSpPr>
-            <a:spLocks noGrp="1"/>
-          </p:cNvSpPr>
-          <p:nvPr>
-            <p:ph idx="1"/>
+            </a:br>
+            <a:r>
+              <a:rPr lang="en-US" sz="2800" b="1">
+                <a:latin typeface="Times New Roman" panose="02020603050405020304" pitchFamily="18" charset="0"/>
+                <a:cs typeface="Times New Roman" panose="02020603050405020304" pitchFamily="18" charset="0"/>
+              </a:rPr>
+              <a:t>3.3. Hệ thống RAG đề xuất</a:t>
+            </a:r>
+            <a:endParaRPr lang="en-US" sz="4100" b="1" kern="1200">
+              <a:solidFill>
+                <a:schemeClr val="tx1"/>
+              </a:solidFill>
+              <a:latin typeface="Times New Roman" panose="02020603050405020304" pitchFamily="18" charset="0"/>
+              <a:cs typeface="Times New Roman" panose="02020603050405020304" pitchFamily="18" charset="0"/>
+            </a:endParaRPr>
+          </a:p>
+        </p:txBody>
+      </p:sp>
+      <p:sp>
+        <p:nvSpPr>
+          <p:cNvPr id="35" name="sketch line">
+            <a:extLst>
+              <a:ext uri="{FF2B5EF4-FFF2-40B4-BE49-F238E27FC236}">
+                <a16:creationId xmlns:a16="http://schemas.microsoft.com/office/drawing/2014/main" id="{670CEDEF-4F34-412E-84EE-329C1E936AF5}"/>
+              </a:ext>
+              <a:ext uri="{C183D7F6-B498-43B3-948B-1728B52AA6E4}">
+                <adec:decorative xmlns:adec="http://schemas.microsoft.com/office/drawing/2017/decorative" val="1"/>
+              </a:ext>
+            </a:extLst>
+          </p:cNvPr>
+          <p:cNvSpPr>
+            <a:spLocks noGrp="1" noRot="1" noChangeAspect="1" noMove="1" noResize="1" noEditPoints="1" noAdjustHandles="1" noChangeArrowheads="1" noChangeShapeType="1" noTextEdit="1"/>
+          </p:cNvSpPr>
+          <p:nvPr>
+            <p:extLst>
+              <p:ext uri="{386F3935-93C4-4BCD-93E2-E3B085C9AB24}">
+                <p16:designElem xmlns:p16="http://schemas.microsoft.com/office/powerpoint/2015/main" val="1"/>
+              </p:ext>
+            </p:extLst>
           </p:nvPr>
         </p:nvSpPr>
         <p:spPr>
           <a:xfrm>
-            <a:off x="838200" y="1395662"/>
-            <a:ext cx="10515600" cy="4781301"/>
+            <a:off x="3807702" y="1733454"/>
+            <a:ext cx="4572000" cy="18288"/>
           </a:xfrm>
+          <a:custGeom>
+            <a:avLst/>
+            <a:gdLst>
+              <a:gd name="connsiteX0" fmla="*/ 0 w 4572000"/>
+              <a:gd name="connsiteY0" fmla="*/ 0 h 18288"/>
+              <a:gd name="connsiteX1" fmla="*/ 515983 w 4572000"/>
+              <a:gd name="connsiteY1" fmla="*/ 0 h 18288"/>
+              <a:gd name="connsiteX2" fmla="*/ 1031966 w 4572000"/>
+              <a:gd name="connsiteY2" fmla="*/ 0 h 18288"/>
+              <a:gd name="connsiteX3" fmla="*/ 1639389 w 4572000"/>
+              <a:gd name="connsiteY3" fmla="*/ 0 h 18288"/>
+              <a:gd name="connsiteX4" fmla="*/ 2383971 w 4572000"/>
+              <a:gd name="connsiteY4" fmla="*/ 0 h 18288"/>
+              <a:gd name="connsiteX5" fmla="*/ 2945674 w 4572000"/>
+              <a:gd name="connsiteY5" fmla="*/ 0 h 18288"/>
+              <a:gd name="connsiteX6" fmla="*/ 3507377 w 4572000"/>
+              <a:gd name="connsiteY6" fmla="*/ 0 h 18288"/>
+              <a:gd name="connsiteX7" fmla="*/ 4572000 w 4572000"/>
+              <a:gd name="connsiteY7" fmla="*/ 0 h 18288"/>
+              <a:gd name="connsiteX8" fmla="*/ 4572000 w 4572000"/>
+              <a:gd name="connsiteY8" fmla="*/ 18288 h 18288"/>
+              <a:gd name="connsiteX9" fmla="*/ 3873137 w 4572000"/>
+              <a:gd name="connsiteY9" fmla="*/ 18288 h 18288"/>
+              <a:gd name="connsiteX10" fmla="*/ 3311434 w 4572000"/>
+              <a:gd name="connsiteY10" fmla="*/ 18288 h 18288"/>
+              <a:gd name="connsiteX11" fmla="*/ 2749731 w 4572000"/>
+              <a:gd name="connsiteY11" fmla="*/ 18288 h 18288"/>
+              <a:gd name="connsiteX12" fmla="*/ 2050869 w 4572000"/>
+              <a:gd name="connsiteY12" fmla="*/ 18288 h 18288"/>
+              <a:gd name="connsiteX13" fmla="*/ 1306286 w 4572000"/>
+              <a:gd name="connsiteY13" fmla="*/ 18288 h 18288"/>
+              <a:gd name="connsiteX14" fmla="*/ 790303 w 4572000"/>
+              <a:gd name="connsiteY14" fmla="*/ 18288 h 18288"/>
+              <a:gd name="connsiteX15" fmla="*/ 0 w 4572000"/>
+              <a:gd name="connsiteY15" fmla="*/ 18288 h 18288"/>
+              <a:gd name="connsiteX16" fmla="*/ 0 w 4572000"/>
+              <a:gd name="connsiteY16" fmla="*/ 0 h 18288"/>
+            </a:gdLst>
+            <a:ahLst/>
+            <a:cxnLst>
+              <a:cxn ang="0">
+                <a:pos x="connsiteX0" y="connsiteY0"/>
+              </a:cxn>
+              <a:cxn ang="0">
+                <a:pos x="connsiteX1" y="connsiteY1"/>
+              </a:cxn>
+              <a:cxn ang="0">
+                <a:pos x="connsiteX2" y="connsiteY2"/>
+              </a:cxn>
+              <a:cxn ang="0">
+                <a:pos x="connsiteX3" y="connsiteY3"/>
+              </a:cxn>
+              <a:cxn ang="0">
+                <a:pos x="connsiteX4" y="connsiteY4"/>
+              </a:cxn>
+              <a:cxn ang="0">
+                <a:pos x="connsiteX5" y="connsiteY5"/>
+              </a:cxn>
+              <a:cxn ang="0">
+                <a:pos x="connsiteX6" y="connsiteY6"/>
+              </a:cxn>
+              <a:cxn ang="0">
+                <a:pos x="connsiteX7" y="connsiteY7"/>
+              </a:cxn>
+              <a:cxn ang="0">
+                <a:pos x="connsiteX8" y="connsiteY8"/>
+              </a:cxn>
+              <a:cxn ang="0">
+                <a:pos x="connsiteX9" y="connsiteY9"/>
+              </a:cxn>
+              <a:cxn ang="0">
+                <a:pos x="connsiteX10" y="connsiteY10"/>
+              </a:cxn>
+              <a:cxn ang="0">
+                <a:pos x="connsiteX11" y="connsiteY11"/>
+              </a:cxn>
+              <a:cxn ang="0">
+                <a:pos x="connsiteX12" y="connsiteY12"/>
+              </a:cxn>
+              <a:cxn ang="0">
+                <a:pos x="connsiteX13" y="connsiteY13"/>
+              </a:cxn>
+              <a:cxn ang="0">
+                <a:pos x="connsiteX14" y="connsiteY14"/>
+              </a:cxn>
+              <a:cxn ang="0">
+                <a:pos x="connsiteX15" y="connsiteY15"/>
+              </a:cxn>
+              <a:cxn ang="0">
+                <a:pos x="connsiteX16" y="connsiteY16"/>
+              </a:cxn>
+            </a:cxnLst>
+            <a:rect l="l" t="t" r="r" b="b"/>
+            <a:pathLst>
+              <a:path w="4572000" h="18288" fill="none" extrusionOk="0">
+                <a:moveTo>
+                  <a:pt x="0" y="0"/>
+                </a:moveTo>
+                <a:cubicBezTo>
+                  <a:pt x="105156" y="-20963"/>
+                  <a:pt x="340432" y="822"/>
+                  <a:pt x="515983" y="0"/>
+                </a:cubicBezTo>
+                <a:cubicBezTo>
+                  <a:pt x="691534" y="-822"/>
+                  <a:pt x="850679" y="16479"/>
+                  <a:pt x="1031966" y="0"/>
+                </a:cubicBezTo>
+                <a:cubicBezTo>
+                  <a:pt x="1213253" y="-16479"/>
+                  <a:pt x="1443646" y="-18730"/>
+                  <a:pt x="1639389" y="0"/>
+                </a:cubicBezTo>
+                <a:cubicBezTo>
+                  <a:pt x="1835132" y="18730"/>
+                  <a:pt x="2159975" y="18531"/>
+                  <a:pt x="2383971" y="0"/>
+                </a:cubicBezTo>
+                <a:cubicBezTo>
+                  <a:pt x="2607967" y="-18531"/>
+                  <a:pt x="2719096" y="-12030"/>
+                  <a:pt x="2945674" y="0"/>
+                </a:cubicBezTo>
+                <a:cubicBezTo>
+                  <a:pt x="3172252" y="12030"/>
+                  <a:pt x="3269167" y="27666"/>
+                  <a:pt x="3507377" y="0"/>
+                </a:cubicBezTo>
+                <a:cubicBezTo>
+                  <a:pt x="3745587" y="-27666"/>
+                  <a:pt x="4116741" y="18705"/>
+                  <a:pt x="4572000" y="0"/>
+                </a:cubicBezTo>
+                <a:cubicBezTo>
+                  <a:pt x="4572895" y="8974"/>
+                  <a:pt x="4571454" y="9359"/>
+                  <a:pt x="4572000" y="18288"/>
+                </a:cubicBezTo>
+                <a:cubicBezTo>
+                  <a:pt x="4374698" y="3942"/>
+                  <a:pt x="4098874" y="-11042"/>
+                  <a:pt x="3873137" y="18288"/>
+                </a:cubicBezTo>
+                <a:cubicBezTo>
+                  <a:pt x="3647400" y="47618"/>
+                  <a:pt x="3517055" y="5421"/>
+                  <a:pt x="3311434" y="18288"/>
+                </a:cubicBezTo>
+                <a:cubicBezTo>
+                  <a:pt x="3105813" y="31155"/>
+                  <a:pt x="3025168" y="17856"/>
+                  <a:pt x="2749731" y="18288"/>
+                </a:cubicBezTo>
+                <a:cubicBezTo>
+                  <a:pt x="2474294" y="18720"/>
+                  <a:pt x="2291766" y="-14168"/>
+                  <a:pt x="2050869" y="18288"/>
+                </a:cubicBezTo>
+                <a:cubicBezTo>
+                  <a:pt x="1809972" y="50744"/>
+                  <a:pt x="1540276" y="46798"/>
+                  <a:pt x="1306286" y="18288"/>
+                </a:cubicBezTo>
+                <a:cubicBezTo>
+                  <a:pt x="1072296" y="-10222"/>
+                  <a:pt x="972445" y="19645"/>
+                  <a:pt x="790303" y="18288"/>
+                </a:cubicBezTo>
+                <a:cubicBezTo>
+                  <a:pt x="608161" y="16931"/>
+                  <a:pt x="200981" y="8241"/>
+                  <a:pt x="0" y="18288"/>
+                </a:cubicBezTo>
+                <a:cubicBezTo>
+                  <a:pt x="-229" y="14222"/>
+                  <a:pt x="509" y="5816"/>
+                  <a:pt x="0" y="0"/>
+                </a:cubicBezTo>
+                <a:close/>
+              </a:path>
+              <a:path w="4572000" h="18288" stroke="0" extrusionOk="0">
+                <a:moveTo>
+                  <a:pt x="0" y="0"/>
+                </a:moveTo>
+                <a:cubicBezTo>
+                  <a:pt x="143285" y="-9565"/>
+                  <a:pt x="327959" y="-11498"/>
+                  <a:pt x="561703" y="0"/>
+                </a:cubicBezTo>
+                <a:cubicBezTo>
+                  <a:pt x="795447" y="11498"/>
+                  <a:pt x="838260" y="18255"/>
+                  <a:pt x="1077686" y="0"/>
+                </a:cubicBezTo>
+                <a:cubicBezTo>
+                  <a:pt x="1317112" y="-18255"/>
+                  <a:pt x="1437472" y="23514"/>
+                  <a:pt x="1639389" y="0"/>
+                </a:cubicBezTo>
+                <a:cubicBezTo>
+                  <a:pt x="1841306" y="-23514"/>
+                  <a:pt x="2037142" y="-12551"/>
+                  <a:pt x="2292531" y="0"/>
+                </a:cubicBezTo>
+                <a:cubicBezTo>
+                  <a:pt x="2547920" y="12551"/>
+                  <a:pt x="2810436" y="-20352"/>
+                  <a:pt x="2991394" y="0"/>
+                </a:cubicBezTo>
+                <a:cubicBezTo>
+                  <a:pt x="3172352" y="20352"/>
+                  <a:pt x="3530025" y="-13347"/>
+                  <a:pt x="3735977" y="0"/>
+                </a:cubicBezTo>
+                <a:cubicBezTo>
+                  <a:pt x="3941929" y="13347"/>
+                  <a:pt x="4161497" y="34086"/>
+                  <a:pt x="4572000" y="0"/>
+                </a:cubicBezTo>
+                <a:cubicBezTo>
+                  <a:pt x="4571545" y="6162"/>
+                  <a:pt x="4571903" y="11775"/>
+                  <a:pt x="4572000" y="18288"/>
+                </a:cubicBezTo>
+                <a:cubicBezTo>
+                  <a:pt x="4228040" y="36490"/>
+                  <a:pt x="4199736" y="42557"/>
+                  <a:pt x="3873137" y="18288"/>
+                </a:cubicBezTo>
+                <a:cubicBezTo>
+                  <a:pt x="3546538" y="-5981"/>
+                  <a:pt x="3472124" y="16809"/>
+                  <a:pt x="3128554" y="18288"/>
+                </a:cubicBezTo>
+                <a:cubicBezTo>
+                  <a:pt x="2784984" y="19767"/>
+                  <a:pt x="2735896" y="-17781"/>
+                  <a:pt x="2383971" y="18288"/>
+                </a:cubicBezTo>
+                <a:cubicBezTo>
+                  <a:pt x="2032046" y="54357"/>
+                  <a:pt x="2019324" y="2920"/>
+                  <a:pt x="1867989" y="18288"/>
+                </a:cubicBezTo>
+                <a:cubicBezTo>
+                  <a:pt x="1716654" y="33656"/>
+                  <a:pt x="1418675" y="32575"/>
+                  <a:pt x="1169126" y="18288"/>
+                </a:cubicBezTo>
+                <a:cubicBezTo>
+                  <a:pt x="919577" y="4001"/>
+                  <a:pt x="798537" y="16165"/>
+                  <a:pt x="561703" y="18288"/>
+                </a:cubicBezTo>
+                <a:cubicBezTo>
+                  <a:pt x="324869" y="20411"/>
+                  <a:pt x="221395" y="-912"/>
+                  <a:pt x="0" y="18288"/>
+                </a:cubicBezTo>
+                <a:cubicBezTo>
+                  <a:pt x="766" y="10800"/>
+                  <a:pt x="-457" y="8180"/>
+                  <a:pt x="0" y="0"/>
+                </a:cubicBezTo>
+                <a:close/>
+              </a:path>
+            </a:pathLst>
+          </a:custGeom>
+          <a:solidFill>
+            <a:schemeClr val="accent2"/>
+          </a:solidFill>
+          <a:ln w="41275" cap="rnd">
+            <a:solidFill>
+              <a:schemeClr val="accent2"/>
+            </a:solidFill>
+            <a:round/>
+            <a:extLst>
+              <a:ext uri="{C807C97D-BFC1-408E-A445-0C87EB9F89A2}">
+                <ask:lineSketchStyleProps xmlns:ask="http://schemas.microsoft.com/office/drawing/2018/sketchyshapes" sd="2727557108">
+                  <a:prstGeom prst="rect">
+                    <a:avLst/>
+                  </a:prstGeom>
+                  <ask:type>
+                    <ask:lineSketchFreehand/>
+                  </ask:type>
+                </ask:lineSketchStyleProps>
+              </a:ext>
+            </a:extLst>
+          </a:ln>
         </p:spPr>
-        <p:txBody>
-          <a:bodyPr/>
-          <a:lstStyle/>
-          <a:p>
-            <a:pPr marL="0" indent="0">
-              <a:buNone/>
-            </a:pPr>
-            <a:r>
-              <a:rPr lang="en-US" i="1">
-                <a:latin typeface="Times New Roman" panose="02020603050405020304" pitchFamily="18" charset="0"/>
-                <a:cs typeface="Times New Roman" panose="02020603050405020304" pitchFamily="18" charset="0"/>
-              </a:rPr>
-              <a:t>3.3. Hệ thống RAG đề xuất</a:t>
-            </a:r>
-          </a:p>
-          <a:p>
-            <a:pPr marL="0" indent="0">
-              <a:buNone/>
-            </a:pPr>
-            <a:r>
-              <a:rPr lang="en-US" sz="2000" i="1">
-                <a:latin typeface="Times New Roman" panose="02020603050405020304" pitchFamily="18" charset="0"/>
-                <a:cs typeface="Times New Roman" panose="02020603050405020304" pitchFamily="18" charset="0"/>
-              </a:rPr>
-              <a:t>(mô tả hình)</a:t>
-            </a:r>
-          </a:p>
-        </p:txBody>
-      </p:sp>
+        <p:style>
+          <a:lnRef idx="2">
+            <a:schemeClr val="accent1">
+              <a:shade val="50000"/>
+            </a:schemeClr>
+          </a:lnRef>
+          <a:fillRef idx="1">
+            <a:schemeClr val="accent1"/>
+          </a:fillRef>
+          <a:effectRef idx="0">
+            <a:schemeClr val="accent1"/>
+          </a:effectRef>
+          <a:fontRef idx="minor">
+            <a:schemeClr val="lt1"/>
+          </a:fontRef>
+        </p:style>
+        <p:txBody>
+          <a:bodyPr rtlCol="0" anchor="ctr"/>
+          <a:lstStyle/>
+          <a:p>
+            <a:pPr algn="ctr"/>
+            <a:endParaRPr lang="en-US"/>
+          </a:p>
+        </p:txBody>
+      </p:sp>
+      <p:pic>
+        <p:nvPicPr>
+          <p:cNvPr id="4" name="Picture 3" descr="A screenshot of a computer&#10;&#10;AI-generated content may be incorrect.">
+            <a:extLst>
+              <a:ext uri="{FF2B5EF4-FFF2-40B4-BE49-F238E27FC236}">
+                <a16:creationId xmlns:a16="http://schemas.microsoft.com/office/drawing/2014/main" id="{C76F8FCA-E996-1FC6-6FF5-E917E277A5AF}"/>
+              </a:ext>
+            </a:extLst>
+          </p:cNvPr>
+          <p:cNvPicPr>
+            <a:picLocks noChangeAspect="1"/>
+          </p:cNvPicPr>
+          <p:nvPr/>
+        </p:nvPicPr>
+        <p:blipFill>
+          <a:blip r:embed="rId2">
+            <a:extLst>
+              <a:ext uri="{28A0092B-C50C-407E-A947-70E740481C1C}">
+                <a14:useLocalDpi xmlns:a14="http://schemas.microsoft.com/office/drawing/2010/main" val="0"/>
+              </a:ext>
+            </a:extLst>
+          </a:blip>
+          <a:stretch>
+            <a:fillRect/>
+          </a:stretch>
+        </p:blipFill>
+        <p:spPr>
+          <a:xfrm>
+            <a:off x="2560580" y="1847925"/>
+            <a:ext cx="7070840" cy="4401599"/>
+          </a:xfrm>
+          <a:prstGeom prst="rect">
+            <a:avLst/>
+          </a:prstGeom>
+        </p:spPr>
+      </p:pic>
     </p:spTree>
     <p:extLst>
       <p:ext uri="{BB962C8B-B14F-4D97-AF65-F5344CB8AC3E}">
-        <p14:creationId xmlns:p14="http://schemas.microsoft.com/office/powerpoint/2010/main" val="3865884305"/>
+        <p14:creationId xmlns:p14="http://schemas.microsoft.com/office/powerpoint/2010/main" val="1461354941"/>
       </p:ext>
     </p:extLst>
   </p:cSld>
@@ -5476,6 +7739,139 @@
         <p:cNvPr id="1" name="">
           <a:extLst>
             <a:ext uri="{FF2B5EF4-FFF2-40B4-BE49-F238E27FC236}">
+              <a16:creationId xmlns:a16="http://schemas.microsoft.com/office/drawing/2014/main" id="{18D240CE-75C8-FAD3-F11D-D12E50D3EC28}"/>
+            </a:ext>
+          </a:extLst>
+        </p:cNvPr>
+        <p:cNvGrpSpPr/>
+        <p:nvPr/>
+      </p:nvGrpSpPr>
+      <p:grpSpPr>
+        <a:xfrm>
+          <a:off x="0" y="0"/>
+          <a:ext cx="0" cy="0"/>
+          <a:chOff x="0" y="0"/>
+          <a:chExt cx="0" cy="0"/>
+        </a:xfrm>
+      </p:grpSpPr>
+      <p:sp>
+        <p:nvSpPr>
+          <p:cNvPr id="2" name="Title 1">
+            <a:extLst>
+              <a:ext uri="{FF2B5EF4-FFF2-40B4-BE49-F238E27FC236}">
+                <a16:creationId xmlns:a16="http://schemas.microsoft.com/office/drawing/2014/main" id="{34000910-DBD4-C977-CC19-F8415F4D9374}"/>
+              </a:ext>
+            </a:extLst>
+          </p:cNvPr>
+          <p:cNvSpPr>
+            <a:spLocks noGrp="1"/>
+          </p:cNvSpPr>
+          <p:nvPr>
+            <p:ph type="title"/>
+          </p:nvPr>
+        </p:nvSpPr>
+        <p:spPr>
+          <a:xfrm>
+            <a:off x="838200" y="365125"/>
+            <a:ext cx="10515600" cy="1030537"/>
+          </a:xfrm>
+        </p:spPr>
+        <p:txBody>
+          <a:bodyPr>
+            <a:normAutofit/>
+          </a:bodyPr>
+          <a:lstStyle/>
+          <a:p>
+            <a:r>
+              <a:rPr lang="en-US" sz="4000" b="1">
+                <a:latin typeface="Times New Roman" panose="02020603050405020304" pitchFamily="18" charset="0"/>
+                <a:cs typeface="Times New Roman" panose="02020603050405020304" pitchFamily="18" charset="0"/>
+              </a:rPr>
+              <a:t>PHƯƠNG PHÁP ĐỀ XUẤT</a:t>
+            </a:r>
+          </a:p>
+        </p:txBody>
+      </p:sp>
+      <p:sp>
+        <p:nvSpPr>
+          <p:cNvPr id="3" name="Content Placeholder 2">
+            <a:extLst>
+              <a:ext uri="{FF2B5EF4-FFF2-40B4-BE49-F238E27FC236}">
+                <a16:creationId xmlns:a16="http://schemas.microsoft.com/office/drawing/2014/main" id="{C2AF600F-137F-1B18-1D35-C7894E00D3EC}"/>
+              </a:ext>
+            </a:extLst>
+          </p:cNvPr>
+          <p:cNvSpPr>
+            <a:spLocks noGrp="1"/>
+          </p:cNvSpPr>
+          <p:nvPr>
+            <p:ph idx="1"/>
+          </p:nvPr>
+        </p:nvSpPr>
+        <p:spPr>
+          <a:xfrm>
+            <a:off x="838200" y="1395662"/>
+            <a:ext cx="10515600" cy="4781301"/>
+          </a:xfrm>
+        </p:spPr>
+        <p:txBody>
+          <a:bodyPr/>
+          <a:lstStyle/>
+          <a:p>
+            <a:pPr marL="0" indent="0">
+              <a:buNone/>
+            </a:pPr>
+            <a:r>
+              <a:rPr lang="en-US" i="1">
+                <a:latin typeface="Times New Roman" panose="02020603050405020304" pitchFamily="18" charset="0"/>
+                <a:cs typeface="Times New Roman" panose="02020603050405020304" pitchFamily="18" charset="0"/>
+              </a:rPr>
+              <a:t>3.3. Hệ thống RAG đề xuất</a:t>
+            </a:r>
+          </a:p>
+          <a:p>
+            <a:pPr marL="0" indent="0">
+              <a:buNone/>
+            </a:pPr>
+            <a:r>
+              <a:rPr lang="en-US" sz="2000" i="1">
+                <a:latin typeface="Times New Roman" panose="02020603050405020304" pitchFamily="18" charset="0"/>
+                <a:cs typeface="Times New Roman" panose="02020603050405020304" pitchFamily="18" charset="0"/>
+              </a:rPr>
+              <a:t>(mô tả hình)</a:t>
+            </a:r>
+          </a:p>
+        </p:txBody>
+      </p:sp>
+    </p:spTree>
+    <p:extLst>
+      <p:ext uri="{BB962C8B-B14F-4D97-AF65-F5344CB8AC3E}">
+        <p14:creationId xmlns:p14="http://schemas.microsoft.com/office/powerpoint/2010/main" val="3865884305"/>
+      </p:ext>
+    </p:extLst>
+  </p:cSld>
+  <p:clrMapOvr>
+    <a:masterClrMapping/>
+  </p:clrMapOvr>
+</p:sld>
+</file>
+
+<file path=ppt/slides/slide21.xml><?xml version="1.0" encoding="utf-8"?>
+<p:sld xmlns:a="http://schemas.openxmlformats.org/drawingml/2006/main" xmlns:r="http://schemas.openxmlformats.org/officeDocument/2006/relationships" xmlns:p="http://schemas.openxmlformats.org/presentationml/2006/main">
+  <p:cSld>
+    <p:bg>
+      <p:bgPr>
+        <a:solidFill>
+          <a:schemeClr val="bg1"/>
+        </a:solidFill>
+        <a:effectLst/>
+      </p:bgPr>
+    </p:bg>
+    <p:spTree>
+      <p:nvGrpSpPr>
+        <p:cNvPr id="1" name="">
+          <a:extLst>
+            <a:ext uri="{FF2B5EF4-FFF2-40B4-BE49-F238E27FC236}">
               <a16:creationId xmlns:a16="http://schemas.microsoft.com/office/drawing/2014/main" id="{FDE5FB31-9924-5C2E-F7A0-6E99FB530B3C}"/>
             </a:ext>
           </a:extLst>
@@ -5491,36 +7887,96 @@
           <a:chExt cx="0" cy="0"/>
         </a:xfrm>
       </p:grpSpPr>
-      <p:sp>
-        <p:nvSpPr>
-          <p:cNvPr id="2" name="Title 1">
-            <a:extLst>
-              <a:ext uri="{FF2B5EF4-FFF2-40B4-BE49-F238E27FC236}">
-                <a16:creationId xmlns:a16="http://schemas.microsoft.com/office/drawing/2014/main" id="{72973459-9CC7-7ED9-05ED-622E0AF56BCC}"/>
-              </a:ext>
-            </a:extLst>
-          </p:cNvPr>
-          <p:cNvSpPr>
-            <a:spLocks noGrp="1"/>
-          </p:cNvSpPr>
-          <p:nvPr>
-            <p:ph type="title"/>
+      <p:sp useBgFill="1">
+        <p:nvSpPr>
+          <p:cNvPr id="9" name="Rectangle 8">
+            <a:extLst>
+              <a:ext uri="{FF2B5EF4-FFF2-40B4-BE49-F238E27FC236}">
+                <a16:creationId xmlns:a16="http://schemas.microsoft.com/office/drawing/2014/main" id="{743AA782-23D1-4521-8CAD-47662984AA08}"/>
+              </a:ext>
+              <a:ext uri="{C183D7F6-B498-43B3-948B-1728B52AA6E4}">
+                <adec:decorative xmlns:adec="http://schemas.microsoft.com/office/drawing/2017/decorative" val="1"/>
+              </a:ext>
+            </a:extLst>
+          </p:cNvPr>
+          <p:cNvSpPr>
+            <a:spLocks noGrp="1" noRot="1" noChangeAspect="1" noMove="1" noResize="1" noEditPoints="1" noAdjustHandles="1" noChangeArrowheads="1" noChangeShapeType="1" noTextEdit="1"/>
+          </p:cNvSpPr>
+          <p:nvPr>
+            <p:extLst>
+              <p:ext uri="{386F3935-93C4-4BCD-93E2-E3B085C9AB24}">
+                <p16:designElem xmlns:p16="http://schemas.microsoft.com/office/powerpoint/2015/main" val="1"/>
+              </p:ext>
+            </p:extLst>
           </p:nvPr>
         </p:nvSpPr>
         <p:spPr>
           <a:xfrm>
-            <a:off x="838200" y="365125"/>
-            <a:ext cx="10515600" cy="1030537"/>
+            <a:off x="0" y="0"/>
+            <a:ext cx="12192000" cy="6858000"/>
+          </a:xfrm>
+          <a:prstGeom prst="rect">
+            <a:avLst/>
+          </a:prstGeom>
+          <a:ln>
+            <a:noFill/>
+          </a:ln>
+        </p:spPr>
+        <p:style>
+          <a:lnRef idx="2">
+            <a:schemeClr val="accent1">
+              <a:shade val="50000"/>
+            </a:schemeClr>
+          </a:lnRef>
+          <a:fillRef idx="1">
+            <a:schemeClr val="accent1"/>
+          </a:fillRef>
+          <a:effectRef idx="0">
+            <a:schemeClr val="accent1"/>
+          </a:effectRef>
+          <a:fontRef idx="minor">
+            <a:schemeClr val="lt1"/>
+          </a:fontRef>
+        </p:style>
+        <p:txBody>
+          <a:bodyPr rtlCol="0" anchor="ctr"/>
+          <a:lstStyle/>
+          <a:p>
+            <a:pPr algn="ctr"/>
+            <a:endParaRPr lang="en-US"/>
+          </a:p>
+        </p:txBody>
+      </p:sp>
+      <p:sp>
+        <p:nvSpPr>
+          <p:cNvPr id="2" name="Title 1">
+            <a:extLst>
+              <a:ext uri="{FF2B5EF4-FFF2-40B4-BE49-F238E27FC236}">
+                <a16:creationId xmlns:a16="http://schemas.microsoft.com/office/drawing/2014/main" id="{72973459-9CC7-7ED9-05ED-622E0AF56BCC}"/>
+              </a:ext>
+            </a:extLst>
+          </p:cNvPr>
+          <p:cNvSpPr>
+            <a:spLocks noGrp="1"/>
+          </p:cNvSpPr>
+          <p:nvPr>
+            <p:ph type="title"/>
+          </p:nvPr>
+        </p:nvSpPr>
+        <p:spPr>
+          <a:xfrm>
+            <a:off x="630936" y="640080"/>
+            <a:ext cx="4818888" cy="1481328"/>
           </a:xfrm>
         </p:spPr>
         <p:txBody>
-          <a:bodyPr>
+          <a:bodyPr anchor="b">
             <a:normAutofit/>
           </a:bodyPr>
           <a:lstStyle/>
           <a:p>
             <a:r>
-              <a:rPr lang="en-US" sz="4000" b="1">
+              <a:rPr lang="en-US" sz="4600" b="1">
                 <a:latin typeface="Times New Roman" panose="02020603050405020304" pitchFamily="18" charset="0"/>
                 <a:cs typeface="Times New Roman" panose="02020603050405020304" pitchFamily="18" charset="0"/>
               </a:rPr>
@@ -5531,35 +7987,313 @@
       </p:sp>
       <p:sp>
         <p:nvSpPr>
-          <p:cNvPr id="3" name="Content Placeholder 2">
-            <a:extLst>
-              <a:ext uri="{FF2B5EF4-FFF2-40B4-BE49-F238E27FC236}">
-                <a16:creationId xmlns:a16="http://schemas.microsoft.com/office/drawing/2014/main" id="{372617BC-26E8-26FB-B8F4-C67280D57222}"/>
-              </a:ext>
-            </a:extLst>
-          </p:cNvPr>
-          <p:cNvSpPr>
-            <a:spLocks noGrp="1"/>
-          </p:cNvSpPr>
-          <p:nvPr>
-            <p:ph idx="1"/>
+          <p:cNvPr id="11" name="sketch line">
+            <a:extLst>
+              <a:ext uri="{FF2B5EF4-FFF2-40B4-BE49-F238E27FC236}">
+                <a16:creationId xmlns:a16="http://schemas.microsoft.com/office/drawing/2014/main" id="{71877DBC-BB60-40F0-AC93-2ACDBAAE60CE}"/>
+              </a:ext>
+              <a:ext uri="{C183D7F6-B498-43B3-948B-1728B52AA6E4}">
+                <adec:decorative xmlns:adec="http://schemas.microsoft.com/office/drawing/2017/decorative" val="1"/>
+              </a:ext>
+            </a:extLst>
+          </p:cNvPr>
+          <p:cNvSpPr>
+            <a:spLocks noGrp="1" noRot="1" noChangeAspect="1" noMove="1" noResize="1" noEditPoints="1" noAdjustHandles="1" noChangeArrowheads="1" noChangeShapeType="1" noTextEdit="1"/>
+          </p:cNvSpPr>
+          <p:nvPr>
+            <p:extLst>
+              <p:ext uri="{386F3935-93C4-4BCD-93E2-E3B085C9AB24}">
+                <p16:designElem xmlns:p16="http://schemas.microsoft.com/office/powerpoint/2015/main" val="1"/>
+              </p:ext>
+            </p:extLst>
           </p:nvPr>
         </p:nvSpPr>
         <p:spPr>
           <a:xfrm>
-            <a:off x="838200" y="1395662"/>
-            <a:ext cx="10515600" cy="4781301"/>
+            <a:off x="643278" y="2372868"/>
+            <a:ext cx="3255095" cy="18288"/>
+          </a:xfrm>
+          <a:custGeom>
+            <a:avLst/>
+            <a:gdLst>
+              <a:gd name="connsiteX0" fmla="*/ 0 w 3255095"/>
+              <a:gd name="connsiteY0" fmla="*/ 0 h 18288"/>
+              <a:gd name="connsiteX1" fmla="*/ 618468 w 3255095"/>
+              <a:gd name="connsiteY1" fmla="*/ 0 h 18288"/>
+              <a:gd name="connsiteX2" fmla="*/ 1269487 w 3255095"/>
+              <a:gd name="connsiteY2" fmla="*/ 0 h 18288"/>
+              <a:gd name="connsiteX3" fmla="*/ 1953057 w 3255095"/>
+              <a:gd name="connsiteY3" fmla="*/ 0 h 18288"/>
+              <a:gd name="connsiteX4" fmla="*/ 2636627 w 3255095"/>
+              <a:gd name="connsiteY4" fmla="*/ 0 h 18288"/>
+              <a:gd name="connsiteX5" fmla="*/ 3255095 w 3255095"/>
+              <a:gd name="connsiteY5" fmla="*/ 0 h 18288"/>
+              <a:gd name="connsiteX6" fmla="*/ 3255095 w 3255095"/>
+              <a:gd name="connsiteY6" fmla="*/ 18288 h 18288"/>
+              <a:gd name="connsiteX7" fmla="*/ 2538974 w 3255095"/>
+              <a:gd name="connsiteY7" fmla="*/ 18288 h 18288"/>
+              <a:gd name="connsiteX8" fmla="*/ 1822853 w 3255095"/>
+              <a:gd name="connsiteY8" fmla="*/ 18288 h 18288"/>
+              <a:gd name="connsiteX9" fmla="*/ 1171834 w 3255095"/>
+              <a:gd name="connsiteY9" fmla="*/ 18288 h 18288"/>
+              <a:gd name="connsiteX10" fmla="*/ 0 w 3255095"/>
+              <a:gd name="connsiteY10" fmla="*/ 18288 h 18288"/>
+              <a:gd name="connsiteX11" fmla="*/ 0 w 3255095"/>
+              <a:gd name="connsiteY11" fmla="*/ 0 h 18288"/>
+            </a:gdLst>
+            <a:ahLst/>
+            <a:cxnLst>
+              <a:cxn ang="0">
+                <a:pos x="connsiteX0" y="connsiteY0"/>
+              </a:cxn>
+              <a:cxn ang="0">
+                <a:pos x="connsiteX1" y="connsiteY1"/>
+              </a:cxn>
+              <a:cxn ang="0">
+                <a:pos x="connsiteX2" y="connsiteY2"/>
+              </a:cxn>
+              <a:cxn ang="0">
+                <a:pos x="connsiteX3" y="connsiteY3"/>
+              </a:cxn>
+              <a:cxn ang="0">
+                <a:pos x="connsiteX4" y="connsiteY4"/>
+              </a:cxn>
+              <a:cxn ang="0">
+                <a:pos x="connsiteX5" y="connsiteY5"/>
+              </a:cxn>
+              <a:cxn ang="0">
+                <a:pos x="connsiteX6" y="connsiteY6"/>
+              </a:cxn>
+              <a:cxn ang="0">
+                <a:pos x="connsiteX7" y="connsiteY7"/>
+              </a:cxn>
+              <a:cxn ang="0">
+                <a:pos x="connsiteX8" y="connsiteY8"/>
+              </a:cxn>
+              <a:cxn ang="0">
+                <a:pos x="connsiteX9" y="connsiteY9"/>
+              </a:cxn>
+              <a:cxn ang="0">
+                <a:pos x="connsiteX10" y="connsiteY10"/>
+              </a:cxn>
+              <a:cxn ang="0">
+                <a:pos x="connsiteX11" y="connsiteY11"/>
+              </a:cxn>
+            </a:cxnLst>
+            <a:rect l="l" t="t" r="r" b="b"/>
+            <a:pathLst>
+              <a:path w="3255095" h="18288" fill="none" extrusionOk="0">
+                <a:moveTo>
+                  <a:pt x="0" y="0"/>
+                </a:moveTo>
+                <a:cubicBezTo>
+                  <a:pt x="240201" y="-22123"/>
+                  <a:pt x="462021" y="-19623"/>
+                  <a:pt x="618468" y="0"/>
+                </a:cubicBezTo>
+                <a:cubicBezTo>
+                  <a:pt x="774915" y="19623"/>
+                  <a:pt x="974734" y="2035"/>
+                  <a:pt x="1269487" y="0"/>
+                </a:cubicBezTo>
+                <a:cubicBezTo>
+                  <a:pt x="1564240" y="-2035"/>
+                  <a:pt x="1733579" y="10639"/>
+                  <a:pt x="1953057" y="0"/>
+                </a:cubicBezTo>
+                <a:cubicBezTo>
+                  <a:pt x="2172535" y="-10639"/>
+                  <a:pt x="2453962" y="14018"/>
+                  <a:pt x="2636627" y="0"/>
+                </a:cubicBezTo>
+                <a:cubicBezTo>
+                  <a:pt x="2819292" y="-14018"/>
+                  <a:pt x="3121375" y="5399"/>
+                  <a:pt x="3255095" y="0"/>
+                </a:cubicBezTo>
+                <a:cubicBezTo>
+                  <a:pt x="3254386" y="8157"/>
+                  <a:pt x="3254682" y="12125"/>
+                  <a:pt x="3255095" y="18288"/>
+                </a:cubicBezTo>
+                <a:cubicBezTo>
+                  <a:pt x="3088545" y="23203"/>
+                  <a:pt x="2687475" y="7419"/>
+                  <a:pt x="2538974" y="18288"/>
+                </a:cubicBezTo>
+                <a:cubicBezTo>
+                  <a:pt x="2390473" y="29157"/>
+                  <a:pt x="2137381" y="-8959"/>
+                  <a:pt x="1822853" y="18288"/>
+                </a:cubicBezTo>
+                <a:cubicBezTo>
+                  <a:pt x="1508325" y="45535"/>
+                  <a:pt x="1466437" y="20385"/>
+                  <a:pt x="1171834" y="18288"/>
+                </a:cubicBezTo>
+                <a:cubicBezTo>
+                  <a:pt x="877231" y="16191"/>
+                  <a:pt x="561097" y="37643"/>
+                  <a:pt x="0" y="18288"/>
+                </a:cubicBezTo>
+                <a:cubicBezTo>
+                  <a:pt x="-46" y="12483"/>
+                  <a:pt x="-203" y="6491"/>
+                  <a:pt x="0" y="0"/>
+                </a:cubicBezTo>
+                <a:close/>
+              </a:path>
+              <a:path w="3255095" h="18288" stroke="0" extrusionOk="0">
+                <a:moveTo>
+                  <a:pt x="0" y="0"/>
+                </a:moveTo>
+                <a:cubicBezTo>
+                  <a:pt x="291965" y="19429"/>
+                  <a:pt x="363155" y="8568"/>
+                  <a:pt x="618468" y="0"/>
+                </a:cubicBezTo>
+                <a:cubicBezTo>
+                  <a:pt x="873781" y="-8568"/>
+                  <a:pt x="904459" y="-19505"/>
+                  <a:pt x="1171834" y="0"/>
+                </a:cubicBezTo>
+                <a:cubicBezTo>
+                  <a:pt x="1439209" y="19505"/>
+                  <a:pt x="1744369" y="9790"/>
+                  <a:pt x="1887955" y="0"/>
+                </a:cubicBezTo>
+                <a:cubicBezTo>
+                  <a:pt x="2031541" y="-9790"/>
+                  <a:pt x="2346378" y="21240"/>
+                  <a:pt x="2506423" y="0"/>
+                </a:cubicBezTo>
+                <a:cubicBezTo>
+                  <a:pt x="2666468" y="-21240"/>
+                  <a:pt x="2990257" y="30414"/>
+                  <a:pt x="3255095" y="0"/>
+                </a:cubicBezTo>
+                <a:cubicBezTo>
+                  <a:pt x="3254831" y="4493"/>
+                  <a:pt x="3255479" y="9472"/>
+                  <a:pt x="3255095" y="18288"/>
+                </a:cubicBezTo>
+                <a:cubicBezTo>
+                  <a:pt x="3120743" y="16690"/>
+                  <a:pt x="2759628" y="42462"/>
+                  <a:pt x="2604076" y="18288"/>
+                </a:cubicBezTo>
+                <a:cubicBezTo>
+                  <a:pt x="2448524" y="-5886"/>
+                  <a:pt x="2184336" y="19599"/>
+                  <a:pt x="1887955" y="18288"/>
+                </a:cubicBezTo>
+                <a:cubicBezTo>
+                  <a:pt x="1591574" y="16977"/>
+                  <a:pt x="1548845" y="6870"/>
+                  <a:pt x="1334589" y="18288"/>
+                </a:cubicBezTo>
+                <a:cubicBezTo>
+                  <a:pt x="1120333" y="29706"/>
+                  <a:pt x="996014" y="9662"/>
+                  <a:pt x="683570" y="18288"/>
+                </a:cubicBezTo>
+                <a:cubicBezTo>
+                  <a:pt x="371126" y="26914"/>
+                  <a:pt x="198687" y="16167"/>
+                  <a:pt x="0" y="18288"/>
+                </a:cubicBezTo>
+                <a:cubicBezTo>
+                  <a:pt x="843" y="9577"/>
+                  <a:pt x="371" y="6900"/>
+                  <a:pt x="0" y="0"/>
+                </a:cubicBezTo>
+                <a:close/>
+              </a:path>
+            </a:pathLst>
+          </a:custGeom>
+          <a:solidFill>
+            <a:schemeClr val="accent2"/>
+          </a:solidFill>
+          <a:ln w="38100" cap="rnd">
+            <a:solidFill>
+              <a:schemeClr val="accent2"/>
+            </a:solidFill>
+            <a:round/>
+            <a:extLst>
+              <a:ext uri="{C807C97D-BFC1-408E-A445-0C87EB9F89A2}">
+                <ask:lineSketchStyleProps xmlns:ask="http://schemas.microsoft.com/office/drawing/2018/sketchyshapes" sd="1219033472">
+                  <a:prstGeom prst="rect">
+                    <a:avLst/>
+                  </a:prstGeom>
+                  <ask:type>
+                    <ask:lineSketchFreehand/>
+                  </ask:type>
+                </ask:lineSketchStyleProps>
+              </a:ext>
+            </a:extLst>
+          </a:ln>
+        </p:spPr>
+        <p:style>
+          <a:lnRef idx="2">
+            <a:schemeClr val="accent1">
+              <a:shade val="50000"/>
+            </a:schemeClr>
+          </a:lnRef>
+          <a:fillRef idx="1">
+            <a:schemeClr val="accent1"/>
+          </a:fillRef>
+          <a:effectRef idx="0">
+            <a:schemeClr val="accent1"/>
+          </a:effectRef>
+          <a:fontRef idx="minor">
+            <a:schemeClr val="lt1"/>
+          </a:fontRef>
+        </p:style>
+        <p:txBody>
+          <a:bodyPr rtlCol="0" anchor="ctr"/>
+          <a:lstStyle/>
+          <a:p>
+            <a:pPr algn="ctr"/>
+            <a:endParaRPr lang="en-US"/>
+          </a:p>
+        </p:txBody>
+      </p:sp>
+      <p:sp>
+        <p:nvSpPr>
+          <p:cNvPr id="3" name="Content Placeholder 2">
+            <a:extLst>
+              <a:ext uri="{FF2B5EF4-FFF2-40B4-BE49-F238E27FC236}">
+                <a16:creationId xmlns:a16="http://schemas.microsoft.com/office/drawing/2014/main" id="{372617BC-26E8-26FB-B8F4-C67280D57222}"/>
+              </a:ext>
+            </a:extLst>
+          </p:cNvPr>
+          <p:cNvSpPr>
+            <a:spLocks noGrp="1"/>
+          </p:cNvSpPr>
+          <p:nvPr>
+            <p:ph idx="1"/>
+          </p:nvPr>
+        </p:nvSpPr>
+        <p:spPr>
+          <a:xfrm>
+            <a:off x="630935" y="2660904"/>
+            <a:ext cx="5080053" cy="3879782"/>
           </a:xfrm>
         </p:spPr>
         <p:txBody>
-          <a:bodyPr/>
+          <a:bodyPr anchor="t">
+            <a:normAutofit/>
+          </a:bodyPr>
           <a:lstStyle/>
           <a:p>
             <a:pPr marL="0" indent="0">
+              <a:lnSpc>
+                <a:spcPct val="150000"/>
+              </a:lnSpc>
               <a:buNone/>
             </a:pPr>
             <a:r>
-              <a:rPr lang="en-US" i="1">
+              <a:rPr lang="en-US" b="1">
                 <a:latin typeface="Times New Roman" panose="02020603050405020304" pitchFamily="18" charset="0"/>
                 <a:cs typeface="Times New Roman" panose="02020603050405020304" pitchFamily="18" charset="0"/>
               </a:rPr>
@@ -5567,19 +8301,131 @@
             </a:r>
           </a:p>
           <a:p>
-            <a:pPr marL="0" indent="0">
-              <a:buNone/>
+            <a:pPr>
+              <a:lnSpc>
+                <a:spcPct val="100000"/>
+              </a:lnSpc>
             </a:pPr>
             <a:r>
-              <a:rPr lang="en-US" sz="2000" i="1">
-                <a:latin typeface="Times New Roman" panose="02020603050405020304" pitchFamily="18" charset="0"/>
-                <a:cs typeface="Times New Roman" panose="02020603050405020304" pitchFamily="18" charset="0"/>
-              </a:rPr>
-              <a:t>(hình minh họa quy trình+ mô tả)</a:t>
-            </a:r>
-          </a:p>
-        </p:txBody>
-      </p:sp>
+              <a:rPr lang="en-US" sz="1800">
+                <a:latin typeface="Times New Roman" panose="02020603050405020304" pitchFamily="18" charset="0"/>
+                <a:cs typeface="Times New Roman" panose="02020603050405020304" pitchFamily="18" charset="0"/>
+              </a:rPr>
+              <a:t>Các nội dung được </a:t>
+            </a:r>
+            <a:r>
+              <a:rPr lang="en-US" sz="1800" b="1" i="1">
+                <a:latin typeface="Times New Roman" panose="02020603050405020304" pitchFamily="18" charset="0"/>
+                <a:cs typeface="Times New Roman" panose="02020603050405020304" pitchFamily="18" charset="0"/>
+              </a:rPr>
+              <a:t>chuyển thành văn bản thô</a:t>
+            </a:r>
+            <a:r>
+              <a:rPr lang="en-US" sz="1800">
+                <a:latin typeface="Times New Roman" panose="02020603050405020304" pitchFamily="18" charset="0"/>
+                <a:cs typeface="Times New Roman" panose="02020603050405020304" pitchFamily="18" charset="0"/>
+              </a:rPr>
+              <a:t>.</a:t>
+            </a:r>
+            <a:endParaRPr lang="en-US" sz="1800" b="1">
+              <a:latin typeface="Times New Roman" panose="02020603050405020304" pitchFamily="18" charset="0"/>
+              <a:cs typeface="Times New Roman" panose="02020603050405020304" pitchFamily="18" charset="0"/>
+            </a:endParaRPr>
+          </a:p>
+          <a:p>
+            <a:pPr>
+              <a:lnSpc>
+                <a:spcPct val="100000"/>
+              </a:lnSpc>
+            </a:pPr>
+            <a:r>
+              <a:rPr lang="en-US" sz="1800">
+                <a:latin typeface="Times New Roman" panose="02020603050405020304" pitchFamily="18" charset="0"/>
+                <a:cs typeface="Times New Roman" panose="02020603050405020304" pitchFamily="18" charset="0"/>
+              </a:rPr>
+              <a:t>Mỗi văn bản tương ứng với </a:t>
+            </a:r>
+            <a:r>
+              <a:rPr lang="en-US" sz="1800" b="1" i="1">
+                <a:latin typeface="Times New Roman" panose="02020603050405020304" pitchFamily="18" charset="0"/>
+                <a:cs typeface="Times New Roman" panose="02020603050405020304" pitchFamily="18" charset="0"/>
+              </a:rPr>
+              <a:t>một đơn vị kiến thức (chương, bài, đoạn) </a:t>
+            </a:r>
+            <a:r>
+              <a:rPr lang="en-US" sz="1800">
+                <a:latin typeface="Times New Roman" panose="02020603050405020304" pitchFamily="18" charset="0"/>
+                <a:cs typeface="Times New Roman" panose="02020603050405020304" pitchFamily="18" charset="0"/>
+              </a:rPr>
+              <a:t>cụ thể.</a:t>
+            </a:r>
+          </a:p>
+          <a:p>
+            <a:pPr>
+              <a:lnSpc>
+                <a:spcPct val="100000"/>
+              </a:lnSpc>
+            </a:pPr>
+            <a:r>
+              <a:rPr lang="en-US" sz="1800">
+                <a:latin typeface="Times New Roman" panose="02020603050405020304" pitchFamily="18" charset="0"/>
+                <a:cs typeface="Times New Roman" panose="02020603050405020304" pitchFamily="18" charset="0"/>
+              </a:rPr>
+              <a:t>Lưu trữ các văn bản trong các </a:t>
+            </a:r>
+            <a:r>
+              <a:rPr lang="en-US" sz="1800" b="1" i="1">
+                <a:latin typeface="Times New Roman" panose="02020603050405020304" pitchFamily="18" charset="0"/>
+                <a:cs typeface="Times New Roman" panose="02020603050405020304" pitchFamily="18" charset="0"/>
+              </a:rPr>
+              <a:t>tệp JSON</a:t>
+            </a:r>
+            <a:r>
+              <a:rPr lang="en-US" sz="1800" b="1">
+                <a:latin typeface="Times New Roman" panose="02020603050405020304" pitchFamily="18" charset="0"/>
+                <a:cs typeface="Times New Roman" panose="02020603050405020304" pitchFamily="18" charset="0"/>
+              </a:rPr>
+              <a:t>.</a:t>
+            </a:r>
+          </a:p>
+        </p:txBody>
+      </p:sp>
+      <p:pic>
+        <p:nvPicPr>
+          <p:cNvPr id="4" name="Picture 3" descr="A black background with red lines&#10;&#10;AI-generated content may be incorrect.">
+            <a:extLst>
+              <a:ext uri="{FF2B5EF4-FFF2-40B4-BE49-F238E27FC236}">
+                <a16:creationId xmlns:a16="http://schemas.microsoft.com/office/drawing/2014/main" id="{0E7045BD-A995-549B-B842-1F75B407D899}"/>
+              </a:ext>
+            </a:extLst>
+          </p:cNvPr>
+          <p:cNvPicPr>
+            <a:picLocks noChangeAspect="1"/>
+          </p:cNvPicPr>
+          <p:nvPr/>
+        </p:nvPicPr>
+        <p:blipFill>
+          <a:blip r:embed="rId2">
+            <a:extLst>
+              <a:ext uri="{28A0092B-C50C-407E-A947-70E740481C1C}">
+                <a14:useLocalDpi xmlns:a14="http://schemas.microsoft.com/office/drawing/2010/main" val="0"/>
+              </a:ext>
+            </a:extLst>
+          </a:blip>
+          <a:stretch>
+            <a:fillRect/>
+          </a:stretch>
+        </p:blipFill>
+        <p:spPr>
+          <a:xfrm>
+            <a:off x="5521223" y="2236131"/>
+            <a:ext cx="6039841" cy="2385738"/>
+          </a:xfrm>
+          <a:prstGeom prst="rect">
+            <a:avLst/>
+          </a:prstGeom>
+        </p:spPr>
+      </p:pic>
     </p:spTree>
     <p:extLst>
       <p:ext uri="{BB962C8B-B14F-4D97-AF65-F5344CB8AC3E}">
@@ -5593,9 +8439,17 @@
 </p:sld>
 </file>
 
-<file path=ppt/slides/slide21.xml><?xml version="1.0" encoding="utf-8"?>
+<file path=ppt/slides/slide22.xml><?xml version="1.0" encoding="utf-8"?>
 <p:sld xmlns:a="http://schemas.openxmlformats.org/drawingml/2006/main" xmlns:r="http://schemas.openxmlformats.org/officeDocument/2006/relationships" xmlns:p="http://schemas.openxmlformats.org/presentationml/2006/main">
   <p:cSld>
+    <p:bg>
+      <p:bgPr>
+        <a:solidFill>
+          <a:schemeClr val="bg1"/>
+        </a:solidFill>
+        <a:effectLst/>
+      </p:bgPr>
+    </p:bg>
     <p:spTree>
       <p:nvGrpSpPr>
         <p:cNvPr id="1" name="">
@@ -5616,36 +8470,96 @@
           <a:chExt cx="0" cy="0"/>
         </a:xfrm>
       </p:grpSpPr>
-      <p:sp>
-        <p:nvSpPr>
-          <p:cNvPr id="2" name="Title 1">
-            <a:extLst>
-              <a:ext uri="{FF2B5EF4-FFF2-40B4-BE49-F238E27FC236}">
-                <a16:creationId xmlns:a16="http://schemas.microsoft.com/office/drawing/2014/main" id="{0F318B0F-F164-D94D-7A04-2DDFA28B8DA3}"/>
-              </a:ext>
-            </a:extLst>
-          </p:cNvPr>
-          <p:cNvSpPr>
-            <a:spLocks noGrp="1"/>
-          </p:cNvSpPr>
-          <p:nvPr>
-            <p:ph type="title"/>
+      <p:sp useBgFill="1">
+        <p:nvSpPr>
+          <p:cNvPr id="9" name="Rectangle 8">
+            <a:extLst>
+              <a:ext uri="{FF2B5EF4-FFF2-40B4-BE49-F238E27FC236}">
+                <a16:creationId xmlns:a16="http://schemas.microsoft.com/office/drawing/2014/main" id="{743AA782-23D1-4521-8CAD-47662984AA08}"/>
+              </a:ext>
+              <a:ext uri="{C183D7F6-B498-43B3-948B-1728B52AA6E4}">
+                <adec:decorative xmlns:adec="http://schemas.microsoft.com/office/drawing/2017/decorative" val="1"/>
+              </a:ext>
+            </a:extLst>
+          </p:cNvPr>
+          <p:cNvSpPr>
+            <a:spLocks noGrp="1" noRot="1" noChangeAspect="1" noMove="1" noResize="1" noEditPoints="1" noAdjustHandles="1" noChangeArrowheads="1" noChangeShapeType="1" noTextEdit="1"/>
+          </p:cNvSpPr>
+          <p:nvPr>
+            <p:extLst>
+              <p:ext uri="{386F3935-93C4-4BCD-93E2-E3B085C9AB24}">
+                <p16:designElem xmlns:p16="http://schemas.microsoft.com/office/powerpoint/2015/main" val="1"/>
+              </p:ext>
+            </p:extLst>
           </p:nvPr>
         </p:nvSpPr>
         <p:spPr>
           <a:xfrm>
-            <a:off x="838200" y="365125"/>
-            <a:ext cx="10515600" cy="1030537"/>
+            <a:off x="0" y="0"/>
+            <a:ext cx="12192000" cy="6858000"/>
+          </a:xfrm>
+          <a:prstGeom prst="rect">
+            <a:avLst/>
+          </a:prstGeom>
+          <a:ln>
+            <a:noFill/>
+          </a:ln>
+        </p:spPr>
+        <p:style>
+          <a:lnRef idx="2">
+            <a:schemeClr val="accent1">
+              <a:shade val="50000"/>
+            </a:schemeClr>
+          </a:lnRef>
+          <a:fillRef idx="1">
+            <a:schemeClr val="accent1"/>
+          </a:fillRef>
+          <a:effectRef idx="0">
+            <a:schemeClr val="accent1"/>
+          </a:effectRef>
+          <a:fontRef idx="minor">
+            <a:schemeClr val="lt1"/>
+          </a:fontRef>
+        </p:style>
+        <p:txBody>
+          <a:bodyPr rtlCol="0" anchor="ctr"/>
+          <a:lstStyle/>
+          <a:p>
+            <a:pPr algn="ctr"/>
+            <a:endParaRPr lang="en-US"/>
+          </a:p>
+        </p:txBody>
+      </p:sp>
+      <p:sp>
+        <p:nvSpPr>
+          <p:cNvPr id="2" name="Title 1">
+            <a:extLst>
+              <a:ext uri="{FF2B5EF4-FFF2-40B4-BE49-F238E27FC236}">
+                <a16:creationId xmlns:a16="http://schemas.microsoft.com/office/drawing/2014/main" id="{0F318B0F-F164-D94D-7A04-2DDFA28B8DA3}"/>
+              </a:ext>
+            </a:extLst>
+          </p:cNvPr>
+          <p:cNvSpPr>
+            <a:spLocks noGrp="1"/>
+          </p:cNvSpPr>
+          <p:nvPr>
+            <p:ph type="title"/>
+          </p:nvPr>
+        </p:nvSpPr>
+        <p:spPr>
+          <a:xfrm>
+            <a:off x="630936" y="640080"/>
+            <a:ext cx="4818888" cy="1481328"/>
           </a:xfrm>
         </p:spPr>
         <p:txBody>
-          <a:bodyPr>
+          <a:bodyPr anchor="b">
             <a:normAutofit/>
           </a:bodyPr>
           <a:lstStyle/>
           <a:p>
             <a:r>
-              <a:rPr lang="en-US" sz="4000" b="1">
+              <a:rPr lang="en-US" sz="4600" b="1">
                 <a:latin typeface="Times New Roman" panose="02020603050405020304" pitchFamily="18" charset="0"/>
                 <a:cs typeface="Times New Roman" panose="02020603050405020304" pitchFamily="18" charset="0"/>
               </a:rPr>
@@ -5656,35 +8570,313 @@
       </p:sp>
       <p:sp>
         <p:nvSpPr>
-          <p:cNvPr id="3" name="Content Placeholder 2">
-            <a:extLst>
-              <a:ext uri="{FF2B5EF4-FFF2-40B4-BE49-F238E27FC236}">
-                <a16:creationId xmlns:a16="http://schemas.microsoft.com/office/drawing/2014/main" id="{E50BC489-EA73-CEFB-BFFB-8D3BABA50272}"/>
-              </a:ext>
-            </a:extLst>
-          </p:cNvPr>
-          <p:cNvSpPr>
-            <a:spLocks noGrp="1"/>
-          </p:cNvSpPr>
-          <p:nvPr>
-            <p:ph idx="1"/>
+          <p:cNvPr id="11" name="sketch line">
+            <a:extLst>
+              <a:ext uri="{FF2B5EF4-FFF2-40B4-BE49-F238E27FC236}">
+                <a16:creationId xmlns:a16="http://schemas.microsoft.com/office/drawing/2014/main" id="{71877DBC-BB60-40F0-AC93-2ACDBAAE60CE}"/>
+              </a:ext>
+              <a:ext uri="{C183D7F6-B498-43B3-948B-1728B52AA6E4}">
+                <adec:decorative xmlns:adec="http://schemas.microsoft.com/office/drawing/2017/decorative" val="1"/>
+              </a:ext>
+            </a:extLst>
+          </p:cNvPr>
+          <p:cNvSpPr>
+            <a:spLocks noGrp="1" noRot="1" noChangeAspect="1" noMove="1" noResize="1" noEditPoints="1" noAdjustHandles="1" noChangeArrowheads="1" noChangeShapeType="1" noTextEdit="1"/>
+          </p:cNvSpPr>
+          <p:nvPr>
+            <p:extLst>
+              <p:ext uri="{386F3935-93C4-4BCD-93E2-E3B085C9AB24}">
+                <p16:designElem xmlns:p16="http://schemas.microsoft.com/office/powerpoint/2015/main" val="1"/>
+              </p:ext>
+            </p:extLst>
           </p:nvPr>
         </p:nvSpPr>
         <p:spPr>
           <a:xfrm>
-            <a:off x="838200" y="1395662"/>
-            <a:ext cx="10515600" cy="4781301"/>
+            <a:off x="643278" y="2372868"/>
+            <a:ext cx="3255095" cy="18288"/>
+          </a:xfrm>
+          <a:custGeom>
+            <a:avLst/>
+            <a:gdLst>
+              <a:gd name="connsiteX0" fmla="*/ 0 w 3255095"/>
+              <a:gd name="connsiteY0" fmla="*/ 0 h 18288"/>
+              <a:gd name="connsiteX1" fmla="*/ 618468 w 3255095"/>
+              <a:gd name="connsiteY1" fmla="*/ 0 h 18288"/>
+              <a:gd name="connsiteX2" fmla="*/ 1269487 w 3255095"/>
+              <a:gd name="connsiteY2" fmla="*/ 0 h 18288"/>
+              <a:gd name="connsiteX3" fmla="*/ 1953057 w 3255095"/>
+              <a:gd name="connsiteY3" fmla="*/ 0 h 18288"/>
+              <a:gd name="connsiteX4" fmla="*/ 2636627 w 3255095"/>
+              <a:gd name="connsiteY4" fmla="*/ 0 h 18288"/>
+              <a:gd name="connsiteX5" fmla="*/ 3255095 w 3255095"/>
+              <a:gd name="connsiteY5" fmla="*/ 0 h 18288"/>
+              <a:gd name="connsiteX6" fmla="*/ 3255095 w 3255095"/>
+              <a:gd name="connsiteY6" fmla="*/ 18288 h 18288"/>
+              <a:gd name="connsiteX7" fmla="*/ 2538974 w 3255095"/>
+              <a:gd name="connsiteY7" fmla="*/ 18288 h 18288"/>
+              <a:gd name="connsiteX8" fmla="*/ 1822853 w 3255095"/>
+              <a:gd name="connsiteY8" fmla="*/ 18288 h 18288"/>
+              <a:gd name="connsiteX9" fmla="*/ 1171834 w 3255095"/>
+              <a:gd name="connsiteY9" fmla="*/ 18288 h 18288"/>
+              <a:gd name="connsiteX10" fmla="*/ 0 w 3255095"/>
+              <a:gd name="connsiteY10" fmla="*/ 18288 h 18288"/>
+              <a:gd name="connsiteX11" fmla="*/ 0 w 3255095"/>
+              <a:gd name="connsiteY11" fmla="*/ 0 h 18288"/>
+            </a:gdLst>
+            <a:ahLst/>
+            <a:cxnLst>
+              <a:cxn ang="0">
+                <a:pos x="connsiteX0" y="connsiteY0"/>
+              </a:cxn>
+              <a:cxn ang="0">
+                <a:pos x="connsiteX1" y="connsiteY1"/>
+              </a:cxn>
+              <a:cxn ang="0">
+                <a:pos x="connsiteX2" y="connsiteY2"/>
+              </a:cxn>
+              <a:cxn ang="0">
+                <a:pos x="connsiteX3" y="connsiteY3"/>
+              </a:cxn>
+              <a:cxn ang="0">
+                <a:pos x="connsiteX4" y="connsiteY4"/>
+              </a:cxn>
+              <a:cxn ang="0">
+                <a:pos x="connsiteX5" y="connsiteY5"/>
+              </a:cxn>
+              <a:cxn ang="0">
+                <a:pos x="connsiteX6" y="connsiteY6"/>
+              </a:cxn>
+              <a:cxn ang="0">
+                <a:pos x="connsiteX7" y="connsiteY7"/>
+              </a:cxn>
+              <a:cxn ang="0">
+                <a:pos x="connsiteX8" y="connsiteY8"/>
+              </a:cxn>
+              <a:cxn ang="0">
+                <a:pos x="connsiteX9" y="connsiteY9"/>
+              </a:cxn>
+              <a:cxn ang="0">
+                <a:pos x="connsiteX10" y="connsiteY10"/>
+              </a:cxn>
+              <a:cxn ang="0">
+                <a:pos x="connsiteX11" y="connsiteY11"/>
+              </a:cxn>
+            </a:cxnLst>
+            <a:rect l="l" t="t" r="r" b="b"/>
+            <a:pathLst>
+              <a:path w="3255095" h="18288" fill="none" extrusionOk="0">
+                <a:moveTo>
+                  <a:pt x="0" y="0"/>
+                </a:moveTo>
+                <a:cubicBezTo>
+                  <a:pt x="240201" y="-22123"/>
+                  <a:pt x="462021" y="-19623"/>
+                  <a:pt x="618468" y="0"/>
+                </a:cubicBezTo>
+                <a:cubicBezTo>
+                  <a:pt x="774915" y="19623"/>
+                  <a:pt x="974734" y="2035"/>
+                  <a:pt x="1269487" y="0"/>
+                </a:cubicBezTo>
+                <a:cubicBezTo>
+                  <a:pt x="1564240" y="-2035"/>
+                  <a:pt x="1733579" y="10639"/>
+                  <a:pt x="1953057" y="0"/>
+                </a:cubicBezTo>
+                <a:cubicBezTo>
+                  <a:pt x="2172535" y="-10639"/>
+                  <a:pt x="2453962" y="14018"/>
+                  <a:pt x="2636627" y="0"/>
+                </a:cubicBezTo>
+                <a:cubicBezTo>
+                  <a:pt x="2819292" y="-14018"/>
+                  <a:pt x="3121375" y="5399"/>
+                  <a:pt x="3255095" y="0"/>
+                </a:cubicBezTo>
+                <a:cubicBezTo>
+                  <a:pt x="3254386" y="8157"/>
+                  <a:pt x="3254682" y="12125"/>
+                  <a:pt x="3255095" y="18288"/>
+                </a:cubicBezTo>
+                <a:cubicBezTo>
+                  <a:pt x="3088545" y="23203"/>
+                  <a:pt x="2687475" y="7419"/>
+                  <a:pt x="2538974" y="18288"/>
+                </a:cubicBezTo>
+                <a:cubicBezTo>
+                  <a:pt x="2390473" y="29157"/>
+                  <a:pt x="2137381" y="-8959"/>
+                  <a:pt x="1822853" y="18288"/>
+                </a:cubicBezTo>
+                <a:cubicBezTo>
+                  <a:pt x="1508325" y="45535"/>
+                  <a:pt x="1466437" y="20385"/>
+                  <a:pt x="1171834" y="18288"/>
+                </a:cubicBezTo>
+                <a:cubicBezTo>
+                  <a:pt x="877231" y="16191"/>
+                  <a:pt x="561097" y="37643"/>
+                  <a:pt x="0" y="18288"/>
+                </a:cubicBezTo>
+                <a:cubicBezTo>
+                  <a:pt x="-46" y="12483"/>
+                  <a:pt x="-203" y="6491"/>
+                  <a:pt x="0" y="0"/>
+                </a:cubicBezTo>
+                <a:close/>
+              </a:path>
+              <a:path w="3255095" h="18288" stroke="0" extrusionOk="0">
+                <a:moveTo>
+                  <a:pt x="0" y="0"/>
+                </a:moveTo>
+                <a:cubicBezTo>
+                  <a:pt x="291965" y="19429"/>
+                  <a:pt x="363155" y="8568"/>
+                  <a:pt x="618468" y="0"/>
+                </a:cubicBezTo>
+                <a:cubicBezTo>
+                  <a:pt x="873781" y="-8568"/>
+                  <a:pt x="904459" y="-19505"/>
+                  <a:pt x="1171834" y="0"/>
+                </a:cubicBezTo>
+                <a:cubicBezTo>
+                  <a:pt x="1439209" y="19505"/>
+                  <a:pt x="1744369" y="9790"/>
+                  <a:pt x="1887955" y="0"/>
+                </a:cubicBezTo>
+                <a:cubicBezTo>
+                  <a:pt x="2031541" y="-9790"/>
+                  <a:pt x="2346378" y="21240"/>
+                  <a:pt x="2506423" y="0"/>
+                </a:cubicBezTo>
+                <a:cubicBezTo>
+                  <a:pt x="2666468" y="-21240"/>
+                  <a:pt x="2990257" y="30414"/>
+                  <a:pt x="3255095" y="0"/>
+                </a:cubicBezTo>
+                <a:cubicBezTo>
+                  <a:pt x="3254831" y="4493"/>
+                  <a:pt x="3255479" y="9472"/>
+                  <a:pt x="3255095" y="18288"/>
+                </a:cubicBezTo>
+                <a:cubicBezTo>
+                  <a:pt x="3120743" y="16690"/>
+                  <a:pt x="2759628" y="42462"/>
+                  <a:pt x="2604076" y="18288"/>
+                </a:cubicBezTo>
+                <a:cubicBezTo>
+                  <a:pt x="2448524" y="-5886"/>
+                  <a:pt x="2184336" y="19599"/>
+                  <a:pt x="1887955" y="18288"/>
+                </a:cubicBezTo>
+                <a:cubicBezTo>
+                  <a:pt x="1591574" y="16977"/>
+                  <a:pt x="1548845" y="6870"/>
+                  <a:pt x="1334589" y="18288"/>
+                </a:cubicBezTo>
+                <a:cubicBezTo>
+                  <a:pt x="1120333" y="29706"/>
+                  <a:pt x="996014" y="9662"/>
+                  <a:pt x="683570" y="18288"/>
+                </a:cubicBezTo>
+                <a:cubicBezTo>
+                  <a:pt x="371126" y="26914"/>
+                  <a:pt x="198687" y="16167"/>
+                  <a:pt x="0" y="18288"/>
+                </a:cubicBezTo>
+                <a:cubicBezTo>
+                  <a:pt x="843" y="9577"/>
+                  <a:pt x="371" y="6900"/>
+                  <a:pt x="0" y="0"/>
+                </a:cubicBezTo>
+                <a:close/>
+              </a:path>
+            </a:pathLst>
+          </a:custGeom>
+          <a:solidFill>
+            <a:schemeClr val="accent2"/>
+          </a:solidFill>
+          <a:ln w="38100" cap="rnd">
+            <a:solidFill>
+              <a:schemeClr val="accent2"/>
+            </a:solidFill>
+            <a:round/>
+            <a:extLst>
+              <a:ext uri="{C807C97D-BFC1-408E-A445-0C87EB9F89A2}">
+                <ask:lineSketchStyleProps xmlns:ask="http://schemas.microsoft.com/office/drawing/2018/sketchyshapes" sd="1219033472">
+                  <a:prstGeom prst="rect">
+                    <a:avLst/>
+                  </a:prstGeom>
+                  <ask:type>
+                    <ask:lineSketchFreehand/>
+                  </ask:type>
+                </ask:lineSketchStyleProps>
+              </a:ext>
+            </a:extLst>
+          </a:ln>
+        </p:spPr>
+        <p:style>
+          <a:lnRef idx="2">
+            <a:schemeClr val="accent1">
+              <a:shade val="50000"/>
+            </a:schemeClr>
+          </a:lnRef>
+          <a:fillRef idx="1">
+            <a:schemeClr val="accent1"/>
+          </a:fillRef>
+          <a:effectRef idx="0">
+            <a:schemeClr val="accent1"/>
+          </a:effectRef>
+          <a:fontRef idx="minor">
+            <a:schemeClr val="lt1"/>
+          </a:fontRef>
+        </p:style>
+        <p:txBody>
+          <a:bodyPr rtlCol="0" anchor="ctr"/>
+          <a:lstStyle/>
+          <a:p>
+            <a:pPr algn="ctr"/>
+            <a:endParaRPr lang="en-US"/>
+          </a:p>
+        </p:txBody>
+      </p:sp>
+      <p:sp>
+        <p:nvSpPr>
+          <p:cNvPr id="3" name="Content Placeholder 2">
+            <a:extLst>
+              <a:ext uri="{FF2B5EF4-FFF2-40B4-BE49-F238E27FC236}">
+                <a16:creationId xmlns:a16="http://schemas.microsoft.com/office/drawing/2014/main" id="{E50BC489-EA73-CEFB-BFFB-8D3BABA50272}"/>
+              </a:ext>
+            </a:extLst>
+          </p:cNvPr>
+          <p:cNvSpPr>
+            <a:spLocks noGrp="1"/>
+          </p:cNvSpPr>
+          <p:nvPr>
+            <p:ph idx="1"/>
+          </p:nvPr>
+        </p:nvSpPr>
+        <p:spPr>
+          <a:xfrm>
+            <a:off x="630936" y="2660904"/>
+            <a:ext cx="5144222" cy="3547872"/>
           </a:xfrm>
         </p:spPr>
         <p:txBody>
-          <a:bodyPr/>
+          <a:bodyPr anchor="t">
+            <a:normAutofit/>
+          </a:bodyPr>
           <a:lstStyle/>
           <a:p>
             <a:pPr marL="0" indent="0">
+              <a:lnSpc>
+                <a:spcPct val="150000"/>
+              </a:lnSpc>
               <a:buNone/>
             </a:pPr>
             <a:r>
-              <a:rPr lang="en-US" i="1">
+              <a:rPr lang="en-US" b="1">
                 <a:latin typeface="Times New Roman" panose="02020603050405020304" pitchFamily="18" charset="0"/>
                 <a:cs typeface="Times New Roman" panose="02020603050405020304" pitchFamily="18" charset="0"/>
               </a:rPr>
@@ -5692,19 +8884,199 @@
             </a:r>
           </a:p>
           <a:p>
-            <a:pPr marL="0" indent="0">
-              <a:buNone/>
-            </a:pPr>
+            <a:r>
+              <a:rPr lang="en-US" sz="2000">
+                <a:latin typeface="Times New Roman" panose="02020603050405020304" pitchFamily="18" charset="0"/>
+                <a:cs typeface="Times New Roman" panose="02020603050405020304" pitchFamily="18" charset="0"/>
+              </a:rPr>
+              <a:t>Có tổng cộng </a:t>
+            </a:r>
+            <a:r>
+              <a:rPr lang="en-US" sz="2000" b="1" i="1">
+                <a:latin typeface="Times New Roman" panose="02020603050405020304" pitchFamily="18" charset="0"/>
+                <a:cs typeface="Times New Roman" panose="02020603050405020304" pitchFamily="18" charset="0"/>
+              </a:rPr>
+              <a:t>1121 tài liệu </a:t>
+            </a:r>
+            <a:r>
+              <a:rPr lang="en-US" sz="2000">
+                <a:latin typeface="Times New Roman" panose="02020603050405020304" pitchFamily="18" charset="0"/>
+                <a:cs typeface="Times New Roman" panose="02020603050405020304" pitchFamily="18" charset="0"/>
+              </a:rPr>
+              <a:t>các loại.</a:t>
+            </a:r>
+          </a:p>
+          <a:p>
+            <a:r>
+              <a:rPr lang="en-US" sz="2000">
+                <a:latin typeface="Times New Roman" panose="02020603050405020304" pitchFamily="18" charset="0"/>
+                <a:cs typeface="Times New Roman" panose="02020603050405020304" pitchFamily="18" charset="0"/>
+              </a:rPr>
+              <a:t>Tài liệu có </a:t>
+            </a:r>
+            <a:r>
+              <a:rPr lang="en-US" sz="2000" b="1" i="1">
+                <a:latin typeface="Times New Roman" panose="02020603050405020304" pitchFamily="18" charset="0"/>
+                <a:cs typeface="Times New Roman" panose="02020603050405020304" pitchFamily="18" charset="0"/>
+              </a:rPr>
+              <a:t>3 loại</a:t>
+            </a:r>
+            <a:r>
+              <a:rPr lang="en-US" sz="2000">
+                <a:latin typeface="Times New Roman" panose="02020603050405020304" pitchFamily="18" charset="0"/>
+                <a:cs typeface="Times New Roman" panose="02020603050405020304" pitchFamily="18" charset="0"/>
+              </a:rPr>
+              <a:t>: </a:t>
+            </a:r>
             <a:r>
               <a:rPr lang="en-US" sz="2000" i="1">
                 <a:latin typeface="Times New Roman" panose="02020603050405020304" pitchFamily="18" charset="0"/>
                 <a:cs typeface="Times New Roman" panose="02020603050405020304" pitchFamily="18" charset="0"/>
               </a:rPr>
-              <a:t>(hình số liệu của tập tài liệu + giải thích hình)</a:t>
-            </a:r>
-          </a:p>
-        </p:txBody>
-      </p:sp>
+              <a:t>chapter</a:t>
+            </a:r>
+            <a:r>
+              <a:rPr lang="en-US" sz="2000">
+                <a:latin typeface="Times New Roman" panose="02020603050405020304" pitchFamily="18" charset="0"/>
+                <a:cs typeface="Times New Roman" panose="02020603050405020304" pitchFamily="18" charset="0"/>
+              </a:rPr>
+              <a:t> (chương), </a:t>
+            </a:r>
+            <a:r>
+              <a:rPr lang="en-US" sz="2000" i="1">
+                <a:latin typeface="Times New Roman" panose="02020603050405020304" pitchFamily="18" charset="0"/>
+                <a:cs typeface="Times New Roman" panose="02020603050405020304" pitchFamily="18" charset="0"/>
+              </a:rPr>
+              <a:t>lesson</a:t>
+            </a:r>
+            <a:r>
+              <a:rPr lang="en-US" sz="2000">
+                <a:latin typeface="Times New Roman" panose="02020603050405020304" pitchFamily="18" charset="0"/>
+                <a:cs typeface="Times New Roman" panose="02020603050405020304" pitchFamily="18" charset="0"/>
+              </a:rPr>
+              <a:t> (bài học) và </a:t>
+            </a:r>
+            <a:r>
+              <a:rPr lang="en-US" sz="2000" i="1">
+                <a:latin typeface="Times New Roman" panose="02020603050405020304" pitchFamily="18" charset="0"/>
+                <a:cs typeface="Times New Roman" panose="02020603050405020304" pitchFamily="18" charset="0"/>
+              </a:rPr>
+              <a:t>title</a:t>
+            </a:r>
+            <a:r>
+              <a:rPr lang="en-US" sz="2000">
+                <a:latin typeface="Times New Roman" panose="02020603050405020304" pitchFamily="18" charset="0"/>
+                <a:cs typeface="Times New Roman" panose="02020603050405020304" pitchFamily="18" charset="0"/>
+              </a:rPr>
+              <a:t> (câu hỏi hoặc tiêu đề).</a:t>
+            </a:r>
+          </a:p>
+          <a:p>
+            <a:r>
+              <a:rPr lang="en-US" sz="2000">
+                <a:latin typeface="Times New Roman" panose="02020603050405020304" pitchFamily="18" charset="0"/>
+                <a:cs typeface="Times New Roman" panose="02020603050405020304" pitchFamily="18" charset="0"/>
+              </a:rPr>
+              <a:t>Tài liệu loại </a:t>
+            </a:r>
+            <a:r>
+              <a:rPr lang="en-US" sz="2000" i="1">
+                <a:latin typeface="Times New Roman" panose="02020603050405020304" pitchFamily="18" charset="0"/>
+                <a:cs typeface="Times New Roman" panose="02020603050405020304" pitchFamily="18" charset="0"/>
+              </a:rPr>
+              <a:t>title</a:t>
+            </a:r>
+            <a:r>
+              <a:rPr lang="en-US" sz="2000">
+                <a:latin typeface="Times New Roman" panose="02020603050405020304" pitchFamily="18" charset="0"/>
+                <a:cs typeface="Times New Roman" panose="02020603050405020304" pitchFamily="18" charset="0"/>
+              </a:rPr>
+              <a:t> chiếm </a:t>
+            </a:r>
+            <a:r>
+              <a:rPr lang="en-US" sz="2000" b="1" i="1">
+                <a:latin typeface="Times New Roman" panose="02020603050405020304" pitchFamily="18" charset="0"/>
+                <a:cs typeface="Times New Roman" panose="02020603050405020304" pitchFamily="18" charset="0"/>
+              </a:rPr>
+              <a:t>phần lớn số lượng </a:t>
+            </a:r>
+            <a:r>
+              <a:rPr lang="en-US" sz="2000">
+                <a:latin typeface="Times New Roman" panose="02020603050405020304" pitchFamily="18" charset="0"/>
+                <a:cs typeface="Times New Roman" panose="02020603050405020304" pitchFamily="18" charset="0"/>
+              </a:rPr>
+              <a:t>tài liệu thu thập được.</a:t>
+            </a:r>
+          </a:p>
+          <a:p>
+            <a:r>
+              <a:rPr lang="en-US" sz="2000">
+                <a:latin typeface="Times New Roman" panose="02020603050405020304" pitchFamily="18" charset="0"/>
+                <a:cs typeface="Times New Roman" panose="02020603050405020304" pitchFamily="18" charset="0"/>
+              </a:rPr>
+              <a:t>Tài liệu loại </a:t>
+            </a:r>
+            <a:r>
+              <a:rPr lang="en-US" sz="2000" i="1">
+                <a:latin typeface="Times New Roman" panose="02020603050405020304" pitchFamily="18" charset="0"/>
+                <a:cs typeface="Times New Roman" panose="02020603050405020304" pitchFamily="18" charset="0"/>
+              </a:rPr>
+              <a:t>title</a:t>
+            </a:r>
+            <a:r>
+              <a:rPr lang="en-US" sz="2000">
+                <a:latin typeface="Times New Roman" panose="02020603050405020304" pitchFamily="18" charset="0"/>
+                <a:cs typeface="Times New Roman" panose="02020603050405020304" pitchFamily="18" charset="0"/>
+              </a:rPr>
+              <a:t> có </a:t>
+            </a:r>
+            <a:r>
+              <a:rPr lang="en-US" sz="2000" b="1" i="1">
+                <a:latin typeface="Times New Roman" panose="02020603050405020304" pitchFamily="18" charset="0"/>
+                <a:cs typeface="Times New Roman" panose="02020603050405020304" pitchFamily="18" charset="0"/>
+              </a:rPr>
+              <a:t>độ dài (đơn vị từ) </a:t>
+            </a:r>
+            <a:r>
+              <a:rPr lang="en-US" sz="2000">
+                <a:latin typeface="Times New Roman" panose="02020603050405020304" pitchFamily="18" charset="0"/>
+                <a:cs typeface="Times New Roman" panose="02020603050405020304" pitchFamily="18" charset="0"/>
+              </a:rPr>
+              <a:t>vượt trội so với các loại tài liệu còn lại.</a:t>
+            </a:r>
+          </a:p>
+        </p:txBody>
+      </p:sp>
+      <p:pic>
+        <p:nvPicPr>
+          <p:cNvPr id="4" name="Picture 3" descr="A green graph with white text&#10;&#10;AI-generated content may be incorrect.">
+            <a:extLst>
+              <a:ext uri="{FF2B5EF4-FFF2-40B4-BE49-F238E27FC236}">
+                <a16:creationId xmlns:a16="http://schemas.microsoft.com/office/drawing/2014/main" id="{5E9C202C-3520-3FA0-68AD-F02B840B6AEB}"/>
+              </a:ext>
+            </a:extLst>
+          </p:cNvPr>
+          <p:cNvPicPr>
+            <a:picLocks noChangeAspect="1"/>
+          </p:cNvPicPr>
+          <p:nvPr/>
+        </p:nvPicPr>
+        <p:blipFill>
+          <a:blip r:embed="rId2"/>
+          <a:stretch>
+            <a:fillRect/>
+          </a:stretch>
+        </p:blipFill>
+        <p:spPr>
+          <a:xfrm>
+            <a:off x="5775158" y="2077905"/>
+            <a:ext cx="5782858" cy="2862513"/>
+          </a:xfrm>
+          <a:prstGeom prst="rect">
+            <a:avLst/>
+          </a:prstGeom>
+        </p:spPr>
+      </p:pic>
     </p:spTree>
     <p:extLst>
       <p:ext uri="{BB962C8B-B14F-4D97-AF65-F5344CB8AC3E}">
@@ -5718,7 +9090,7 @@
 </p:sld>
 </file>
 
-<file path=ppt/slides/slide22.xml><?xml version="1.0" encoding="utf-8"?>
+<file path=ppt/slides/slide23.xml><?xml version="1.0" encoding="utf-8"?>
 <p:sld xmlns:a="http://schemas.openxmlformats.org/drawingml/2006/main" xmlns:r="http://schemas.openxmlformats.org/officeDocument/2006/relationships" xmlns:p="http://schemas.openxmlformats.org/presentationml/2006/main">
   <p:cSld>
     <p:spTree>
@@ -5843,7 +9215,7 @@
 </p:sld>
 </file>
 
-<file path=ppt/slides/slide23.xml><?xml version="1.0" encoding="utf-8"?>
+<file path=ppt/slides/slide24.xml><?xml version="1.0" encoding="utf-8"?>
 <p:sld xmlns:a="http://schemas.openxmlformats.org/drawingml/2006/main" xmlns:r="http://schemas.openxmlformats.org/officeDocument/2006/relationships" xmlns:p="http://schemas.openxmlformats.org/presentationml/2006/main">
   <p:cSld>
     <p:spTree>
@@ -5980,7 +9352,7 @@
 </p:sld>
 </file>
 
-<file path=ppt/slides/slide24.xml><?xml version="1.0" encoding="utf-8"?>
+<file path=ppt/slides/slide25.xml><?xml version="1.0" encoding="utf-8"?>
 <p:sld xmlns:a="http://schemas.openxmlformats.org/drawingml/2006/main" xmlns:r="http://schemas.openxmlformats.org/officeDocument/2006/relationships" xmlns:p="http://schemas.openxmlformats.org/presentationml/2006/main">
   <p:cSld>
     <p:spTree>
@@ -6117,7 +9489,7 @@
 </p:sld>
 </file>
 
-<file path=ppt/slides/slide25.xml><?xml version="1.0" encoding="utf-8"?>
+<file path=ppt/slides/slide26.xml><?xml version="1.0" encoding="utf-8"?>
 <p:sld xmlns:a="http://schemas.openxmlformats.org/drawingml/2006/main" xmlns:r="http://schemas.openxmlformats.org/officeDocument/2006/relationships" xmlns:p="http://schemas.openxmlformats.org/presentationml/2006/main">
   <p:cSld>
     <p:spTree>
@@ -6254,7 +9626,7 @@
 </p:sld>
 </file>
 
-<file path=ppt/slides/slide26.xml><?xml version="1.0" encoding="utf-8"?>
+<file path=ppt/slides/slide27.xml><?xml version="1.0" encoding="utf-8"?>
 <p:sld xmlns:a="http://schemas.openxmlformats.org/drawingml/2006/main" xmlns:r="http://schemas.openxmlformats.org/officeDocument/2006/relationships" xmlns:p="http://schemas.openxmlformats.org/presentationml/2006/main">
   <p:cSld>
     <p:spTree>
@@ -6391,7 +9763,7 @@
 </p:sld>
 </file>
 
-<file path=ppt/slides/slide27.xml><?xml version="1.0" encoding="utf-8"?>
+<file path=ppt/slides/slide28.xml><?xml version="1.0" encoding="utf-8"?>
 <p:sld xmlns:a="http://schemas.openxmlformats.org/drawingml/2006/main" xmlns:r="http://schemas.openxmlformats.org/officeDocument/2006/relationships" xmlns:p="http://schemas.openxmlformats.org/presentationml/2006/main">
   <p:cSld>
     <p:spTree>
@@ -6528,7 +9900,7 @@
 </p:sld>
 </file>
 
-<file path=ppt/slides/slide28.xml><?xml version="1.0" encoding="utf-8"?>
+<file path=ppt/slides/slide29.xml><?xml version="1.0" encoding="utf-8"?>
 <p:sld xmlns:a="http://schemas.openxmlformats.org/drawingml/2006/main" xmlns:r="http://schemas.openxmlformats.org/officeDocument/2006/relationships" xmlns:p="http://schemas.openxmlformats.org/presentationml/2006/main">
   <p:cSld>
     <p:spTree>
@@ -6656,143 +10028,6 @@
     <p:extLst>
       <p:ext uri="{BB962C8B-B14F-4D97-AF65-F5344CB8AC3E}">
         <p14:creationId xmlns:p14="http://schemas.microsoft.com/office/powerpoint/2010/main" val="288812920"/>
-      </p:ext>
-    </p:extLst>
-  </p:cSld>
-  <p:clrMapOvr>
-    <a:masterClrMapping/>
-  </p:clrMapOvr>
-</p:sld>
-</file>
-
-<file path=ppt/slides/slide29.xml><?xml version="1.0" encoding="utf-8"?>
-<p:sld xmlns:a="http://schemas.openxmlformats.org/drawingml/2006/main" xmlns:r="http://schemas.openxmlformats.org/officeDocument/2006/relationships" xmlns:p="http://schemas.openxmlformats.org/presentationml/2006/main">
-  <p:cSld>
-    <p:spTree>
-      <p:nvGrpSpPr>
-        <p:cNvPr id="1" name="">
-          <a:extLst>
-            <a:ext uri="{FF2B5EF4-FFF2-40B4-BE49-F238E27FC236}">
-              <a16:creationId xmlns:a16="http://schemas.microsoft.com/office/drawing/2014/main" id="{0ADE3A4A-73AA-ABAE-32EF-61DDD4F2CBC3}"/>
-            </a:ext>
-          </a:extLst>
-        </p:cNvPr>
-        <p:cNvGrpSpPr/>
-        <p:nvPr/>
-      </p:nvGrpSpPr>
-      <p:grpSpPr>
-        <a:xfrm>
-          <a:off x="0" y="0"/>
-          <a:ext cx="0" cy="0"/>
-          <a:chOff x="0" y="0"/>
-          <a:chExt cx="0" cy="0"/>
-        </a:xfrm>
-      </p:grpSpPr>
-      <p:sp>
-        <p:nvSpPr>
-          <p:cNvPr id="2" name="Title 1">
-            <a:extLst>
-              <a:ext uri="{FF2B5EF4-FFF2-40B4-BE49-F238E27FC236}">
-                <a16:creationId xmlns:a16="http://schemas.microsoft.com/office/drawing/2014/main" id="{C14C944B-9F16-15E9-5335-E5F11FA6E592}"/>
-              </a:ext>
-            </a:extLst>
-          </p:cNvPr>
-          <p:cNvSpPr>
-            <a:spLocks noGrp="1"/>
-          </p:cNvSpPr>
-          <p:nvPr>
-            <p:ph type="title"/>
-          </p:nvPr>
-        </p:nvSpPr>
-        <p:spPr>
-          <a:xfrm>
-            <a:off x="838200" y="365125"/>
-            <a:ext cx="10515600" cy="1030537"/>
-          </a:xfrm>
-        </p:spPr>
-        <p:txBody>
-          <a:bodyPr>
-            <a:normAutofit/>
-          </a:bodyPr>
-          <a:lstStyle/>
-          <a:p>
-            <a:r>
-              <a:rPr lang="en-US" sz="4000" b="1">
-                <a:latin typeface="Times New Roman" panose="02020603050405020304" pitchFamily="18" charset="0"/>
-                <a:cs typeface="Times New Roman" panose="02020603050405020304" pitchFamily="18" charset="0"/>
-              </a:rPr>
-              <a:t>PHƯƠNG PHÁP ĐỀ XUẤT</a:t>
-            </a:r>
-          </a:p>
-        </p:txBody>
-      </p:sp>
-      <p:sp>
-        <p:nvSpPr>
-          <p:cNvPr id="3" name="Content Placeholder 2">
-            <a:extLst>
-              <a:ext uri="{FF2B5EF4-FFF2-40B4-BE49-F238E27FC236}">
-                <a16:creationId xmlns:a16="http://schemas.microsoft.com/office/drawing/2014/main" id="{B8C4D149-0C86-DE97-DD65-A704DAB3E28B}"/>
-              </a:ext>
-            </a:extLst>
-          </p:cNvPr>
-          <p:cNvSpPr>
-            <a:spLocks noGrp="1"/>
-          </p:cNvSpPr>
-          <p:nvPr>
-            <p:ph idx="1"/>
-          </p:nvPr>
-        </p:nvSpPr>
-        <p:spPr>
-          <a:xfrm>
-            <a:off x="838200" y="1395662"/>
-            <a:ext cx="10515600" cy="4781301"/>
-          </a:xfrm>
-        </p:spPr>
-        <p:txBody>
-          <a:bodyPr/>
-          <a:lstStyle/>
-          <a:p>
-            <a:pPr marL="0" indent="0">
-              <a:buNone/>
-            </a:pPr>
-            <a:r>
-              <a:rPr lang="en-US" i="1">
-                <a:latin typeface="Times New Roman" panose="02020603050405020304" pitchFamily="18" charset="0"/>
-                <a:cs typeface="Times New Roman" panose="02020603050405020304" pitchFamily="18" charset="0"/>
-              </a:rPr>
-              <a:t>3.6. Mô hình embedding đề xuất</a:t>
-            </a:r>
-          </a:p>
-          <a:p>
-            <a:pPr marL="0" indent="0">
-              <a:buNone/>
-            </a:pPr>
-            <a:r>
-              <a:rPr lang="en-US" sz="2400" i="1">
-                <a:latin typeface="Times New Roman" panose="02020603050405020304" pitchFamily="18" charset="0"/>
-                <a:cs typeface="Times New Roman" panose="02020603050405020304" pitchFamily="18" charset="0"/>
-              </a:rPr>
-              <a:t>3.6.5. Đánh giá hiệu quả embedding</a:t>
-            </a:r>
-          </a:p>
-          <a:p>
-            <a:pPr marL="0" indent="0">
-              <a:buNone/>
-            </a:pPr>
-            <a:r>
-              <a:rPr lang="en-US" sz="2000" i="1">
-                <a:latin typeface="Times New Roman" panose="02020603050405020304" pitchFamily="18" charset="0"/>
-                <a:cs typeface="Times New Roman" panose="02020603050405020304" pitchFamily="18" charset="0"/>
-              </a:rPr>
-              <a:t>(bảng kết quả đánh giá hiệu quả embedding)</a:t>
-            </a:r>
-          </a:p>
-        </p:txBody>
-      </p:sp>
-    </p:spTree>
-    <p:extLst>
-      <p:ext uri="{BB962C8B-B14F-4D97-AF65-F5344CB8AC3E}">
-        <p14:creationId xmlns:p14="http://schemas.microsoft.com/office/powerpoint/2010/main" val="2656953229"/>
       </p:ext>
     </p:extLst>
   </p:cSld>
@@ -6911,6 +10146,143 @@
         <p:cNvPr id="1" name="">
           <a:extLst>
             <a:ext uri="{FF2B5EF4-FFF2-40B4-BE49-F238E27FC236}">
+              <a16:creationId xmlns:a16="http://schemas.microsoft.com/office/drawing/2014/main" id="{0ADE3A4A-73AA-ABAE-32EF-61DDD4F2CBC3}"/>
+            </a:ext>
+          </a:extLst>
+        </p:cNvPr>
+        <p:cNvGrpSpPr/>
+        <p:nvPr/>
+      </p:nvGrpSpPr>
+      <p:grpSpPr>
+        <a:xfrm>
+          <a:off x="0" y="0"/>
+          <a:ext cx="0" cy="0"/>
+          <a:chOff x="0" y="0"/>
+          <a:chExt cx="0" cy="0"/>
+        </a:xfrm>
+      </p:grpSpPr>
+      <p:sp>
+        <p:nvSpPr>
+          <p:cNvPr id="2" name="Title 1">
+            <a:extLst>
+              <a:ext uri="{FF2B5EF4-FFF2-40B4-BE49-F238E27FC236}">
+                <a16:creationId xmlns:a16="http://schemas.microsoft.com/office/drawing/2014/main" id="{C14C944B-9F16-15E9-5335-E5F11FA6E592}"/>
+              </a:ext>
+            </a:extLst>
+          </p:cNvPr>
+          <p:cNvSpPr>
+            <a:spLocks noGrp="1"/>
+          </p:cNvSpPr>
+          <p:nvPr>
+            <p:ph type="title"/>
+          </p:nvPr>
+        </p:nvSpPr>
+        <p:spPr>
+          <a:xfrm>
+            <a:off x="838200" y="365125"/>
+            <a:ext cx="10515600" cy="1030537"/>
+          </a:xfrm>
+        </p:spPr>
+        <p:txBody>
+          <a:bodyPr>
+            <a:normAutofit/>
+          </a:bodyPr>
+          <a:lstStyle/>
+          <a:p>
+            <a:r>
+              <a:rPr lang="en-US" sz="4000" b="1">
+                <a:latin typeface="Times New Roman" panose="02020603050405020304" pitchFamily="18" charset="0"/>
+                <a:cs typeface="Times New Roman" panose="02020603050405020304" pitchFamily="18" charset="0"/>
+              </a:rPr>
+              <a:t>PHƯƠNG PHÁP ĐỀ XUẤT</a:t>
+            </a:r>
+          </a:p>
+        </p:txBody>
+      </p:sp>
+      <p:sp>
+        <p:nvSpPr>
+          <p:cNvPr id="3" name="Content Placeholder 2">
+            <a:extLst>
+              <a:ext uri="{FF2B5EF4-FFF2-40B4-BE49-F238E27FC236}">
+                <a16:creationId xmlns:a16="http://schemas.microsoft.com/office/drawing/2014/main" id="{B8C4D149-0C86-DE97-DD65-A704DAB3E28B}"/>
+              </a:ext>
+            </a:extLst>
+          </p:cNvPr>
+          <p:cNvSpPr>
+            <a:spLocks noGrp="1"/>
+          </p:cNvSpPr>
+          <p:nvPr>
+            <p:ph idx="1"/>
+          </p:nvPr>
+        </p:nvSpPr>
+        <p:spPr>
+          <a:xfrm>
+            <a:off x="838200" y="1395662"/>
+            <a:ext cx="10515600" cy="4781301"/>
+          </a:xfrm>
+        </p:spPr>
+        <p:txBody>
+          <a:bodyPr/>
+          <a:lstStyle/>
+          <a:p>
+            <a:pPr marL="0" indent="0">
+              <a:buNone/>
+            </a:pPr>
+            <a:r>
+              <a:rPr lang="en-US" i="1">
+                <a:latin typeface="Times New Roman" panose="02020603050405020304" pitchFamily="18" charset="0"/>
+                <a:cs typeface="Times New Roman" panose="02020603050405020304" pitchFamily="18" charset="0"/>
+              </a:rPr>
+              <a:t>3.6. Mô hình embedding đề xuất</a:t>
+            </a:r>
+          </a:p>
+          <a:p>
+            <a:pPr marL="0" indent="0">
+              <a:buNone/>
+            </a:pPr>
+            <a:r>
+              <a:rPr lang="en-US" sz="2400" i="1">
+                <a:latin typeface="Times New Roman" panose="02020603050405020304" pitchFamily="18" charset="0"/>
+                <a:cs typeface="Times New Roman" panose="02020603050405020304" pitchFamily="18" charset="0"/>
+              </a:rPr>
+              <a:t>3.6.5. Đánh giá hiệu quả embedding</a:t>
+            </a:r>
+          </a:p>
+          <a:p>
+            <a:pPr marL="0" indent="0">
+              <a:buNone/>
+            </a:pPr>
+            <a:r>
+              <a:rPr lang="en-US" sz="2000" i="1">
+                <a:latin typeface="Times New Roman" panose="02020603050405020304" pitchFamily="18" charset="0"/>
+                <a:cs typeface="Times New Roman" panose="02020603050405020304" pitchFamily="18" charset="0"/>
+              </a:rPr>
+              <a:t>(bảng kết quả đánh giá hiệu quả embedding)</a:t>
+            </a:r>
+          </a:p>
+        </p:txBody>
+      </p:sp>
+    </p:spTree>
+    <p:extLst>
+      <p:ext uri="{BB962C8B-B14F-4D97-AF65-F5344CB8AC3E}">
+        <p14:creationId xmlns:p14="http://schemas.microsoft.com/office/powerpoint/2010/main" val="2656953229"/>
+      </p:ext>
+    </p:extLst>
+  </p:cSld>
+  <p:clrMapOvr>
+    <a:masterClrMapping/>
+  </p:clrMapOvr>
+</p:sld>
+</file>
+
+<file path=ppt/slides/slide31.xml><?xml version="1.0" encoding="utf-8"?>
+<p:sld xmlns:a="http://schemas.openxmlformats.org/drawingml/2006/main" xmlns:r="http://schemas.openxmlformats.org/officeDocument/2006/relationships" xmlns:p="http://schemas.openxmlformats.org/presentationml/2006/main">
+  <p:cSld>
+    <p:spTree>
+      <p:nvGrpSpPr>
+        <p:cNvPr id="1" name="">
+          <a:extLst>
+            <a:ext uri="{FF2B5EF4-FFF2-40B4-BE49-F238E27FC236}">
               <a16:creationId xmlns:a16="http://schemas.microsoft.com/office/drawing/2014/main" id="{7D4DC1EB-57D0-CE2E-F804-8293C37DA528}"/>
             </a:ext>
           </a:extLst>
@@ -7040,7 +10412,7 @@
 </p:sld>
 </file>
 
-<file path=ppt/slides/slide31.xml><?xml version="1.0" encoding="utf-8"?>
+<file path=ppt/slides/slide32.xml><?xml version="1.0" encoding="utf-8"?>
 <p:sld xmlns:a="http://schemas.openxmlformats.org/drawingml/2006/main" xmlns:r="http://schemas.openxmlformats.org/officeDocument/2006/relationships" xmlns:p="http://schemas.openxmlformats.org/presentationml/2006/main">
   <p:cSld>
     <p:spTree>
@@ -7165,7 +10537,7 @@
 </p:sld>
 </file>
 
-<file path=ppt/slides/slide32.xml><?xml version="1.0" encoding="utf-8"?>
+<file path=ppt/slides/slide33.xml><?xml version="1.0" encoding="utf-8"?>
 <p:sld xmlns:a="http://schemas.openxmlformats.org/drawingml/2006/main" xmlns:r="http://schemas.openxmlformats.org/officeDocument/2006/relationships" xmlns:p="http://schemas.openxmlformats.org/presentationml/2006/main">
   <p:cSld>
     <p:spTree>
@@ -7290,7 +10662,7 @@
 </p:sld>
 </file>
 
-<file path=ppt/slides/slide33.xml><?xml version="1.0" encoding="utf-8"?>
+<file path=ppt/slides/slide34.xml><?xml version="1.0" encoding="utf-8"?>
 <p:sld xmlns:a="http://schemas.openxmlformats.org/drawingml/2006/main" xmlns:r="http://schemas.openxmlformats.org/officeDocument/2006/relationships" xmlns:p="http://schemas.openxmlformats.org/presentationml/2006/main">
   <p:cSld>
     <p:spTree>
@@ -7434,7 +10806,7 @@
 </p:sld>
 </file>
 
-<file path=ppt/slides/slide34.xml><?xml version="1.0" encoding="utf-8"?>
+<file path=ppt/slides/slide35.xml><?xml version="1.0" encoding="utf-8"?>
 <p:sld xmlns:a="http://schemas.openxmlformats.org/drawingml/2006/main" xmlns:r="http://schemas.openxmlformats.org/officeDocument/2006/relationships" xmlns:p="http://schemas.openxmlformats.org/presentationml/2006/main">
   <p:cSld>
     <p:spTree>
@@ -7571,7 +10943,7 @@
 </p:sld>
 </file>
 
-<file path=ppt/slides/slide35.xml><?xml version="1.0" encoding="utf-8"?>
+<file path=ppt/slides/slide36.xml><?xml version="1.0" encoding="utf-8"?>
 <p:sld xmlns:a="http://schemas.openxmlformats.org/drawingml/2006/main" xmlns:r="http://schemas.openxmlformats.org/officeDocument/2006/relationships" xmlns:p="http://schemas.openxmlformats.org/presentationml/2006/main">
   <p:cSld>
     <p:spTree>
@@ -7708,7 +11080,7 @@
 </p:sld>
 </file>
 
-<file path=ppt/slides/slide36.xml><?xml version="1.0" encoding="utf-8"?>
+<file path=ppt/slides/slide37.xml><?xml version="1.0" encoding="utf-8"?>
 <p:sld xmlns:a="http://schemas.openxmlformats.org/drawingml/2006/main" xmlns:r="http://schemas.openxmlformats.org/officeDocument/2006/relationships" xmlns:p="http://schemas.openxmlformats.org/presentationml/2006/main">
   <p:cSld>
     <p:spTree>
@@ -7849,7 +11221,7 @@
 </p:sld>
 </file>
 
-<file path=ppt/slides/slide37.xml><?xml version="1.0" encoding="utf-8"?>
+<file path=ppt/slides/slide38.xml><?xml version="1.0" encoding="utf-8"?>
 <p:sld xmlns:a="http://schemas.openxmlformats.org/drawingml/2006/main" xmlns:r="http://schemas.openxmlformats.org/officeDocument/2006/relationships" xmlns:p="http://schemas.openxmlformats.org/presentationml/2006/main">
   <p:cSld>
     <p:spTree>
@@ -7990,7 +11362,7 @@
 </p:sld>
 </file>
 
-<file path=ppt/slides/slide38.xml><?xml version="1.0" encoding="utf-8"?>
+<file path=ppt/slides/slide39.xml><?xml version="1.0" encoding="utf-8"?>
 <p:sld xmlns:a="http://schemas.openxmlformats.org/drawingml/2006/main" xmlns:r="http://schemas.openxmlformats.org/officeDocument/2006/relationships" xmlns:p="http://schemas.openxmlformats.org/presentationml/2006/main">
   <p:cSld>
     <p:spTree>
@@ -8131,7 +11503,686 @@
 </p:sld>
 </file>
 
-<file path=ppt/slides/slide39.xml><?xml version="1.0" encoding="utf-8"?>
+<file path=ppt/slides/slide4.xml><?xml version="1.0" encoding="utf-8"?>
+<p:sld xmlns:a="http://schemas.openxmlformats.org/drawingml/2006/main" xmlns:r="http://schemas.openxmlformats.org/officeDocument/2006/relationships" xmlns:p="http://schemas.openxmlformats.org/presentationml/2006/main">
+  <p:cSld>
+    <p:bg>
+      <p:bgPr>
+        <a:solidFill>
+          <a:schemeClr val="bg1"/>
+        </a:solidFill>
+        <a:effectLst/>
+      </p:bgPr>
+    </p:bg>
+    <p:spTree>
+      <p:nvGrpSpPr>
+        <p:cNvPr id="1" name=""/>
+        <p:cNvGrpSpPr/>
+        <p:nvPr/>
+      </p:nvGrpSpPr>
+      <p:grpSpPr>
+        <a:xfrm>
+          <a:off x="0" y="0"/>
+          <a:ext cx="0" cy="0"/>
+          <a:chOff x="0" y="0"/>
+          <a:chExt cx="0" cy="0"/>
+        </a:xfrm>
+      </p:grpSpPr>
+      <p:sp useBgFill="1">
+        <p:nvSpPr>
+          <p:cNvPr id="14" name="Rectangle 13">
+            <a:extLst>
+              <a:ext uri="{FF2B5EF4-FFF2-40B4-BE49-F238E27FC236}">
+                <a16:creationId xmlns:a16="http://schemas.microsoft.com/office/drawing/2014/main" id="{53B475F8-50AE-46A0-9943-B2B63183D50C}"/>
+              </a:ext>
+              <a:ext uri="{C183D7F6-B498-43B3-948B-1728B52AA6E4}">
+                <adec:decorative xmlns:adec="http://schemas.microsoft.com/office/drawing/2017/decorative" val="1"/>
+              </a:ext>
+            </a:extLst>
+          </p:cNvPr>
+          <p:cNvSpPr>
+            <a:spLocks noGrp="1" noRot="1" noChangeAspect="1" noMove="1" noResize="1" noEditPoints="1" noAdjustHandles="1" noChangeArrowheads="1" noChangeShapeType="1" noTextEdit="1"/>
+          </p:cNvSpPr>
+          <p:nvPr>
+            <p:extLst>
+              <p:ext uri="{386F3935-93C4-4BCD-93E2-E3B085C9AB24}">
+                <p16:designElem xmlns:p16="http://schemas.microsoft.com/office/powerpoint/2015/main" val="1"/>
+              </p:ext>
+            </p:extLst>
+          </p:nvPr>
+        </p:nvSpPr>
+        <p:spPr>
+          <a:xfrm>
+            <a:off x="0" y="0"/>
+            <a:ext cx="12188952" cy="6858000"/>
+          </a:xfrm>
+          <a:prstGeom prst="rect">
+            <a:avLst/>
+          </a:prstGeom>
+          <a:ln>
+            <a:noFill/>
+          </a:ln>
+        </p:spPr>
+        <p:style>
+          <a:lnRef idx="2">
+            <a:schemeClr val="accent1">
+              <a:shade val="50000"/>
+            </a:schemeClr>
+          </a:lnRef>
+          <a:fillRef idx="1">
+            <a:schemeClr val="accent1"/>
+          </a:fillRef>
+          <a:effectRef idx="0">
+            <a:schemeClr val="accent1"/>
+          </a:effectRef>
+          <a:fontRef idx="minor">
+            <a:schemeClr val="lt1"/>
+          </a:fontRef>
+        </p:style>
+        <p:txBody>
+          <a:bodyPr rtlCol="0" anchor="ctr"/>
+          <a:lstStyle/>
+          <a:p>
+            <a:pPr algn="ctr"/>
+            <a:endParaRPr lang="en-US"/>
+          </a:p>
+        </p:txBody>
+      </p:sp>
+      <p:sp>
+        <p:nvSpPr>
+          <p:cNvPr id="2" name="Title 1">
+            <a:extLst>
+              <a:ext uri="{FF2B5EF4-FFF2-40B4-BE49-F238E27FC236}">
+                <a16:creationId xmlns:a16="http://schemas.microsoft.com/office/drawing/2014/main" id="{FA9E429C-446C-5C3D-E9F3-E05438AFB75E}"/>
+              </a:ext>
+            </a:extLst>
+          </p:cNvPr>
+          <p:cNvSpPr>
+            <a:spLocks noGrp="1"/>
+          </p:cNvSpPr>
+          <p:nvPr>
+            <p:ph type="title"/>
+          </p:nvPr>
+        </p:nvSpPr>
+        <p:spPr>
+          <a:xfrm>
+            <a:off x="612648" y="365125"/>
+            <a:ext cx="6986015" cy="1776484"/>
+          </a:xfrm>
+        </p:spPr>
+        <p:txBody>
+          <a:bodyPr anchor="b">
+            <a:normAutofit/>
+          </a:bodyPr>
+          <a:lstStyle/>
+          <a:p>
+            <a:r>
+              <a:rPr lang="en-US" sz="5400" b="1">
+                <a:latin typeface="Times New Roman" panose="02020603050405020304" pitchFamily="18" charset="0"/>
+                <a:cs typeface="Times New Roman" panose="02020603050405020304" pitchFamily="18" charset="0"/>
+              </a:rPr>
+              <a:t>GIỚI THIỆU ĐỀ TÀI</a:t>
+            </a:r>
+          </a:p>
+        </p:txBody>
+      </p:sp>
+      <p:pic>
+        <p:nvPicPr>
+          <p:cNvPr id="7" name="Picture 6" descr="A group of logos in a circle&#10;&#10;AI-generated content may be incorrect.">
+            <a:extLst>
+              <a:ext uri="{FF2B5EF4-FFF2-40B4-BE49-F238E27FC236}">
+                <a16:creationId xmlns:a16="http://schemas.microsoft.com/office/drawing/2014/main" id="{C1C2440E-83D8-6DF3-21CD-2DE339B7F38D}"/>
+              </a:ext>
+            </a:extLst>
+          </p:cNvPr>
+          <p:cNvPicPr>
+            <a:picLocks noChangeAspect="1"/>
+          </p:cNvPicPr>
+          <p:nvPr/>
+        </p:nvPicPr>
+        <p:blipFill>
+          <a:blip r:embed="rId2">
+            <a:extLst>
+              <a:ext uri="{28A0092B-C50C-407E-A947-70E740481C1C}">
+                <a14:useLocalDpi xmlns:a14="http://schemas.microsoft.com/office/drawing/2010/main" val="0"/>
+              </a:ext>
+            </a:extLst>
+          </a:blip>
+          <a:stretch>
+            <a:fillRect/>
+          </a:stretch>
+        </p:blipFill>
+        <p:spPr>
+          <a:xfrm>
+            <a:off x="8465231" y="261991"/>
+            <a:ext cx="3360391" cy="1890220"/>
+          </a:xfrm>
+          <a:prstGeom prst="rect">
+            <a:avLst/>
+          </a:prstGeom>
+        </p:spPr>
+      </p:pic>
+      <p:sp>
+        <p:nvSpPr>
+          <p:cNvPr id="16" name="sketch line">
+            <a:extLst>
+              <a:ext uri="{FF2B5EF4-FFF2-40B4-BE49-F238E27FC236}">
+                <a16:creationId xmlns:a16="http://schemas.microsoft.com/office/drawing/2014/main" id="{75F6FDB4-2351-48C2-A863-2364A02343C0}"/>
+              </a:ext>
+              <a:ext uri="{C183D7F6-B498-43B3-948B-1728B52AA6E4}">
+                <adec:decorative xmlns:adec="http://schemas.microsoft.com/office/drawing/2017/decorative" val="1"/>
+              </a:ext>
+            </a:extLst>
+          </p:cNvPr>
+          <p:cNvSpPr>
+            <a:spLocks noGrp="1" noRot="1" noChangeAspect="1" noMove="1" noResize="1" noEditPoints="1" noAdjustHandles="1" noChangeArrowheads="1" noChangeShapeType="1" noTextEdit="1"/>
+          </p:cNvSpPr>
+          <p:nvPr>
+            <p:extLst>
+              <p:ext uri="{386F3935-93C4-4BCD-93E2-E3B085C9AB24}">
+                <p16:designElem xmlns:p16="http://schemas.microsoft.com/office/powerpoint/2015/main" val="1"/>
+              </p:ext>
+            </p:extLst>
+          </p:nvPr>
+        </p:nvSpPr>
+        <p:spPr>
+          <a:xfrm>
+            <a:off x="838200" y="2315691"/>
+            <a:ext cx="4343400" cy="18288"/>
+          </a:xfrm>
+          <a:custGeom>
+            <a:avLst/>
+            <a:gdLst>
+              <a:gd name="connsiteX0" fmla="*/ 0 w 4343400"/>
+              <a:gd name="connsiteY0" fmla="*/ 0 h 18288"/>
+              <a:gd name="connsiteX1" fmla="*/ 577052 w 4343400"/>
+              <a:gd name="connsiteY1" fmla="*/ 0 h 18288"/>
+              <a:gd name="connsiteX2" fmla="*/ 1067235 w 4343400"/>
+              <a:gd name="connsiteY2" fmla="*/ 0 h 18288"/>
+              <a:gd name="connsiteX3" fmla="*/ 1600853 w 4343400"/>
+              <a:gd name="connsiteY3" fmla="*/ 0 h 18288"/>
+              <a:gd name="connsiteX4" fmla="*/ 2264773 w 4343400"/>
+              <a:gd name="connsiteY4" fmla="*/ 0 h 18288"/>
+              <a:gd name="connsiteX5" fmla="*/ 2841825 w 4343400"/>
+              <a:gd name="connsiteY5" fmla="*/ 0 h 18288"/>
+              <a:gd name="connsiteX6" fmla="*/ 3375442 w 4343400"/>
+              <a:gd name="connsiteY6" fmla="*/ 0 h 18288"/>
+              <a:gd name="connsiteX7" fmla="*/ 4343400 w 4343400"/>
+              <a:gd name="connsiteY7" fmla="*/ 0 h 18288"/>
+              <a:gd name="connsiteX8" fmla="*/ 4343400 w 4343400"/>
+              <a:gd name="connsiteY8" fmla="*/ 18288 h 18288"/>
+              <a:gd name="connsiteX9" fmla="*/ 3722914 w 4343400"/>
+              <a:gd name="connsiteY9" fmla="*/ 18288 h 18288"/>
+              <a:gd name="connsiteX10" fmla="*/ 3189297 w 4343400"/>
+              <a:gd name="connsiteY10" fmla="*/ 18288 h 18288"/>
+              <a:gd name="connsiteX11" fmla="*/ 2481943 w 4343400"/>
+              <a:gd name="connsiteY11" fmla="*/ 18288 h 18288"/>
+              <a:gd name="connsiteX12" fmla="*/ 1904891 w 4343400"/>
+              <a:gd name="connsiteY12" fmla="*/ 18288 h 18288"/>
+              <a:gd name="connsiteX13" fmla="*/ 1414707 w 4343400"/>
+              <a:gd name="connsiteY13" fmla="*/ 18288 h 18288"/>
+              <a:gd name="connsiteX14" fmla="*/ 750788 w 4343400"/>
+              <a:gd name="connsiteY14" fmla="*/ 18288 h 18288"/>
+              <a:gd name="connsiteX15" fmla="*/ 0 w 4343400"/>
+              <a:gd name="connsiteY15" fmla="*/ 18288 h 18288"/>
+              <a:gd name="connsiteX16" fmla="*/ 0 w 4343400"/>
+              <a:gd name="connsiteY16" fmla="*/ 0 h 18288"/>
+            </a:gdLst>
+            <a:ahLst/>
+            <a:cxnLst>
+              <a:cxn ang="0">
+                <a:pos x="connsiteX0" y="connsiteY0"/>
+              </a:cxn>
+              <a:cxn ang="0">
+                <a:pos x="connsiteX1" y="connsiteY1"/>
+              </a:cxn>
+              <a:cxn ang="0">
+                <a:pos x="connsiteX2" y="connsiteY2"/>
+              </a:cxn>
+              <a:cxn ang="0">
+                <a:pos x="connsiteX3" y="connsiteY3"/>
+              </a:cxn>
+              <a:cxn ang="0">
+                <a:pos x="connsiteX4" y="connsiteY4"/>
+              </a:cxn>
+              <a:cxn ang="0">
+                <a:pos x="connsiteX5" y="connsiteY5"/>
+              </a:cxn>
+              <a:cxn ang="0">
+                <a:pos x="connsiteX6" y="connsiteY6"/>
+              </a:cxn>
+              <a:cxn ang="0">
+                <a:pos x="connsiteX7" y="connsiteY7"/>
+              </a:cxn>
+              <a:cxn ang="0">
+                <a:pos x="connsiteX8" y="connsiteY8"/>
+              </a:cxn>
+              <a:cxn ang="0">
+                <a:pos x="connsiteX9" y="connsiteY9"/>
+              </a:cxn>
+              <a:cxn ang="0">
+                <a:pos x="connsiteX10" y="connsiteY10"/>
+              </a:cxn>
+              <a:cxn ang="0">
+                <a:pos x="connsiteX11" y="connsiteY11"/>
+              </a:cxn>
+              <a:cxn ang="0">
+                <a:pos x="connsiteX12" y="connsiteY12"/>
+              </a:cxn>
+              <a:cxn ang="0">
+                <a:pos x="connsiteX13" y="connsiteY13"/>
+              </a:cxn>
+              <a:cxn ang="0">
+                <a:pos x="connsiteX14" y="connsiteY14"/>
+              </a:cxn>
+              <a:cxn ang="0">
+                <a:pos x="connsiteX15" y="connsiteY15"/>
+              </a:cxn>
+              <a:cxn ang="0">
+                <a:pos x="connsiteX16" y="connsiteY16"/>
+              </a:cxn>
+            </a:cxnLst>
+            <a:rect l="l" t="t" r="r" b="b"/>
+            <a:pathLst>
+              <a:path w="4343400" h="18288" fill="none" extrusionOk="0">
+                <a:moveTo>
+                  <a:pt x="0" y="0"/>
+                </a:moveTo>
+                <a:cubicBezTo>
+                  <a:pt x="233209" y="-19550"/>
+                  <a:pt x="330816" y="19068"/>
+                  <a:pt x="577052" y="0"/>
+                </a:cubicBezTo>
+                <a:cubicBezTo>
+                  <a:pt x="823288" y="-19068"/>
+                  <a:pt x="875077" y="10360"/>
+                  <a:pt x="1067235" y="0"/>
+                </a:cubicBezTo>
+                <a:cubicBezTo>
+                  <a:pt x="1259393" y="-10360"/>
+                  <a:pt x="1410699" y="2939"/>
+                  <a:pt x="1600853" y="0"/>
+                </a:cubicBezTo>
+                <a:cubicBezTo>
+                  <a:pt x="1791007" y="-2939"/>
+                  <a:pt x="2101644" y="-26225"/>
+                  <a:pt x="2264773" y="0"/>
+                </a:cubicBezTo>
+                <a:cubicBezTo>
+                  <a:pt x="2427902" y="26225"/>
+                  <a:pt x="2690426" y="-27726"/>
+                  <a:pt x="2841825" y="0"/>
+                </a:cubicBezTo>
+                <a:cubicBezTo>
+                  <a:pt x="2993224" y="27726"/>
+                  <a:pt x="3172320" y="-18569"/>
+                  <a:pt x="3375442" y="0"/>
+                </a:cubicBezTo>
+                <a:cubicBezTo>
+                  <a:pt x="3578564" y="18569"/>
+                  <a:pt x="4003119" y="21909"/>
+                  <a:pt x="4343400" y="0"/>
+                </a:cubicBezTo>
+                <a:cubicBezTo>
+                  <a:pt x="4343798" y="7429"/>
+                  <a:pt x="4343380" y="10822"/>
+                  <a:pt x="4343400" y="18288"/>
+                </a:cubicBezTo>
+                <a:cubicBezTo>
+                  <a:pt x="4109047" y="14709"/>
+                  <a:pt x="3996986" y="7919"/>
+                  <a:pt x="3722914" y="18288"/>
+                </a:cubicBezTo>
+                <a:cubicBezTo>
+                  <a:pt x="3448842" y="28657"/>
+                  <a:pt x="3340973" y="29252"/>
+                  <a:pt x="3189297" y="18288"/>
+                </a:cubicBezTo>
+                <a:cubicBezTo>
+                  <a:pt x="3037621" y="7324"/>
+                  <a:pt x="2636891" y="-9539"/>
+                  <a:pt x="2481943" y="18288"/>
+                </a:cubicBezTo>
+                <a:cubicBezTo>
+                  <a:pt x="2326995" y="46115"/>
+                  <a:pt x="2131632" y="740"/>
+                  <a:pt x="1904891" y="18288"/>
+                </a:cubicBezTo>
+                <a:cubicBezTo>
+                  <a:pt x="1678150" y="35836"/>
+                  <a:pt x="1575362" y="-3381"/>
+                  <a:pt x="1414707" y="18288"/>
+                </a:cubicBezTo>
+                <a:cubicBezTo>
+                  <a:pt x="1254052" y="39957"/>
+                  <a:pt x="1051093" y="-335"/>
+                  <a:pt x="750788" y="18288"/>
+                </a:cubicBezTo>
+                <a:cubicBezTo>
+                  <a:pt x="450483" y="36911"/>
+                  <a:pt x="293781" y="22900"/>
+                  <a:pt x="0" y="18288"/>
+                </a:cubicBezTo>
+                <a:cubicBezTo>
+                  <a:pt x="-591" y="13205"/>
+                  <a:pt x="-663" y="6329"/>
+                  <a:pt x="0" y="0"/>
+                </a:cubicBezTo>
+                <a:close/>
+              </a:path>
+              <a:path w="4343400" h="18288" stroke="0" extrusionOk="0">
+                <a:moveTo>
+                  <a:pt x="0" y="0"/>
+                </a:moveTo>
+                <a:cubicBezTo>
+                  <a:pt x="212719" y="-28531"/>
+                  <a:pt x="340561" y="-1164"/>
+                  <a:pt x="577052" y="0"/>
+                </a:cubicBezTo>
+                <a:cubicBezTo>
+                  <a:pt x="813543" y="1164"/>
+                  <a:pt x="866967" y="-9376"/>
+                  <a:pt x="1067235" y="0"/>
+                </a:cubicBezTo>
+                <a:cubicBezTo>
+                  <a:pt x="1267503" y="9376"/>
+                  <a:pt x="1485778" y="-20470"/>
+                  <a:pt x="1774589" y="0"/>
+                </a:cubicBezTo>
+                <a:cubicBezTo>
+                  <a:pt x="2063400" y="20470"/>
+                  <a:pt x="2090152" y="-14502"/>
+                  <a:pt x="2351641" y="0"/>
+                </a:cubicBezTo>
+                <a:cubicBezTo>
+                  <a:pt x="2613130" y="14502"/>
+                  <a:pt x="2802864" y="19125"/>
+                  <a:pt x="2928693" y="0"/>
+                </a:cubicBezTo>
+                <a:cubicBezTo>
+                  <a:pt x="3054522" y="-19125"/>
+                  <a:pt x="3482611" y="-2038"/>
+                  <a:pt x="3636046" y="0"/>
+                </a:cubicBezTo>
+                <a:cubicBezTo>
+                  <a:pt x="3789481" y="2038"/>
+                  <a:pt x="4012363" y="973"/>
+                  <a:pt x="4343400" y="0"/>
+                </a:cubicBezTo>
+                <a:cubicBezTo>
+                  <a:pt x="4342514" y="5429"/>
+                  <a:pt x="4344221" y="14046"/>
+                  <a:pt x="4343400" y="18288"/>
+                </a:cubicBezTo>
+                <a:cubicBezTo>
+                  <a:pt x="4078870" y="-6138"/>
+                  <a:pt x="4015967" y="29658"/>
+                  <a:pt x="3809782" y="18288"/>
+                </a:cubicBezTo>
+                <a:cubicBezTo>
+                  <a:pt x="3603597" y="6918"/>
+                  <a:pt x="3495552" y="24439"/>
+                  <a:pt x="3189297" y="18288"/>
+                </a:cubicBezTo>
+                <a:cubicBezTo>
+                  <a:pt x="2883042" y="12137"/>
+                  <a:pt x="2850610" y="32583"/>
+                  <a:pt x="2568811" y="18288"/>
+                </a:cubicBezTo>
+                <a:cubicBezTo>
+                  <a:pt x="2287012" y="3993"/>
+                  <a:pt x="2279820" y="23580"/>
+                  <a:pt x="1991759" y="18288"/>
+                </a:cubicBezTo>
+                <a:cubicBezTo>
+                  <a:pt x="1703698" y="12996"/>
+                  <a:pt x="1616455" y="23157"/>
+                  <a:pt x="1284405" y="18288"/>
+                </a:cubicBezTo>
+                <a:cubicBezTo>
+                  <a:pt x="952355" y="13419"/>
+                  <a:pt x="783530" y="16053"/>
+                  <a:pt x="577052" y="18288"/>
+                </a:cubicBezTo>
+                <a:cubicBezTo>
+                  <a:pt x="370574" y="20523"/>
+                  <a:pt x="173929" y="5195"/>
+                  <a:pt x="0" y="18288"/>
+                </a:cubicBezTo>
+                <a:cubicBezTo>
+                  <a:pt x="668" y="13665"/>
+                  <a:pt x="578" y="5675"/>
+                  <a:pt x="0" y="0"/>
+                </a:cubicBezTo>
+                <a:close/>
+              </a:path>
+            </a:pathLst>
+          </a:custGeom>
+          <a:solidFill>
+            <a:schemeClr val="accent2"/>
+          </a:solidFill>
+          <a:ln w="41275" cap="rnd">
+            <a:solidFill>
+              <a:schemeClr val="accent2"/>
+            </a:solidFill>
+            <a:round/>
+            <a:extLst>
+              <a:ext uri="{C807C97D-BFC1-408E-A445-0C87EB9F89A2}">
+                <ask:lineSketchStyleProps xmlns:ask="http://schemas.microsoft.com/office/drawing/2018/sketchyshapes" sd="1219033472">
+                  <a:prstGeom prst="rect">
+                    <a:avLst/>
+                  </a:prstGeom>
+                  <ask:type>
+                    <ask:lineSketchFreehand/>
+                  </ask:type>
+                </ask:lineSketchStyleProps>
+              </a:ext>
+            </a:extLst>
+          </a:ln>
+        </p:spPr>
+        <p:style>
+          <a:lnRef idx="2">
+            <a:schemeClr val="accent1">
+              <a:shade val="50000"/>
+            </a:schemeClr>
+          </a:lnRef>
+          <a:fillRef idx="1">
+            <a:schemeClr val="accent1"/>
+          </a:fillRef>
+          <a:effectRef idx="0">
+            <a:schemeClr val="accent1"/>
+          </a:effectRef>
+          <a:fontRef idx="minor">
+            <a:schemeClr val="lt1"/>
+          </a:fontRef>
+        </p:style>
+        <p:txBody>
+          <a:bodyPr rtlCol="0" anchor="ctr"/>
+          <a:lstStyle/>
+          <a:p>
+            <a:pPr algn="ctr"/>
+            <a:endParaRPr lang="en-US"/>
+          </a:p>
+        </p:txBody>
+      </p:sp>
+      <p:sp>
+        <p:nvSpPr>
+          <p:cNvPr id="3" name="Content Placeholder 2">
+            <a:extLst>
+              <a:ext uri="{FF2B5EF4-FFF2-40B4-BE49-F238E27FC236}">
+                <a16:creationId xmlns:a16="http://schemas.microsoft.com/office/drawing/2014/main" id="{BFEA3D1D-5A35-3D5F-7447-81194895EC5A}"/>
+              </a:ext>
+            </a:extLst>
+          </p:cNvPr>
+          <p:cNvSpPr>
+            <a:spLocks noGrp="1"/>
+          </p:cNvSpPr>
+          <p:nvPr>
+            <p:ph idx="1"/>
+          </p:nvPr>
+        </p:nvSpPr>
+        <p:spPr>
+          <a:xfrm>
+            <a:off x="612648" y="2504819"/>
+            <a:ext cx="6986016" cy="3672144"/>
+          </a:xfrm>
+        </p:spPr>
+        <p:txBody>
+          <a:bodyPr>
+            <a:normAutofit/>
+          </a:bodyPr>
+          <a:lstStyle/>
+          <a:p>
+            <a:pPr marL="0" indent="0">
+              <a:lnSpc>
+                <a:spcPct val="150000"/>
+              </a:lnSpc>
+              <a:buNone/>
+            </a:pPr>
+            <a:r>
+              <a:rPr lang="en-US" b="1">
+                <a:latin typeface="Times New Roman" panose="02020603050405020304" pitchFamily="18" charset="0"/>
+                <a:cs typeface="Times New Roman" panose="02020603050405020304" pitchFamily="18" charset="0"/>
+              </a:rPr>
+              <a:t>1.1. Lý do chọn đề tài</a:t>
+            </a:r>
+          </a:p>
+          <a:p>
+            <a:r>
+              <a:rPr lang="en-US" sz="2200">
+                <a:latin typeface="Times New Roman" panose="02020603050405020304" pitchFamily="18" charset="0"/>
+                <a:cs typeface="Times New Roman" panose="02020603050405020304" pitchFamily="18" charset="0"/>
+              </a:rPr>
+              <a:t>Nhu cầu </a:t>
+            </a:r>
+            <a:r>
+              <a:rPr lang="en-US" sz="2200" b="1" i="1">
+                <a:latin typeface="Times New Roman" panose="02020603050405020304" pitchFamily="18" charset="0"/>
+                <a:cs typeface="Times New Roman" panose="02020603050405020304" pitchFamily="18" charset="0"/>
+              </a:rPr>
+              <a:t>đổi mới phương pháp giáo dục.</a:t>
+            </a:r>
+          </a:p>
+          <a:p>
+            <a:r>
+              <a:rPr lang="en-US" sz="2200">
+                <a:latin typeface="Times New Roman" panose="02020603050405020304" pitchFamily="18" charset="0"/>
+                <a:cs typeface="Times New Roman" panose="02020603050405020304" pitchFamily="18" charset="0"/>
+              </a:rPr>
+              <a:t>Tiềm năng từ </a:t>
+            </a:r>
+            <a:r>
+              <a:rPr lang="en-US" sz="2200" b="1" i="1">
+                <a:latin typeface="Times New Roman" panose="02020603050405020304" pitchFamily="18" charset="0"/>
+                <a:cs typeface="Times New Roman" panose="02020603050405020304" pitchFamily="18" charset="0"/>
+              </a:rPr>
+              <a:t>AI và LLM.</a:t>
+            </a:r>
+          </a:p>
+          <a:p>
+            <a:r>
+              <a:rPr lang="en-US" sz="2200">
+                <a:latin typeface="Times New Roman" panose="02020603050405020304" pitchFamily="18" charset="0"/>
+                <a:cs typeface="Times New Roman" panose="02020603050405020304" pitchFamily="18" charset="0"/>
+              </a:rPr>
+              <a:t>Lịch sử là một </a:t>
+            </a:r>
+            <a:r>
+              <a:rPr lang="en-US" sz="2200" b="1" i="1">
+                <a:latin typeface="Times New Roman" panose="02020603050405020304" pitchFamily="18" charset="0"/>
+                <a:cs typeface="Times New Roman" panose="02020603050405020304" pitchFamily="18" charset="0"/>
+              </a:rPr>
+              <a:t>môn học đặc thù.</a:t>
+            </a:r>
+          </a:p>
+        </p:txBody>
+      </p:sp>
+      <p:pic>
+        <p:nvPicPr>
+          <p:cNvPr id="5" name="Picture 4" descr="A classroom with students in front of a blackboard&#10;&#10;AI-generated content may be incorrect.">
+            <a:extLst>
+              <a:ext uri="{FF2B5EF4-FFF2-40B4-BE49-F238E27FC236}">
+                <a16:creationId xmlns:a16="http://schemas.microsoft.com/office/drawing/2014/main" id="{F383968B-DDBB-0538-D632-57CBE19A01F6}"/>
+              </a:ext>
+            </a:extLst>
+          </p:cNvPr>
+          <p:cNvPicPr>
+            <a:picLocks noChangeAspect="1"/>
+          </p:cNvPicPr>
+          <p:nvPr/>
+        </p:nvPicPr>
+        <p:blipFill>
+          <a:blip r:embed="rId3">
+            <a:extLst>
+              <a:ext uri="{28A0092B-C50C-407E-A947-70E740481C1C}">
+                <a14:useLocalDpi xmlns:a14="http://schemas.microsoft.com/office/drawing/2010/main" val="0"/>
+              </a:ext>
+            </a:extLst>
+          </a:blip>
+          <a:stretch>
+            <a:fillRect/>
+          </a:stretch>
+        </p:blipFill>
+        <p:spPr>
+          <a:xfrm>
+            <a:off x="8886144" y="2310086"/>
+            <a:ext cx="2520293" cy="1890220"/>
+          </a:xfrm>
+          <a:prstGeom prst="rect">
+            <a:avLst/>
+          </a:prstGeom>
+        </p:spPr>
+      </p:pic>
+      <p:pic>
+        <p:nvPicPr>
+          <p:cNvPr id="9" name="Picture 8" descr="A book on a map&#10;&#10;AI-generated content may be incorrect.">
+            <a:extLst>
+              <a:ext uri="{FF2B5EF4-FFF2-40B4-BE49-F238E27FC236}">
+                <a16:creationId xmlns:a16="http://schemas.microsoft.com/office/drawing/2014/main" id="{B1F2BB6C-6A97-7B72-A60E-2FBCC066E682}"/>
+              </a:ext>
+            </a:extLst>
+          </p:cNvPr>
+          <p:cNvPicPr>
+            <a:picLocks noChangeAspect="1"/>
+          </p:cNvPicPr>
+          <p:nvPr/>
+        </p:nvPicPr>
+        <p:blipFill>
+          <a:blip r:embed="rId4">
+            <a:extLst>
+              <a:ext uri="{28A0092B-C50C-407E-A947-70E740481C1C}">
+                <a14:useLocalDpi xmlns:a14="http://schemas.microsoft.com/office/drawing/2010/main" val="0"/>
+              </a:ext>
+            </a:extLst>
+          </a:blip>
+          <a:stretch>
+            <a:fillRect/>
+          </a:stretch>
+        </p:blipFill>
+        <p:spPr>
+          <a:xfrm>
+            <a:off x="8530718" y="4358181"/>
+            <a:ext cx="3231145" cy="1890220"/>
+          </a:xfrm>
+          <a:prstGeom prst="rect">
+            <a:avLst/>
+          </a:prstGeom>
+        </p:spPr>
+      </p:pic>
+    </p:spTree>
+    <p:extLst>
+      <p:ext uri="{BB962C8B-B14F-4D97-AF65-F5344CB8AC3E}">
+        <p14:creationId xmlns:p14="http://schemas.microsoft.com/office/powerpoint/2010/main" val="4292577151"/>
+      </p:ext>
+    </p:extLst>
+  </p:cSld>
+  <p:clrMapOvr>
+    <a:masterClrMapping/>
+  </p:clrMapOvr>
+</p:sld>
+</file>
+
+<file path=ppt/slides/slide40.xml><?xml version="1.0" encoding="utf-8"?>
 <p:sld xmlns:a="http://schemas.openxmlformats.org/drawingml/2006/main" xmlns:r="http://schemas.openxmlformats.org/officeDocument/2006/relationships" xmlns:p="http://schemas.openxmlformats.org/presentationml/2006/main">
   <p:cSld>
     <p:spTree>
@@ -8272,114 +12323,7 @@
 </p:sld>
 </file>
 
-<file path=ppt/slides/slide4.xml><?xml version="1.0" encoding="utf-8"?>
-<p:sld xmlns:a="http://schemas.openxmlformats.org/drawingml/2006/main" xmlns:r="http://schemas.openxmlformats.org/officeDocument/2006/relationships" xmlns:p="http://schemas.openxmlformats.org/presentationml/2006/main">
-  <p:cSld>
-    <p:spTree>
-      <p:nvGrpSpPr>
-        <p:cNvPr id="1" name=""/>
-        <p:cNvGrpSpPr/>
-        <p:nvPr/>
-      </p:nvGrpSpPr>
-      <p:grpSpPr>
-        <a:xfrm>
-          <a:off x="0" y="0"/>
-          <a:ext cx="0" cy="0"/>
-          <a:chOff x="0" y="0"/>
-          <a:chExt cx="0" cy="0"/>
-        </a:xfrm>
-      </p:grpSpPr>
-      <p:sp>
-        <p:nvSpPr>
-          <p:cNvPr id="2" name="Title 1">
-            <a:extLst>
-              <a:ext uri="{FF2B5EF4-FFF2-40B4-BE49-F238E27FC236}">
-                <a16:creationId xmlns:a16="http://schemas.microsoft.com/office/drawing/2014/main" id="{FA9E429C-446C-5C3D-E9F3-E05438AFB75E}"/>
-              </a:ext>
-            </a:extLst>
-          </p:cNvPr>
-          <p:cNvSpPr>
-            <a:spLocks noGrp="1"/>
-          </p:cNvSpPr>
-          <p:nvPr>
-            <p:ph type="title"/>
-          </p:nvPr>
-        </p:nvSpPr>
-        <p:spPr>
-          <a:xfrm>
-            <a:off x="838200" y="365125"/>
-            <a:ext cx="10515600" cy="1030537"/>
-          </a:xfrm>
-        </p:spPr>
-        <p:txBody>
-          <a:bodyPr>
-            <a:normAutofit/>
-          </a:bodyPr>
-          <a:lstStyle/>
-          <a:p>
-            <a:r>
-              <a:rPr lang="en-US" sz="4000" b="1">
-                <a:latin typeface="Times New Roman" panose="02020603050405020304" pitchFamily="18" charset="0"/>
-                <a:cs typeface="Times New Roman" panose="02020603050405020304" pitchFamily="18" charset="0"/>
-              </a:rPr>
-              <a:t>GIỚI THIỆU ĐỀ TÀI</a:t>
-            </a:r>
-          </a:p>
-        </p:txBody>
-      </p:sp>
-      <p:sp>
-        <p:nvSpPr>
-          <p:cNvPr id="3" name="Content Placeholder 2">
-            <a:extLst>
-              <a:ext uri="{FF2B5EF4-FFF2-40B4-BE49-F238E27FC236}">
-                <a16:creationId xmlns:a16="http://schemas.microsoft.com/office/drawing/2014/main" id="{BFEA3D1D-5A35-3D5F-7447-81194895EC5A}"/>
-              </a:ext>
-            </a:extLst>
-          </p:cNvPr>
-          <p:cNvSpPr>
-            <a:spLocks noGrp="1"/>
-          </p:cNvSpPr>
-          <p:nvPr>
-            <p:ph idx="1"/>
-          </p:nvPr>
-        </p:nvSpPr>
-        <p:spPr>
-          <a:xfrm>
-            <a:off x="838200" y="1395662"/>
-            <a:ext cx="10515600" cy="4781301"/>
-          </a:xfrm>
-        </p:spPr>
-        <p:txBody>
-          <a:bodyPr/>
-          <a:lstStyle/>
-          <a:p>
-            <a:pPr marL="0" indent="0">
-              <a:buNone/>
-            </a:pPr>
-            <a:r>
-              <a:rPr lang="en-US" i="1">
-                <a:latin typeface="Times New Roman" panose="02020603050405020304" pitchFamily="18" charset="0"/>
-                <a:cs typeface="Times New Roman" panose="02020603050405020304" pitchFamily="18" charset="0"/>
-              </a:rPr>
-              <a:t>1.1. Lý do chọn đề tài</a:t>
-            </a:r>
-          </a:p>
-        </p:txBody>
-      </p:sp>
-    </p:spTree>
-    <p:extLst>
-      <p:ext uri="{BB962C8B-B14F-4D97-AF65-F5344CB8AC3E}">
-        <p14:creationId xmlns:p14="http://schemas.microsoft.com/office/powerpoint/2010/main" val="4292577151"/>
-      </p:ext>
-    </p:extLst>
-  </p:cSld>
-  <p:clrMapOvr>
-    <a:masterClrMapping/>
-  </p:clrMapOvr>
-</p:sld>
-</file>
-
-<file path=ppt/slides/slide40.xml><?xml version="1.0" encoding="utf-8"?>
+<file path=ppt/slides/slide41.xml><?xml version="1.0" encoding="utf-8"?>
 <p:sld xmlns:a="http://schemas.openxmlformats.org/drawingml/2006/main" xmlns:r="http://schemas.openxmlformats.org/officeDocument/2006/relationships" xmlns:p="http://schemas.openxmlformats.org/presentationml/2006/main">
   <p:cSld>
     <p:spTree>
@@ -8520,7 +12464,7 @@
 </p:sld>
 </file>
 
-<file path=ppt/slides/slide41.xml><?xml version="1.0" encoding="utf-8"?>
+<file path=ppt/slides/slide42.xml><?xml version="1.0" encoding="utf-8"?>
 <p:sld xmlns:a="http://schemas.openxmlformats.org/drawingml/2006/main" xmlns:r="http://schemas.openxmlformats.org/officeDocument/2006/relationships" xmlns:p="http://schemas.openxmlformats.org/presentationml/2006/main">
   <p:cSld>
     <p:spTree>
@@ -8661,7 +12605,7 @@
 </p:sld>
 </file>
 
-<file path=ppt/slides/slide42.xml><?xml version="1.0" encoding="utf-8"?>
+<file path=ppt/slides/slide43.xml><?xml version="1.0" encoding="utf-8"?>
 <p:sld xmlns:a="http://schemas.openxmlformats.org/drawingml/2006/main" xmlns:r="http://schemas.openxmlformats.org/officeDocument/2006/relationships" xmlns:p="http://schemas.openxmlformats.org/presentationml/2006/main">
   <p:cSld>
     <p:spTree>
@@ -8802,7 +12746,7 @@
 </p:sld>
 </file>
 
-<file path=ppt/slides/slide43.xml><?xml version="1.0" encoding="utf-8"?>
+<file path=ppt/slides/slide44.xml><?xml version="1.0" encoding="utf-8"?>
 <p:sld xmlns:a="http://schemas.openxmlformats.org/drawingml/2006/main" xmlns:r="http://schemas.openxmlformats.org/officeDocument/2006/relationships" xmlns:p="http://schemas.openxmlformats.org/presentationml/2006/main">
   <p:cSld>
     <p:spTree>
@@ -8943,7 +12887,7 @@
 </p:sld>
 </file>
 
-<file path=ppt/slides/slide44.xml><?xml version="1.0" encoding="utf-8"?>
+<file path=ppt/slides/slide45.xml><?xml version="1.0" encoding="utf-8"?>
 <p:sld xmlns:a="http://schemas.openxmlformats.org/drawingml/2006/main" xmlns:r="http://schemas.openxmlformats.org/officeDocument/2006/relationships" xmlns:p="http://schemas.openxmlformats.org/presentationml/2006/main">
   <p:cSld>
     <p:spTree>
@@ -9084,7 +13028,7 @@
 </p:sld>
 </file>
 
-<file path=ppt/slides/slide45.xml><?xml version="1.0" encoding="utf-8"?>
+<file path=ppt/slides/slide46.xml><?xml version="1.0" encoding="utf-8"?>
 <p:sld xmlns:a="http://schemas.openxmlformats.org/drawingml/2006/main" xmlns:r="http://schemas.openxmlformats.org/officeDocument/2006/relationships" xmlns:p="http://schemas.openxmlformats.org/presentationml/2006/main">
   <p:cSld>
     <p:spTree>
@@ -9225,7 +13169,7 @@
 </p:sld>
 </file>
 
-<file path=ppt/slides/slide46.xml><?xml version="1.0" encoding="utf-8"?>
+<file path=ppt/slides/slide47.xml><?xml version="1.0" encoding="utf-8"?>
 <p:sld xmlns:a="http://schemas.openxmlformats.org/drawingml/2006/main" xmlns:r="http://schemas.openxmlformats.org/officeDocument/2006/relationships" xmlns:p="http://schemas.openxmlformats.org/presentationml/2006/main">
   <p:cSld>
     <p:spTree>
@@ -9332,7 +13276,7 @@
 </p:sld>
 </file>
 
-<file path=ppt/slides/slide47.xml><?xml version="1.0" encoding="utf-8"?>
+<file path=ppt/slides/slide48.xml><?xml version="1.0" encoding="utf-8"?>
 <p:sld xmlns:a="http://schemas.openxmlformats.org/drawingml/2006/main" xmlns:r="http://schemas.openxmlformats.org/officeDocument/2006/relationships" xmlns:p="http://schemas.openxmlformats.org/presentationml/2006/main">
   <p:cSld>
     <p:spTree>
@@ -9457,7 +13401,7 @@
 </p:sld>
 </file>
 
-<file path=ppt/slides/slide48.xml><?xml version="1.0" encoding="utf-8"?>
+<file path=ppt/slides/slide49.xml><?xml version="1.0" encoding="utf-8"?>
 <p:sld xmlns:a="http://schemas.openxmlformats.org/drawingml/2006/main" xmlns:r="http://schemas.openxmlformats.org/officeDocument/2006/relationships" xmlns:p="http://schemas.openxmlformats.org/presentationml/2006/main">
   <p:cSld>
     <p:spTree>
@@ -9582,7 +13526,744 @@
 </p:sld>
 </file>
 
-<file path=ppt/slides/slide49.xml><?xml version="1.0" encoding="utf-8"?>
+<file path=ppt/slides/slide5.xml><?xml version="1.0" encoding="utf-8"?>
+<p:sld xmlns:a="http://schemas.openxmlformats.org/drawingml/2006/main" xmlns:r="http://schemas.openxmlformats.org/officeDocument/2006/relationships" xmlns:p="http://schemas.openxmlformats.org/presentationml/2006/main">
+  <p:cSld>
+    <p:bg>
+      <p:bgPr>
+        <a:solidFill>
+          <a:schemeClr val="bg1"/>
+        </a:solidFill>
+        <a:effectLst/>
+      </p:bgPr>
+    </p:bg>
+    <p:spTree>
+      <p:nvGrpSpPr>
+        <p:cNvPr id="1" name="">
+          <a:extLst>
+            <a:ext uri="{FF2B5EF4-FFF2-40B4-BE49-F238E27FC236}">
+              <a16:creationId xmlns:a16="http://schemas.microsoft.com/office/drawing/2014/main" id="{55ACC9AE-4282-9F1E-1993-C94D1F1C7DCA}"/>
+            </a:ext>
+          </a:extLst>
+        </p:cNvPr>
+        <p:cNvGrpSpPr/>
+        <p:nvPr/>
+      </p:nvGrpSpPr>
+      <p:grpSpPr>
+        <a:xfrm>
+          <a:off x="0" y="0"/>
+          <a:ext cx="0" cy="0"/>
+          <a:chOff x="0" y="0"/>
+          <a:chExt cx="0" cy="0"/>
+        </a:xfrm>
+      </p:grpSpPr>
+      <p:sp useBgFill="1">
+        <p:nvSpPr>
+          <p:cNvPr id="15" name="Rectangle 14">
+            <a:extLst>
+              <a:ext uri="{FF2B5EF4-FFF2-40B4-BE49-F238E27FC236}">
+                <a16:creationId xmlns:a16="http://schemas.microsoft.com/office/drawing/2014/main" id="{352BEC0E-22F8-46D0-9632-375DB541B06C}"/>
+              </a:ext>
+              <a:ext uri="{C183D7F6-B498-43B3-948B-1728B52AA6E4}">
+                <adec:decorative xmlns:adec="http://schemas.microsoft.com/office/drawing/2017/decorative" val="1"/>
+              </a:ext>
+            </a:extLst>
+          </p:cNvPr>
+          <p:cNvSpPr>
+            <a:spLocks noGrp="1" noRot="1" noChangeAspect="1" noMove="1" noResize="1" noEditPoints="1" noAdjustHandles="1" noChangeArrowheads="1" noChangeShapeType="1" noTextEdit="1"/>
+          </p:cNvSpPr>
+          <p:nvPr>
+            <p:extLst>
+              <p:ext uri="{386F3935-93C4-4BCD-93E2-E3B085C9AB24}">
+                <p16:designElem xmlns:p16="http://schemas.microsoft.com/office/powerpoint/2015/main" val="1"/>
+              </p:ext>
+            </p:extLst>
+          </p:nvPr>
+        </p:nvSpPr>
+        <p:spPr>
+          <a:xfrm>
+            <a:off x="0" y="0"/>
+            <a:ext cx="12188952" cy="6858000"/>
+          </a:xfrm>
+          <a:prstGeom prst="rect">
+            <a:avLst/>
+          </a:prstGeom>
+          <a:ln>
+            <a:noFill/>
+          </a:ln>
+        </p:spPr>
+        <p:style>
+          <a:lnRef idx="2">
+            <a:schemeClr val="accent1">
+              <a:shade val="50000"/>
+            </a:schemeClr>
+          </a:lnRef>
+          <a:fillRef idx="1">
+            <a:schemeClr val="accent1"/>
+          </a:fillRef>
+          <a:effectRef idx="0">
+            <a:schemeClr val="accent1"/>
+          </a:effectRef>
+          <a:fontRef idx="minor">
+            <a:schemeClr val="lt1"/>
+          </a:fontRef>
+        </p:style>
+        <p:txBody>
+          <a:bodyPr rtlCol="0" anchor="ctr"/>
+          <a:lstStyle/>
+          <a:p>
+            <a:pPr algn="ctr"/>
+            <a:endParaRPr lang="en-US"/>
+          </a:p>
+        </p:txBody>
+      </p:sp>
+      <p:sp>
+        <p:nvSpPr>
+          <p:cNvPr id="2" name="Title 1">
+            <a:extLst>
+              <a:ext uri="{FF2B5EF4-FFF2-40B4-BE49-F238E27FC236}">
+                <a16:creationId xmlns:a16="http://schemas.microsoft.com/office/drawing/2014/main" id="{3FEAC56F-4530-0099-1FEB-FF6A38C16C16}"/>
+              </a:ext>
+            </a:extLst>
+          </p:cNvPr>
+          <p:cNvSpPr>
+            <a:spLocks noGrp="1"/>
+          </p:cNvSpPr>
+          <p:nvPr>
+            <p:ph type="title"/>
+          </p:nvPr>
+        </p:nvSpPr>
+        <p:spPr>
+          <a:xfrm>
+            <a:off x="640080" y="329184"/>
+            <a:ext cx="6894576" cy="1783080"/>
+          </a:xfrm>
+        </p:spPr>
+        <p:txBody>
+          <a:bodyPr anchor="b">
+            <a:normAutofit/>
+          </a:bodyPr>
+          <a:lstStyle/>
+          <a:p>
+            <a:r>
+              <a:rPr lang="en-US" sz="5400" b="1">
+                <a:latin typeface="Times New Roman" panose="02020603050405020304" pitchFamily="18" charset="0"/>
+                <a:cs typeface="Times New Roman" panose="02020603050405020304" pitchFamily="18" charset="0"/>
+              </a:rPr>
+              <a:t>GIỚI THIỆU ĐỀ TÀI</a:t>
+            </a:r>
+          </a:p>
+        </p:txBody>
+      </p:sp>
+      <p:sp>
+        <p:nvSpPr>
+          <p:cNvPr id="17" name="sketch line">
+            <a:extLst>
+              <a:ext uri="{FF2B5EF4-FFF2-40B4-BE49-F238E27FC236}">
+                <a16:creationId xmlns:a16="http://schemas.microsoft.com/office/drawing/2014/main" id="{3FCFB1DE-0B7E-48CC-BA90-B2AB0889F9D6}"/>
+              </a:ext>
+              <a:ext uri="{C183D7F6-B498-43B3-948B-1728B52AA6E4}">
+                <adec:decorative xmlns:adec="http://schemas.microsoft.com/office/drawing/2017/decorative" val="1"/>
+              </a:ext>
+            </a:extLst>
+          </p:cNvPr>
+          <p:cNvSpPr>
+            <a:spLocks noGrp="1" noRot="1" noChangeAspect="1" noMove="1" noResize="1" noEditPoints="1" noAdjustHandles="1" noChangeArrowheads="1" noChangeShapeType="1" noTextEdit="1"/>
+          </p:cNvSpPr>
+          <p:nvPr>
+            <p:extLst>
+              <p:ext uri="{386F3935-93C4-4BCD-93E2-E3B085C9AB24}">
+                <p16:designElem xmlns:p16="http://schemas.microsoft.com/office/powerpoint/2015/main" val="1"/>
+              </p:ext>
+            </p:extLst>
+          </p:nvPr>
+        </p:nvSpPr>
+        <p:spPr>
+          <a:xfrm>
+            <a:off x="758952" y="2395728"/>
+            <a:ext cx="4243589" cy="18288"/>
+          </a:xfrm>
+          <a:custGeom>
+            <a:avLst/>
+            <a:gdLst>
+              <a:gd name="connsiteX0" fmla="*/ 0 w 4243589"/>
+              <a:gd name="connsiteY0" fmla="*/ 0 h 18288"/>
+              <a:gd name="connsiteX1" fmla="*/ 478919 w 4243589"/>
+              <a:gd name="connsiteY1" fmla="*/ 0 h 18288"/>
+              <a:gd name="connsiteX2" fmla="*/ 957839 w 4243589"/>
+              <a:gd name="connsiteY2" fmla="*/ 0 h 18288"/>
+              <a:gd name="connsiteX3" fmla="*/ 1521630 w 4243589"/>
+              <a:gd name="connsiteY3" fmla="*/ 0 h 18288"/>
+              <a:gd name="connsiteX4" fmla="*/ 2212729 w 4243589"/>
+              <a:gd name="connsiteY4" fmla="*/ 0 h 18288"/>
+              <a:gd name="connsiteX5" fmla="*/ 2734084 w 4243589"/>
+              <a:gd name="connsiteY5" fmla="*/ 0 h 18288"/>
+              <a:gd name="connsiteX6" fmla="*/ 3255439 w 4243589"/>
+              <a:gd name="connsiteY6" fmla="*/ 0 h 18288"/>
+              <a:gd name="connsiteX7" fmla="*/ 4243589 w 4243589"/>
+              <a:gd name="connsiteY7" fmla="*/ 0 h 18288"/>
+              <a:gd name="connsiteX8" fmla="*/ 4243589 w 4243589"/>
+              <a:gd name="connsiteY8" fmla="*/ 18288 h 18288"/>
+              <a:gd name="connsiteX9" fmla="*/ 3594926 w 4243589"/>
+              <a:gd name="connsiteY9" fmla="*/ 18288 h 18288"/>
+              <a:gd name="connsiteX10" fmla="*/ 3073571 w 4243589"/>
+              <a:gd name="connsiteY10" fmla="*/ 18288 h 18288"/>
+              <a:gd name="connsiteX11" fmla="*/ 2552216 w 4243589"/>
+              <a:gd name="connsiteY11" fmla="*/ 18288 h 18288"/>
+              <a:gd name="connsiteX12" fmla="*/ 1903553 w 4243589"/>
+              <a:gd name="connsiteY12" fmla="*/ 18288 h 18288"/>
+              <a:gd name="connsiteX13" fmla="*/ 1212454 w 4243589"/>
+              <a:gd name="connsiteY13" fmla="*/ 18288 h 18288"/>
+              <a:gd name="connsiteX14" fmla="*/ 733535 w 4243589"/>
+              <a:gd name="connsiteY14" fmla="*/ 18288 h 18288"/>
+              <a:gd name="connsiteX15" fmla="*/ 0 w 4243589"/>
+              <a:gd name="connsiteY15" fmla="*/ 18288 h 18288"/>
+              <a:gd name="connsiteX16" fmla="*/ 0 w 4243589"/>
+              <a:gd name="connsiteY16" fmla="*/ 0 h 18288"/>
+            </a:gdLst>
+            <a:ahLst/>
+            <a:cxnLst>
+              <a:cxn ang="0">
+                <a:pos x="connsiteX0" y="connsiteY0"/>
+              </a:cxn>
+              <a:cxn ang="0">
+                <a:pos x="connsiteX1" y="connsiteY1"/>
+              </a:cxn>
+              <a:cxn ang="0">
+                <a:pos x="connsiteX2" y="connsiteY2"/>
+              </a:cxn>
+              <a:cxn ang="0">
+                <a:pos x="connsiteX3" y="connsiteY3"/>
+              </a:cxn>
+              <a:cxn ang="0">
+                <a:pos x="connsiteX4" y="connsiteY4"/>
+              </a:cxn>
+              <a:cxn ang="0">
+                <a:pos x="connsiteX5" y="connsiteY5"/>
+              </a:cxn>
+              <a:cxn ang="0">
+                <a:pos x="connsiteX6" y="connsiteY6"/>
+              </a:cxn>
+              <a:cxn ang="0">
+                <a:pos x="connsiteX7" y="connsiteY7"/>
+              </a:cxn>
+              <a:cxn ang="0">
+                <a:pos x="connsiteX8" y="connsiteY8"/>
+              </a:cxn>
+              <a:cxn ang="0">
+                <a:pos x="connsiteX9" y="connsiteY9"/>
+              </a:cxn>
+              <a:cxn ang="0">
+                <a:pos x="connsiteX10" y="connsiteY10"/>
+              </a:cxn>
+              <a:cxn ang="0">
+                <a:pos x="connsiteX11" y="connsiteY11"/>
+              </a:cxn>
+              <a:cxn ang="0">
+                <a:pos x="connsiteX12" y="connsiteY12"/>
+              </a:cxn>
+              <a:cxn ang="0">
+                <a:pos x="connsiteX13" y="connsiteY13"/>
+              </a:cxn>
+              <a:cxn ang="0">
+                <a:pos x="connsiteX14" y="connsiteY14"/>
+              </a:cxn>
+              <a:cxn ang="0">
+                <a:pos x="connsiteX15" y="connsiteY15"/>
+              </a:cxn>
+              <a:cxn ang="0">
+                <a:pos x="connsiteX16" y="connsiteY16"/>
+              </a:cxn>
+            </a:cxnLst>
+            <a:rect l="l" t="t" r="r" b="b"/>
+            <a:pathLst>
+              <a:path w="4243589" h="18288" fill="none" extrusionOk="0">
+                <a:moveTo>
+                  <a:pt x="0" y="0"/>
+                </a:moveTo>
+                <a:cubicBezTo>
+                  <a:pt x="213395" y="-21006"/>
+                  <a:pt x="307421" y="-18116"/>
+                  <a:pt x="478919" y="0"/>
+                </a:cubicBezTo>
+                <a:cubicBezTo>
+                  <a:pt x="650417" y="18116"/>
+                  <a:pt x="831092" y="-21237"/>
+                  <a:pt x="957839" y="0"/>
+                </a:cubicBezTo>
+                <a:cubicBezTo>
+                  <a:pt x="1084586" y="21237"/>
+                  <a:pt x="1301682" y="25124"/>
+                  <a:pt x="1521630" y="0"/>
+                </a:cubicBezTo>
+                <a:cubicBezTo>
+                  <a:pt x="1741578" y="-25124"/>
+                  <a:pt x="1970269" y="-29139"/>
+                  <a:pt x="2212729" y="0"/>
+                </a:cubicBezTo>
+                <a:cubicBezTo>
+                  <a:pt x="2455189" y="29139"/>
+                  <a:pt x="2558847" y="-4796"/>
+                  <a:pt x="2734084" y="0"/>
+                </a:cubicBezTo>
+                <a:cubicBezTo>
+                  <a:pt x="2909321" y="4796"/>
+                  <a:pt x="3097217" y="-13409"/>
+                  <a:pt x="3255439" y="0"/>
+                </a:cubicBezTo>
+                <a:cubicBezTo>
+                  <a:pt x="3413662" y="13409"/>
+                  <a:pt x="3979999" y="-10121"/>
+                  <a:pt x="4243589" y="0"/>
+                </a:cubicBezTo>
+                <a:cubicBezTo>
+                  <a:pt x="4244484" y="8974"/>
+                  <a:pt x="4243043" y="9359"/>
+                  <a:pt x="4243589" y="18288"/>
+                </a:cubicBezTo>
+                <a:cubicBezTo>
+                  <a:pt x="4058777" y="31246"/>
+                  <a:pt x="3910348" y="3158"/>
+                  <a:pt x="3594926" y="18288"/>
+                </a:cubicBezTo>
+                <a:cubicBezTo>
+                  <a:pt x="3279504" y="33418"/>
+                  <a:pt x="3319955" y="-3977"/>
+                  <a:pt x="3073571" y="18288"/>
+                </a:cubicBezTo>
+                <a:cubicBezTo>
+                  <a:pt x="2827187" y="40553"/>
+                  <a:pt x="2767387" y="1863"/>
+                  <a:pt x="2552216" y="18288"/>
+                </a:cubicBezTo>
+                <a:cubicBezTo>
+                  <a:pt x="2337046" y="34713"/>
+                  <a:pt x="2181871" y="19527"/>
+                  <a:pt x="1903553" y="18288"/>
+                </a:cubicBezTo>
+                <a:cubicBezTo>
+                  <a:pt x="1625235" y="17049"/>
+                  <a:pt x="1557672" y="24174"/>
+                  <a:pt x="1212454" y="18288"/>
+                </a:cubicBezTo>
+                <a:cubicBezTo>
+                  <a:pt x="867236" y="12402"/>
+                  <a:pt x="874382" y="15627"/>
+                  <a:pt x="733535" y="18288"/>
+                </a:cubicBezTo>
+                <a:cubicBezTo>
+                  <a:pt x="592688" y="20949"/>
+                  <a:pt x="183477" y="14753"/>
+                  <a:pt x="0" y="18288"/>
+                </a:cubicBezTo>
+                <a:cubicBezTo>
+                  <a:pt x="-229" y="14222"/>
+                  <a:pt x="509" y="5816"/>
+                  <a:pt x="0" y="0"/>
+                </a:cubicBezTo>
+                <a:close/>
+              </a:path>
+              <a:path w="4243589" h="18288" stroke="0" extrusionOk="0">
+                <a:moveTo>
+                  <a:pt x="0" y="0"/>
+                </a:moveTo>
+                <a:cubicBezTo>
+                  <a:pt x="143690" y="16630"/>
+                  <a:pt x="266667" y="14847"/>
+                  <a:pt x="521355" y="0"/>
+                </a:cubicBezTo>
+                <a:cubicBezTo>
+                  <a:pt x="776043" y="-14847"/>
+                  <a:pt x="814491" y="-17363"/>
+                  <a:pt x="1000275" y="0"/>
+                </a:cubicBezTo>
+                <a:cubicBezTo>
+                  <a:pt x="1186059" y="17363"/>
+                  <a:pt x="1352504" y="-23507"/>
+                  <a:pt x="1521630" y="0"/>
+                </a:cubicBezTo>
+                <a:cubicBezTo>
+                  <a:pt x="1690756" y="23507"/>
+                  <a:pt x="1889525" y="5871"/>
+                  <a:pt x="2127857" y="0"/>
+                </a:cubicBezTo>
+                <a:cubicBezTo>
+                  <a:pt x="2366189" y="-5871"/>
+                  <a:pt x="2620628" y="-27997"/>
+                  <a:pt x="2776520" y="0"/>
+                </a:cubicBezTo>
+                <a:cubicBezTo>
+                  <a:pt x="2932412" y="27997"/>
+                  <a:pt x="3131683" y="-25073"/>
+                  <a:pt x="3467618" y="0"/>
+                </a:cubicBezTo>
+                <a:cubicBezTo>
+                  <a:pt x="3803553" y="25073"/>
+                  <a:pt x="4017371" y="3071"/>
+                  <a:pt x="4243589" y="0"/>
+                </a:cubicBezTo>
+                <a:cubicBezTo>
+                  <a:pt x="4243134" y="6162"/>
+                  <a:pt x="4243492" y="11775"/>
+                  <a:pt x="4243589" y="18288"/>
+                </a:cubicBezTo>
+                <a:cubicBezTo>
+                  <a:pt x="4017834" y="-5779"/>
+                  <a:pt x="3834586" y="13376"/>
+                  <a:pt x="3594926" y="18288"/>
+                </a:cubicBezTo>
+                <a:cubicBezTo>
+                  <a:pt x="3355266" y="23200"/>
+                  <a:pt x="3204179" y="2869"/>
+                  <a:pt x="2903827" y="18288"/>
+                </a:cubicBezTo>
+                <a:cubicBezTo>
+                  <a:pt x="2603475" y="33707"/>
+                  <a:pt x="2526187" y="46187"/>
+                  <a:pt x="2212729" y="18288"/>
+                </a:cubicBezTo>
+                <a:cubicBezTo>
+                  <a:pt x="1899271" y="-9611"/>
+                  <a:pt x="1966289" y="29692"/>
+                  <a:pt x="1733809" y="18288"/>
+                </a:cubicBezTo>
+                <a:cubicBezTo>
+                  <a:pt x="1501329" y="6884"/>
+                  <a:pt x="1343612" y="12492"/>
+                  <a:pt x="1085146" y="18288"/>
+                </a:cubicBezTo>
+                <a:cubicBezTo>
+                  <a:pt x="826680" y="24084"/>
+                  <a:pt x="778184" y="35607"/>
+                  <a:pt x="521355" y="18288"/>
+                </a:cubicBezTo>
+                <a:cubicBezTo>
+                  <a:pt x="264526" y="969"/>
+                  <a:pt x="120277" y="4268"/>
+                  <a:pt x="0" y="18288"/>
+                </a:cubicBezTo>
+                <a:cubicBezTo>
+                  <a:pt x="766" y="10800"/>
+                  <a:pt x="-457" y="8180"/>
+                  <a:pt x="0" y="0"/>
+                </a:cubicBezTo>
+                <a:close/>
+              </a:path>
+            </a:pathLst>
+          </a:custGeom>
+          <a:solidFill>
+            <a:schemeClr val="accent2"/>
+          </a:solidFill>
+          <a:ln w="41275" cap="rnd">
+            <a:solidFill>
+              <a:schemeClr val="accent2"/>
+            </a:solidFill>
+            <a:round/>
+            <a:extLst>
+              <a:ext uri="{C807C97D-BFC1-408E-A445-0C87EB9F89A2}">
+                <ask:lineSketchStyleProps xmlns:ask="http://schemas.microsoft.com/office/drawing/2018/sketchyshapes" sd="2727557108">
+                  <a:prstGeom prst="rect">
+                    <a:avLst/>
+                  </a:prstGeom>
+                  <ask:type>
+                    <ask:lineSketchFreehand/>
+                  </ask:type>
+                </ask:lineSketchStyleProps>
+              </a:ext>
+            </a:extLst>
+          </a:ln>
+        </p:spPr>
+        <p:style>
+          <a:lnRef idx="2">
+            <a:schemeClr val="accent1">
+              <a:shade val="50000"/>
+            </a:schemeClr>
+          </a:lnRef>
+          <a:fillRef idx="1">
+            <a:schemeClr val="accent1"/>
+          </a:fillRef>
+          <a:effectRef idx="0">
+            <a:schemeClr val="accent1"/>
+          </a:effectRef>
+          <a:fontRef idx="minor">
+            <a:schemeClr val="lt1"/>
+          </a:fontRef>
+        </p:style>
+        <p:txBody>
+          <a:bodyPr rtlCol="0" anchor="ctr"/>
+          <a:lstStyle/>
+          <a:p>
+            <a:pPr algn="ctr"/>
+            <a:endParaRPr lang="en-US"/>
+          </a:p>
+        </p:txBody>
+      </p:sp>
+      <p:sp>
+        <p:nvSpPr>
+          <p:cNvPr id="3" name="Content Placeholder 2">
+            <a:extLst>
+              <a:ext uri="{FF2B5EF4-FFF2-40B4-BE49-F238E27FC236}">
+                <a16:creationId xmlns:a16="http://schemas.microsoft.com/office/drawing/2014/main" id="{EC5CE7BF-29EB-0616-CC76-430116469C4C}"/>
+              </a:ext>
+            </a:extLst>
+          </p:cNvPr>
+          <p:cNvSpPr>
+            <a:spLocks noGrp="1"/>
+          </p:cNvSpPr>
+          <p:nvPr>
+            <p:ph idx="1"/>
+          </p:nvPr>
+        </p:nvSpPr>
+        <p:spPr>
+          <a:xfrm>
+            <a:off x="640080" y="2706624"/>
+            <a:ext cx="6894576" cy="3483864"/>
+          </a:xfrm>
+        </p:spPr>
+        <p:txBody>
+          <a:bodyPr>
+            <a:normAutofit/>
+          </a:bodyPr>
+          <a:lstStyle/>
+          <a:p>
+            <a:pPr marL="0" indent="0">
+              <a:lnSpc>
+                <a:spcPct val="150000"/>
+              </a:lnSpc>
+              <a:buNone/>
+            </a:pPr>
+            <a:r>
+              <a:rPr lang="en-US" b="1">
+                <a:latin typeface="Times New Roman" panose="02020603050405020304" pitchFamily="18" charset="0"/>
+                <a:cs typeface="Times New Roman" panose="02020603050405020304" pitchFamily="18" charset="0"/>
+              </a:rPr>
+              <a:t>1.2. Mục tiêu của đề tài</a:t>
+            </a:r>
+          </a:p>
+          <a:p>
+            <a:r>
+              <a:rPr lang="en-US" sz="2200" b="1" i="1">
+                <a:latin typeface="Times New Roman" panose="02020603050405020304" pitchFamily="18" charset="0"/>
+                <a:cs typeface="Times New Roman" panose="02020603050405020304" pitchFamily="18" charset="0"/>
+              </a:rPr>
+              <a:t>Xây dựng hệ thống chatbot hỗ trợ học Lịch sử Việt Nam </a:t>
+            </a:r>
+            <a:r>
+              <a:rPr lang="en-US" sz="2200">
+                <a:latin typeface="Times New Roman" panose="02020603050405020304" pitchFamily="18" charset="0"/>
+                <a:cs typeface="Times New Roman" panose="02020603050405020304" pitchFamily="18" charset="0"/>
+              </a:rPr>
+              <a:t>bằng cách ứng dụng LLM và các công nghệ NLP tiên tiến.</a:t>
+            </a:r>
+          </a:p>
+          <a:p>
+            <a:r>
+              <a:rPr lang="en-US" sz="2200" b="1" i="1">
+                <a:latin typeface="Times New Roman" panose="02020603050405020304" pitchFamily="18" charset="0"/>
+                <a:cs typeface="Times New Roman" panose="02020603050405020304" pitchFamily="18" charset="0"/>
+              </a:rPr>
+              <a:t>Gia tăng </a:t>
+            </a:r>
+            <a:r>
+              <a:rPr lang="en-US" sz="2200">
+                <a:latin typeface="Times New Roman" panose="02020603050405020304" pitchFamily="18" charset="0"/>
+                <a:cs typeface="Times New Roman" panose="02020603050405020304" pitchFamily="18" charset="0"/>
+              </a:rPr>
+              <a:t>tính tự động hóa, hiệu quả và trải nghiệm của việc học Lịch sử.</a:t>
+            </a:r>
+          </a:p>
+          <a:p>
+            <a:r>
+              <a:rPr lang="en-US" sz="2200" b="1" i="1">
+                <a:latin typeface="Times New Roman" panose="02020603050405020304" pitchFamily="18" charset="0"/>
+                <a:cs typeface="Times New Roman" panose="02020603050405020304" pitchFamily="18" charset="0"/>
+              </a:rPr>
+              <a:t>Bổ trợ </a:t>
+            </a:r>
+            <a:r>
+              <a:rPr lang="en-US" sz="2200">
+                <a:latin typeface="Times New Roman" panose="02020603050405020304" pitchFamily="18" charset="0"/>
+                <a:cs typeface="Times New Roman" panose="02020603050405020304" pitchFamily="18" charset="0"/>
+              </a:rPr>
+              <a:t>và hiện đại hóa phương pháp giáo dục truyền thống.</a:t>
+            </a:r>
+          </a:p>
+          <a:p>
+            <a:endParaRPr lang="en-US" sz="2200">
+              <a:latin typeface="Times New Roman" panose="02020603050405020304" pitchFamily="18" charset="0"/>
+              <a:cs typeface="Times New Roman" panose="02020603050405020304" pitchFamily="18" charset="0"/>
+            </a:endParaRPr>
+          </a:p>
+        </p:txBody>
+      </p:sp>
+      <p:pic>
+        <p:nvPicPr>
+          <p:cNvPr id="7" name="Picture 6" descr="A teacher teaching a class&#10;&#10;AI-generated content may be incorrect.">
+            <a:extLst>
+              <a:ext uri="{FF2B5EF4-FFF2-40B4-BE49-F238E27FC236}">
+                <a16:creationId xmlns:a16="http://schemas.microsoft.com/office/drawing/2014/main" id="{1511805F-94FA-3749-A5B0-C25E681A6F55}"/>
+              </a:ext>
+            </a:extLst>
+          </p:cNvPr>
+          <p:cNvPicPr>
+            <a:picLocks noChangeAspect="1"/>
+          </p:cNvPicPr>
+          <p:nvPr/>
+        </p:nvPicPr>
+        <p:blipFill>
+          <a:blip r:embed="rId2">
+            <a:extLst>
+              <a:ext uri="{28A0092B-C50C-407E-A947-70E740481C1C}">
+                <a14:useLocalDpi xmlns:a14="http://schemas.microsoft.com/office/drawing/2010/main" val="0"/>
+              </a:ext>
+            </a:extLst>
+          </a:blip>
+          <a:stretch>
+            <a:fillRect/>
+          </a:stretch>
+        </p:blipFill>
+        <p:spPr>
+          <a:xfrm>
+            <a:off x="7863840" y="704423"/>
+            <a:ext cx="4014216" cy="2679489"/>
+          </a:xfrm>
+          <a:prstGeom prst="rect">
+            <a:avLst/>
+          </a:prstGeom>
+        </p:spPr>
+      </p:pic>
+      <p:pic>
+        <p:nvPicPr>
+          <p:cNvPr id="5" name="Picture 4" descr="A chatbot with a headset&#10;&#10;AI-generated content may be incorrect.">
+            <a:extLst>
+              <a:ext uri="{FF2B5EF4-FFF2-40B4-BE49-F238E27FC236}">
+                <a16:creationId xmlns:a16="http://schemas.microsoft.com/office/drawing/2014/main" id="{73751C16-9EAF-37E9-87A1-B09347ACC783}"/>
+              </a:ext>
+            </a:extLst>
+          </p:cNvPr>
+          <p:cNvPicPr>
+            <a:picLocks noChangeAspect="1"/>
+          </p:cNvPicPr>
+          <p:nvPr/>
+        </p:nvPicPr>
+        <p:blipFill>
+          <a:blip r:embed="rId3">
+            <a:extLst>
+              <a:ext uri="{28A0092B-C50C-407E-A947-70E740481C1C}">
+                <a14:useLocalDpi xmlns:a14="http://schemas.microsoft.com/office/drawing/2010/main" val="0"/>
+              </a:ext>
+            </a:extLst>
+          </a:blip>
+          <a:stretch>
+            <a:fillRect/>
+          </a:stretch>
+        </p:blipFill>
+        <p:spPr>
+          <a:xfrm>
+            <a:off x="8148204" y="4079193"/>
+            <a:ext cx="3427200" cy="2176272"/>
+          </a:xfrm>
+          <a:prstGeom prst="rect">
+            <a:avLst/>
+          </a:prstGeom>
+        </p:spPr>
+      </p:pic>
+      <p:sp>
+        <p:nvSpPr>
+          <p:cNvPr id="9" name="Arrow: Up 8">
+            <a:extLst>
+              <a:ext uri="{FF2B5EF4-FFF2-40B4-BE49-F238E27FC236}">
+                <a16:creationId xmlns:a16="http://schemas.microsoft.com/office/drawing/2014/main" id="{6CE18BF5-C5F9-D784-FA15-E641D51DCB74}"/>
+              </a:ext>
+            </a:extLst>
+          </p:cNvPr>
+          <p:cNvSpPr/>
+          <p:nvPr/>
+        </p:nvSpPr>
+        <p:spPr>
+          <a:xfrm>
+            <a:off x="9734590" y="3561347"/>
+            <a:ext cx="272715" cy="368969"/>
+          </a:xfrm>
+          <a:prstGeom prst="upArrow">
+            <a:avLst/>
+          </a:prstGeom>
+        </p:spPr>
+        <p:style>
+          <a:lnRef idx="1">
+            <a:schemeClr val="dk1"/>
+          </a:lnRef>
+          <a:fillRef idx="2">
+            <a:schemeClr val="dk1"/>
+          </a:fillRef>
+          <a:effectRef idx="1">
+            <a:schemeClr val="dk1"/>
+          </a:effectRef>
+          <a:fontRef idx="minor">
+            <a:schemeClr val="dk1"/>
+          </a:fontRef>
+        </p:style>
+        <p:txBody>
+          <a:bodyPr rtlCol="0" anchor="ctr"/>
+          <a:lstStyle/>
+          <a:p>
+            <a:pPr algn="ctr"/>
+            <a:endParaRPr lang="en-US"/>
+          </a:p>
+        </p:txBody>
+      </p:sp>
+      <p:sp>
+        <p:nvSpPr>
+          <p:cNvPr id="11" name="TextBox 10">
+            <a:extLst>
+              <a:ext uri="{FF2B5EF4-FFF2-40B4-BE49-F238E27FC236}">
+                <a16:creationId xmlns:a16="http://schemas.microsoft.com/office/drawing/2014/main" id="{F6A64011-730D-C95C-DF94-B39101006B8E}"/>
+              </a:ext>
+            </a:extLst>
+          </p:cNvPr>
+          <p:cNvSpPr txBox="1"/>
+          <p:nvPr/>
+        </p:nvSpPr>
+        <p:spPr>
+          <a:xfrm>
+            <a:off x="10007305" y="3564873"/>
+            <a:ext cx="779381" cy="369332"/>
+          </a:xfrm>
+          <a:prstGeom prst="rect">
+            <a:avLst/>
+          </a:prstGeom>
+          <a:noFill/>
+        </p:spPr>
+        <p:txBody>
+          <a:bodyPr wrap="none" rtlCol="0">
+            <a:spAutoFit/>
+          </a:bodyPr>
+          <a:lstStyle/>
+          <a:p>
+            <a:r>
+              <a:rPr lang="en-US">
+                <a:latin typeface="Times New Roman" panose="02020603050405020304" pitchFamily="18" charset="0"/>
+                <a:cs typeface="Times New Roman" panose="02020603050405020304" pitchFamily="18" charset="0"/>
+              </a:rPr>
+              <a:t>Bổ trợ</a:t>
+            </a:r>
+          </a:p>
+        </p:txBody>
+      </p:sp>
+    </p:spTree>
+    <p:extLst>
+      <p:ext uri="{BB962C8B-B14F-4D97-AF65-F5344CB8AC3E}">
+        <p14:creationId xmlns:p14="http://schemas.microsoft.com/office/powerpoint/2010/main" val="3036869619"/>
+      </p:ext>
+    </p:extLst>
+  </p:cSld>
+  <p:clrMapOvr>
+    <a:masterClrMapping/>
+  </p:clrMapOvr>
+</p:sld>
+</file>
+
+<file path=ppt/slides/slide50.xml><?xml version="1.0" encoding="utf-8"?>
 <p:sld xmlns:a="http://schemas.openxmlformats.org/drawingml/2006/main" xmlns:r="http://schemas.openxmlformats.org/officeDocument/2006/relationships" xmlns:p="http://schemas.openxmlformats.org/presentationml/2006/main">
   <p:cSld>
     <p:spTree>
@@ -9707,120 +14388,7 @@
 </p:sld>
 </file>
 
-<file path=ppt/slides/slide5.xml><?xml version="1.0" encoding="utf-8"?>
-<p:sld xmlns:a="http://schemas.openxmlformats.org/drawingml/2006/main" xmlns:r="http://schemas.openxmlformats.org/officeDocument/2006/relationships" xmlns:p="http://schemas.openxmlformats.org/presentationml/2006/main">
-  <p:cSld>
-    <p:spTree>
-      <p:nvGrpSpPr>
-        <p:cNvPr id="1" name="">
-          <a:extLst>
-            <a:ext uri="{FF2B5EF4-FFF2-40B4-BE49-F238E27FC236}">
-              <a16:creationId xmlns:a16="http://schemas.microsoft.com/office/drawing/2014/main" id="{55ACC9AE-4282-9F1E-1993-C94D1F1C7DCA}"/>
-            </a:ext>
-          </a:extLst>
-        </p:cNvPr>
-        <p:cNvGrpSpPr/>
-        <p:nvPr/>
-      </p:nvGrpSpPr>
-      <p:grpSpPr>
-        <a:xfrm>
-          <a:off x="0" y="0"/>
-          <a:ext cx="0" cy="0"/>
-          <a:chOff x="0" y="0"/>
-          <a:chExt cx="0" cy="0"/>
-        </a:xfrm>
-      </p:grpSpPr>
-      <p:sp>
-        <p:nvSpPr>
-          <p:cNvPr id="2" name="Title 1">
-            <a:extLst>
-              <a:ext uri="{FF2B5EF4-FFF2-40B4-BE49-F238E27FC236}">
-                <a16:creationId xmlns:a16="http://schemas.microsoft.com/office/drawing/2014/main" id="{3FEAC56F-4530-0099-1FEB-FF6A38C16C16}"/>
-              </a:ext>
-            </a:extLst>
-          </p:cNvPr>
-          <p:cNvSpPr>
-            <a:spLocks noGrp="1"/>
-          </p:cNvSpPr>
-          <p:nvPr>
-            <p:ph type="title"/>
-          </p:nvPr>
-        </p:nvSpPr>
-        <p:spPr>
-          <a:xfrm>
-            <a:off x="838200" y="365125"/>
-            <a:ext cx="10515600" cy="1030537"/>
-          </a:xfrm>
-        </p:spPr>
-        <p:txBody>
-          <a:bodyPr>
-            <a:normAutofit/>
-          </a:bodyPr>
-          <a:lstStyle/>
-          <a:p>
-            <a:r>
-              <a:rPr lang="en-US" sz="4000" b="1">
-                <a:latin typeface="Times New Roman" panose="02020603050405020304" pitchFamily="18" charset="0"/>
-                <a:cs typeface="Times New Roman" panose="02020603050405020304" pitchFamily="18" charset="0"/>
-              </a:rPr>
-              <a:t>GIỚI THIỆU ĐỀ TÀI</a:t>
-            </a:r>
-          </a:p>
-        </p:txBody>
-      </p:sp>
-      <p:sp>
-        <p:nvSpPr>
-          <p:cNvPr id="3" name="Content Placeholder 2">
-            <a:extLst>
-              <a:ext uri="{FF2B5EF4-FFF2-40B4-BE49-F238E27FC236}">
-                <a16:creationId xmlns:a16="http://schemas.microsoft.com/office/drawing/2014/main" id="{EC5CE7BF-29EB-0616-CC76-430116469C4C}"/>
-              </a:ext>
-            </a:extLst>
-          </p:cNvPr>
-          <p:cNvSpPr>
-            <a:spLocks noGrp="1"/>
-          </p:cNvSpPr>
-          <p:nvPr>
-            <p:ph idx="1"/>
-          </p:nvPr>
-        </p:nvSpPr>
-        <p:spPr>
-          <a:xfrm>
-            <a:off x="838200" y="1395662"/>
-            <a:ext cx="10515600" cy="4781301"/>
-          </a:xfrm>
-        </p:spPr>
-        <p:txBody>
-          <a:bodyPr/>
-          <a:lstStyle/>
-          <a:p>
-            <a:pPr marL="0" indent="0">
-              <a:buNone/>
-            </a:pPr>
-            <a:r>
-              <a:rPr lang="en-US" i="1">
-                <a:latin typeface="Times New Roman" panose="02020603050405020304" pitchFamily="18" charset="0"/>
-                <a:cs typeface="Times New Roman" panose="02020603050405020304" pitchFamily="18" charset="0"/>
-              </a:rPr>
-              <a:t>1.2. Mục tiêu của đề tài</a:t>
-            </a:r>
-          </a:p>
-        </p:txBody>
-      </p:sp>
-    </p:spTree>
-    <p:extLst>
-      <p:ext uri="{BB962C8B-B14F-4D97-AF65-F5344CB8AC3E}">
-        <p14:creationId xmlns:p14="http://schemas.microsoft.com/office/powerpoint/2010/main" val="3036869619"/>
-      </p:ext>
-    </p:extLst>
-  </p:cSld>
-  <p:clrMapOvr>
-    <a:masterClrMapping/>
-  </p:clrMapOvr>
-</p:sld>
-</file>
-
-<file path=ppt/slides/slide50.xml><?xml version="1.0" encoding="utf-8"?>
+<file path=ppt/slides/slide51.xml><?xml version="1.0" encoding="utf-8"?>
 <p:sld xmlns:a="http://schemas.openxmlformats.org/drawingml/2006/main" xmlns:r="http://schemas.openxmlformats.org/officeDocument/2006/relationships" xmlns:p="http://schemas.openxmlformats.org/presentationml/2006/main">
   <p:cSld>
     <p:spTree>
@@ -9945,7 +14513,7 @@
 </p:sld>
 </file>
 
-<file path=ppt/slides/slide51.xml><?xml version="1.0" encoding="utf-8"?>
+<file path=ppt/slides/slide52.xml><?xml version="1.0" encoding="utf-8"?>
 <p:sld xmlns:a="http://schemas.openxmlformats.org/drawingml/2006/main" xmlns:r="http://schemas.openxmlformats.org/officeDocument/2006/relationships" xmlns:p="http://schemas.openxmlformats.org/presentationml/2006/main">
   <p:cSld>
     <p:spTree>
@@ -10070,7 +14638,7 @@
 </p:sld>
 </file>
 
-<file path=ppt/slides/slide52.xml><?xml version="1.0" encoding="utf-8"?>
+<file path=ppt/slides/slide53.xml><?xml version="1.0" encoding="utf-8"?>
 <p:sld xmlns:a="http://schemas.openxmlformats.org/drawingml/2006/main" xmlns:r="http://schemas.openxmlformats.org/officeDocument/2006/relationships" xmlns:p="http://schemas.openxmlformats.org/presentationml/2006/main">
   <p:cSld>
     <p:spTree>
@@ -10195,7 +14763,7 @@
 </p:sld>
 </file>
 
-<file path=ppt/slides/slide53.xml><?xml version="1.0" encoding="utf-8"?>
+<file path=ppt/slides/slide54.xml><?xml version="1.0" encoding="utf-8"?>
 <p:sld xmlns:a="http://schemas.openxmlformats.org/drawingml/2006/main" xmlns:r="http://schemas.openxmlformats.org/officeDocument/2006/relationships" xmlns:p="http://schemas.openxmlformats.org/presentationml/2006/main">
   <p:cSld>
     <p:spTree>
@@ -10329,7 +14897,7 @@
 </p:sld>
 </file>
 
-<file path=ppt/slides/slide54.xml><?xml version="1.0" encoding="utf-8"?>
+<file path=ppt/slides/slide55.xml><?xml version="1.0" encoding="utf-8"?>
 <p:sld xmlns:a="http://schemas.openxmlformats.org/drawingml/2006/main" xmlns:r="http://schemas.openxmlformats.org/officeDocument/2006/relationships" xmlns:p="http://schemas.openxmlformats.org/presentationml/2006/main">
   <p:cSld>
     <p:spTree>
@@ -10463,7 +15031,7 @@
 </p:sld>
 </file>
 
-<file path=ppt/slides/slide55.xml><?xml version="1.0" encoding="utf-8"?>
+<file path=ppt/slides/slide56.xml><?xml version="1.0" encoding="utf-8"?>
 <p:sld xmlns:a="http://schemas.openxmlformats.org/drawingml/2006/main" xmlns:r="http://schemas.openxmlformats.org/officeDocument/2006/relationships" xmlns:p="http://schemas.openxmlformats.org/presentationml/2006/main">
   <p:cSld>
     <p:spTree>
@@ -10588,7 +15156,7 @@
 </p:sld>
 </file>
 
-<file path=ppt/slides/slide56.xml><?xml version="1.0" encoding="utf-8"?>
+<file path=ppt/slides/slide57.xml><?xml version="1.0" encoding="utf-8"?>
 <p:sld xmlns:a="http://schemas.openxmlformats.org/drawingml/2006/main" xmlns:r="http://schemas.openxmlformats.org/officeDocument/2006/relationships" xmlns:p="http://schemas.openxmlformats.org/presentationml/2006/main">
   <p:cSld>
     <p:spTree>
@@ -10713,7 +15281,7 @@
 </p:sld>
 </file>
 
-<file path=ppt/slides/slide57.xml><?xml version="1.0" encoding="utf-8"?>
+<file path=ppt/slides/slide58.xml><?xml version="1.0" encoding="utf-8"?>
 <p:sld xmlns:a="http://schemas.openxmlformats.org/drawingml/2006/main" xmlns:r="http://schemas.openxmlformats.org/officeDocument/2006/relationships" xmlns:p="http://schemas.openxmlformats.org/presentationml/2006/main">
   <p:cSld>
     <p:spTree>
@@ -10820,7 +15388,7 @@
 </p:sld>
 </file>
 
-<file path=ppt/slides/slide58.xml><?xml version="1.0" encoding="utf-8"?>
+<file path=ppt/slides/slide59.xml><?xml version="1.0" encoding="utf-8"?>
 <p:sld xmlns:a="http://schemas.openxmlformats.org/drawingml/2006/main" xmlns:r="http://schemas.openxmlformats.org/officeDocument/2006/relationships" xmlns:p="http://schemas.openxmlformats.org/presentationml/2006/main">
   <p:cSld>
     <p:spTree>
@@ -10933,7 +15501,900 @@
 </p:sld>
 </file>
 
-<file path=ppt/slides/slide59.xml><?xml version="1.0" encoding="utf-8"?>
+<file path=ppt/slides/slide6.xml><?xml version="1.0" encoding="utf-8"?>
+<p:sld xmlns:a="http://schemas.openxmlformats.org/drawingml/2006/main" xmlns:r="http://schemas.openxmlformats.org/officeDocument/2006/relationships" xmlns:p="http://schemas.openxmlformats.org/presentationml/2006/main">
+  <p:cSld>
+    <p:bg>
+      <p:bgPr>
+        <a:solidFill>
+          <a:schemeClr val="bg1"/>
+        </a:solidFill>
+        <a:effectLst/>
+      </p:bgPr>
+    </p:bg>
+    <p:spTree>
+      <p:nvGrpSpPr>
+        <p:cNvPr id="1" name="">
+          <a:extLst>
+            <a:ext uri="{FF2B5EF4-FFF2-40B4-BE49-F238E27FC236}">
+              <a16:creationId xmlns:a16="http://schemas.microsoft.com/office/drawing/2014/main" id="{6129467A-6B36-F138-6409-BB22F619E1ED}"/>
+            </a:ext>
+          </a:extLst>
+        </p:cNvPr>
+        <p:cNvGrpSpPr/>
+        <p:nvPr/>
+      </p:nvGrpSpPr>
+      <p:grpSpPr>
+        <a:xfrm>
+          <a:off x="0" y="0"/>
+          <a:ext cx="0" cy="0"/>
+          <a:chOff x="0" y="0"/>
+          <a:chExt cx="0" cy="0"/>
+        </a:xfrm>
+      </p:grpSpPr>
+      <p:sp useBgFill="1">
+        <p:nvSpPr>
+          <p:cNvPr id="8" name="Rectangle 7">
+            <a:extLst>
+              <a:ext uri="{FF2B5EF4-FFF2-40B4-BE49-F238E27FC236}">
+                <a16:creationId xmlns:a16="http://schemas.microsoft.com/office/drawing/2014/main" id="{100EDD19-6802-4EC3-95CE-CFFAB042CFD6}"/>
+              </a:ext>
+              <a:ext uri="{C183D7F6-B498-43B3-948B-1728B52AA6E4}">
+                <adec:decorative xmlns:adec="http://schemas.microsoft.com/office/drawing/2017/decorative" val="1"/>
+              </a:ext>
+            </a:extLst>
+          </p:cNvPr>
+          <p:cNvSpPr>
+            <a:spLocks noGrp="1" noRot="1" noChangeAspect="1" noMove="1" noResize="1" noEditPoints="1" noAdjustHandles="1" noChangeArrowheads="1" noChangeShapeType="1" noTextEdit="1"/>
+          </p:cNvSpPr>
+          <p:nvPr>
+            <p:extLst>
+              <p:ext uri="{386F3935-93C4-4BCD-93E2-E3B085C9AB24}">
+                <p16:designElem xmlns:p16="http://schemas.microsoft.com/office/powerpoint/2015/main" val="1"/>
+              </p:ext>
+            </p:extLst>
+          </p:nvPr>
+        </p:nvSpPr>
+        <p:spPr>
+          <a:xfrm>
+            <a:off x="0" y="0"/>
+            <a:ext cx="12188952" cy="6858000"/>
+          </a:xfrm>
+          <a:prstGeom prst="rect">
+            <a:avLst/>
+          </a:prstGeom>
+          <a:ln>
+            <a:noFill/>
+          </a:ln>
+        </p:spPr>
+        <p:style>
+          <a:lnRef idx="2">
+            <a:schemeClr val="accent1">
+              <a:shade val="50000"/>
+            </a:schemeClr>
+          </a:lnRef>
+          <a:fillRef idx="1">
+            <a:schemeClr val="accent1"/>
+          </a:fillRef>
+          <a:effectRef idx="0">
+            <a:schemeClr val="accent1"/>
+          </a:effectRef>
+          <a:fontRef idx="minor">
+            <a:schemeClr val="lt1"/>
+          </a:fontRef>
+        </p:style>
+        <p:txBody>
+          <a:bodyPr rtlCol="0" anchor="ctr"/>
+          <a:lstStyle/>
+          <a:p>
+            <a:pPr algn="ctr"/>
+            <a:endParaRPr lang="en-US"/>
+          </a:p>
+        </p:txBody>
+      </p:sp>
+      <p:sp>
+        <p:nvSpPr>
+          <p:cNvPr id="2" name="Title 1">
+            <a:extLst>
+              <a:ext uri="{FF2B5EF4-FFF2-40B4-BE49-F238E27FC236}">
+                <a16:creationId xmlns:a16="http://schemas.microsoft.com/office/drawing/2014/main" id="{F6A6D7A7-A6F2-02BE-01CB-B79575395016}"/>
+              </a:ext>
+            </a:extLst>
+          </p:cNvPr>
+          <p:cNvSpPr>
+            <a:spLocks noGrp="1"/>
+          </p:cNvSpPr>
+          <p:nvPr>
+            <p:ph type="title"/>
+          </p:nvPr>
+        </p:nvSpPr>
+        <p:spPr>
+          <a:xfrm>
+            <a:off x="838200" y="365125"/>
+            <a:ext cx="10515600" cy="1325563"/>
+          </a:xfrm>
+        </p:spPr>
+        <p:txBody>
+          <a:bodyPr>
+            <a:normAutofit/>
+          </a:bodyPr>
+          <a:lstStyle/>
+          <a:p>
+            <a:r>
+              <a:rPr lang="en-US" sz="5400" b="1">
+                <a:latin typeface="Times New Roman" panose="02020603050405020304" pitchFamily="18" charset="0"/>
+                <a:cs typeface="Times New Roman" panose="02020603050405020304" pitchFamily="18" charset="0"/>
+              </a:rPr>
+              <a:t>GIỚI THIỆU ĐỀ TÀI</a:t>
+            </a:r>
+          </a:p>
+        </p:txBody>
+      </p:sp>
+      <p:sp>
+        <p:nvSpPr>
+          <p:cNvPr id="10" name="sketch line">
+            <a:extLst>
+              <a:ext uri="{FF2B5EF4-FFF2-40B4-BE49-F238E27FC236}">
+                <a16:creationId xmlns:a16="http://schemas.microsoft.com/office/drawing/2014/main" id="{DB17E863-922E-4C26-BD64-E8FD41D28661}"/>
+              </a:ext>
+              <a:ext uri="{C183D7F6-B498-43B3-948B-1728B52AA6E4}">
+                <adec:decorative xmlns:adec="http://schemas.microsoft.com/office/drawing/2017/decorative" val="1"/>
+              </a:ext>
+            </a:extLst>
+          </p:cNvPr>
+          <p:cNvSpPr>
+            <a:spLocks noGrp="1" noRot="1" noChangeAspect="1" noMove="1" noResize="1" noEditPoints="1" noAdjustHandles="1" noChangeArrowheads="1" noChangeShapeType="1" noTextEdit="1"/>
+          </p:cNvSpPr>
+          <p:nvPr>
+            <p:extLst>
+              <p:ext uri="{386F3935-93C4-4BCD-93E2-E3B085C9AB24}">
+                <p16:designElem xmlns:p16="http://schemas.microsoft.com/office/powerpoint/2015/main" val="1"/>
+              </p:ext>
+            </p:extLst>
+          </p:nvPr>
+        </p:nvSpPr>
+        <p:spPr>
+          <a:xfrm>
+            <a:off x="669036" y="1677373"/>
+            <a:ext cx="10853928" cy="18288"/>
+          </a:xfrm>
+          <a:custGeom>
+            <a:avLst/>
+            <a:gdLst>
+              <a:gd name="connsiteX0" fmla="*/ 0 w 10853928"/>
+              <a:gd name="connsiteY0" fmla="*/ 0 h 18288"/>
+              <a:gd name="connsiteX1" fmla="*/ 461292 w 10853928"/>
+              <a:gd name="connsiteY1" fmla="*/ 0 h 18288"/>
+              <a:gd name="connsiteX2" fmla="*/ 1139662 w 10853928"/>
+              <a:gd name="connsiteY2" fmla="*/ 0 h 18288"/>
+              <a:gd name="connsiteX3" fmla="*/ 1926572 w 10853928"/>
+              <a:gd name="connsiteY3" fmla="*/ 0 h 18288"/>
+              <a:gd name="connsiteX4" fmla="*/ 2279325 w 10853928"/>
+              <a:gd name="connsiteY4" fmla="*/ 0 h 18288"/>
+              <a:gd name="connsiteX5" fmla="*/ 2632078 w 10853928"/>
+              <a:gd name="connsiteY5" fmla="*/ 0 h 18288"/>
+              <a:gd name="connsiteX6" fmla="*/ 3527527 w 10853928"/>
+              <a:gd name="connsiteY6" fmla="*/ 0 h 18288"/>
+              <a:gd name="connsiteX7" fmla="*/ 4205897 w 10853928"/>
+              <a:gd name="connsiteY7" fmla="*/ 0 h 18288"/>
+              <a:gd name="connsiteX8" fmla="*/ 4558650 w 10853928"/>
+              <a:gd name="connsiteY8" fmla="*/ 0 h 18288"/>
+              <a:gd name="connsiteX9" fmla="*/ 5237020 w 10853928"/>
+              <a:gd name="connsiteY9" fmla="*/ 0 h 18288"/>
+              <a:gd name="connsiteX10" fmla="*/ 6132469 w 10853928"/>
+              <a:gd name="connsiteY10" fmla="*/ 0 h 18288"/>
+              <a:gd name="connsiteX11" fmla="*/ 6702301 w 10853928"/>
+              <a:gd name="connsiteY11" fmla="*/ 0 h 18288"/>
+              <a:gd name="connsiteX12" fmla="*/ 7272132 w 10853928"/>
+              <a:gd name="connsiteY12" fmla="*/ 0 h 18288"/>
+              <a:gd name="connsiteX13" fmla="*/ 7950502 w 10853928"/>
+              <a:gd name="connsiteY13" fmla="*/ 0 h 18288"/>
+              <a:gd name="connsiteX14" fmla="*/ 8737412 w 10853928"/>
+              <a:gd name="connsiteY14" fmla="*/ 0 h 18288"/>
+              <a:gd name="connsiteX15" fmla="*/ 9524322 w 10853928"/>
+              <a:gd name="connsiteY15" fmla="*/ 0 h 18288"/>
+              <a:gd name="connsiteX16" fmla="*/ 10853928 w 10853928"/>
+              <a:gd name="connsiteY16" fmla="*/ 0 h 18288"/>
+              <a:gd name="connsiteX17" fmla="*/ 10853928 w 10853928"/>
+              <a:gd name="connsiteY17" fmla="*/ 18288 h 18288"/>
+              <a:gd name="connsiteX18" fmla="*/ 10392636 w 10853928"/>
+              <a:gd name="connsiteY18" fmla="*/ 18288 h 18288"/>
+              <a:gd name="connsiteX19" fmla="*/ 9497187 w 10853928"/>
+              <a:gd name="connsiteY19" fmla="*/ 18288 h 18288"/>
+              <a:gd name="connsiteX20" fmla="*/ 8818817 w 10853928"/>
+              <a:gd name="connsiteY20" fmla="*/ 18288 h 18288"/>
+              <a:gd name="connsiteX21" fmla="*/ 8466064 w 10853928"/>
+              <a:gd name="connsiteY21" fmla="*/ 18288 h 18288"/>
+              <a:gd name="connsiteX22" fmla="*/ 7787693 w 10853928"/>
+              <a:gd name="connsiteY22" fmla="*/ 18288 h 18288"/>
+              <a:gd name="connsiteX23" fmla="*/ 7217862 w 10853928"/>
+              <a:gd name="connsiteY23" fmla="*/ 18288 h 18288"/>
+              <a:gd name="connsiteX24" fmla="*/ 6648031 w 10853928"/>
+              <a:gd name="connsiteY24" fmla="*/ 18288 h 18288"/>
+              <a:gd name="connsiteX25" fmla="*/ 6078200 w 10853928"/>
+              <a:gd name="connsiteY25" fmla="*/ 18288 h 18288"/>
+              <a:gd name="connsiteX26" fmla="*/ 5508368 w 10853928"/>
+              <a:gd name="connsiteY26" fmla="*/ 18288 h 18288"/>
+              <a:gd name="connsiteX27" fmla="*/ 4721459 w 10853928"/>
+              <a:gd name="connsiteY27" fmla="*/ 18288 h 18288"/>
+              <a:gd name="connsiteX28" fmla="*/ 4043088 w 10853928"/>
+              <a:gd name="connsiteY28" fmla="*/ 18288 h 18288"/>
+              <a:gd name="connsiteX29" fmla="*/ 3690336 w 10853928"/>
+              <a:gd name="connsiteY29" fmla="*/ 18288 h 18288"/>
+              <a:gd name="connsiteX30" fmla="*/ 3120504 w 10853928"/>
+              <a:gd name="connsiteY30" fmla="*/ 18288 h 18288"/>
+              <a:gd name="connsiteX31" fmla="*/ 2333595 w 10853928"/>
+              <a:gd name="connsiteY31" fmla="*/ 18288 h 18288"/>
+              <a:gd name="connsiteX32" fmla="*/ 1872303 w 10853928"/>
+              <a:gd name="connsiteY32" fmla="*/ 18288 h 18288"/>
+              <a:gd name="connsiteX33" fmla="*/ 976854 w 10853928"/>
+              <a:gd name="connsiteY33" fmla="*/ 18288 h 18288"/>
+              <a:gd name="connsiteX34" fmla="*/ 0 w 10853928"/>
+              <a:gd name="connsiteY34" fmla="*/ 18288 h 18288"/>
+              <a:gd name="connsiteX35" fmla="*/ 0 w 10853928"/>
+              <a:gd name="connsiteY35" fmla="*/ 0 h 18288"/>
+            </a:gdLst>
+            <a:ahLst/>
+            <a:cxnLst>
+              <a:cxn ang="0">
+                <a:pos x="connsiteX0" y="connsiteY0"/>
+              </a:cxn>
+              <a:cxn ang="0">
+                <a:pos x="connsiteX1" y="connsiteY1"/>
+              </a:cxn>
+              <a:cxn ang="0">
+                <a:pos x="connsiteX2" y="connsiteY2"/>
+              </a:cxn>
+              <a:cxn ang="0">
+                <a:pos x="connsiteX3" y="connsiteY3"/>
+              </a:cxn>
+              <a:cxn ang="0">
+                <a:pos x="connsiteX4" y="connsiteY4"/>
+              </a:cxn>
+              <a:cxn ang="0">
+                <a:pos x="connsiteX5" y="connsiteY5"/>
+              </a:cxn>
+              <a:cxn ang="0">
+                <a:pos x="connsiteX6" y="connsiteY6"/>
+              </a:cxn>
+              <a:cxn ang="0">
+                <a:pos x="connsiteX7" y="connsiteY7"/>
+              </a:cxn>
+              <a:cxn ang="0">
+                <a:pos x="connsiteX8" y="connsiteY8"/>
+              </a:cxn>
+              <a:cxn ang="0">
+                <a:pos x="connsiteX9" y="connsiteY9"/>
+              </a:cxn>
+              <a:cxn ang="0">
+                <a:pos x="connsiteX10" y="connsiteY10"/>
+              </a:cxn>
+              <a:cxn ang="0">
+                <a:pos x="connsiteX11" y="connsiteY11"/>
+              </a:cxn>
+              <a:cxn ang="0">
+                <a:pos x="connsiteX12" y="connsiteY12"/>
+              </a:cxn>
+              <a:cxn ang="0">
+                <a:pos x="connsiteX13" y="connsiteY13"/>
+              </a:cxn>
+              <a:cxn ang="0">
+                <a:pos x="connsiteX14" y="connsiteY14"/>
+              </a:cxn>
+              <a:cxn ang="0">
+                <a:pos x="connsiteX15" y="connsiteY15"/>
+              </a:cxn>
+              <a:cxn ang="0">
+                <a:pos x="connsiteX16" y="connsiteY16"/>
+              </a:cxn>
+              <a:cxn ang="0">
+                <a:pos x="connsiteX17" y="connsiteY17"/>
+              </a:cxn>
+              <a:cxn ang="0">
+                <a:pos x="connsiteX18" y="connsiteY18"/>
+              </a:cxn>
+              <a:cxn ang="0">
+                <a:pos x="connsiteX19" y="connsiteY19"/>
+              </a:cxn>
+              <a:cxn ang="0">
+                <a:pos x="connsiteX20" y="connsiteY20"/>
+              </a:cxn>
+              <a:cxn ang="0">
+                <a:pos x="connsiteX21" y="connsiteY21"/>
+              </a:cxn>
+              <a:cxn ang="0">
+                <a:pos x="connsiteX22" y="connsiteY22"/>
+              </a:cxn>
+              <a:cxn ang="0">
+                <a:pos x="connsiteX23" y="connsiteY23"/>
+              </a:cxn>
+              <a:cxn ang="0">
+                <a:pos x="connsiteX24" y="connsiteY24"/>
+              </a:cxn>
+              <a:cxn ang="0">
+                <a:pos x="connsiteX25" y="connsiteY25"/>
+              </a:cxn>
+              <a:cxn ang="0">
+                <a:pos x="connsiteX26" y="connsiteY26"/>
+              </a:cxn>
+              <a:cxn ang="0">
+                <a:pos x="connsiteX27" y="connsiteY27"/>
+              </a:cxn>
+              <a:cxn ang="0">
+                <a:pos x="connsiteX28" y="connsiteY28"/>
+              </a:cxn>
+              <a:cxn ang="0">
+                <a:pos x="connsiteX29" y="connsiteY29"/>
+              </a:cxn>
+              <a:cxn ang="0">
+                <a:pos x="connsiteX30" y="connsiteY30"/>
+              </a:cxn>
+              <a:cxn ang="0">
+                <a:pos x="connsiteX31" y="connsiteY31"/>
+              </a:cxn>
+              <a:cxn ang="0">
+                <a:pos x="connsiteX32" y="connsiteY32"/>
+              </a:cxn>
+              <a:cxn ang="0">
+                <a:pos x="connsiteX33" y="connsiteY33"/>
+              </a:cxn>
+              <a:cxn ang="0">
+                <a:pos x="connsiteX34" y="connsiteY34"/>
+              </a:cxn>
+              <a:cxn ang="0">
+                <a:pos x="connsiteX35" y="connsiteY35"/>
+              </a:cxn>
+            </a:cxnLst>
+            <a:rect l="l" t="t" r="r" b="b"/>
+            <a:pathLst>
+              <a:path w="10853928" h="18288" fill="none" extrusionOk="0">
+                <a:moveTo>
+                  <a:pt x="0" y="0"/>
+                </a:moveTo>
+                <a:cubicBezTo>
+                  <a:pt x="146993" y="-19076"/>
+                  <a:pt x="347684" y="-4790"/>
+                  <a:pt x="461292" y="0"/>
+                </a:cubicBezTo>
+                <a:cubicBezTo>
+                  <a:pt x="574900" y="4790"/>
+                  <a:pt x="808367" y="19821"/>
+                  <a:pt x="1139662" y="0"/>
+                </a:cubicBezTo>
+                <a:cubicBezTo>
+                  <a:pt x="1470957" y="-19821"/>
+                  <a:pt x="1627405" y="5721"/>
+                  <a:pt x="1926572" y="0"/>
+                </a:cubicBezTo>
+                <a:cubicBezTo>
+                  <a:pt x="2225739" y="-5721"/>
+                  <a:pt x="2137730" y="-3235"/>
+                  <a:pt x="2279325" y="0"/>
+                </a:cubicBezTo>
+                <a:cubicBezTo>
+                  <a:pt x="2420920" y="3235"/>
+                  <a:pt x="2456518" y="9685"/>
+                  <a:pt x="2632078" y="0"/>
+                </a:cubicBezTo>
+                <a:cubicBezTo>
+                  <a:pt x="2807638" y="-9685"/>
+                  <a:pt x="3211516" y="-43007"/>
+                  <a:pt x="3527527" y="0"/>
+                </a:cubicBezTo>
+                <a:cubicBezTo>
+                  <a:pt x="3843538" y="43007"/>
+                  <a:pt x="4058833" y="22042"/>
+                  <a:pt x="4205897" y="0"/>
+                </a:cubicBezTo>
+                <a:cubicBezTo>
+                  <a:pt x="4352961" y="-22042"/>
+                  <a:pt x="4474805" y="-11846"/>
+                  <a:pt x="4558650" y="0"/>
+                </a:cubicBezTo>
+                <a:cubicBezTo>
+                  <a:pt x="4642495" y="11846"/>
+                  <a:pt x="5041928" y="-6069"/>
+                  <a:pt x="5237020" y="0"/>
+                </a:cubicBezTo>
+                <a:cubicBezTo>
+                  <a:pt x="5432112" y="6069"/>
+                  <a:pt x="5943266" y="-17479"/>
+                  <a:pt x="6132469" y="0"/>
+                </a:cubicBezTo>
+                <a:cubicBezTo>
+                  <a:pt x="6321672" y="17479"/>
+                  <a:pt x="6483872" y="26234"/>
+                  <a:pt x="6702301" y="0"/>
+                </a:cubicBezTo>
+                <a:cubicBezTo>
+                  <a:pt x="6920730" y="-26234"/>
+                  <a:pt x="6991194" y="-15156"/>
+                  <a:pt x="7272132" y="0"/>
+                </a:cubicBezTo>
+                <a:cubicBezTo>
+                  <a:pt x="7553070" y="15156"/>
+                  <a:pt x="7684444" y="-32961"/>
+                  <a:pt x="7950502" y="0"/>
+                </a:cubicBezTo>
+                <a:cubicBezTo>
+                  <a:pt x="8216560" y="32961"/>
+                  <a:pt x="8493290" y="-10491"/>
+                  <a:pt x="8737412" y="0"/>
+                </a:cubicBezTo>
+                <a:cubicBezTo>
+                  <a:pt x="8981534" y="10491"/>
+                  <a:pt x="9191586" y="-13899"/>
+                  <a:pt x="9524322" y="0"/>
+                </a:cubicBezTo>
+                <a:cubicBezTo>
+                  <a:pt x="9857058" y="13899"/>
+                  <a:pt x="10297509" y="7485"/>
+                  <a:pt x="10853928" y="0"/>
+                </a:cubicBezTo>
+                <a:cubicBezTo>
+                  <a:pt x="10854574" y="4451"/>
+                  <a:pt x="10854418" y="9226"/>
+                  <a:pt x="10853928" y="18288"/>
+                </a:cubicBezTo>
+                <a:cubicBezTo>
+                  <a:pt x="10691638" y="28522"/>
+                  <a:pt x="10574319" y="29578"/>
+                  <a:pt x="10392636" y="18288"/>
+                </a:cubicBezTo>
+                <a:cubicBezTo>
+                  <a:pt x="10210953" y="6998"/>
+                  <a:pt x="9836277" y="-16742"/>
+                  <a:pt x="9497187" y="18288"/>
+                </a:cubicBezTo>
+                <a:cubicBezTo>
+                  <a:pt x="9158097" y="53318"/>
+                  <a:pt x="9119479" y="30714"/>
+                  <a:pt x="8818817" y="18288"/>
+                </a:cubicBezTo>
+                <a:cubicBezTo>
+                  <a:pt x="8518155" y="5863"/>
+                  <a:pt x="8640037" y="6483"/>
+                  <a:pt x="8466064" y="18288"/>
+                </a:cubicBezTo>
+                <a:cubicBezTo>
+                  <a:pt x="8292091" y="30093"/>
+                  <a:pt x="7997656" y="18914"/>
+                  <a:pt x="7787693" y="18288"/>
+                </a:cubicBezTo>
+                <a:cubicBezTo>
+                  <a:pt x="7577730" y="17662"/>
+                  <a:pt x="7412468" y="21416"/>
+                  <a:pt x="7217862" y="18288"/>
+                </a:cubicBezTo>
+                <a:cubicBezTo>
+                  <a:pt x="7023256" y="15160"/>
+                  <a:pt x="6898018" y="14824"/>
+                  <a:pt x="6648031" y="18288"/>
+                </a:cubicBezTo>
+                <a:cubicBezTo>
+                  <a:pt x="6398044" y="21752"/>
+                  <a:pt x="6254402" y="38625"/>
+                  <a:pt x="6078200" y="18288"/>
+                </a:cubicBezTo>
+                <a:cubicBezTo>
+                  <a:pt x="5901998" y="-2049"/>
+                  <a:pt x="5622886" y="3213"/>
+                  <a:pt x="5508368" y="18288"/>
+                </a:cubicBezTo>
+                <a:cubicBezTo>
+                  <a:pt x="5393850" y="33363"/>
+                  <a:pt x="5036260" y="26830"/>
+                  <a:pt x="4721459" y="18288"/>
+                </a:cubicBezTo>
+                <a:cubicBezTo>
+                  <a:pt x="4406658" y="9746"/>
+                  <a:pt x="4239221" y="41551"/>
+                  <a:pt x="4043088" y="18288"/>
+                </a:cubicBezTo>
+                <a:cubicBezTo>
+                  <a:pt x="3846955" y="-4975"/>
+                  <a:pt x="3818802" y="34658"/>
+                  <a:pt x="3690336" y="18288"/>
+                </a:cubicBezTo>
+                <a:cubicBezTo>
+                  <a:pt x="3561870" y="1918"/>
+                  <a:pt x="3265491" y="42194"/>
+                  <a:pt x="3120504" y="18288"/>
+                </a:cubicBezTo>
+                <a:cubicBezTo>
+                  <a:pt x="2975517" y="-5618"/>
+                  <a:pt x="2720254" y="36673"/>
+                  <a:pt x="2333595" y="18288"/>
+                </a:cubicBezTo>
+                <a:cubicBezTo>
+                  <a:pt x="1946936" y="-97"/>
+                  <a:pt x="2097241" y="5776"/>
+                  <a:pt x="1872303" y="18288"/>
+                </a:cubicBezTo>
+                <a:cubicBezTo>
+                  <a:pt x="1647365" y="30800"/>
+                  <a:pt x="1282708" y="45380"/>
+                  <a:pt x="976854" y="18288"/>
+                </a:cubicBezTo>
+                <a:cubicBezTo>
+                  <a:pt x="671000" y="-8804"/>
+                  <a:pt x="408401" y="-12775"/>
+                  <a:pt x="0" y="18288"/>
+                </a:cubicBezTo>
+                <a:cubicBezTo>
+                  <a:pt x="-213" y="9468"/>
+                  <a:pt x="187" y="4459"/>
+                  <a:pt x="0" y="0"/>
+                </a:cubicBezTo>
+                <a:close/>
+              </a:path>
+              <a:path w="10853928" h="18288" stroke="0" extrusionOk="0">
+                <a:moveTo>
+                  <a:pt x="0" y="0"/>
+                </a:moveTo>
+                <a:cubicBezTo>
+                  <a:pt x="267322" y="15284"/>
+                  <a:pt x="415388" y="-21048"/>
+                  <a:pt x="569831" y="0"/>
+                </a:cubicBezTo>
+                <a:cubicBezTo>
+                  <a:pt x="724274" y="21048"/>
+                  <a:pt x="769333" y="-2353"/>
+                  <a:pt x="922584" y="0"/>
+                </a:cubicBezTo>
+                <a:cubicBezTo>
+                  <a:pt x="1075835" y="2353"/>
+                  <a:pt x="1399490" y="-145"/>
+                  <a:pt x="1818033" y="0"/>
+                </a:cubicBezTo>
+                <a:cubicBezTo>
+                  <a:pt x="2236576" y="145"/>
+                  <a:pt x="2145330" y="5482"/>
+                  <a:pt x="2387864" y="0"/>
+                </a:cubicBezTo>
+                <a:cubicBezTo>
+                  <a:pt x="2630398" y="-5482"/>
+                  <a:pt x="2793207" y="18487"/>
+                  <a:pt x="2957695" y="0"/>
+                </a:cubicBezTo>
+                <a:cubicBezTo>
+                  <a:pt x="3122183" y="-18487"/>
+                  <a:pt x="3579141" y="19003"/>
+                  <a:pt x="3853144" y="0"/>
+                </a:cubicBezTo>
+                <a:cubicBezTo>
+                  <a:pt x="4127147" y="-19003"/>
+                  <a:pt x="4209857" y="12211"/>
+                  <a:pt x="4314436" y="0"/>
+                </a:cubicBezTo>
+                <a:cubicBezTo>
+                  <a:pt x="4419015" y="-12211"/>
+                  <a:pt x="4762459" y="-17220"/>
+                  <a:pt x="5209885" y="0"/>
+                </a:cubicBezTo>
+                <a:cubicBezTo>
+                  <a:pt x="5657311" y="17220"/>
+                  <a:pt x="5692663" y="-3290"/>
+                  <a:pt x="6105335" y="0"/>
+                </a:cubicBezTo>
+                <a:cubicBezTo>
+                  <a:pt x="6518007" y="3290"/>
+                  <a:pt x="6455516" y="-5124"/>
+                  <a:pt x="6783705" y="0"/>
+                </a:cubicBezTo>
+                <a:cubicBezTo>
+                  <a:pt x="7111894" y="5124"/>
+                  <a:pt x="7441941" y="-17829"/>
+                  <a:pt x="7679154" y="0"/>
+                </a:cubicBezTo>
+                <a:cubicBezTo>
+                  <a:pt x="7916367" y="17829"/>
+                  <a:pt x="8102967" y="-24363"/>
+                  <a:pt x="8248985" y="0"/>
+                </a:cubicBezTo>
+                <a:cubicBezTo>
+                  <a:pt x="8395003" y="24363"/>
+                  <a:pt x="8552393" y="25505"/>
+                  <a:pt x="8818817" y="0"/>
+                </a:cubicBezTo>
+                <a:cubicBezTo>
+                  <a:pt x="9085241" y="-25505"/>
+                  <a:pt x="9411308" y="38000"/>
+                  <a:pt x="9605726" y="0"/>
+                </a:cubicBezTo>
+                <a:cubicBezTo>
+                  <a:pt x="9800144" y="-38000"/>
+                  <a:pt x="10006468" y="-25741"/>
+                  <a:pt x="10175558" y="0"/>
+                </a:cubicBezTo>
+                <a:cubicBezTo>
+                  <a:pt x="10344648" y="25741"/>
+                  <a:pt x="10696282" y="695"/>
+                  <a:pt x="10853928" y="0"/>
+                </a:cubicBezTo>
+                <a:cubicBezTo>
+                  <a:pt x="10853521" y="8690"/>
+                  <a:pt x="10853774" y="14141"/>
+                  <a:pt x="10853928" y="18288"/>
+                </a:cubicBezTo>
+                <a:cubicBezTo>
+                  <a:pt x="10608124" y="24255"/>
+                  <a:pt x="10343415" y="22307"/>
+                  <a:pt x="10067018" y="18288"/>
+                </a:cubicBezTo>
+                <a:cubicBezTo>
+                  <a:pt x="9790621" y="14270"/>
+                  <a:pt x="9843266" y="3564"/>
+                  <a:pt x="9714266" y="18288"/>
+                </a:cubicBezTo>
+                <a:cubicBezTo>
+                  <a:pt x="9585266" y="33012"/>
+                  <a:pt x="9379484" y="1875"/>
+                  <a:pt x="9252974" y="18288"/>
+                </a:cubicBezTo>
+                <a:cubicBezTo>
+                  <a:pt x="9126464" y="34701"/>
+                  <a:pt x="8580678" y="-4904"/>
+                  <a:pt x="8357525" y="18288"/>
+                </a:cubicBezTo>
+                <a:cubicBezTo>
+                  <a:pt x="8134372" y="41480"/>
+                  <a:pt x="7903199" y="26458"/>
+                  <a:pt x="7679154" y="18288"/>
+                </a:cubicBezTo>
+                <a:cubicBezTo>
+                  <a:pt x="7455109" y="10118"/>
+                  <a:pt x="7435944" y="27109"/>
+                  <a:pt x="7217862" y="18288"/>
+                </a:cubicBezTo>
+                <a:cubicBezTo>
+                  <a:pt x="6999780" y="9467"/>
+                  <a:pt x="6680409" y="18985"/>
+                  <a:pt x="6539492" y="18288"/>
+                </a:cubicBezTo>
+                <a:cubicBezTo>
+                  <a:pt x="6398575" y="17592"/>
+                  <a:pt x="6312077" y="33018"/>
+                  <a:pt x="6186739" y="18288"/>
+                </a:cubicBezTo>
+                <a:cubicBezTo>
+                  <a:pt x="6061401" y="3558"/>
+                  <a:pt x="5947033" y="12075"/>
+                  <a:pt x="5833986" y="18288"/>
+                </a:cubicBezTo>
+                <a:cubicBezTo>
+                  <a:pt x="5720939" y="24501"/>
+                  <a:pt x="5482226" y="8586"/>
+                  <a:pt x="5155616" y="18288"/>
+                </a:cubicBezTo>
+                <a:cubicBezTo>
+                  <a:pt x="4829006" y="27991"/>
+                  <a:pt x="4841274" y="29316"/>
+                  <a:pt x="4694324" y="18288"/>
+                </a:cubicBezTo>
+                <a:cubicBezTo>
+                  <a:pt x="4547374" y="7260"/>
+                  <a:pt x="4077675" y="7013"/>
+                  <a:pt x="3907414" y="18288"/>
+                </a:cubicBezTo>
+                <a:cubicBezTo>
+                  <a:pt x="3737153" y="29564"/>
+                  <a:pt x="3538393" y="21630"/>
+                  <a:pt x="3446122" y="18288"/>
+                </a:cubicBezTo>
+                <a:cubicBezTo>
+                  <a:pt x="3353851" y="14946"/>
+                  <a:pt x="2990320" y="-8091"/>
+                  <a:pt x="2659212" y="18288"/>
+                </a:cubicBezTo>
+                <a:cubicBezTo>
+                  <a:pt x="2328104" y="44667"/>
+                  <a:pt x="2427653" y="9607"/>
+                  <a:pt x="2306460" y="18288"/>
+                </a:cubicBezTo>
+                <a:cubicBezTo>
+                  <a:pt x="2185267" y="26969"/>
+                  <a:pt x="1719763" y="3717"/>
+                  <a:pt x="1519550" y="18288"/>
+                </a:cubicBezTo>
+                <a:cubicBezTo>
+                  <a:pt x="1319337" y="32860"/>
+                  <a:pt x="1167371" y="17040"/>
+                  <a:pt x="1058258" y="18288"/>
+                </a:cubicBezTo>
+                <a:cubicBezTo>
+                  <a:pt x="949145" y="19536"/>
+                  <a:pt x="780234" y="31447"/>
+                  <a:pt x="705505" y="18288"/>
+                </a:cubicBezTo>
+                <a:cubicBezTo>
+                  <a:pt x="630776" y="5129"/>
+                  <a:pt x="215796" y="30056"/>
+                  <a:pt x="0" y="18288"/>
+                </a:cubicBezTo>
+                <a:cubicBezTo>
+                  <a:pt x="-53" y="11301"/>
+                  <a:pt x="-649" y="7756"/>
+                  <a:pt x="0" y="0"/>
+                </a:cubicBezTo>
+                <a:close/>
+              </a:path>
+            </a:pathLst>
+          </a:custGeom>
+          <a:solidFill>
+            <a:schemeClr val="accent2"/>
+          </a:solidFill>
+          <a:ln w="41275" cap="rnd">
+            <a:solidFill>
+              <a:schemeClr val="accent2"/>
+            </a:solidFill>
+            <a:round/>
+            <a:extLst>
+              <a:ext uri="{C807C97D-BFC1-408E-A445-0C87EB9F89A2}">
+                <ask:lineSketchStyleProps xmlns:ask="http://schemas.microsoft.com/office/drawing/2018/sketchyshapes" sd="1219033472">
+                  <a:prstGeom prst="rect">
+                    <a:avLst/>
+                  </a:prstGeom>
+                  <ask:type>
+                    <ask:lineSketchFreehand/>
+                  </ask:type>
+                </ask:lineSketchStyleProps>
+              </a:ext>
+            </a:extLst>
+          </a:ln>
+        </p:spPr>
+        <p:style>
+          <a:lnRef idx="2">
+            <a:schemeClr val="accent1">
+              <a:shade val="50000"/>
+            </a:schemeClr>
+          </a:lnRef>
+          <a:fillRef idx="1">
+            <a:schemeClr val="accent1"/>
+          </a:fillRef>
+          <a:effectRef idx="0">
+            <a:schemeClr val="accent1"/>
+          </a:effectRef>
+          <a:fontRef idx="minor">
+            <a:schemeClr val="lt1"/>
+          </a:fontRef>
+        </p:style>
+        <p:txBody>
+          <a:bodyPr rtlCol="0" anchor="ctr"/>
+          <a:lstStyle/>
+          <a:p>
+            <a:pPr algn="ctr"/>
+            <a:endParaRPr lang="en-US"/>
+          </a:p>
+        </p:txBody>
+      </p:sp>
+      <p:sp>
+        <p:nvSpPr>
+          <p:cNvPr id="3" name="Content Placeholder 2">
+            <a:extLst>
+              <a:ext uri="{FF2B5EF4-FFF2-40B4-BE49-F238E27FC236}">
+                <a16:creationId xmlns:a16="http://schemas.microsoft.com/office/drawing/2014/main" id="{EA9059FA-D655-22D4-0BEB-242403E8B356}"/>
+              </a:ext>
+            </a:extLst>
+          </p:cNvPr>
+          <p:cNvSpPr>
+            <a:spLocks noGrp="1"/>
+          </p:cNvSpPr>
+          <p:nvPr>
+            <p:ph idx="1"/>
+          </p:nvPr>
+        </p:nvSpPr>
+        <p:spPr>
+          <a:xfrm>
+            <a:off x="838200" y="1929384"/>
+            <a:ext cx="10515600" cy="4251960"/>
+          </a:xfrm>
+        </p:spPr>
+        <p:txBody>
+          <a:bodyPr>
+            <a:normAutofit/>
+          </a:bodyPr>
+          <a:lstStyle/>
+          <a:p>
+            <a:pPr marL="0" indent="0">
+              <a:lnSpc>
+                <a:spcPct val="150000"/>
+              </a:lnSpc>
+              <a:buNone/>
+            </a:pPr>
+            <a:r>
+              <a:rPr lang="en-US" b="1">
+                <a:latin typeface="Times New Roman" panose="02020603050405020304" pitchFamily="18" charset="0"/>
+                <a:cs typeface="Times New Roman" panose="02020603050405020304" pitchFamily="18" charset="0"/>
+              </a:rPr>
+              <a:t>1.3. Đối tượng nghiên cứu</a:t>
+            </a:r>
+          </a:p>
+          <a:p>
+            <a:r>
+              <a:rPr lang="en-US" sz="2200" b="1" i="1">
+                <a:latin typeface="Times New Roman" panose="02020603050405020304" pitchFamily="18" charset="0"/>
+                <a:cs typeface="Times New Roman" panose="02020603050405020304" pitchFamily="18" charset="0"/>
+              </a:rPr>
+              <a:t>Nghiên cứu các LLM </a:t>
+            </a:r>
+            <a:r>
+              <a:rPr lang="en-US" sz="2200">
+                <a:latin typeface="Times New Roman" panose="02020603050405020304" pitchFamily="18" charset="0"/>
+                <a:cs typeface="Times New Roman" panose="02020603050405020304" pitchFamily="18" charset="0"/>
+              </a:rPr>
+              <a:t>để xây dựng hệ thống chatbot hỗ trợ học Lịch sử Việt Nam</a:t>
+            </a:r>
+          </a:p>
+          <a:p>
+            <a:r>
+              <a:rPr lang="en-US" sz="2200">
+                <a:latin typeface="Times New Roman" panose="02020603050405020304" pitchFamily="18" charset="0"/>
+                <a:cs typeface="Times New Roman" panose="02020603050405020304" pitchFamily="18" charset="0"/>
+              </a:rPr>
+              <a:t>Phương pháp </a:t>
+            </a:r>
+            <a:r>
+              <a:rPr lang="en-US" sz="2200" b="1" i="1">
+                <a:latin typeface="Times New Roman" panose="02020603050405020304" pitchFamily="18" charset="0"/>
+                <a:cs typeface="Times New Roman" panose="02020603050405020304" pitchFamily="18" charset="0"/>
+              </a:rPr>
+              <a:t>nạp dữ liệu </a:t>
+            </a:r>
+            <a:r>
+              <a:rPr lang="en-US" sz="2200">
+                <a:latin typeface="Times New Roman" panose="02020603050405020304" pitchFamily="18" charset="0"/>
+                <a:cs typeface="Times New Roman" panose="02020603050405020304" pitchFamily="18" charset="0"/>
+              </a:rPr>
+              <a:t>và</a:t>
+            </a:r>
+            <a:r>
+              <a:rPr lang="en-US" sz="2200" b="1" i="1">
+                <a:latin typeface="Times New Roman" panose="02020603050405020304" pitchFamily="18" charset="0"/>
+                <a:cs typeface="Times New Roman" panose="02020603050405020304" pitchFamily="18" charset="0"/>
+              </a:rPr>
+              <a:t> tối ưu hóa mô hình </a:t>
+            </a:r>
+            <a:r>
+              <a:rPr lang="en-US" sz="2200">
+                <a:latin typeface="Times New Roman" panose="02020603050405020304" pitchFamily="18" charset="0"/>
+                <a:cs typeface="Times New Roman" panose="02020603050405020304" pitchFamily="18" charset="0"/>
+              </a:rPr>
+              <a:t>trong ngữ cảnh giáo dục Lịch sử.</a:t>
+            </a:r>
+          </a:p>
+          <a:p>
+            <a:r>
+              <a:rPr lang="en-US" sz="2200">
+                <a:latin typeface="Times New Roman" panose="02020603050405020304" pitchFamily="18" charset="0"/>
+                <a:cs typeface="Times New Roman" panose="02020603050405020304" pitchFamily="18" charset="0"/>
+              </a:rPr>
+              <a:t>Phương pháp </a:t>
+            </a:r>
+            <a:r>
+              <a:rPr lang="en-US" sz="2200" b="1" i="1">
+                <a:latin typeface="Times New Roman" panose="02020603050405020304" pitchFamily="18" charset="0"/>
+                <a:cs typeface="Times New Roman" panose="02020603050405020304" pitchFamily="18" charset="0"/>
+              </a:rPr>
+              <a:t>đánh giá hiệu suất hệ thống.</a:t>
+            </a:r>
+          </a:p>
+        </p:txBody>
+      </p:sp>
+    </p:spTree>
+    <p:extLst>
+      <p:ext uri="{BB962C8B-B14F-4D97-AF65-F5344CB8AC3E}">
+        <p14:creationId xmlns:p14="http://schemas.microsoft.com/office/powerpoint/2010/main" val="1104712058"/>
+      </p:ext>
+    </p:extLst>
+  </p:cSld>
+  <p:clrMapOvr>
+    <a:masterClrMapping/>
+  </p:clrMapOvr>
+</p:sld>
+</file>
+
+<file path=ppt/slides/slide60.xml><?xml version="1.0" encoding="utf-8"?>
 <p:sld xmlns:a="http://schemas.openxmlformats.org/drawingml/2006/main" xmlns:r="http://schemas.openxmlformats.org/officeDocument/2006/relationships" xmlns:p="http://schemas.openxmlformats.org/presentationml/2006/main">
   <p:cSld>
     <p:spTree>
@@ -11046,120 +16507,7 @@
 </p:sld>
 </file>
 
-<file path=ppt/slides/slide6.xml><?xml version="1.0" encoding="utf-8"?>
-<p:sld xmlns:a="http://schemas.openxmlformats.org/drawingml/2006/main" xmlns:r="http://schemas.openxmlformats.org/officeDocument/2006/relationships" xmlns:p="http://schemas.openxmlformats.org/presentationml/2006/main">
-  <p:cSld>
-    <p:spTree>
-      <p:nvGrpSpPr>
-        <p:cNvPr id="1" name="">
-          <a:extLst>
-            <a:ext uri="{FF2B5EF4-FFF2-40B4-BE49-F238E27FC236}">
-              <a16:creationId xmlns:a16="http://schemas.microsoft.com/office/drawing/2014/main" id="{6129467A-6B36-F138-6409-BB22F619E1ED}"/>
-            </a:ext>
-          </a:extLst>
-        </p:cNvPr>
-        <p:cNvGrpSpPr/>
-        <p:nvPr/>
-      </p:nvGrpSpPr>
-      <p:grpSpPr>
-        <a:xfrm>
-          <a:off x="0" y="0"/>
-          <a:ext cx="0" cy="0"/>
-          <a:chOff x="0" y="0"/>
-          <a:chExt cx="0" cy="0"/>
-        </a:xfrm>
-      </p:grpSpPr>
-      <p:sp>
-        <p:nvSpPr>
-          <p:cNvPr id="2" name="Title 1">
-            <a:extLst>
-              <a:ext uri="{FF2B5EF4-FFF2-40B4-BE49-F238E27FC236}">
-                <a16:creationId xmlns:a16="http://schemas.microsoft.com/office/drawing/2014/main" id="{F6A6D7A7-A6F2-02BE-01CB-B79575395016}"/>
-              </a:ext>
-            </a:extLst>
-          </p:cNvPr>
-          <p:cNvSpPr>
-            <a:spLocks noGrp="1"/>
-          </p:cNvSpPr>
-          <p:nvPr>
-            <p:ph type="title"/>
-          </p:nvPr>
-        </p:nvSpPr>
-        <p:spPr>
-          <a:xfrm>
-            <a:off x="838200" y="365125"/>
-            <a:ext cx="10515600" cy="1030537"/>
-          </a:xfrm>
-        </p:spPr>
-        <p:txBody>
-          <a:bodyPr>
-            <a:normAutofit/>
-          </a:bodyPr>
-          <a:lstStyle/>
-          <a:p>
-            <a:r>
-              <a:rPr lang="en-US" sz="4000" b="1">
-                <a:latin typeface="Times New Roman" panose="02020603050405020304" pitchFamily="18" charset="0"/>
-                <a:cs typeface="Times New Roman" panose="02020603050405020304" pitchFamily="18" charset="0"/>
-              </a:rPr>
-              <a:t>GIỚI THIỆU ĐỀ TÀI</a:t>
-            </a:r>
-          </a:p>
-        </p:txBody>
-      </p:sp>
-      <p:sp>
-        <p:nvSpPr>
-          <p:cNvPr id="3" name="Content Placeholder 2">
-            <a:extLst>
-              <a:ext uri="{FF2B5EF4-FFF2-40B4-BE49-F238E27FC236}">
-                <a16:creationId xmlns:a16="http://schemas.microsoft.com/office/drawing/2014/main" id="{EA9059FA-D655-22D4-0BEB-242403E8B356}"/>
-              </a:ext>
-            </a:extLst>
-          </p:cNvPr>
-          <p:cNvSpPr>
-            <a:spLocks noGrp="1"/>
-          </p:cNvSpPr>
-          <p:nvPr>
-            <p:ph idx="1"/>
-          </p:nvPr>
-        </p:nvSpPr>
-        <p:spPr>
-          <a:xfrm>
-            <a:off x="838200" y="1395662"/>
-            <a:ext cx="10515600" cy="4781301"/>
-          </a:xfrm>
-        </p:spPr>
-        <p:txBody>
-          <a:bodyPr/>
-          <a:lstStyle/>
-          <a:p>
-            <a:pPr marL="0" indent="0">
-              <a:buNone/>
-            </a:pPr>
-            <a:r>
-              <a:rPr lang="en-US" i="1">
-                <a:latin typeface="Times New Roman" panose="02020603050405020304" pitchFamily="18" charset="0"/>
-                <a:cs typeface="Times New Roman" panose="02020603050405020304" pitchFamily="18" charset="0"/>
-              </a:rPr>
-              <a:t>1.3. Đối tượng nghiên cứu</a:t>
-            </a:r>
-          </a:p>
-        </p:txBody>
-      </p:sp>
-    </p:spTree>
-    <p:extLst>
-      <p:ext uri="{BB962C8B-B14F-4D97-AF65-F5344CB8AC3E}">
-        <p14:creationId xmlns:p14="http://schemas.microsoft.com/office/powerpoint/2010/main" val="1104712058"/>
-      </p:ext>
-    </p:extLst>
-  </p:cSld>
-  <p:clrMapOvr>
-    <a:masterClrMapping/>
-  </p:clrMapOvr>
-</p:sld>
-</file>
-
-<file path=ppt/slides/slide60.xml><?xml version="1.0" encoding="utf-8"?>
+<file path=ppt/slides/slide61.xml><?xml version="1.0" encoding="utf-8"?>
 <p:sld xmlns:a="http://schemas.openxmlformats.org/drawingml/2006/main" xmlns:r="http://schemas.openxmlformats.org/officeDocument/2006/relationships" xmlns:p="http://schemas.openxmlformats.org/presentationml/2006/main">
   <p:cSld>
     <p:spTree>
@@ -11248,6 +16596,14 @@
 <file path=ppt/slides/slide7.xml><?xml version="1.0" encoding="utf-8"?>
 <p:sld xmlns:a="http://schemas.openxmlformats.org/drawingml/2006/main" xmlns:r="http://schemas.openxmlformats.org/officeDocument/2006/relationships" xmlns:p="http://schemas.openxmlformats.org/presentationml/2006/main">
   <p:cSld>
+    <p:bg>
+      <p:bgPr>
+        <a:solidFill>
+          <a:schemeClr val="bg1"/>
+        </a:solidFill>
+        <a:effectLst/>
+      </p:bgPr>
+    </p:bg>
     <p:spTree>
       <p:nvGrpSpPr>
         <p:cNvPr id="1" name="">
@@ -11268,6 +16624,66 @@
           <a:chExt cx="0" cy="0"/>
         </a:xfrm>
       </p:grpSpPr>
+      <p:sp useBgFill="1">
+        <p:nvSpPr>
+          <p:cNvPr id="8" name="Rectangle 7">
+            <a:extLst>
+              <a:ext uri="{FF2B5EF4-FFF2-40B4-BE49-F238E27FC236}">
+                <a16:creationId xmlns:a16="http://schemas.microsoft.com/office/drawing/2014/main" id="{100EDD19-6802-4EC3-95CE-CFFAB042CFD6}"/>
+              </a:ext>
+              <a:ext uri="{C183D7F6-B498-43B3-948B-1728B52AA6E4}">
+                <adec:decorative xmlns:adec="http://schemas.microsoft.com/office/drawing/2017/decorative" val="1"/>
+              </a:ext>
+            </a:extLst>
+          </p:cNvPr>
+          <p:cNvSpPr>
+            <a:spLocks noGrp="1" noRot="1" noChangeAspect="1" noMove="1" noResize="1" noEditPoints="1" noAdjustHandles="1" noChangeArrowheads="1" noChangeShapeType="1" noTextEdit="1"/>
+          </p:cNvSpPr>
+          <p:nvPr>
+            <p:extLst>
+              <p:ext uri="{386F3935-93C4-4BCD-93E2-E3B085C9AB24}">
+                <p16:designElem xmlns:p16="http://schemas.microsoft.com/office/powerpoint/2015/main" val="1"/>
+              </p:ext>
+            </p:extLst>
+          </p:nvPr>
+        </p:nvSpPr>
+        <p:spPr>
+          <a:xfrm>
+            <a:off x="0" y="0"/>
+            <a:ext cx="12188952" cy="6858000"/>
+          </a:xfrm>
+          <a:prstGeom prst="rect">
+            <a:avLst/>
+          </a:prstGeom>
+          <a:ln>
+            <a:noFill/>
+          </a:ln>
+        </p:spPr>
+        <p:style>
+          <a:lnRef idx="2">
+            <a:schemeClr val="accent1">
+              <a:shade val="50000"/>
+            </a:schemeClr>
+          </a:lnRef>
+          <a:fillRef idx="1">
+            <a:schemeClr val="accent1"/>
+          </a:fillRef>
+          <a:effectRef idx="0">
+            <a:schemeClr val="accent1"/>
+          </a:effectRef>
+          <a:fontRef idx="minor">
+            <a:schemeClr val="lt1"/>
+          </a:fontRef>
+        </p:style>
+        <p:txBody>
+          <a:bodyPr rtlCol="0" anchor="ctr"/>
+          <a:lstStyle/>
+          <a:p>
+            <a:pPr algn="ctr"/>
+            <a:endParaRPr lang="en-US"/>
+          </a:p>
+        </p:txBody>
+      </p:sp>
       <p:sp>
         <p:nvSpPr>
           <p:cNvPr id="2" name="Title 1">
@@ -11287,7 +16703,7 @@
         <p:spPr>
           <a:xfrm>
             <a:off x="838200" y="365125"/>
-            <a:ext cx="10515600" cy="1030537"/>
+            <a:ext cx="10515600" cy="1325563"/>
           </a:xfrm>
         </p:spPr>
         <p:txBody>
@@ -11297,7 +16713,7 @@
           <a:lstStyle/>
           <a:p>
             <a:r>
-              <a:rPr lang="en-US" sz="4000" b="1">
+              <a:rPr lang="en-US" sz="5400" b="1">
                 <a:latin typeface="Times New Roman" panose="02020603050405020304" pitchFamily="18" charset="0"/>
                 <a:cs typeface="Times New Roman" panose="02020603050405020304" pitchFamily="18" charset="0"/>
               </a:rPr>
@@ -11308,40 +16724,801 @@
       </p:sp>
       <p:sp>
         <p:nvSpPr>
-          <p:cNvPr id="3" name="Content Placeholder 2">
-            <a:extLst>
-              <a:ext uri="{FF2B5EF4-FFF2-40B4-BE49-F238E27FC236}">
-                <a16:creationId xmlns:a16="http://schemas.microsoft.com/office/drawing/2014/main" id="{79B0C182-55D2-A7F6-8A60-BF17B263BC9F}"/>
-              </a:ext>
-            </a:extLst>
-          </p:cNvPr>
-          <p:cNvSpPr>
-            <a:spLocks noGrp="1"/>
-          </p:cNvSpPr>
-          <p:nvPr>
-            <p:ph idx="1"/>
+          <p:cNvPr id="10" name="sketch line">
+            <a:extLst>
+              <a:ext uri="{FF2B5EF4-FFF2-40B4-BE49-F238E27FC236}">
+                <a16:creationId xmlns:a16="http://schemas.microsoft.com/office/drawing/2014/main" id="{DB17E863-922E-4C26-BD64-E8FD41D28661}"/>
+              </a:ext>
+              <a:ext uri="{C183D7F6-B498-43B3-948B-1728B52AA6E4}">
+                <adec:decorative xmlns:adec="http://schemas.microsoft.com/office/drawing/2017/decorative" val="1"/>
+              </a:ext>
+            </a:extLst>
+          </p:cNvPr>
+          <p:cNvSpPr>
+            <a:spLocks noGrp="1" noRot="1" noChangeAspect="1" noMove="1" noResize="1" noEditPoints="1" noAdjustHandles="1" noChangeArrowheads="1" noChangeShapeType="1" noTextEdit="1"/>
+          </p:cNvSpPr>
+          <p:nvPr>
+            <p:extLst>
+              <p:ext uri="{386F3935-93C4-4BCD-93E2-E3B085C9AB24}">
+                <p16:designElem xmlns:p16="http://schemas.microsoft.com/office/powerpoint/2015/main" val="1"/>
+              </p:ext>
+            </p:extLst>
           </p:nvPr>
         </p:nvSpPr>
         <p:spPr>
           <a:xfrm>
-            <a:off x="838200" y="1395662"/>
-            <a:ext cx="10515600" cy="4781301"/>
+            <a:off x="669036" y="1677373"/>
+            <a:ext cx="10853928" cy="18288"/>
+          </a:xfrm>
+          <a:custGeom>
+            <a:avLst/>
+            <a:gdLst>
+              <a:gd name="connsiteX0" fmla="*/ 0 w 10853928"/>
+              <a:gd name="connsiteY0" fmla="*/ 0 h 18288"/>
+              <a:gd name="connsiteX1" fmla="*/ 461292 w 10853928"/>
+              <a:gd name="connsiteY1" fmla="*/ 0 h 18288"/>
+              <a:gd name="connsiteX2" fmla="*/ 1139662 w 10853928"/>
+              <a:gd name="connsiteY2" fmla="*/ 0 h 18288"/>
+              <a:gd name="connsiteX3" fmla="*/ 1926572 w 10853928"/>
+              <a:gd name="connsiteY3" fmla="*/ 0 h 18288"/>
+              <a:gd name="connsiteX4" fmla="*/ 2279325 w 10853928"/>
+              <a:gd name="connsiteY4" fmla="*/ 0 h 18288"/>
+              <a:gd name="connsiteX5" fmla="*/ 2632078 w 10853928"/>
+              <a:gd name="connsiteY5" fmla="*/ 0 h 18288"/>
+              <a:gd name="connsiteX6" fmla="*/ 3527527 w 10853928"/>
+              <a:gd name="connsiteY6" fmla="*/ 0 h 18288"/>
+              <a:gd name="connsiteX7" fmla="*/ 4205897 w 10853928"/>
+              <a:gd name="connsiteY7" fmla="*/ 0 h 18288"/>
+              <a:gd name="connsiteX8" fmla="*/ 4558650 w 10853928"/>
+              <a:gd name="connsiteY8" fmla="*/ 0 h 18288"/>
+              <a:gd name="connsiteX9" fmla="*/ 5237020 w 10853928"/>
+              <a:gd name="connsiteY9" fmla="*/ 0 h 18288"/>
+              <a:gd name="connsiteX10" fmla="*/ 6132469 w 10853928"/>
+              <a:gd name="connsiteY10" fmla="*/ 0 h 18288"/>
+              <a:gd name="connsiteX11" fmla="*/ 6702301 w 10853928"/>
+              <a:gd name="connsiteY11" fmla="*/ 0 h 18288"/>
+              <a:gd name="connsiteX12" fmla="*/ 7272132 w 10853928"/>
+              <a:gd name="connsiteY12" fmla="*/ 0 h 18288"/>
+              <a:gd name="connsiteX13" fmla="*/ 7950502 w 10853928"/>
+              <a:gd name="connsiteY13" fmla="*/ 0 h 18288"/>
+              <a:gd name="connsiteX14" fmla="*/ 8737412 w 10853928"/>
+              <a:gd name="connsiteY14" fmla="*/ 0 h 18288"/>
+              <a:gd name="connsiteX15" fmla="*/ 9524322 w 10853928"/>
+              <a:gd name="connsiteY15" fmla="*/ 0 h 18288"/>
+              <a:gd name="connsiteX16" fmla="*/ 10853928 w 10853928"/>
+              <a:gd name="connsiteY16" fmla="*/ 0 h 18288"/>
+              <a:gd name="connsiteX17" fmla="*/ 10853928 w 10853928"/>
+              <a:gd name="connsiteY17" fmla="*/ 18288 h 18288"/>
+              <a:gd name="connsiteX18" fmla="*/ 10392636 w 10853928"/>
+              <a:gd name="connsiteY18" fmla="*/ 18288 h 18288"/>
+              <a:gd name="connsiteX19" fmla="*/ 9497187 w 10853928"/>
+              <a:gd name="connsiteY19" fmla="*/ 18288 h 18288"/>
+              <a:gd name="connsiteX20" fmla="*/ 8818817 w 10853928"/>
+              <a:gd name="connsiteY20" fmla="*/ 18288 h 18288"/>
+              <a:gd name="connsiteX21" fmla="*/ 8466064 w 10853928"/>
+              <a:gd name="connsiteY21" fmla="*/ 18288 h 18288"/>
+              <a:gd name="connsiteX22" fmla="*/ 7787693 w 10853928"/>
+              <a:gd name="connsiteY22" fmla="*/ 18288 h 18288"/>
+              <a:gd name="connsiteX23" fmla="*/ 7217862 w 10853928"/>
+              <a:gd name="connsiteY23" fmla="*/ 18288 h 18288"/>
+              <a:gd name="connsiteX24" fmla="*/ 6648031 w 10853928"/>
+              <a:gd name="connsiteY24" fmla="*/ 18288 h 18288"/>
+              <a:gd name="connsiteX25" fmla="*/ 6078200 w 10853928"/>
+              <a:gd name="connsiteY25" fmla="*/ 18288 h 18288"/>
+              <a:gd name="connsiteX26" fmla="*/ 5508368 w 10853928"/>
+              <a:gd name="connsiteY26" fmla="*/ 18288 h 18288"/>
+              <a:gd name="connsiteX27" fmla="*/ 4721459 w 10853928"/>
+              <a:gd name="connsiteY27" fmla="*/ 18288 h 18288"/>
+              <a:gd name="connsiteX28" fmla="*/ 4043088 w 10853928"/>
+              <a:gd name="connsiteY28" fmla="*/ 18288 h 18288"/>
+              <a:gd name="connsiteX29" fmla="*/ 3690336 w 10853928"/>
+              <a:gd name="connsiteY29" fmla="*/ 18288 h 18288"/>
+              <a:gd name="connsiteX30" fmla="*/ 3120504 w 10853928"/>
+              <a:gd name="connsiteY30" fmla="*/ 18288 h 18288"/>
+              <a:gd name="connsiteX31" fmla="*/ 2333595 w 10853928"/>
+              <a:gd name="connsiteY31" fmla="*/ 18288 h 18288"/>
+              <a:gd name="connsiteX32" fmla="*/ 1872303 w 10853928"/>
+              <a:gd name="connsiteY32" fmla="*/ 18288 h 18288"/>
+              <a:gd name="connsiteX33" fmla="*/ 976854 w 10853928"/>
+              <a:gd name="connsiteY33" fmla="*/ 18288 h 18288"/>
+              <a:gd name="connsiteX34" fmla="*/ 0 w 10853928"/>
+              <a:gd name="connsiteY34" fmla="*/ 18288 h 18288"/>
+              <a:gd name="connsiteX35" fmla="*/ 0 w 10853928"/>
+              <a:gd name="connsiteY35" fmla="*/ 0 h 18288"/>
+            </a:gdLst>
+            <a:ahLst/>
+            <a:cxnLst>
+              <a:cxn ang="0">
+                <a:pos x="connsiteX0" y="connsiteY0"/>
+              </a:cxn>
+              <a:cxn ang="0">
+                <a:pos x="connsiteX1" y="connsiteY1"/>
+              </a:cxn>
+              <a:cxn ang="0">
+                <a:pos x="connsiteX2" y="connsiteY2"/>
+              </a:cxn>
+              <a:cxn ang="0">
+                <a:pos x="connsiteX3" y="connsiteY3"/>
+              </a:cxn>
+              <a:cxn ang="0">
+                <a:pos x="connsiteX4" y="connsiteY4"/>
+              </a:cxn>
+              <a:cxn ang="0">
+                <a:pos x="connsiteX5" y="connsiteY5"/>
+              </a:cxn>
+              <a:cxn ang="0">
+                <a:pos x="connsiteX6" y="connsiteY6"/>
+              </a:cxn>
+              <a:cxn ang="0">
+                <a:pos x="connsiteX7" y="connsiteY7"/>
+              </a:cxn>
+              <a:cxn ang="0">
+                <a:pos x="connsiteX8" y="connsiteY8"/>
+              </a:cxn>
+              <a:cxn ang="0">
+                <a:pos x="connsiteX9" y="connsiteY9"/>
+              </a:cxn>
+              <a:cxn ang="0">
+                <a:pos x="connsiteX10" y="connsiteY10"/>
+              </a:cxn>
+              <a:cxn ang="0">
+                <a:pos x="connsiteX11" y="connsiteY11"/>
+              </a:cxn>
+              <a:cxn ang="0">
+                <a:pos x="connsiteX12" y="connsiteY12"/>
+              </a:cxn>
+              <a:cxn ang="0">
+                <a:pos x="connsiteX13" y="connsiteY13"/>
+              </a:cxn>
+              <a:cxn ang="0">
+                <a:pos x="connsiteX14" y="connsiteY14"/>
+              </a:cxn>
+              <a:cxn ang="0">
+                <a:pos x="connsiteX15" y="connsiteY15"/>
+              </a:cxn>
+              <a:cxn ang="0">
+                <a:pos x="connsiteX16" y="connsiteY16"/>
+              </a:cxn>
+              <a:cxn ang="0">
+                <a:pos x="connsiteX17" y="connsiteY17"/>
+              </a:cxn>
+              <a:cxn ang="0">
+                <a:pos x="connsiteX18" y="connsiteY18"/>
+              </a:cxn>
+              <a:cxn ang="0">
+                <a:pos x="connsiteX19" y="connsiteY19"/>
+              </a:cxn>
+              <a:cxn ang="0">
+                <a:pos x="connsiteX20" y="connsiteY20"/>
+              </a:cxn>
+              <a:cxn ang="0">
+                <a:pos x="connsiteX21" y="connsiteY21"/>
+              </a:cxn>
+              <a:cxn ang="0">
+                <a:pos x="connsiteX22" y="connsiteY22"/>
+              </a:cxn>
+              <a:cxn ang="0">
+                <a:pos x="connsiteX23" y="connsiteY23"/>
+              </a:cxn>
+              <a:cxn ang="0">
+                <a:pos x="connsiteX24" y="connsiteY24"/>
+              </a:cxn>
+              <a:cxn ang="0">
+                <a:pos x="connsiteX25" y="connsiteY25"/>
+              </a:cxn>
+              <a:cxn ang="0">
+                <a:pos x="connsiteX26" y="connsiteY26"/>
+              </a:cxn>
+              <a:cxn ang="0">
+                <a:pos x="connsiteX27" y="connsiteY27"/>
+              </a:cxn>
+              <a:cxn ang="0">
+                <a:pos x="connsiteX28" y="connsiteY28"/>
+              </a:cxn>
+              <a:cxn ang="0">
+                <a:pos x="connsiteX29" y="connsiteY29"/>
+              </a:cxn>
+              <a:cxn ang="0">
+                <a:pos x="connsiteX30" y="connsiteY30"/>
+              </a:cxn>
+              <a:cxn ang="0">
+                <a:pos x="connsiteX31" y="connsiteY31"/>
+              </a:cxn>
+              <a:cxn ang="0">
+                <a:pos x="connsiteX32" y="connsiteY32"/>
+              </a:cxn>
+              <a:cxn ang="0">
+                <a:pos x="connsiteX33" y="connsiteY33"/>
+              </a:cxn>
+              <a:cxn ang="0">
+                <a:pos x="connsiteX34" y="connsiteY34"/>
+              </a:cxn>
+              <a:cxn ang="0">
+                <a:pos x="connsiteX35" y="connsiteY35"/>
+              </a:cxn>
+            </a:cxnLst>
+            <a:rect l="l" t="t" r="r" b="b"/>
+            <a:pathLst>
+              <a:path w="10853928" h="18288" fill="none" extrusionOk="0">
+                <a:moveTo>
+                  <a:pt x="0" y="0"/>
+                </a:moveTo>
+                <a:cubicBezTo>
+                  <a:pt x="146993" y="-19076"/>
+                  <a:pt x="347684" y="-4790"/>
+                  <a:pt x="461292" y="0"/>
+                </a:cubicBezTo>
+                <a:cubicBezTo>
+                  <a:pt x="574900" y="4790"/>
+                  <a:pt x="808367" y="19821"/>
+                  <a:pt x="1139662" y="0"/>
+                </a:cubicBezTo>
+                <a:cubicBezTo>
+                  <a:pt x="1470957" y="-19821"/>
+                  <a:pt x="1627405" y="5721"/>
+                  <a:pt x="1926572" y="0"/>
+                </a:cubicBezTo>
+                <a:cubicBezTo>
+                  <a:pt x="2225739" y="-5721"/>
+                  <a:pt x="2137730" y="-3235"/>
+                  <a:pt x="2279325" y="0"/>
+                </a:cubicBezTo>
+                <a:cubicBezTo>
+                  <a:pt x="2420920" y="3235"/>
+                  <a:pt x="2456518" y="9685"/>
+                  <a:pt x="2632078" y="0"/>
+                </a:cubicBezTo>
+                <a:cubicBezTo>
+                  <a:pt x="2807638" y="-9685"/>
+                  <a:pt x="3211516" y="-43007"/>
+                  <a:pt x="3527527" y="0"/>
+                </a:cubicBezTo>
+                <a:cubicBezTo>
+                  <a:pt x="3843538" y="43007"/>
+                  <a:pt x="4058833" y="22042"/>
+                  <a:pt x="4205897" y="0"/>
+                </a:cubicBezTo>
+                <a:cubicBezTo>
+                  <a:pt x="4352961" y="-22042"/>
+                  <a:pt x="4474805" y="-11846"/>
+                  <a:pt x="4558650" y="0"/>
+                </a:cubicBezTo>
+                <a:cubicBezTo>
+                  <a:pt x="4642495" y="11846"/>
+                  <a:pt x="5041928" y="-6069"/>
+                  <a:pt x="5237020" y="0"/>
+                </a:cubicBezTo>
+                <a:cubicBezTo>
+                  <a:pt x="5432112" y="6069"/>
+                  <a:pt x="5943266" y="-17479"/>
+                  <a:pt x="6132469" y="0"/>
+                </a:cubicBezTo>
+                <a:cubicBezTo>
+                  <a:pt x="6321672" y="17479"/>
+                  <a:pt x="6483872" y="26234"/>
+                  <a:pt x="6702301" y="0"/>
+                </a:cubicBezTo>
+                <a:cubicBezTo>
+                  <a:pt x="6920730" y="-26234"/>
+                  <a:pt x="6991194" y="-15156"/>
+                  <a:pt x="7272132" y="0"/>
+                </a:cubicBezTo>
+                <a:cubicBezTo>
+                  <a:pt x="7553070" y="15156"/>
+                  <a:pt x="7684444" y="-32961"/>
+                  <a:pt x="7950502" y="0"/>
+                </a:cubicBezTo>
+                <a:cubicBezTo>
+                  <a:pt x="8216560" y="32961"/>
+                  <a:pt x="8493290" y="-10491"/>
+                  <a:pt x="8737412" y="0"/>
+                </a:cubicBezTo>
+                <a:cubicBezTo>
+                  <a:pt x="8981534" y="10491"/>
+                  <a:pt x="9191586" y="-13899"/>
+                  <a:pt x="9524322" y="0"/>
+                </a:cubicBezTo>
+                <a:cubicBezTo>
+                  <a:pt x="9857058" y="13899"/>
+                  <a:pt x="10297509" y="7485"/>
+                  <a:pt x="10853928" y="0"/>
+                </a:cubicBezTo>
+                <a:cubicBezTo>
+                  <a:pt x="10854574" y="4451"/>
+                  <a:pt x="10854418" y="9226"/>
+                  <a:pt x="10853928" y="18288"/>
+                </a:cubicBezTo>
+                <a:cubicBezTo>
+                  <a:pt x="10691638" y="28522"/>
+                  <a:pt x="10574319" y="29578"/>
+                  <a:pt x="10392636" y="18288"/>
+                </a:cubicBezTo>
+                <a:cubicBezTo>
+                  <a:pt x="10210953" y="6998"/>
+                  <a:pt x="9836277" y="-16742"/>
+                  <a:pt x="9497187" y="18288"/>
+                </a:cubicBezTo>
+                <a:cubicBezTo>
+                  <a:pt x="9158097" y="53318"/>
+                  <a:pt x="9119479" y="30714"/>
+                  <a:pt x="8818817" y="18288"/>
+                </a:cubicBezTo>
+                <a:cubicBezTo>
+                  <a:pt x="8518155" y="5863"/>
+                  <a:pt x="8640037" y="6483"/>
+                  <a:pt x="8466064" y="18288"/>
+                </a:cubicBezTo>
+                <a:cubicBezTo>
+                  <a:pt x="8292091" y="30093"/>
+                  <a:pt x="7997656" y="18914"/>
+                  <a:pt x="7787693" y="18288"/>
+                </a:cubicBezTo>
+                <a:cubicBezTo>
+                  <a:pt x="7577730" y="17662"/>
+                  <a:pt x="7412468" y="21416"/>
+                  <a:pt x="7217862" y="18288"/>
+                </a:cubicBezTo>
+                <a:cubicBezTo>
+                  <a:pt x="7023256" y="15160"/>
+                  <a:pt x="6898018" y="14824"/>
+                  <a:pt x="6648031" y="18288"/>
+                </a:cubicBezTo>
+                <a:cubicBezTo>
+                  <a:pt x="6398044" y="21752"/>
+                  <a:pt x="6254402" y="38625"/>
+                  <a:pt x="6078200" y="18288"/>
+                </a:cubicBezTo>
+                <a:cubicBezTo>
+                  <a:pt x="5901998" y="-2049"/>
+                  <a:pt x="5622886" y="3213"/>
+                  <a:pt x="5508368" y="18288"/>
+                </a:cubicBezTo>
+                <a:cubicBezTo>
+                  <a:pt x="5393850" y="33363"/>
+                  <a:pt x="5036260" y="26830"/>
+                  <a:pt x="4721459" y="18288"/>
+                </a:cubicBezTo>
+                <a:cubicBezTo>
+                  <a:pt x="4406658" y="9746"/>
+                  <a:pt x="4239221" y="41551"/>
+                  <a:pt x="4043088" y="18288"/>
+                </a:cubicBezTo>
+                <a:cubicBezTo>
+                  <a:pt x="3846955" y="-4975"/>
+                  <a:pt x="3818802" y="34658"/>
+                  <a:pt x="3690336" y="18288"/>
+                </a:cubicBezTo>
+                <a:cubicBezTo>
+                  <a:pt x="3561870" y="1918"/>
+                  <a:pt x="3265491" y="42194"/>
+                  <a:pt x="3120504" y="18288"/>
+                </a:cubicBezTo>
+                <a:cubicBezTo>
+                  <a:pt x="2975517" y="-5618"/>
+                  <a:pt x="2720254" y="36673"/>
+                  <a:pt x="2333595" y="18288"/>
+                </a:cubicBezTo>
+                <a:cubicBezTo>
+                  <a:pt x="1946936" y="-97"/>
+                  <a:pt x="2097241" y="5776"/>
+                  <a:pt x="1872303" y="18288"/>
+                </a:cubicBezTo>
+                <a:cubicBezTo>
+                  <a:pt x="1647365" y="30800"/>
+                  <a:pt x="1282708" y="45380"/>
+                  <a:pt x="976854" y="18288"/>
+                </a:cubicBezTo>
+                <a:cubicBezTo>
+                  <a:pt x="671000" y="-8804"/>
+                  <a:pt x="408401" y="-12775"/>
+                  <a:pt x="0" y="18288"/>
+                </a:cubicBezTo>
+                <a:cubicBezTo>
+                  <a:pt x="-213" y="9468"/>
+                  <a:pt x="187" y="4459"/>
+                  <a:pt x="0" y="0"/>
+                </a:cubicBezTo>
+                <a:close/>
+              </a:path>
+              <a:path w="10853928" h="18288" stroke="0" extrusionOk="0">
+                <a:moveTo>
+                  <a:pt x="0" y="0"/>
+                </a:moveTo>
+                <a:cubicBezTo>
+                  <a:pt x="267322" y="15284"/>
+                  <a:pt x="415388" y="-21048"/>
+                  <a:pt x="569831" y="0"/>
+                </a:cubicBezTo>
+                <a:cubicBezTo>
+                  <a:pt x="724274" y="21048"/>
+                  <a:pt x="769333" y="-2353"/>
+                  <a:pt x="922584" y="0"/>
+                </a:cubicBezTo>
+                <a:cubicBezTo>
+                  <a:pt x="1075835" y="2353"/>
+                  <a:pt x="1399490" y="-145"/>
+                  <a:pt x="1818033" y="0"/>
+                </a:cubicBezTo>
+                <a:cubicBezTo>
+                  <a:pt x="2236576" y="145"/>
+                  <a:pt x="2145330" y="5482"/>
+                  <a:pt x="2387864" y="0"/>
+                </a:cubicBezTo>
+                <a:cubicBezTo>
+                  <a:pt x="2630398" y="-5482"/>
+                  <a:pt x="2793207" y="18487"/>
+                  <a:pt x="2957695" y="0"/>
+                </a:cubicBezTo>
+                <a:cubicBezTo>
+                  <a:pt x="3122183" y="-18487"/>
+                  <a:pt x="3579141" y="19003"/>
+                  <a:pt x="3853144" y="0"/>
+                </a:cubicBezTo>
+                <a:cubicBezTo>
+                  <a:pt x="4127147" y="-19003"/>
+                  <a:pt x="4209857" y="12211"/>
+                  <a:pt x="4314436" y="0"/>
+                </a:cubicBezTo>
+                <a:cubicBezTo>
+                  <a:pt x="4419015" y="-12211"/>
+                  <a:pt x="4762459" y="-17220"/>
+                  <a:pt x="5209885" y="0"/>
+                </a:cubicBezTo>
+                <a:cubicBezTo>
+                  <a:pt x="5657311" y="17220"/>
+                  <a:pt x="5692663" y="-3290"/>
+                  <a:pt x="6105335" y="0"/>
+                </a:cubicBezTo>
+                <a:cubicBezTo>
+                  <a:pt x="6518007" y="3290"/>
+                  <a:pt x="6455516" y="-5124"/>
+                  <a:pt x="6783705" y="0"/>
+                </a:cubicBezTo>
+                <a:cubicBezTo>
+                  <a:pt x="7111894" y="5124"/>
+                  <a:pt x="7441941" y="-17829"/>
+                  <a:pt x="7679154" y="0"/>
+                </a:cubicBezTo>
+                <a:cubicBezTo>
+                  <a:pt x="7916367" y="17829"/>
+                  <a:pt x="8102967" y="-24363"/>
+                  <a:pt x="8248985" y="0"/>
+                </a:cubicBezTo>
+                <a:cubicBezTo>
+                  <a:pt x="8395003" y="24363"/>
+                  <a:pt x="8552393" y="25505"/>
+                  <a:pt x="8818817" y="0"/>
+                </a:cubicBezTo>
+                <a:cubicBezTo>
+                  <a:pt x="9085241" y="-25505"/>
+                  <a:pt x="9411308" y="38000"/>
+                  <a:pt x="9605726" y="0"/>
+                </a:cubicBezTo>
+                <a:cubicBezTo>
+                  <a:pt x="9800144" y="-38000"/>
+                  <a:pt x="10006468" y="-25741"/>
+                  <a:pt x="10175558" y="0"/>
+                </a:cubicBezTo>
+                <a:cubicBezTo>
+                  <a:pt x="10344648" y="25741"/>
+                  <a:pt x="10696282" y="695"/>
+                  <a:pt x="10853928" y="0"/>
+                </a:cubicBezTo>
+                <a:cubicBezTo>
+                  <a:pt x="10853521" y="8690"/>
+                  <a:pt x="10853774" y="14141"/>
+                  <a:pt x="10853928" y="18288"/>
+                </a:cubicBezTo>
+                <a:cubicBezTo>
+                  <a:pt x="10608124" y="24255"/>
+                  <a:pt x="10343415" y="22307"/>
+                  <a:pt x="10067018" y="18288"/>
+                </a:cubicBezTo>
+                <a:cubicBezTo>
+                  <a:pt x="9790621" y="14270"/>
+                  <a:pt x="9843266" y="3564"/>
+                  <a:pt x="9714266" y="18288"/>
+                </a:cubicBezTo>
+                <a:cubicBezTo>
+                  <a:pt x="9585266" y="33012"/>
+                  <a:pt x="9379484" y="1875"/>
+                  <a:pt x="9252974" y="18288"/>
+                </a:cubicBezTo>
+                <a:cubicBezTo>
+                  <a:pt x="9126464" y="34701"/>
+                  <a:pt x="8580678" y="-4904"/>
+                  <a:pt x="8357525" y="18288"/>
+                </a:cubicBezTo>
+                <a:cubicBezTo>
+                  <a:pt x="8134372" y="41480"/>
+                  <a:pt x="7903199" y="26458"/>
+                  <a:pt x="7679154" y="18288"/>
+                </a:cubicBezTo>
+                <a:cubicBezTo>
+                  <a:pt x="7455109" y="10118"/>
+                  <a:pt x="7435944" y="27109"/>
+                  <a:pt x="7217862" y="18288"/>
+                </a:cubicBezTo>
+                <a:cubicBezTo>
+                  <a:pt x="6999780" y="9467"/>
+                  <a:pt x="6680409" y="18985"/>
+                  <a:pt x="6539492" y="18288"/>
+                </a:cubicBezTo>
+                <a:cubicBezTo>
+                  <a:pt x="6398575" y="17592"/>
+                  <a:pt x="6312077" y="33018"/>
+                  <a:pt x="6186739" y="18288"/>
+                </a:cubicBezTo>
+                <a:cubicBezTo>
+                  <a:pt x="6061401" y="3558"/>
+                  <a:pt x="5947033" y="12075"/>
+                  <a:pt x="5833986" y="18288"/>
+                </a:cubicBezTo>
+                <a:cubicBezTo>
+                  <a:pt x="5720939" y="24501"/>
+                  <a:pt x="5482226" y="8586"/>
+                  <a:pt x="5155616" y="18288"/>
+                </a:cubicBezTo>
+                <a:cubicBezTo>
+                  <a:pt x="4829006" y="27991"/>
+                  <a:pt x="4841274" y="29316"/>
+                  <a:pt x="4694324" y="18288"/>
+                </a:cubicBezTo>
+                <a:cubicBezTo>
+                  <a:pt x="4547374" y="7260"/>
+                  <a:pt x="4077675" y="7013"/>
+                  <a:pt x="3907414" y="18288"/>
+                </a:cubicBezTo>
+                <a:cubicBezTo>
+                  <a:pt x="3737153" y="29564"/>
+                  <a:pt x="3538393" y="21630"/>
+                  <a:pt x="3446122" y="18288"/>
+                </a:cubicBezTo>
+                <a:cubicBezTo>
+                  <a:pt x="3353851" y="14946"/>
+                  <a:pt x="2990320" y="-8091"/>
+                  <a:pt x="2659212" y="18288"/>
+                </a:cubicBezTo>
+                <a:cubicBezTo>
+                  <a:pt x="2328104" y="44667"/>
+                  <a:pt x="2427653" y="9607"/>
+                  <a:pt x="2306460" y="18288"/>
+                </a:cubicBezTo>
+                <a:cubicBezTo>
+                  <a:pt x="2185267" y="26969"/>
+                  <a:pt x="1719763" y="3717"/>
+                  <a:pt x="1519550" y="18288"/>
+                </a:cubicBezTo>
+                <a:cubicBezTo>
+                  <a:pt x="1319337" y="32860"/>
+                  <a:pt x="1167371" y="17040"/>
+                  <a:pt x="1058258" y="18288"/>
+                </a:cubicBezTo>
+                <a:cubicBezTo>
+                  <a:pt x="949145" y="19536"/>
+                  <a:pt x="780234" y="31447"/>
+                  <a:pt x="705505" y="18288"/>
+                </a:cubicBezTo>
+                <a:cubicBezTo>
+                  <a:pt x="630776" y="5129"/>
+                  <a:pt x="215796" y="30056"/>
+                  <a:pt x="0" y="18288"/>
+                </a:cubicBezTo>
+                <a:cubicBezTo>
+                  <a:pt x="-53" y="11301"/>
+                  <a:pt x="-649" y="7756"/>
+                  <a:pt x="0" y="0"/>
+                </a:cubicBezTo>
+                <a:close/>
+              </a:path>
+            </a:pathLst>
+          </a:custGeom>
+          <a:solidFill>
+            <a:schemeClr val="accent2"/>
+          </a:solidFill>
+          <a:ln w="41275" cap="rnd">
+            <a:solidFill>
+              <a:schemeClr val="accent2"/>
+            </a:solidFill>
+            <a:round/>
+            <a:extLst>
+              <a:ext uri="{C807C97D-BFC1-408E-A445-0C87EB9F89A2}">
+                <ask:lineSketchStyleProps xmlns:ask="http://schemas.microsoft.com/office/drawing/2018/sketchyshapes" sd="1219033472">
+                  <a:prstGeom prst="rect">
+                    <a:avLst/>
+                  </a:prstGeom>
+                  <ask:type>
+                    <ask:lineSketchFreehand/>
+                  </ask:type>
+                </ask:lineSketchStyleProps>
+              </a:ext>
+            </a:extLst>
+          </a:ln>
+        </p:spPr>
+        <p:style>
+          <a:lnRef idx="2">
+            <a:schemeClr val="accent1">
+              <a:shade val="50000"/>
+            </a:schemeClr>
+          </a:lnRef>
+          <a:fillRef idx="1">
+            <a:schemeClr val="accent1"/>
+          </a:fillRef>
+          <a:effectRef idx="0">
+            <a:schemeClr val="accent1"/>
+          </a:effectRef>
+          <a:fontRef idx="minor">
+            <a:schemeClr val="lt1"/>
+          </a:fontRef>
+        </p:style>
+        <p:txBody>
+          <a:bodyPr rtlCol="0" anchor="ctr"/>
+          <a:lstStyle/>
+          <a:p>
+            <a:pPr algn="ctr"/>
+            <a:endParaRPr lang="en-US"/>
+          </a:p>
+        </p:txBody>
+      </p:sp>
+      <p:sp>
+        <p:nvSpPr>
+          <p:cNvPr id="3" name="Content Placeholder 2">
+            <a:extLst>
+              <a:ext uri="{FF2B5EF4-FFF2-40B4-BE49-F238E27FC236}">
+                <a16:creationId xmlns:a16="http://schemas.microsoft.com/office/drawing/2014/main" id="{79B0C182-55D2-A7F6-8A60-BF17B263BC9F}"/>
+              </a:ext>
+            </a:extLst>
+          </p:cNvPr>
+          <p:cNvSpPr>
+            <a:spLocks noGrp="1"/>
+          </p:cNvSpPr>
+          <p:nvPr>
+            <p:ph idx="1"/>
+          </p:nvPr>
+        </p:nvSpPr>
+        <p:spPr>
+          <a:xfrm>
+            <a:off x="838200" y="1929384"/>
+            <a:ext cx="10515600" cy="4251960"/>
           </a:xfrm>
         </p:spPr>
         <p:txBody>
-          <a:bodyPr/>
-          <a:lstStyle/>
+          <a:bodyPr>
+            <a:normAutofit/>
+          </a:bodyPr>
+          <a:lstStyle/>
+          <a:p>
+            <a:pPr marL="0" indent="0">
+              <a:lnSpc>
+                <a:spcPct val="150000"/>
+              </a:lnSpc>
+              <a:buNone/>
+            </a:pPr>
+            <a:r>
+              <a:rPr lang="en-US" b="1">
+                <a:latin typeface="Times New Roman" panose="02020603050405020304" pitchFamily="18" charset="0"/>
+                <a:cs typeface="Times New Roman" panose="02020603050405020304" pitchFamily="18" charset="0"/>
+              </a:rPr>
+              <a:t>1.4. Nội dung nghiên cứu</a:t>
+            </a:r>
+          </a:p>
+          <a:p>
+            <a:r>
+              <a:rPr lang="en-US" sz="2200" b="1" i="1">
+                <a:latin typeface="Times New Roman" panose="02020603050405020304" pitchFamily="18" charset="0"/>
+                <a:cs typeface="Times New Roman" panose="02020603050405020304" pitchFamily="18" charset="0"/>
+              </a:rPr>
+              <a:t>Nghiên cứu, đánh giá và lựa chọn </a:t>
+            </a:r>
+            <a:r>
+              <a:rPr lang="en-US" sz="2200">
+                <a:latin typeface="Times New Roman" panose="02020603050405020304" pitchFamily="18" charset="0"/>
+                <a:cs typeface="Times New Roman" panose="02020603050405020304" pitchFamily="18" charset="0"/>
+              </a:rPr>
+              <a:t>mô hình LLM và embedding phù hợp.</a:t>
+            </a:r>
+          </a:p>
+          <a:p>
+            <a:r>
+              <a:rPr lang="en-US" sz="2200" b="1" i="1">
+                <a:latin typeface="Times New Roman" panose="02020603050405020304" pitchFamily="18" charset="0"/>
+                <a:cs typeface="Times New Roman" panose="02020603050405020304" pitchFamily="18" charset="0"/>
+              </a:rPr>
+              <a:t>Xây dựng kiến trúc </a:t>
+            </a:r>
+            <a:r>
+              <a:rPr lang="en-US" sz="2200">
+                <a:latin typeface="Times New Roman" panose="02020603050405020304" pitchFamily="18" charset="0"/>
+                <a:cs typeface="Times New Roman" panose="02020603050405020304" pitchFamily="18" charset="0"/>
+              </a:rPr>
+              <a:t>hệ thống chatbot tổng thể.</a:t>
+            </a:r>
+          </a:p>
+          <a:p>
+            <a:r>
+              <a:rPr lang="vi-VN" sz="2200">
+                <a:latin typeface="Times New Roman" panose="02020603050405020304" pitchFamily="18" charset="0"/>
+                <a:cs typeface="Times New Roman" panose="02020603050405020304" pitchFamily="18" charset="0"/>
+              </a:rPr>
+              <a:t>Thiết lập </a:t>
+            </a:r>
+            <a:r>
+              <a:rPr lang="vi-VN" sz="2200" b="1" i="1">
+                <a:latin typeface="Times New Roman" panose="02020603050405020304" pitchFamily="18" charset="0"/>
+                <a:cs typeface="Times New Roman" panose="02020603050405020304" pitchFamily="18" charset="0"/>
+              </a:rPr>
+              <a:t>các tiêu chí đánh giá chất lượng chatbot</a:t>
+            </a:r>
+            <a:r>
+              <a:rPr lang="en-US" sz="2200">
+                <a:latin typeface="Times New Roman" panose="02020603050405020304" pitchFamily="18" charset="0"/>
+                <a:cs typeface="Times New Roman" panose="02020603050405020304" pitchFamily="18" charset="0"/>
+              </a:rPr>
+              <a:t>.</a:t>
+            </a:r>
+            <a:endParaRPr lang="en-US" sz="2200" b="1" i="1">
+              <a:latin typeface="Times New Roman" panose="02020603050405020304" pitchFamily="18" charset="0"/>
+              <a:cs typeface="Times New Roman" panose="02020603050405020304" pitchFamily="18" charset="0"/>
+            </a:endParaRPr>
+          </a:p>
+          <a:p>
+            <a:r>
+              <a:rPr lang="vi-VN" sz="2200" b="1" i="1">
+                <a:latin typeface="Times New Roman" panose="02020603050405020304" pitchFamily="18" charset="0"/>
+                <a:cs typeface="Times New Roman" panose="02020603050405020304" pitchFamily="18" charset="0"/>
+              </a:rPr>
+              <a:t>Thử nghiệm và tối ưu </a:t>
+            </a:r>
+            <a:r>
+              <a:rPr lang="vi-VN" sz="2200">
+                <a:latin typeface="Times New Roman" panose="02020603050405020304" pitchFamily="18" charset="0"/>
+                <a:cs typeface="Times New Roman" panose="02020603050405020304" pitchFamily="18" charset="0"/>
+              </a:rPr>
+              <a:t>chatbot qua các kịch bản hỏi đáp thực tế</a:t>
+            </a:r>
+            <a:r>
+              <a:rPr lang="en-US" sz="2200">
+                <a:latin typeface="Times New Roman" panose="02020603050405020304" pitchFamily="18" charset="0"/>
+                <a:cs typeface="Times New Roman" panose="02020603050405020304" pitchFamily="18" charset="0"/>
+              </a:rPr>
+              <a:t>.</a:t>
+            </a:r>
+          </a:p>
+          <a:p>
+            <a:r>
+              <a:rPr lang="vi-VN" sz="2200" b="1" i="1">
+                <a:latin typeface="Times New Roman" panose="02020603050405020304" pitchFamily="18" charset="0"/>
+                <a:cs typeface="Times New Roman" panose="02020603050405020304" pitchFamily="18" charset="0"/>
+              </a:rPr>
+              <a:t>Triển khai </a:t>
+            </a:r>
+            <a:r>
+              <a:rPr lang="vi-VN" sz="2200">
+                <a:latin typeface="Times New Roman" panose="02020603050405020304" pitchFamily="18" charset="0"/>
+                <a:cs typeface="Times New Roman" panose="02020603050405020304" pitchFamily="18" charset="0"/>
+              </a:rPr>
+              <a:t>chatbot lên giao diện người dùng (UI)</a:t>
+            </a:r>
+            <a:r>
+              <a:rPr lang="en-US" sz="2200">
+                <a:latin typeface="Times New Roman" panose="02020603050405020304" pitchFamily="18" charset="0"/>
+                <a:cs typeface="Times New Roman" panose="02020603050405020304" pitchFamily="18" charset="0"/>
+              </a:rPr>
+              <a:t>.</a:t>
+            </a:r>
+            <a:endParaRPr lang="en-US" sz="2200" i="1">
+              <a:latin typeface="Times New Roman" panose="02020603050405020304" pitchFamily="18" charset="0"/>
+              <a:cs typeface="Times New Roman" panose="02020603050405020304" pitchFamily="18" charset="0"/>
+            </a:endParaRPr>
+          </a:p>
           <a:p>
             <a:pPr marL="0" indent="0">
               <a:buNone/>
             </a:pPr>
-            <a:r>
-              <a:rPr lang="en-US" i="1">
-                <a:latin typeface="Times New Roman" panose="02020603050405020304" pitchFamily="18" charset="0"/>
-                <a:cs typeface="Times New Roman" panose="02020603050405020304" pitchFamily="18" charset="0"/>
-              </a:rPr>
-              <a:t>1.4. Nội dung nghiên cứu</a:t>
-            </a:r>
+            <a:endParaRPr lang="en-US" sz="2200" i="1">
+              <a:latin typeface="Times New Roman" panose="02020603050405020304" pitchFamily="18" charset="0"/>
+              <a:cs typeface="Times New Roman" panose="02020603050405020304" pitchFamily="18" charset="0"/>
+            </a:endParaRPr>
           </a:p>
         </p:txBody>
       </p:sp>
@@ -11468,6 +17645,14 @@
 <file path=ppt/slides/slide9.xml><?xml version="1.0" encoding="utf-8"?>
 <p:sld xmlns:a="http://schemas.openxmlformats.org/drawingml/2006/main" xmlns:r="http://schemas.openxmlformats.org/officeDocument/2006/relationships" xmlns:p="http://schemas.openxmlformats.org/presentationml/2006/main">
   <p:cSld>
+    <p:bg>
+      <p:bgPr>
+        <a:solidFill>
+          <a:schemeClr val="bg1"/>
+        </a:solidFill>
+        <a:effectLst/>
+      </p:bgPr>
+    </p:bg>
     <p:spTree>
       <p:nvGrpSpPr>
         <p:cNvPr id="1" name="">
@@ -11488,41 +17673,324 @@
           <a:chExt cx="0" cy="0"/>
         </a:xfrm>
       </p:grpSpPr>
-      <p:sp>
-        <p:nvSpPr>
-          <p:cNvPr id="2" name="Title 1">
-            <a:extLst>
-              <a:ext uri="{FF2B5EF4-FFF2-40B4-BE49-F238E27FC236}">
-                <a16:creationId xmlns:a16="http://schemas.microsoft.com/office/drawing/2014/main" id="{25FBDB50-1CF1-909D-D85C-D508E40CF7A6}"/>
-              </a:ext>
-            </a:extLst>
-          </p:cNvPr>
-          <p:cNvSpPr>
-            <a:spLocks noGrp="1"/>
-          </p:cNvSpPr>
-          <p:nvPr>
-            <p:ph type="title"/>
+      <p:sp useBgFill="1">
+        <p:nvSpPr>
+          <p:cNvPr id="9" name="Rectangle 8">
+            <a:extLst>
+              <a:ext uri="{FF2B5EF4-FFF2-40B4-BE49-F238E27FC236}">
+                <a16:creationId xmlns:a16="http://schemas.microsoft.com/office/drawing/2014/main" id="{32AEEBC8-9D30-42EF-95F2-386C2653FBF0}"/>
+              </a:ext>
+              <a:ext uri="{C183D7F6-B498-43B3-948B-1728B52AA6E4}">
+                <adec:decorative xmlns:adec="http://schemas.microsoft.com/office/drawing/2017/decorative" val="1"/>
+              </a:ext>
+            </a:extLst>
+          </p:cNvPr>
+          <p:cNvSpPr>
+            <a:spLocks noGrp="1" noRot="1" noChangeAspect="1" noMove="1" noResize="1" noEditPoints="1" noAdjustHandles="1" noChangeArrowheads="1" noChangeShapeType="1" noTextEdit="1"/>
+          </p:cNvSpPr>
+          <p:nvPr>
+            <p:extLst>
+              <p:ext uri="{386F3935-93C4-4BCD-93E2-E3B085C9AB24}">
+                <p16:designElem xmlns:p16="http://schemas.microsoft.com/office/powerpoint/2015/main" val="1"/>
+              </p:ext>
+            </p:extLst>
           </p:nvPr>
         </p:nvSpPr>
         <p:spPr>
           <a:xfrm>
-            <a:off x="838200" y="365125"/>
-            <a:ext cx="10515600" cy="1030537"/>
+            <a:off x="0" y="0"/>
+            <a:ext cx="12192000" cy="6858000"/>
+          </a:xfrm>
+          <a:prstGeom prst="rect">
+            <a:avLst/>
+          </a:prstGeom>
+          <a:ln>
+            <a:noFill/>
+          </a:ln>
+        </p:spPr>
+        <p:style>
+          <a:lnRef idx="2">
+            <a:schemeClr val="accent1">
+              <a:shade val="50000"/>
+            </a:schemeClr>
+          </a:lnRef>
+          <a:fillRef idx="1">
+            <a:schemeClr val="accent1"/>
+          </a:fillRef>
+          <a:effectRef idx="0">
+            <a:schemeClr val="accent1"/>
+          </a:effectRef>
+          <a:fontRef idx="minor">
+            <a:schemeClr val="lt1"/>
+          </a:fontRef>
+        </p:style>
+        <p:txBody>
+          <a:bodyPr rtlCol="0" anchor="ctr"/>
+          <a:lstStyle/>
+          <a:p>
+            <a:pPr algn="ctr"/>
+            <a:endParaRPr lang="en-US"/>
+          </a:p>
+        </p:txBody>
+      </p:sp>
+      <p:sp>
+        <p:nvSpPr>
+          <p:cNvPr id="2" name="Title 1">
+            <a:extLst>
+              <a:ext uri="{FF2B5EF4-FFF2-40B4-BE49-F238E27FC236}">
+                <a16:creationId xmlns:a16="http://schemas.microsoft.com/office/drawing/2014/main" id="{25FBDB50-1CF1-909D-D85C-D508E40CF7A6}"/>
+              </a:ext>
+            </a:extLst>
+          </p:cNvPr>
+          <p:cNvSpPr>
+            <a:spLocks noGrp="1"/>
+          </p:cNvSpPr>
+          <p:nvPr>
+            <p:ph type="title"/>
+          </p:nvPr>
+        </p:nvSpPr>
+        <p:spPr>
+          <a:xfrm>
+            <a:off x="630936" y="502920"/>
+            <a:ext cx="3419856" cy="1463040"/>
           </a:xfrm>
         </p:spPr>
         <p:txBody>
-          <a:bodyPr>
+          <a:bodyPr anchor="ctr">
             <a:normAutofit/>
           </a:bodyPr>
           <a:lstStyle/>
           <a:p>
             <a:r>
-              <a:rPr lang="en-US" sz="4000" b="1">
+              <a:rPr lang="en-US" sz="4800" b="1">
                 <a:latin typeface="Times New Roman" panose="02020603050405020304" pitchFamily="18" charset="0"/>
                 <a:cs typeface="Times New Roman" panose="02020603050405020304" pitchFamily="18" charset="0"/>
               </a:rPr>
               <a:t>CƠ SỞ LÝ THUYẾT</a:t>
             </a:r>
+          </a:p>
+        </p:txBody>
+      </p:sp>
+      <p:sp>
+        <p:nvSpPr>
+          <p:cNvPr id="11" name="sketch line">
+            <a:extLst>
+              <a:ext uri="{FF2B5EF4-FFF2-40B4-BE49-F238E27FC236}">
+                <a16:creationId xmlns:a16="http://schemas.microsoft.com/office/drawing/2014/main" id="{2E92FA66-67D7-4CB4-94D3-E643A9AD4757}"/>
+              </a:ext>
+              <a:ext uri="{C183D7F6-B498-43B3-948B-1728B52AA6E4}">
+                <adec:decorative xmlns:adec="http://schemas.microsoft.com/office/drawing/2017/decorative" val="1"/>
+              </a:ext>
+            </a:extLst>
+          </p:cNvPr>
+          <p:cNvSpPr>
+            <a:spLocks noGrp="1" noRot="1" noChangeAspect="1" noMove="1" noResize="1" noEditPoints="1" noAdjustHandles="1" noChangeArrowheads="1" noChangeShapeType="1" noTextEdit="1"/>
+          </p:cNvSpPr>
+          <p:nvPr>
+            <p:extLst>
+              <p:ext uri="{386F3935-93C4-4BCD-93E2-E3B085C9AB24}">
+                <p16:designElem xmlns:p16="http://schemas.microsoft.com/office/powerpoint/2015/main" val="1"/>
+              </p:ext>
+            </p:extLst>
+          </p:nvPr>
+        </p:nvSpPr>
+        <p:spPr>
+          <a:xfrm rot="5400000">
+            <a:off x="3566159" y="1225296"/>
+            <a:ext cx="1554480" cy="18288"/>
+          </a:xfrm>
+          <a:custGeom>
+            <a:avLst/>
+            <a:gdLst>
+              <a:gd name="connsiteX0" fmla="*/ 0 w 1554480"/>
+              <a:gd name="connsiteY0" fmla="*/ 0 h 18288"/>
+              <a:gd name="connsiteX1" fmla="*/ 549250 w 1554480"/>
+              <a:gd name="connsiteY1" fmla="*/ 0 h 18288"/>
+              <a:gd name="connsiteX2" fmla="*/ 1082954 w 1554480"/>
+              <a:gd name="connsiteY2" fmla="*/ 0 h 18288"/>
+              <a:gd name="connsiteX3" fmla="*/ 1554480 w 1554480"/>
+              <a:gd name="connsiteY3" fmla="*/ 0 h 18288"/>
+              <a:gd name="connsiteX4" fmla="*/ 1554480 w 1554480"/>
+              <a:gd name="connsiteY4" fmla="*/ 18288 h 18288"/>
+              <a:gd name="connsiteX5" fmla="*/ 1067410 w 1554480"/>
+              <a:gd name="connsiteY5" fmla="*/ 18288 h 18288"/>
+              <a:gd name="connsiteX6" fmla="*/ 549250 w 1554480"/>
+              <a:gd name="connsiteY6" fmla="*/ 18288 h 18288"/>
+              <a:gd name="connsiteX7" fmla="*/ 0 w 1554480"/>
+              <a:gd name="connsiteY7" fmla="*/ 18288 h 18288"/>
+              <a:gd name="connsiteX8" fmla="*/ 0 w 1554480"/>
+              <a:gd name="connsiteY8" fmla="*/ 0 h 18288"/>
+            </a:gdLst>
+            <a:ahLst/>
+            <a:cxnLst>
+              <a:cxn ang="0">
+                <a:pos x="connsiteX0" y="connsiteY0"/>
+              </a:cxn>
+              <a:cxn ang="0">
+                <a:pos x="connsiteX1" y="connsiteY1"/>
+              </a:cxn>
+              <a:cxn ang="0">
+                <a:pos x="connsiteX2" y="connsiteY2"/>
+              </a:cxn>
+              <a:cxn ang="0">
+                <a:pos x="connsiteX3" y="connsiteY3"/>
+              </a:cxn>
+              <a:cxn ang="0">
+                <a:pos x="connsiteX4" y="connsiteY4"/>
+              </a:cxn>
+              <a:cxn ang="0">
+                <a:pos x="connsiteX5" y="connsiteY5"/>
+              </a:cxn>
+              <a:cxn ang="0">
+                <a:pos x="connsiteX6" y="connsiteY6"/>
+              </a:cxn>
+              <a:cxn ang="0">
+                <a:pos x="connsiteX7" y="connsiteY7"/>
+              </a:cxn>
+              <a:cxn ang="0">
+                <a:pos x="connsiteX8" y="connsiteY8"/>
+              </a:cxn>
+            </a:cxnLst>
+            <a:rect l="l" t="t" r="r" b="b"/>
+            <a:pathLst>
+              <a:path w="1554480" h="18288" fill="none" extrusionOk="0">
+                <a:moveTo>
+                  <a:pt x="0" y="0"/>
+                </a:moveTo>
+                <a:cubicBezTo>
+                  <a:pt x="114141" y="-19864"/>
+                  <a:pt x="345055" y="-1657"/>
+                  <a:pt x="549250" y="0"/>
+                </a:cubicBezTo>
+                <a:cubicBezTo>
+                  <a:pt x="753445" y="1657"/>
+                  <a:pt x="862292" y="-5674"/>
+                  <a:pt x="1082954" y="0"/>
+                </a:cubicBezTo>
+                <a:cubicBezTo>
+                  <a:pt x="1303616" y="5674"/>
+                  <a:pt x="1363530" y="4537"/>
+                  <a:pt x="1554480" y="0"/>
+                </a:cubicBezTo>
+                <a:cubicBezTo>
+                  <a:pt x="1554963" y="7176"/>
+                  <a:pt x="1553909" y="13682"/>
+                  <a:pt x="1554480" y="18288"/>
+                </a:cubicBezTo>
+                <a:cubicBezTo>
+                  <a:pt x="1338847" y="6127"/>
+                  <a:pt x="1215066" y="37851"/>
+                  <a:pt x="1067410" y="18288"/>
+                </a:cubicBezTo>
+                <a:cubicBezTo>
+                  <a:pt x="919754" y="-1275"/>
+                  <a:pt x="800465" y="3080"/>
+                  <a:pt x="549250" y="18288"/>
+                </a:cubicBezTo>
+                <a:cubicBezTo>
+                  <a:pt x="298035" y="33496"/>
+                  <a:pt x="158868" y="22769"/>
+                  <a:pt x="0" y="18288"/>
+                </a:cubicBezTo>
+                <a:cubicBezTo>
+                  <a:pt x="-655" y="13237"/>
+                  <a:pt x="709" y="4645"/>
+                  <a:pt x="0" y="0"/>
+                </a:cubicBezTo>
+                <a:close/>
+              </a:path>
+              <a:path w="1554480" h="18288" stroke="0" extrusionOk="0">
+                <a:moveTo>
+                  <a:pt x="0" y="0"/>
+                </a:moveTo>
+                <a:cubicBezTo>
+                  <a:pt x="249941" y="-58"/>
+                  <a:pt x="367334" y="23448"/>
+                  <a:pt x="502615" y="0"/>
+                </a:cubicBezTo>
+                <a:cubicBezTo>
+                  <a:pt x="637897" y="-23448"/>
+                  <a:pt x="813653" y="-20418"/>
+                  <a:pt x="974141" y="0"/>
+                </a:cubicBezTo>
+                <a:cubicBezTo>
+                  <a:pt x="1134629" y="20418"/>
+                  <a:pt x="1268772" y="6288"/>
+                  <a:pt x="1554480" y="0"/>
+                </a:cubicBezTo>
+                <a:cubicBezTo>
+                  <a:pt x="1554917" y="7222"/>
+                  <a:pt x="1555359" y="13299"/>
+                  <a:pt x="1554480" y="18288"/>
+                </a:cubicBezTo>
+                <a:cubicBezTo>
+                  <a:pt x="1336087" y="12172"/>
+                  <a:pt x="1310024" y="19759"/>
+                  <a:pt x="1067410" y="18288"/>
+                </a:cubicBezTo>
+                <a:cubicBezTo>
+                  <a:pt x="824796" y="16818"/>
+                  <a:pt x="787902" y="34647"/>
+                  <a:pt x="518160" y="18288"/>
+                </a:cubicBezTo>
+                <a:cubicBezTo>
+                  <a:pt x="248418" y="1930"/>
+                  <a:pt x="133160" y="9205"/>
+                  <a:pt x="0" y="18288"/>
+                </a:cubicBezTo>
+                <a:cubicBezTo>
+                  <a:pt x="-643" y="9451"/>
+                  <a:pt x="-340" y="7114"/>
+                  <a:pt x="0" y="0"/>
+                </a:cubicBezTo>
+                <a:close/>
+              </a:path>
+            </a:pathLst>
+          </a:custGeom>
+          <a:solidFill>
+            <a:schemeClr val="accent2"/>
+          </a:solidFill>
+          <a:ln w="41275" cap="rnd">
+            <a:solidFill>
+              <a:schemeClr val="accent2"/>
+            </a:solidFill>
+            <a:round/>
+            <a:extLst>
+              <a:ext uri="{C807C97D-BFC1-408E-A445-0C87EB9F89A2}">
+                <ask:lineSketchStyleProps xmlns:ask="http://schemas.microsoft.com/office/drawing/2018/sketchyshapes" sd="1219033472">
+                  <a:prstGeom prst="rect">
+                    <a:avLst/>
+                  </a:prstGeom>
+                  <ask:type>
+                    <ask:lineSketchFreehand/>
+                  </ask:type>
+                </ask:lineSketchStyleProps>
+              </a:ext>
+            </a:extLst>
+          </a:ln>
+        </p:spPr>
+        <p:style>
+          <a:lnRef idx="2">
+            <a:schemeClr val="accent1">
+              <a:shade val="50000"/>
+            </a:schemeClr>
+          </a:lnRef>
+          <a:fillRef idx="1">
+            <a:schemeClr val="accent1"/>
+          </a:fillRef>
+          <a:effectRef idx="0">
+            <a:schemeClr val="accent1"/>
+          </a:effectRef>
+          <a:fontRef idx="minor">
+            <a:schemeClr val="lt1"/>
+          </a:fontRef>
+        </p:style>
+        <p:txBody>
+          <a:bodyPr rtlCol="0" anchor="ctr"/>
+          <a:lstStyle/>
+          <a:p>
+            <a:pPr algn="ctr"/>
+            <a:endParaRPr lang="en-US"/>
           </a:p>
         </p:txBody>
       </p:sp>
@@ -11544,19 +18012,21 @@
         </p:nvSpPr>
         <p:spPr>
           <a:xfrm>
-            <a:off x="838200" y="1395662"/>
-            <a:ext cx="10515600" cy="4781301"/>
+            <a:off x="4654295" y="502920"/>
+            <a:ext cx="6894576" cy="1463040"/>
           </a:xfrm>
         </p:spPr>
         <p:txBody>
-          <a:bodyPr/>
+          <a:bodyPr anchor="ctr">
+            <a:normAutofit/>
+          </a:bodyPr>
           <a:lstStyle/>
           <a:p>
             <a:pPr marL="0" indent="0">
               <a:buNone/>
             </a:pPr>
             <a:r>
-              <a:rPr lang="en-US" i="1">
+              <a:rPr lang="en-US" b="1">
                 <a:latin typeface="Times New Roman" panose="02020603050405020304" pitchFamily="18" charset="0"/>
                 <a:cs typeface="Times New Roman" panose="02020603050405020304" pitchFamily="18" charset="0"/>
               </a:rPr>
@@ -11565,6 +18035,40 @@
           </a:p>
         </p:txBody>
       </p:sp>
+      <p:pic>
+        <p:nvPicPr>
+          <p:cNvPr id="4" name="Picture 3">
+            <a:extLst>
+              <a:ext uri="{FF2B5EF4-FFF2-40B4-BE49-F238E27FC236}">
+                <a16:creationId xmlns:a16="http://schemas.microsoft.com/office/drawing/2014/main" id="{D4CB9C94-A3B5-AD77-34BA-77E776DFF49A}"/>
+              </a:ext>
+            </a:extLst>
+          </p:cNvPr>
+          <p:cNvPicPr>
+            <a:picLocks noChangeAspect="1"/>
+          </p:cNvPicPr>
+          <p:nvPr/>
+        </p:nvPicPr>
+        <p:blipFill>
+          <a:blip r:embed="rId2">
+            <a:extLst>
+              <a:ext uri="{28A0092B-C50C-407E-A947-70E740481C1C}">
+                <a14:useLocalDpi xmlns:a14="http://schemas.microsoft.com/office/drawing/2010/main" val="0"/>
+              </a:ext>
+            </a:extLst>
+          </a:blip>
+          <a:stretch/>
+        </p:blipFill>
+        <p:spPr>
+          <a:xfrm>
+            <a:off x="666141" y="2290936"/>
+            <a:ext cx="10847526" cy="3959352"/>
+          </a:xfrm>
+          <a:prstGeom prst="rect">
+            <a:avLst/>
+          </a:prstGeom>
+        </p:spPr>
+      </p:pic>
     </p:spTree>
     <p:extLst>
       <p:ext uri="{BB962C8B-B14F-4D97-AF65-F5344CB8AC3E}">

--- a/documents/slide bao cao v2.pptx
+++ b/documents/slide bao cao v2.pptx
@@ -26835,7 +26835,7 @@
                 <a:latin typeface="Times New Roman" panose="02020603050405020304" pitchFamily="18" charset="0"/>
                 <a:cs typeface="Times New Roman" panose="02020603050405020304" pitchFamily="18" charset="0"/>
               </a:rPr>
-              <a:t>LLM, hệ thống RAG, kỹ thuật prompt vào hệ thống.</a:t>
+              <a:t>LLM, hệ thống RAG và các kỹ thuật NLP khác vào hệ thống.</a:t>
             </a:r>
           </a:p>
           <a:p>
@@ -26870,7 +26870,7 @@
                 <a:latin typeface="Times New Roman" panose="02020603050405020304" pitchFamily="18" charset="0"/>
                 <a:cs typeface="Times New Roman" panose="02020603050405020304" pitchFamily="18" charset="0"/>
               </a:rPr>
-              <a:t>Phạm vi nội dung chuyên biệt</a:t>
+              <a:t>Giới hạn phạm vi nội dung chuyên biệt</a:t>
             </a:r>
             <a:r>
               <a:rPr lang="en-US" altLang="en-US" sz="2000">
@@ -27901,18 +27901,11 @@
               </a:lnSpc>
             </a:pPr>
             <a:r>
-              <a:rPr lang="en-US" sz="2000" i="1" u="sng">
-                <a:latin typeface="Times New Roman" panose="02020603050405020304" pitchFamily="18" charset="0"/>
-                <a:cs typeface="Times New Roman" panose="02020603050405020304" pitchFamily="18" charset="0"/>
-              </a:rPr>
-              <a:t>Mở rộng nội dung học tập:</a:t>
-            </a:r>
-            <a:r>
               <a:rPr lang="en-US" sz="2000" i="1">
                 <a:latin typeface="Times New Roman" panose="02020603050405020304" pitchFamily="18" charset="0"/>
                 <a:cs typeface="Times New Roman" panose="02020603050405020304" pitchFamily="18" charset="0"/>
               </a:rPr>
-              <a:t> </a:t>
+              <a:t>Mở rộng nội dung học tập: </a:t>
             </a:r>
             <a:r>
               <a:rPr lang="en-US" sz="2000">
@@ -27933,7 +27926,7 @@
               </a:lnSpc>
             </a:pPr>
             <a:r>
-              <a:rPr lang="en-US" sz="2000" i="1" u="sng">
+              <a:rPr lang="en-US" sz="2000" i="1">
                 <a:latin typeface="Times New Roman" panose="02020603050405020304" pitchFamily="18" charset="0"/>
                 <a:cs typeface="Times New Roman" panose="02020603050405020304" pitchFamily="18" charset="0"/>
               </a:rPr>
@@ -27958,7 +27951,7 @@
               </a:lnSpc>
             </a:pPr>
             <a:r>
-              <a:rPr lang="en-US" sz="2000" i="1" u="sng">
+              <a:rPr lang="en-US" sz="2000" i="1">
                 <a:latin typeface="Times New Roman" panose="02020603050405020304" pitchFamily="18" charset="0"/>
                 <a:cs typeface="Times New Roman" panose="02020603050405020304" pitchFamily="18" charset="0"/>
               </a:rPr>
@@ -27983,7 +27976,7 @@
               </a:lnSpc>
             </a:pPr>
             <a:r>
-              <a:rPr lang="en-US" sz="2000" i="1" u="sng">
+              <a:rPr lang="en-US" sz="2000" i="1">
                 <a:latin typeface="Times New Roman" panose="02020603050405020304" pitchFamily="18" charset="0"/>
                 <a:cs typeface="Times New Roman" panose="02020603050405020304" pitchFamily="18" charset="0"/>
               </a:rPr>
@@ -28008,7 +28001,7 @@
               </a:lnSpc>
             </a:pPr>
             <a:r>
-              <a:rPr lang="en-US" sz="2000" i="1" u="sng">
+              <a:rPr lang="en-US" sz="2000" i="1">
                 <a:latin typeface="Times New Roman" panose="02020603050405020304" pitchFamily="18" charset="0"/>
                 <a:cs typeface="Times New Roman" panose="02020603050405020304" pitchFamily="18" charset="0"/>
               </a:rPr>
